--- a/a7/packages/A7 Unit 3 - Exponents and Scientific Notation/Lessons/3.01/A7 3.01 Product Laws of Exponents - Slides.pptx
+++ b/a7/packages/A7 Unit 3 - Exponents and Scientific Notation/Lessons/3.01/A7 3.01 Product Laws of Exponents - Slides.pptx
@@ -3130,7 +3130,7 @@
         </p:nvSpPr>
         <p:spPr>
           <a:xfrm>
-            <a:off x="777240" y="1691640"/>
+            <a:off x="777240" y="2148840"/>
             <a:ext cx="10607040" cy="347472"/>
           </a:xfrm>
           <a:prstGeom prst="rect">
@@ -3165,7 +3165,7 @@
         </p:nvSpPr>
         <p:spPr>
           <a:xfrm>
-            <a:off x="777240" y="2048256"/>
+            <a:off x="777240" y="2505456"/>
             <a:ext cx="10607040" cy="1005840"/>
           </a:xfrm>
           <a:prstGeom prst="rect">
@@ -3200,7 +3200,7 @@
         </p:nvCxnSpPr>
         <p:spPr>
           <a:xfrm>
-            <a:off x="3291840" y="3255264"/>
+            <a:off x="3291840" y="3712464"/>
             <a:ext cx="5577840" cy="0"/>
           </a:xfrm>
           <a:prstGeom prst="line">
@@ -3235,7 +3235,7 @@
         </p:nvCxnSpPr>
         <p:spPr>
           <a:xfrm>
-            <a:off x="3291840" y="3337560"/>
+            <a:off x="3291840" y="3794760"/>
             <a:ext cx="5577840" cy="0"/>
           </a:xfrm>
           <a:prstGeom prst="line">
@@ -3270,7 +3270,7 @@
         </p:nvSpPr>
         <p:spPr>
           <a:xfrm>
-            <a:off x="777240" y="3502152"/>
+            <a:off x="777240" y="3959352"/>
             <a:ext cx="10607040" cy="310896"/>
           </a:xfrm>
           <a:prstGeom prst="rect">
@@ -3305,7 +3305,7 @@
         </p:nvSpPr>
         <p:spPr>
           <a:xfrm>
-            <a:off x="777240" y="3840480"/>
+            <a:off x="777240" y="4297680"/>
             <a:ext cx="10607040" cy="731520"/>
           </a:xfrm>
           <a:prstGeom prst="rect">
@@ -3328,129 +3328,13 @@
                 <a:latin typeface="Century Schoolbook"/>
               </a:rPr>
               <a:t>I can use the product of powers, power of a product, power of a power and identity laws to rewrite and evaluate a numerical expression.</a:t>
-            </a:r>
-          </a:p>
-        </p:txBody>
-      </p:sp>
-      <p:sp>
-        <p:nvSpPr>
-          <p:cNvPr id="8" name="Rectangle 7"/>
-          <p:cNvSpPr/>
-          <p:nvPr/>
-        </p:nvSpPr>
-        <p:spPr>
-          <a:xfrm>
-            <a:off x="2377440" y="4736592"/>
-            <a:ext cx="7406640" cy="1051560"/>
-          </a:xfrm>
-          <a:prstGeom prst="rect">
-            <a:avLst/>
-          </a:prstGeom>
-          <a:solidFill>
-            <a:srgbClr val="F2F2F0"/>
-          </a:solidFill>
-          <a:ln w="9525">
-            <a:solidFill>
-              <a:srgbClr val="BFBFBF"/>
-            </a:solidFill>
-          </a:ln>
-          <a:effectLst/>
-        </p:spPr>
-        <p:style>
-          <a:lnRef idx="1">
-            <a:schemeClr val="accent1"/>
-          </a:lnRef>
-          <a:fillRef idx="3">
-            <a:schemeClr val="accent1"/>
-          </a:fillRef>
-          <a:effectRef idx="2">
-            <a:schemeClr val="accent1"/>
-          </a:effectRef>
-          <a:fontRef idx="minor">
-            <a:schemeClr val="lt1"/>
-          </a:fontRef>
-        </p:style>
-        <p:txBody>
-          <a:bodyPr rtlCol="0" anchor="ctr"/>
-          <a:lstStyle/>
-          <a:p>
-            <a:pPr algn="ctr"/>
-          </a:p>
-        </p:txBody>
-      </p:sp>
-      <p:sp>
-        <p:nvSpPr>
-          <p:cNvPr id="9" name="TextBox 8"/>
-          <p:cNvSpPr txBox="1"/>
-          <p:nvPr/>
-        </p:nvSpPr>
-        <p:spPr>
-          <a:xfrm>
-            <a:off x="2606040" y="4892040"/>
-            <a:ext cx="6949440" cy="365760"/>
-          </a:xfrm>
-          <a:prstGeom prst="rect">
-            <a:avLst/>
-          </a:prstGeom>
-          <a:noFill/>
-        </p:spPr>
-        <p:txBody>
-          <a:bodyPr wrap="square" lIns="45720" rIns="45720" tIns="18288" bIns="18288" anchor="t">
-            <a:spAutoFit/>
-          </a:bodyPr>
-          <a:lstStyle/>
-          <a:p>
-            <a:pPr algn="ctr"/>
-            <a:r>
-              <a:rPr sz="1700" b="0" i="1">
-                <a:solidFill>
-                  <a:srgbClr val="6B6B6B"/>
-                </a:solidFill>
-                <a:latin typeface="Century Schoolbook"/>
-              </a:rPr>
-              <a:t>Last unit you took roots apart.</a:t>
-            </a:r>
-          </a:p>
-        </p:txBody>
-      </p:sp>
-      <p:sp>
-        <p:nvSpPr>
-          <p:cNvPr id="10" name="TextBox 9"/>
-          <p:cNvSpPr txBox="1"/>
-          <p:nvPr/>
-        </p:nvSpPr>
-        <p:spPr>
-          <a:xfrm>
-            <a:off x="2606040" y="5276088"/>
-            <a:ext cx="6949440" cy="365760"/>
-          </a:xfrm>
-          <a:prstGeom prst="rect">
-            <a:avLst/>
-          </a:prstGeom>
-          <a:noFill/>
-        </p:spPr>
-        <p:txBody>
-          <a:bodyPr wrap="square" lIns="45720" rIns="45720" tIns="18288" bIns="18288" anchor="t">
-            <a:spAutoFit/>
-          </a:bodyPr>
-          <a:lstStyle/>
-          <a:p>
-            <a:pPr algn="ctr"/>
-            <a:r>
-              <a:rPr sz="1700" b="1" i="0">
-                <a:solidFill>
-                  <a:srgbClr val="1A1A1A"/>
-                </a:solidFill>
-                <a:latin typeface="Century Schoolbook"/>
-              </a:rPr>
-              <a:t>Today you put powers together — and the base has to match.</a:t>
             </a:r>
           </a:p>
         </p:txBody>
       </p:sp>
       <p:cxnSp>
         <p:nvCxnSpPr>
-          <p:cNvPr id="11" name="Connector 10"/>
+          <p:cNvPr id="8" name="Connector 7"/>
           <p:cNvCxnSpPr/>
           <p:nvPr/>
         </p:nvCxnSpPr>
@@ -3485,7 +3369,7 @@
       </p:cxnSp>
       <p:sp>
         <p:nvSpPr>
-          <p:cNvPr id="12" name="TextBox 11"/>
+          <p:cNvPr id="9" name="TextBox 8"/>
           <p:cNvSpPr txBox="1"/>
           <p:nvPr/>
         </p:nvSpPr>
@@ -3520,7 +3404,7 @@
       </p:sp>
       <p:sp>
         <p:nvSpPr>
-          <p:cNvPr id="13" name="TextBox 12"/>
+          <p:cNvPr id="10" name="TextBox 9"/>
           <p:cNvSpPr txBox="1"/>
           <p:nvPr/>
         </p:nvSpPr>
@@ -3676,44 +3560,9 @@
           </a:fontRef>
         </p:style>
       </p:cxnSp>
-      <p:sp>
-        <p:nvSpPr>
-          <p:cNvPr id="5" name="TextBox 4"/>
-          <p:cNvSpPr txBox="1"/>
-          <p:nvPr/>
-        </p:nvSpPr>
-        <p:spPr>
-          <a:xfrm>
-            <a:off x="777240" y="1261872"/>
-            <a:ext cx="10607040" cy="310896"/>
-          </a:xfrm>
-          <a:prstGeom prst="rect">
-            <a:avLst/>
-          </a:prstGeom>
-          <a:noFill/>
-        </p:spPr>
-        <p:txBody>
-          <a:bodyPr wrap="square" lIns="45720" rIns="45720" tIns="18288" bIns="18288" anchor="t">
-            <a:spAutoFit/>
-          </a:bodyPr>
-          <a:lstStyle/>
-          <a:p>
-            <a:pPr algn="l"/>
-            <a:r>
-              <a:rPr sz="1700" b="0" i="1">
-                <a:solidFill>
-                  <a:srgbClr val="6B6B6B"/>
-                </a:solidFill>
-                <a:latin typeface="Century Schoolbook"/>
-              </a:rPr>
-              <a:t>Same steps, your numbers. Boards up when done.</a:t>
-            </a:r>
-          </a:p>
-        </p:txBody>
-      </p:sp>
       <p:cxnSp>
         <p:nvCxnSpPr>
-          <p:cNvPr id="6" name="Connector 5"/>
+          <p:cNvPr id="5" name="Connector 4"/>
           <p:cNvCxnSpPr/>
           <p:nvPr/>
         </p:nvCxnSpPr>
@@ -3748,7 +3597,7 @@
       </p:cxnSp>
       <p:sp>
         <p:nvSpPr>
-          <p:cNvPr id="7" name="TextBox 6"/>
+          <p:cNvPr id="6" name="TextBox 5"/>
           <p:cNvSpPr txBox="1"/>
           <p:nvPr/>
         </p:nvSpPr>
@@ -3783,7 +3632,7 @@
       </p:sp>
       <p:sp>
         <p:nvSpPr>
-          <p:cNvPr id="8" name="TextBox 7"/>
+          <p:cNvPr id="7" name="TextBox 6"/>
           <p:cNvSpPr txBox="1"/>
           <p:nvPr/>
         </p:nvSpPr>
@@ -3818,7 +3667,7 @@
       </p:sp>
       <p:pic>
         <p:nvPicPr>
-          <p:cNvPr id="9" name="Picture 8" descr="0dfb72a0f6508b3b.png"/>
+          <p:cNvPr id="8" name="Picture 7" descr="0dfb72a0f6508b3b.png"/>
           <p:cNvPicPr>
             <a:picLocks noChangeAspect="1"/>
           </p:cNvPicPr>
@@ -3840,6 +3689,41 @@
           </a:prstGeom>
         </p:spPr>
       </p:pic>
+      <p:sp>
+        <p:nvSpPr>
+          <p:cNvPr id="9" name="TextBox 8"/>
+          <p:cNvSpPr txBox="1"/>
+          <p:nvPr/>
+        </p:nvSpPr>
+        <p:spPr>
+          <a:xfrm>
+            <a:off x="777240" y="3124200"/>
+            <a:ext cx="10607040" cy="429370"/>
+          </a:xfrm>
+          <a:prstGeom prst="rect">
+            <a:avLst/>
+          </a:prstGeom>
+          <a:noFill/>
+        </p:spPr>
+        <p:txBody>
+          <a:bodyPr wrap="square" lIns="45720" rIns="45720" tIns="18288" bIns="18288" anchor="t">
+            <a:spAutoFit/>
+          </a:bodyPr>
+          <a:lstStyle/>
+          <a:p>
+            <a:pPr algn="ctr"/>
+            <a:r>
+              <a:rPr sz="2400" b="1" i="0">
+                <a:solidFill>
+                  <a:srgbClr val="1A1A1A"/>
+                </a:solidFill>
+                <a:latin typeface="Century Schoolbook"/>
+              </a:rPr>
+              <a:t>Which law? Then find the value.</a:t>
+            </a:r>
+          </a:p>
+        </p:txBody>
+      </p:sp>
     </p:spTree>
   </p:cSld>
   <p:clrMapOvr>
@@ -3963,44 +3847,9 @@
           </a:fontRef>
         </p:style>
       </p:cxnSp>
-      <p:sp>
-        <p:nvSpPr>
-          <p:cNvPr id="5" name="TextBox 4"/>
-          <p:cNvSpPr txBox="1"/>
-          <p:nvPr/>
-        </p:nvSpPr>
-        <p:spPr>
-          <a:xfrm>
-            <a:off x="777240" y="1261872"/>
-            <a:ext cx="10607040" cy="310896"/>
-          </a:xfrm>
-          <a:prstGeom prst="rect">
-            <a:avLst/>
-          </a:prstGeom>
-          <a:noFill/>
-        </p:spPr>
-        <p:txBody>
-          <a:bodyPr wrap="square" lIns="45720" rIns="45720" tIns="18288" bIns="18288" anchor="t">
-            <a:spAutoFit/>
-          </a:bodyPr>
-          <a:lstStyle/>
-          <a:p>
-            <a:pPr algn="l"/>
-            <a:r>
-              <a:rPr sz="1700" b="0" i="1">
-                <a:solidFill>
-                  <a:srgbClr val="6B6B6B"/>
-                </a:solidFill>
-                <a:latin typeface="Century Schoolbook"/>
-              </a:rPr>
-              <a:t>Answer.</a:t>
-            </a:r>
-          </a:p>
-        </p:txBody>
-      </p:sp>
       <p:cxnSp>
         <p:nvCxnSpPr>
-          <p:cNvPr id="6" name="Connector 5"/>
+          <p:cNvPr id="5" name="Connector 4"/>
           <p:cNvCxnSpPr/>
           <p:nvPr/>
         </p:nvCxnSpPr>
@@ -4035,7 +3884,7 @@
       </p:cxnSp>
       <p:sp>
         <p:nvSpPr>
-          <p:cNvPr id="7" name="TextBox 6"/>
+          <p:cNvPr id="6" name="TextBox 5"/>
           <p:cNvSpPr txBox="1"/>
           <p:nvPr/>
         </p:nvSpPr>
@@ -4070,7 +3919,7 @@
       </p:sp>
       <p:sp>
         <p:nvSpPr>
-          <p:cNvPr id="8" name="TextBox 7"/>
+          <p:cNvPr id="7" name="TextBox 6"/>
           <p:cNvSpPr txBox="1"/>
           <p:nvPr/>
         </p:nvSpPr>
@@ -4105,7 +3954,7 @@
       </p:sp>
       <p:pic>
         <p:nvPicPr>
-          <p:cNvPr id="9" name="Picture 8" descr="f61491015b87f325.png"/>
+          <p:cNvPr id="8" name="Picture 7" descr="f61491015b87f325.png"/>
           <p:cNvPicPr>
             <a:picLocks noChangeAspect="1"/>
           </p:cNvPicPr>
@@ -4129,51 +3978,42 @@
       </p:pic>
       <p:sp>
         <p:nvSpPr>
+          <p:cNvPr id="9" name="TextBox 8"/>
+          <p:cNvSpPr txBox="1"/>
+          <p:nvPr/>
+        </p:nvSpPr>
+        <p:spPr>
+          <a:xfrm>
+            <a:off x="777240" y="3118104"/>
+            <a:ext cx="10607040" cy="429370"/>
+          </a:xfrm>
+          <a:prstGeom prst="rect">
+            <a:avLst/>
+          </a:prstGeom>
+          <a:noFill/>
+        </p:spPr>
+        <p:txBody>
+          <a:bodyPr wrap="square" lIns="45720" rIns="45720" tIns="18288" bIns="18288" anchor="t">
+            <a:spAutoFit/>
+          </a:bodyPr>
+          <a:lstStyle/>
+          <a:p>
+            <a:pPr algn="ctr"/>
+            <a:r>
+              <a:rPr sz="2400" b="1" i="0">
+                <a:solidFill>
+                  <a:srgbClr val="1A1A1A"/>
+                </a:solidFill>
+                <a:latin typeface="Century Schoolbook"/>
+              </a:rPr>
+              <a:t>Which law? Then find the value.</a:t>
+            </a:r>
+          </a:p>
+        </p:txBody>
+      </p:sp>
+      <p:sp>
+        <p:nvSpPr>
           <p:cNvPr id="10" name="TextBox 9"/>
-          <p:cNvSpPr txBox="1"/>
-          <p:nvPr/>
-        </p:nvSpPr>
-        <p:spPr>
-          <a:xfrm>
-            <a:off x="777240" y="2935224"/>
-            <a:ext cx="10607040" cy="429370"/>
-          </a:xfrm>
-          <a:prstGeom prst="rect">
-            <a:avLst/>
-          </a:prstGeom>
-          <a:noFill/>
-        </p:spPr>
-        <p:txBody>
-          <a:bodyPr wrap="square" lIns="45720" rIns="45720" tIns="18288" bIns="18288" anchor="t">
-            <a:spAutoFit/>
-          </a:bodyPr>
-          <a:lstStyle/>
-          <a:p>
-            <a:pPr algn="ctr"/>
-            <a:r>
-              <a:rPr sz="2400" b="0" i="0">
-                <a:solidFill>
-                  <a:srgbClr val="6B6B6B"/>
-                </a:solidFill>
-                <a:latin typeface="Century Schoolbook"/>
-              </a:rPr>
-              <a:t>same base, add: 2</a:t>
-            </a:r>
-            <a:r>
-              <a:rPr sz="2400" b="0" i="0" baseline="30000">
-                <a:solidFill>
-                  <a:srgbClr val="6B6B6B"/>
-                </a:solidFill>
-                <a:latin typeface="Century Schoolbook"/>
-              </a:rPr>
-              <a:t>7</a:t>
-            </a:r>
-          </a:p>
-        </p:txBody>
-      </p:sp>
-      <p:sp>
-        <p:nvSpPr>
-          <p:cNvPr id="11" name="TextBox 10"/>
           <p:cNvSpPr txBox="1"/>
           <p:nvPr/>
         </p:nvSpPr>
@@ -4347,44 +4187,9 @@
           </a:fontRef>
         </p:style>
       </p:cxnSp>
-      <p:sp>
-        <p:nvSpPr>
-          <p:cNvPr id="5" name="TextBox 4"/>
-          <p:cNvSpPr txBox="1"/>
-          <p:nvPr/>
-        </p:nvSpPr>
-        <p:spPr>
-          <a:xfrm>
-            <a:off x="777240" y="1261872"/>
-            <a:ext cx="10607040" cy="310896"/>
-          </a:xfrm>
-          <a:prstGeom prst="rect">
-            <a:avLst/>
-          </a:prstGeom>
-          <a:noFill/>
-        </p:spPr>
-        <p:txBody>
-          <a:bodyPr wrap="square" lIns="45720" rIns="45720" tIns="18288" bIns="18288" anchor="t">
-            <a:spAutoFit/>
-          </a:bodyPr>
-          <a:lstStyle/>
-          <a:p>
-            <a:pPr algn="l"/>
-            <a:r>
-              <a:rPr sz="1700" b="0" i="1">
-                <a:solidFill>
-                  <a:srgbClr val="6B6B6B"/>
-                </a:solidFill>
-                <a:latin typeface="Century Schoolbook"/>
-              </a:rPr>
-              <a:t>A negative base and a power of a power.</a:t>
-            </a:r>
-          </a:p>
-        </p:txBody>
-      </p:sp>
       <p:cxnSp>
         <p:nvCxnSpPr>
-          <p:cNvPr id="6" name="Connector 5"/>
+          <p:cNvPr id="5" name="Connector 4"/>
           <p:cNvCxnSpPr/>
           <p:nvPr/>
         </p:nvCxnSpPr>
@@ -4419,7 +4224,7 @@
       </p:cxnSp>
       <p:sp>
         <p:nvSpPr>
-          <p:cNvPr id="7" name="TextBox 6"/>
+          <p:cNvPr id="6" name="TextBox 5"/>
           <p:cNvSpPr txBox="1"/>
           <p:nvPr/>
         </p:nvSpPr>
@@ -4454,7 +4259,7 @@
       </p:sp>
       <p:sp>
         <p:nvSpPr>
-          <p:cNvPr id="8" name="TextBox 7"/>
+          <p:cNvPr id="7" name="TextBox 6"/>
           <p:cNvSpPr txBox="1"/>
           <p:nvPr/>
         </p:nvSpPr>
@@ -4489,7 +4294,7 @@
       </p:sp>
       <p:pic>
         <p:nvPicPr>
-          <p:cNvPr id="9" name="Picture 8" descr="111bd13923d7f5ee.png"/>
+          <p:cNvPr id="8" name="Picture 7" descr="111bd13923d7f5ee.png"/>
           <p:cNvPicPr>
             <a:picLocks noChangeAspect="1"/>
           </p:cNvPicPr>
@@ -4513,7 +4318,7 @@
       </p:pic>
       <p:sp>
         <p:nvSpPr>
-          <p:cNvPr id="10" name="TextBox 9"/>
+          <p:cNvPr id="9" name="TextBox 8"/>
           <p:cNvSpPr txBox="1"/>
           <p:nvPr/>
         </p:nvSpPr>
@@ -4669,44 +4474,9 @@
           </a:fontRef>
         </p:style>
       </p:cxnSp>
-      <p:sp>
-        <p:nvSpPr>
-          <p:cNvPr id="5" name="TextBox 4"/>
-          <p:cNvSpPr txBox="1"/>
-          <p:nvPr/>
-        </p:nvSpPr>
-        <p:spPr>
-          <a:xfrm>
-            <a:off x="777240" y="1261872"/>
-            <a:ext cx="10607040" cy="310896"/>
-          </a:xfrm>
-          <a:prstGeom prst="rect">
-            <a:avLst/>
-          </a:prstGeom>
-          <a:noFill/>
-        </p:spPr>
-        <p:txBody>
-          <a:bodyPr wrap="square" lIns="45720" rIns="45720" tIns="18288" bIns="18288" anchor="t">
-            <a:spAutoFit/>
-          </a:bodyPr>
-          <a:lstStyle/>
-          <a:p>
-            <a:pPr algn="l"/>
-            <a:r>
-              <a:rPr sz="1700" b="0" i="1">
-                <a:solidFill>
-                  <a:srgbClr val="6B6B6B"/>
-                </a:solidFill>
-                <a:latin typeface="Century Schoolbook"/>
-              </a:rPr>
-              <a:t>Worked.</a:t>
-            </a:r>
-          </a:p>
-        </p:txBody>
-      </p:sp>
       <p:cxnSp>
         <p:nvCxnSpPr>
-          <p:cNvPr id="6" name="Connector 5"/>
+          <p:cNvPr id="5" name="Connector 4"/>
           <p:cNvCxnSpPr/>
           <p:nvPr/>
         </p:nvCxnSpPr>
@@ -4741,7 +4511,7 @@
       </p:cxnSp>
       <p:sp>
         <p:nvSpPr>
-          <p:cNvPr id="7" name="TextBox 6"/>
+          <p:cNvPr id="6" name="TextBox 5"/>
           <p:cNvSpPr txBox="1"/>
           <p:nvPr/>
         </p:nvSpPr>
@@ -4776,7 +4546,7 @@
       </p:sp>
       <p:sp>
         <p:nvSpPr>
-          <p:cNvPr id="8" name="TextBox 7"/>
+          <p:cNvPr id="7" name="TextBox 6"/>
           <p:cNvSpPr txBox="1"/>
           <p:nvPr/>
         </p:nvSpPr>
@@ -4811,7 +4581,7 @@
       </p:sp>
       <p:pic>
         <p:nvPicPr>
-          <p:cNvPr id="9" name="Picture 8" descr="996ff5847669506b.png"/>
+          <p:cNvPr id="8" name="Picture 7" descr="996ff5847669506b.png"/>
           <p:cNvPicPr>
             <a:picLocks noChangeAspect="1"/>
           </p:cNvPicPr>
@@ -4833,44 +4603,9 @@
           </a:prstGeom>
         </p:spPr>
       </p:pic>
-      <p:sp>
-        <p:nvSpPr>
-          <p:cNvPr id="10" name="TextBox 9"/>
-          <p:cNvSpPr txBox="1"/>
-          <p:nvPr/>
-        </p:nvSpPr>
-        <p:spPr>
-          <a:xfrm>
-            <a:off x="6473952" y="1897380"/>
-            <a:ext cx="4910327" cy="502920"/>
-          </a:xfrm>
-          <a:prstGeom prst="rect">
-            <a:avLst/>
-          </a:prstGeom>
-          <a:noFill/>
-        </p:spPr>
-        <p:txBody>
-          <a:bodyPr wrap="square" lIns="45720" rIns="45720" tIns="18288" bIns="18288" anchor="ctr">
-            <a:spAutoFit/>
-          </a:bodyPr>
-          <a:lstStyle/>
-          <a:p>
-            <a:pPr algn="l"/>
-            <a:r>
-              <a:rPr sz="2100" b="0" i="1">
-                <a:solidFill>
-                  <a:srgbClr val="6B6B6B"/>
-                </a:solidFill>
-                <a:latin typeface="Century Schoolbook"/>
-              </a:rPr>
-              <a:t>power of a power: multiply</a:t>
-            </a:r>
-          </a:p>
-        </p:txBody>
-      </p:sp>
       <p:pic>
         <p:nvPicPr>
-          <p:cNvPr id="11" name="Picture 10" descr="816ea1a633337a34.png"/>
+          <p:cNvPr id="9" name="Picture 8" descr="816ea1a633337a34.png"/>
           <p:cNvPicPr>
             <a:picLocks noChangeAspect="1"/>
           </p:cNvPicPr>
@@ -4892,44 +4627,9 @@
           </a:prstGeom>
         </p:spPr>
       </p:pic>
-      <p:sp>
-        <p:nvSpPr>
-          <p:cNvPr id="12" name="TextBox 11"/>
-          <p:cNvSpPr txBox="1"/>
-          <p:nvPr/>
-        </p:nvSpPr>
-        <p:spPr>
-          <a:xfrm>
-            <a:off x="3983736" y="2583180"/>
-            <a:ext cx="6400800" cy="502920"/>
-          </a:xfrm>
-          <a:prstGeom prst="rect">
-            <a:avLst/>
-          </a:prstGeom>
-          <a:noFill/>
-        </p:spPr>
-        <p:txBody>
-          <a:bodyPr wrap="square" lIns="45720" rIns="45720" tIns="18288" bIns="18288" anchor="ctr">
-            <a:spAutoFit/>
-          </a:bodyPr>
-          <a:lstStyle/>
-          <a:p>
-            <a:pPr algn="l"/>
-            <a:r>
-              <a:rPr sz="2100" b="0" i="1">
-                <a:solidFill>
-                  <a:srgbClr val="6B6B6B"/>
-                </a:solidFill>
-                <a:latin typeface="Century Schoolbook"/>
-              </a:rPr>
-              <a:t>six negative factors — positive</a:t>
-            </a:r>
-          </a:p>
-        </p:txBody>
-      </p:sp>
       <p:pic>
         <p:nvPicPr>
-          <p:cNvPr id="13" name="Picture 12" descr="ed67bc8f2938c145.png"/>
+          <p:cNvPr id="10" name="Picture 9" descr="ed67bc8f2938c145.png"/>
           <p:cNvPicPr>
             <a:picLocks noChangeAspect="1"/>
           </p:cNvPicPr>
@@ -4953,60 +4653,7 @@
       </p:pic>
       <p:sp>
         <p:nvSpPr>
-          <p:cNvPr id="14" name="TextBox 13"/>
-          <p:cNvSpPr txBox="1"/>
-          <p:nvPr/>
-        </p:nvSpPr>
-        <p:spPr>
-          <a:xfrm>
-            <a:off x="3983736" y="3265932"/>
-            <a:ext cx="6400800" cy="502920"/>
-          </a:xfrm>
-          <a:prstGeom prst="rect">
-            <a:avLst/>
-          </a:prstGeom>
-          <a:noFill/>
-        </p:spPr>
-        <p:txBody>
-          <a:bodyPr wrap="square" lIns="45720" rIns="45720" tIns="18288" bIns="18288" anchor="ctr">
-            <a:spAutoFit/>
-          </a:bodyPr>
-          <a:lstStyle/>
-          <a:p>
-            <a:pPr algn="l"/>
-            <a:r>
-              <a:rPr sz="2100" b="0" i="1">
-                <a:solidFill>
-                  <a:srgbClr val="6B6B6B"/>
-                </a:solidFill>
-                <a:latin typeface="Century Schoolbook"/>
-              </a:rPr>
-              <a:t>check: (−2)</a:t>
-            </a:r>
-            <a:r>
-              <a:rPr sz="2100" b="0" i="1" baseline="30000">
-                <a:solidFill>
-                  <a:srgbClr val="6B6B6B"/>
-                </a:solidFill>
-                <a:latin typeface="Century Schoolbook"/>
-              </a:rPr>
-              <a:t>3</a:t>
-            </a:r>
-            <a:r>
-              <a:rPr sz="2100" b="0" i="1">
-                <a:solidFill>
-                  <a:srgbClr val="6B6B6B"/>
-                </a:solidFill>
-                <a:latin typeface="Century Schoolbook"/>
-              </a:rPr>
-              <a:t> = −8, then square</a:t>
-            </a:r>
-          </a:p>
-        </p:txBody>
-      </p:sp>
-      <p:sp>
-        <p:nvSpPr>
-          <p:cNvPr id="15" name="TextBox 14"/>
+          <p:cNvPr id="11" name="TextBox 10"/>
           <p:cNvSpPr txBox="1"/>
           <p:nvPr/>
         </p:nvSpPr>
@@ -5162,44 +4809,9 @@
           </a:fontRef>
         </p:style>
       </p:cxnSp>
-      <p:sp>
-        <p:nvSpPr>
-          <p:cNvPr id="5" name="TextBox 4"/>
-          <p:cNvSpPr txBox="1"/>
-          <p:nvPr/>
-        </p:nvSpPr>
-        <p:spPr>
-          <a:xfrm>
-            <a:off x="777240" y="1261872"/>
-            <a:ext cx="10607040" cy="310896"/>
-          </a:xfrm>
-          <a:prstGeom prst="rect">
-            <a:avLst/>
-          </a:prstGeom>
-          <a:noFill/>
-        </p:spPr>
-        <p:txBody>
-          <a:bodyPr wrap="square" lIns="45720" rIns="45720" tIns="18288" bIns="18288" anchor="t">
-            <a:spAutoFit/>
-          </a:bodyPr>
-          <a:lstStyle/>
-          <a:p>
-            <a:pPr algn="l"/>
-            <a:r>
-              <a:rPr sz="1700" b="0" i="1">
-                <a:solidFill>
-                  <a:srgbClr val="6B6B6B"/>
-                </a:solidFill>
-                <a:latin typeface="Century Schoolbook"/>
-              </a:rPr>
-              <a:t>Same steps, your numbers. Boards up when done.</a:t>
-            </a:r>
-          </a:p>
-        </p:txBody>
-      </p:sp>
       <p:cxnSp>
         <p:nvCxnSpPr>
-          <p:cNvPr id="6" name="Connector 5"/>
+          <p:cNvPr id="5" name="Connector 4"/>
           <p:cNvCxnSpPr/>
           <p:nvPr/>
         </p:nvCxnSpPr>
@@ -5234,7 +4846,7 @@
       </p:cxnSp>
       <p:sp>
         <p:nvSpPr>
-          <p:cNvPr id="7" name="TextBox 6"/>
+          <p:cNvPr id="6" name="TextBox 5"/>
           <p:cNvSpPr txBox="1"/>
           <p:nvPr/>
         </p:nvSpPr>
@@ -5269,7 +4881,7 @@
       </p:sp>
       <p:sp>
         <p:nvSpPr>
-          <p:cNvPr id="8" name="TextBox 7"/>
+          <p:cNvPr id="7" name="TextBox 6"/>
           <p:cNvSpPr txBox="1"/>
           <p:nvPr/>
         </p:nvSpPr>
@@ -5304,7 +4916,7 @@
       </p:sp>
       <p:pic>
         <p:nvPicPr>
-          <p:cNvPr id="9" name="Picture 8" descr="bb2905f7bc694992.png"/>
+          <p:cNvPr id="8" name="Picture 7" descr="bb2905f7bc694992.png"/>
           <p:cNvPicPr>
             <a:picLocks noChangeAspect="1"/>
           </p:cNvPicPr>
@@ -5326,6 +4938,41 @@
           </a:prstGeom>
         </p:spPr>
       </p:pic>
+      <p:sp>
+        <p:nvSpPr>
+          <p:cNvPr id="9" name="TextBox 8"/>
+          <p:cNvSpPr txBox="1"/>
+          <p:nvPr/>
+        </p:nvSpPr>
+        <p:spPr>
+          <a:xfrm>
+            <a:off x="777240" y="3215640"/>
+            <a:ext cx="10607040" cy="429370"/>
+          </a:xfrm>
+          <a:prstGeom prst="rect">
+            <a:avLst/>
+          </a:prstGeom>
+          <a:noFill/>
+        </p:spPr>
+        <p:txBody>
+          <a:bodyPr wrap="square" lIns="45720" rIns="45720" tIns="18288" bIns="18288" anchor="t">
+            <a:spAutoFit/>
+          </a:bodyPr>
+          <a:lstStyle/>
+          <a:p>
+            <a:pPr algn="ctr"/>
+            <a:r>
+              <a:rPr sz="2400" b="1" i="0">
+                <a:solidFill>
+                  <a:srgbClr val="1A1A1A"/>
+                </a:solidFill>
+                <a:latin typeface="Century Schoolbook"/>
+              </a:rPr>
+              <a:t>Which law? Then find the value.</a:t>
+            </a:r>
+          </a:p>
+        </p:txBody>
+      </p:sp>
     </p:spTree>
   </p:cSld>
   <p:clrMapOvr>
@@ -5449,44 +5096,9 @@
           </a:fontRef>
         </p:style>
       </p:cxnSp>
-      <p:sp>
-        <p:nvSpPr>
-          <p:cNvPr id="5" name="TextBox 4"/>
-          <p:cNvSpPr txBox="1"/>
-          <p:nvPr/>
-        </p:nvSpPr>
-        <p:spPr>
-          <a:xfrm>
-            <a:off x="777240" y="1261872"/>
-            <a:ext cx="10607040" cy="310896"/>
-          </a:xfrm>
-          <a:prstGeom prst="rect">
-            <a:avLst/>
-          </a:prstGeom>
-          <a:noFill/>
-        </p:spPr>
-        <p:txBody>
-          <a:bodyPr wrap="square" lIns="45720" rIns="45720" tIns="18288" bIns="18288" anchor="t">
-            <a:spAutoFit/>
-          </a:bodyPr>
-          <a:lstStyle/>
-          <a:p>
-            <a:pPr algn="l"/>
-            <a:r>
-              <a:rPr sz="1700" b="0" i="1">
-                <a:solidFill>
-                  <a:srgbClr val="6B6B6B"/>
-                </a:solidFill>
-                <a:latin typeface="Century Schoolbook"/>
-              </a:rPr>
-              <a:t>Answer.</a:t>
-            </a:r>
-          </a:p>
-        </p:txBody>
-      </p:sp>
       <p:cxnSp>
         <p:nvCxnSpPr>
-          <p:cNvPr id="6" name="Connector 5"/>
+          <p:cNvPr id="5" name="Connector 4"/>
           <p:cNvCxnSpPr/>
           <p:nvPr/>
         </p:nvCxnSpPr>
@@ -5521,7 +5133,7 @@
       </p:cxnSp>
       <p:sp>
         <p:nvSpPr>
-          <p:cNvPr id="7" name="TextBox 6"/>
+          <p:cNvPr id="6" name="TextBox 5"/>
           <p:cNvSpPr txBox="1"/>
           <p:nvPr/>
         </p:nvSpPr>
@@ -5556,7 +5168,7 @@
       </p:sp>
       <p:sp>
         <p:nvSpPr>
-          <p:cNvPr id="8" name="TextBox 7"/>
+          <p:cNvPr id="7" name="TextBox 6"/>
           <p:cNvSpPr txBox="1"/>
           <p:nvPr/>
         </p:nvSpPr>
@@ -5591,7 +5203,7 @@
       </p:sp>
       <p:pic>
         <p:nvPicPr>
-          <p:cNvPr id="9" name="Picture 8" descr="44c6670a1f908383.png"/>
+          <p:cNvPr id="8" name="Picture 7" descr="44c6670a1f908383.png"/>
           <p:cNvPicPr>
             <a:picLocks noChangeAspect="1"/>
           </p:cNvPicPr>
@@ -5615,51 +5227,42 @@
       </p:pic>
       <p:sp>
         <p:nvSpPr>
+          <p:cNvPr id="9" name="TextBox 8"/>
+          <p:cNvSpPr txBox="1"/>
+          <p:nvPr/>
+        </p:nvSpPr>
+        <p:spPr>
+          <a:xfrm>
+            <a:off x="777240" y="3215640"/>
+            <a:ext cx="10607040" cy="429370"/>
+          </a:xfrm>
+          <a:prstGeom prst="rect">
+            <a:avLst/>
+          </a:prstGeom>
+          <a:noFill/>
+        </p:spPr>
+        <p:txBody>
+          <a:bodyPr wrap="square" lIns="45720" rIns="45720" tIns="18288" bIns="18288" anchor="t">
+            <a:spAutoFit/>
+          </a:bodyPr>
+          <a:lstStyle/>
+          <a:p>
+            <a:pPr algn="ctr"/>
+            <a:r>
+              <a:rPr sz="2400" b="1" i="0">
+                <a:solidFill>
+                  <a:srgbClr val="1A1A1A"/>
+                </a:solidFill>
+                <a:latin typeface="Century Schoolbook"/>
+              </a:rPr>
+              <a:t>Which law? Then find the value.</a:t>
+            </a:r>
+          </a:p>
+        </p:txBody>
+      </p:sp>
+      <p:sp>
+        <p:nvSpPr>
           <p:cNvPr id="10" name="TextBox 9"/>
-          <p:cNvSpPr txBox="1"/>
-          <p:nvPr/>
-        </p:nvSpPr>
-        <p:spPr>
-          <a:xfrm>
-            <a:off x="777240" y="3032760"/>
-            <a:ext cx="10607040" cy="429370"/>
-          </a:xfrm>
-          <a:prstGeom prst="rect">
-            <a:avLst/>
-          </a:prstGeom>
-          <a:noFill/>
-        </p:spPr>
-        <p:txBody>
-          <a:bodyPr wrap="square" lIns="45720" rIns="45720" tIns="18288" bIns="18288" anchor="t">
-            <a:spAutoFit/>
-          </a:bodyPr>
-          <a:lstStyle/>
-          <a:p>
-            <a:pPr algn="ctr"/>
-            <a:r>
-              <a:rPr sz="2400" b="0" i="0">
-                <a:solidFill>
-                  <a:srgbClr val="6B6B6B"/>
-                </a:solidFill>
-                <a:latin typeface="Century Schoolbook"/>
-              </a:rPr>
-              <a:t>multiply the exponents: (−3)</a:t>
-            </a:r>
-            <a:r>
-              <a:rPr sz="2400" b="0" i="0" baseline="30000">
-                <a:solidFill>
-                  <a:srgbClr val="6B6B6B"/>
-                </a:solidFill>
-                <a:latin typeface="Century Schoolbook"/>
-              </a:rPr>
-              <a:t>6</a:t>
-            </a:r>
-          </a:p>
-        </p:txBody>
-      </p:sp>
-      <p:sp>
-        <p:nvSpPr>
-          <p:cNvPr id="11" name="TextBox 10"/>
           <p:cNvSpPr txBox="1"/>
           <p:nvPr/>
         </p:nvSpPr>
@@ -5833,44 +5436,9 @@
           </a:fontRef>
         </p:style>
       </p:cxnSp>
-      <p:sp>
-        <p:nvSpPr>
-          <p:cNvPr id="5" name="TextBox 4"/>
-          <p:cNvSpPr txBox="1"/>
-          <p:nvPr/>
-        </p:nvSpPr>
-        <p:spPr>
-          <a:xfrm>
-            <a:off x="777240" y="1261872"/>
-            <a:ext cx="10607040" cy="310896"/>
-          </a:xfrm>
-          <a:prstGeom prst="rect">
-            <a:avLst/>
-          </a:prstGeom>
-          <a:noFill/>
-        </p:spPr>
-        <p:txBody>
-          <a:bodyPr wrap="square" lIns="45720" rIns="45720" tIns="18288" bIns="18288" anchor="t">
-            <a:spAutoFit/>
-          </a:bodyPr>
-          <a:lstStyle/>
-          <a:p>
-            <a:pPr algn="l"/>
-            <a:r>
-              <a:rPr sz="1700" b="0" i="1">
-                <a:solidFill>
-                  <a:srgbClr val="6B6B6B"/>
-                </a:solidFill>
-                <a:latin typeface="Century Schoolbook"/>
-              </a:rPr>
-              <a:t>Boards up on three.</a:t>
-            </a:r>
-          </a:p>
-        </p:txBody>
-      </p:sp>
       <p:cxnSp>
         <p:nvCxnSpPr>
-          <p:cNvPr id="6" name="Connector 5"/>
+          <p:cNvPr id="5" name="Connector 4"/>
           <p:cNvCxnSpPr/>
           <p:nvPr/>
         </p:nvCxnSpPr>
@@ -5905,7 +5473,7 @@
       </p:cxnSp>
       <p:sp>
         <p:nvSpPr>
-          <p:cNvPr id="7" name="TextBox 6"/>
+          <p:cNvPr id="6" name="TextBox 5"/>
           <p:cNvSpPr txBox="1"/>
           <p:nvPr/>
         </p:nvSpPr>
@@ -5940,7 +5508,7 @@
       </p:sp>
       <p:sp>
         <p:nvSpPr>
-          <p:cNvPr id="8" name="TextBox 7"/>
+          <p:cNvPr id="7" name="TextBox 6"/>
           <p:cNvSpPr txBox="1"/>
           <p:nvPr/>
         </p:nvSpPr>
@@ -5975,7 +5543,7 @@
       </p:sp>
       <p:pic>
         <p:nvPicPr>
-          <p:cNvPr id="9" name="Picture 8" descr="7a6e349cb4210116.png"/>
+          <p:cNvPr id="8" name="Picture 7" descr="7a6e349cb4210116.png"/>
           <p:cNvPicPr>
             <a:picLocks noChangeAspect="1"/>
           </p:cNvPicPr>
@@ -5999,7 +5567,7 @@
       </p:pic>
       <p:sp>
         <p:nvSpPr>
-          <p:cNvPr id="10" name="TextBox 9"/>
+          <p:cNvPr id="9" name="TextBox 8"/>
           <p:cNvSpPr txBox="1"/>
           <p:nvPr/>
         </p:nvSpPr>
@@ -6028,41 +5596,6 @@
                 <a:latin typeface="Century Schoolbook"/>
               </a:rPr>
               <a:t>Answer it.</a:t>
-            </a:r>
-          </a:p>
-        </p:txBody>
-      </p:sp>
-      <p:sp>
-        <p:nvSpPr>
-          <p:cNvPr id="11" name="TextBox 10"/>
-          <p:cNvSpPr txBox="1"/>
-          <p:nvPr/>
-        </p:nvSpPr>
-        <p:spPr>
-          <a:xfrm>
-            <a:off x="777240" y="4828032"/>
-            <a:ext cx="10607040" cy="365760"/>
-          </a:xfrm>
-          <a:prstGeom prst="rect">
-            <a:avLst/>
-          </a:prstGeom>
-          <a:noFill/>
-        </p:spPr>
-        <p:txBody>
-          <a:bodyPr wrap="square" lIns="45720" rIns="45720" tIns="18288" bIns="18288" anchor="t">
-            <a:spAutoFit/>
-          </a:bodyPr>
-          <a:lstStyle/>
-          <a:p>
-            <a:pPr algn="ctr"/>
-            <a:r>
-              <a:rPr sz="1900" b="0" i="1">
-                <a:solidFill>
-                  <a:srgbClr val="6B6B6B"/>
-                </a:solidFill>
-                <a:latin typeface="Century Schoolbook"/>
-              </a:rPr>
-              <a:t>Write it as one power.</a:t>
             </a:r>
           </a:p>
         </p:txBody>
@@ -6190,44 +5723,9 @@
           </a:fontRef>
         </p:style>
       </p:cxnSp>
-      <p:sp>
-        <p:nvSpPr>
-          <p:cNvPr id="5" name="TextBox 4"/>
-          <p:cNvSpPr txBox="1"/>
-          <p:nvPr/>
-        </p:nvSpPr>
-        <p:spPr>
-          <a:xfrm>
-            <a:off x="777240" y="1261872"/>
-            <a:ext cx="10607040" cy="310896"/>
-          </a:xfrm>
-          <a:prstGeom prst="rect">
-            <a:avLst/>
-          </a:prstGeom>
-          <a:noFill/>
-        </p:spPr>
-        <p:txBody>
-          <a:bodyPr wrap="square" lIns="45720" rIns="45720" tIns="18288" bIns="18288" anchor="t">
-            <a:spAutoFit/>
-          </a:bodyPr>
-          <a:lstStyle/>
-          <a:p>
-            <a:pPr algn="l"/>
-            <a:r>
-              <a:rPr sz="1700" b="0" i="1">
-                <a:solidFill>
-                  <a:srgbClr val="6B6B6B"/>
-                </a:solidFill>
-                <a:latin typeface="Century Schoolbook"/>
-              </a:rPr>
-              <a:t>Answer.</a:t>
-            </a:r>
-          </a:p>
-        </p:txBody>
-      </p:sp>
       <p:cxnSp>
         <p:nvCxnSpPr>
-          <p:cNvPr id="6" name="Connector 5"/>
+          <p:cNvPr id="5" name="Connector 4"/>
           <p:cNvCxnSpPr/>
           <p:nvPr/>
         </p:nvCxnSpPr>
@@ -6262,7 +5760,7 @@
       </p:cxnSp>
       <p:sp>
         <p:nvSpPr>
-          <p:cNvPr id="7" name="TextBox 6"/>
+          <p:cNvPr id="6" name="TextBox 5"/>
           <p:cNvSpPr txBox="1"/>
           <p:nvPr/>
         </p:nvSpPr>
@@ -6297,7 +5795,7 @@
       </p:sp>
       <p:sp>
         <p:nvSpPr>
-          <p:cNvPr id="8" name="TextBox 7"/>
+          <p:cNvPr id="7" name="TextBox 6"/>
           <p:cNvSpPr txBox="1"/>
           <p:nvPr/>
         </p:nvSpPr>
@@ -6332,7 +5830,7 @@
       </p:sp>
       <p:pic>
         <p:nvPicPr>
-          <p:cNvPr id="9" name="Picture 8" descr="c64ca1a4dc51bf5f.png"/>
+          <p:cNvPr id="8" name="Picture 7" descr="c64ca1a4dc51bf5f.png"/>
           <p:cNvPicPr>
             <a:picLocks noChangeAspect="1"/>
           </p:cNvPicPr>
@@ -6356,42 +5854,7 @@
       </p:pic>
       <p:sp>
         <p:nvSpPr>
-          <p:cNvPr id="10" name="TextBox 9"/>
-          <p:cNvSpPr txBox="1"/>
-          <p:nvPr/>
-        </p:nvSpPr>
-        <p:spPr>
-          <a:xfrm>
-            <a:off x="1828800" y="2807207"/>
-            <a:ext cx="8503920" cy="548640"/>
-          </a:xfrm>
-          <a:prstGeom prst="rect">
-            <a:avLst/>
-          </a:prstGeom>
-          <a:noFill/>
-        </p:spPr>
-        <p:txBody>
-          <a:bodyPr wrap="square" lIns="45720" rIns="45720" tIns="18288" bIns="18288" anchor="t">
-            <a:spAutoFit/>
-          </a:bodyPr>
-          <a:lstStyle/>
-          <a:p>
-            <a:pPr algn="ctr"/>
-            <a:r>
-              <a:rPr sz="2400" b="0" i="0">
-                <a:solidFill>
-                  <a:srgbClr val="6B6B6B"/>
-                </a:solidFill>
-                <a:latin typeface="Century Schoolbook"/>
-              </a:rPr>
-              <a:t>same base, so add the exponents</a:t>
-            </a:r>
-          </a:p>
-        </p:txBody>
-      </p:sp>
-      <p:sp>
-        <p:nvSpPr>
-          <p:cNvPr id="11" name="TextBox 10"/>
+          <p:cNvPr id="9" name="TextBox 8"/>
           <p:cNvSpPr txBox="1"/>
           <p:nvPr/>
         </p:nvSpPr>
@@ -6426,7 +5889,7 @@
       </p:sp>
       <p:pic>
         <p:nvPicPr>
-          <p:cNvPr id="12" name="Picture 11" descr="fb5a5ab64e7e7827.png"/>
+          <p:cNvPr id="10" name="Picture 9" descr="fb5a5ab64e7e7827.png"/>
           <p:cNvPicPr>
             <a:picLocks noChangeAspect="1"/>
           </p:cNvPicPr>
@@ -6571,44 +6034,9 @@
           </a:fontRef>
         </p:style>
       </p:cxnSp>
-      <p:sp>
-        <p:nvSpPr>
-          <p:cNvPr id="5" name="TextBox 4"/>
-          <p:cNvSpPr txBox="1"/>
-          <p:nvPr/>
-        </p:nvSpPr>
-        <p:spPr>
-          <a:xfrm>
-            <a:off x="777240" y="1261872"/>
-            <a:ext cx="10607040" cy="310896"/>
-          </a:xfrm>
-          <a:prstGeom prst="rect">
-            <a:avLst/>
-          </a:prstGeom>
-          <a:noFill/>
-        </p:spPr>
-        <p:txBody>
-          <a:bodyPr wrap="square" lIns="45720" rIns="45720" tIns="18288" bIns="18288" anchor="t">
-            <a:spAutoFit/>
-          </a:bodyPr>
-          <a:lstStyle/>
-          <a:p>
-            <a:pPr algn="l"/>
-            <a:r>
-              <a:rPr sz="1700" b="0" i="1">
-                <a:solidFill>
-                  <a:srgbClr val="6B6B6B"/>
-                </a:solidFill>
-                <a:latin typeface="Century Schoolbook"/>
-              </a:rPr>
-              <a:t>Boards up on three.</a:t>
-            </a:r>
-          </a:p>
-        </p:txBody>
-      </p:sp>
       <p:cxnSp>
         <p:nvCxnSpPr>
-          <p:cNvPr id="6" name="Connector 5"/>
+          <p:cNvPr id="5" name="Connector 4"/>
           <p:cNvCxnSpPr/>
           <p:nvPr/>
         </p:nvCxnSpPr>
@@ -6643,7 +6071,7 @@
       </p:cxnSp>
       <p:sp>
         <p:nvSpPr>
-          <p:cNvPr id="7" name="TextBox 6"/>
+          <p:cNvPr id="6" name="TextBox 5"/>
           <p:cNvSpPr txBox="1"/>
           <p:nvPr/>
         </p:nvSpPr>
@@ -6678,7 +6106,7 @@
       </p:sp>
       <p:sp>
         <p:nvSpPr>
-          <p:cNvPr id="8" name="TextBox 7"/>
+          <p:cNvPr id="7" name="TextBox 6"/>
           <p:cNvSpPr txBox="1"/>
           <p:nvPr/>
         </p:nvSpPr>
@@ -6713,7 +6141,7 @@
       </p:sp>
       <p:sp>
         <p:nvSpPr>
-          <p:cNvPr id="9" name="TextBox 8"/>
+          <p:cNvPr id="8" name="TextBox 7"/>
           <p:cNvSpPr txBox="1"/>
           <p:nvPr/>
         </p:nvSpPr>
@@ -6748,7 +6176,7 @@
       </p:sp>
       <p:pic>
         <p:nvPicPr>
-          <p:cNvPr id="10" name="Picture 9" descr="d5ca6e2822ee53f9.png"/>
+          <p:cNvPr id="9" name="Picture 8" descr="d5ca6e2822ee53f9.png"/>
           <p:cNvPicPr>
             <a:picLocks noChangeAspect="1"/>
           </p:cNvPicPr>
@@ -6772,7 +6200,7 @@
       </p:pic>
       <p:sp>
         <p:nvSpPr>
-          <p:cNvPr id="11" name="TextBox 10"/>
+          <p:cNvPr id="10" name="TextBox 9"/>
           <p:cNvSpPr txBox="1"/>
           <p:nvPr/>
         </p:nvSpPr>
@@ -6807,7 +6235,7 @@
       </p:sp>
       <p:pic>
         <p:nvPicPr>
-          <p:cNvPr id="12" name="Picture 11" descr="ad43ae3bbc8b2264.png"/>
+          <p:cNvPr id="11" name="Picture 10" descr="ad43ae3bbc8b2264.png"/>
           <p:cNvPicPr>
             <a:picLocks noChangeAspect="1"/>
           </p:cNvPicPr>
@@ -6831,7 +6259,7 @@
       </p:pic>
       <p:sp>
         <p:nvSpPr>
-          <p:cNvPr id="13" name="TextBox 12"/>
+          <p:cNvPr id="12" name="TextBox 11"/>
           <p:cNvSpPr txBox="1"/>
           <p:nvPr/>
         </p:nvSpPr>
@@ -6866,7 +6294,7 @@
       </p:sp>
       <p:sp>
         <p:nvSpPr>
-          <p:cNvPr id="14" name="TextBox 13"/>
+          <p:cNvPr id="13" name="TextBox 12"/>
           <p:cNvSpPr txBox="1"/>
           <p:nvPr/>
         </p:nvSpPr>
@@ -6901,7 +6329,7 @@
       </p:sp>
       <p:sp>
         <p:nvSpPr>
-          <p:cNvPr id="15" name="TextBox 14"/>
+          <p:cNvPr id="14" name="TextBox 13"/>
           <p:cNvSpPr txBox="1"/>
           <p:nvPr/>
         </p:nvSpPr>
@@ -6936,7 +6364,7 @@
       </p:sp>
       <p:sp>
         <p:nvSpPr>
-          <p:cNvPr id="16" name="TextBox 15"/>
+          <p:cNvPr id="15" name="TextBox 14"/>
           <p:cNvSpPr txBox="1"/>
           <p:nvPr/>
         </p:nvSpPr>
@@ -7092,44 +6520,9 @@
           </a:fontRef>
         </p:style>
       </p:cxnSp>
-      <p:sp>
-        <p:nvSpPr>
-          <p:cNvPr id="5" name="TextBox 4"/>
-          <p:cNvSpPr txBox="1"/>
-          <p:nvPr/>
-        </p:nvSpPr>
-        <p:spPr>
-          <a:xfrm>
-            <a:off x="777240" y="1261872"/>
-            <a:ext cx="10607040" cy="310896"/>
-          </a:xfrm>
-          <a:prstGeom prst="rect">
-            <a:avLst/>
-          </a:prstGeom>
-          <a:noFill/>
-        </p:spPr>
-        <p:txBody>
-          <a:bodyPr wrap="square" lIns="45720" rIns="45720" tIns="18288" bIns="18288" anchor="t">
-            <a:spAutoFit/>
-          </a:bodyPr>
-          <a:lstStyle/>
-          <a:p>
-            <a:pPr algn="l"/>
-            <a:r>
-              <a:rPr sz="1700" b="0" i="1">
-                <a:solidFill>
-                  <a:srgbClr val="6B6B6B"/>
-                </a:solidFill>
-                <a:latin typeface="Century Schoolbook"/>
-              </a:rPr>
-              <a:t>Answer.</a:t>
-            </a:r>
-          </a:p>
-        </p:txBody>
-      </p:sp>
       <p:cxnSp>
         <p:nvCxnSpPr>
-          <p:cNvPr id="6" name="Connector 5"/>
+          <p:cNvPr id="5" name="Connector 4"/>
           <p:cNvCxnSpPr/>
           <p:nvPr/>
         </p:nvCxnSpPr>
@@ -7164,7 +6557,7 @@
       </p:cxnSp>
       <p:sp>
         <p:nvSpPr>
-          <p:cNvPr id="7" name="TextBox 6"/>
+          <p:cNvPr id="6" name="TextBox 5"/>
           <p:cNvSpPr txBox="1"/>
           <p:nvPr/>
         </p:nvSpPr>
@@ -7199,7 +6592,7 @@
       </p:sp>
       <p:sp>
         <p:nvSpPr>
-          <p:cNvPr id="8" name="TextBox 7"/>
+          <p:cNvPr id="7" name="TextBox 6"/>
           <p:cNvSpPr txBox="1"/>
           <p:nvPr/>
         </p:nvSpPr>
@@ -7234,7 +6627,7 @@
       </p:sp>
       <p:sp>
         <p:nvSpPr>
-          <p:cNvPr id="9" name="TextBox 8"/>
+          <p:cNvPr id="8" name="TextBox 7"/>
           <p:cNvSpPr txBox="1"/>
           <p:nvPr/>
         </p:nvSpPr>
@@ -7269,7 +6662,7 @@
       </p:sp>
       <p:pic>
         <p:nvPicPr>
-          <p:cNvPr id="10" name="Picture 9" descr="5257a77d61b89134.png"/>
+          <p:cNvPr id="9" name="Picture 8" descr="5257a77d61b89134.png"/>
           <p:cNvPicPr>
             <a:picLocks noChangeAspect="1"/>
           </p:cNvPicPr>
@@ -7293,7 +6686,7 @@
       </p:pic>
       <p:sp>
         <p:nvSpPr>
-          <p:cNvPr id="11" name="TextBox 10"/>
+          <p:cNvPr id="10" name="TextBox 9"/>
           <p:cNvSpPr txBox="1"/>
           <p:nvPr/>
         </p:nvSpPr>
@@ -7328,7 +6721,7 @@
       </p:sp>
       <p:pic>
         <p:nvPicPr>
-          <p:cNvPr id="12" name="Picture 11" descr="fcc0337caf95aad5.png"/>
+          <p:cNvPr id="11" name="Picture 10" descr="fcc0337caf95aad5.png"/>
           <p:cNvPicPr>
             <a:picLocks noChangeAspect="1"/>
           </p:cNvPicPr>
@@ -7352,7 +6745,7 @@
       </p:pic>
       <p:sp>
         <p:nvSpPr>
-          <p:cNvPr id="13" name="TextBox 12"/>
+          <p:cNvPr id="12" name="TextBox 11"/>
           <p:cNvSpPr txBox="1"/>
           <p:nvPr/>
         </p:nvSpPr>
@@ -7387,7 +6780,7 @@
       </p:sp>
       <p:sp>
         <p:nvSpPr>
-          <p:cNvPr id="14" name="TextBox 13"/>
+          <p:cNvPr id="13" name="TextBox 12"/>
           <p:cNvSpPr txBox="1"/>
           <p:nvPr/>
         </p:nvSpPr>
@@ -7422,7 +6815,7 @@
       </p:sp>
       <p:sp>
         <p:nvSpPr>
-          <p:cNvPr id="15" name="TextBox 14"/>
+          <p:cNvPr id="14" name="TextBox 13"/>
           <p:cNvSpPr txBox="1"/>
           <p:nvPr/>
         </p:nvSpPr>
@@ -7457,87 +6850,7 @@
       </p:sp>
       <p:sp>
         <p:nvSpPr>
-          <p:cNvPr id="16" name="TextBox 15"/>
-          <p:cNvSpPr txBox="1"/>
-          <p:nvPr/>
-        </p:nvSpPr>
-        <p:spPr>
-          <a:xfrm>
-            <a:off x="1828800" y="3656804"/>
-            <a:ext cx="8503920" cy="548640"/>
-          </a:xfrm>
-          <a:prstGeom prst="rect">
-            <a:avLst/>
-          </a:prstGeom>
-          <a:noFill/>
-        </p:spPr>
-        <p:txBody>
-          <a:bodyPr wrap="square" lIns="45720" rIns="45720" tIns="18288" bIns="18288" anchor="t">
-            <a:spAutoFit/>
-          </a:bodyPr>
-          <a:lstStyle/>
-          <a:p>
-            <a:pPr algn="ctr"/>
-            <a:r>
-              <a:rPr sz="2400" b="0" i="0">
-                <a:solidFill>
-                  <a:srgbClr val="6B6B6B"/>
-                </a:solidFill>
-                <a:latin typeface="Century Schoolbook"/>
-              </a:rPr>
-              <a:t>2</a:t>
-            </a:r>
-            <a:r>
-              <a:rPr sz="2400" b="0" i="0" baseline="30000">
-                <a:solidFill>
-                  <a:srgbClr val="6B6B6B"/>
-                </a:solidFill>
-                <a:latin typeface="Century Schoolbook"/>
-              </a:rPr>
-              <a:t>4</a:t>
-            </a:r>
-            <a:r>
-              <a:rPr sz="2400" b="0" i="0">
-                <a:solidFill>
-                  <a:srgbClr val="6B6B6B"/>
-                </a:solidFill>
-                <a:latin typeface="Century Schoolbook"/>
-              </a:rPr>
-              <a:t> · 2</a:t>
-            </a:r>
-            <a:r>
-              <a:rPr sz="2400" b="0" i="0" baseline="30000">
-                <a:solidFill>
-                  <a:srgbClr val="6B6B6B"/>
-                </a:solidFill>
-                <a:latin typeface="Century Schoolbook"/>
-              </a:rPr>
-              <a:t>2</a:t>
-            </a:r>
-            <a:r>
-              <a:rPr sz="2400" b="0" i="0">
-                <a:solidFill>
-                  <a:srgbClr val="6B6B6B"/>
-                </a:solidFill>
-                <a:latin typeface="Century Schoolbook"/>
-              </a:rPr>
-              <a:t> = 2</a:t>
-            </a:r>
-            <a:r>
-              <a:rPr sz="2400" b="0" i="0" baseline="30000">
-                <a:solidFill>
-                  <a:srgbClr val="6B6B6B"/>
-                </a:solidFill>
-                <a:latin typeface="Century Schoolbook"/>
-              </a:rPr>
-              <a:t>6</a:t>
-            </a:r>
-          </a:p>
-        </p:txBody>
-      </p:sp>
-      <p:sp>
-        <p:nvSpPr>
-          <p:cNvPr id="17" name="TextBox 16"/>
+          <p:cNvPr id="15" name="TextBox 14"/>
           <p:cNvSpPr txBox="1"/>
           <p:nvPr/>
         </p:nvSpPr>
@@ -7711,44 +7024,9 @@
           </a:fontRef>
         </p:style>
       </p:cxnSp>
-      <p:sp>
-        <p:nvSpPr>
-          <p:cNvPr id="5" name="TextBox 4"/>
-          <p:cNvSpPr txBox="1"/>
-          <p:nvPr/>
-        </p:nvSpPr>
-        <p:spPr>
-          <a:xfrm>
-            <a:off x="777240" y="1261872"/>
-            <a:ext cx="10607040" cy="310896"/>
-          </a:xfrm>
-          <a:prstGeom prst="rect">
-            <a:avLst/>
-          </a:prstGeom>
-          <a:noFill/>
-        </p:spPr>
-        <p:txBody>
-          <a:bodyPr wrap="square" lIns="45720" rIns="45720" tIns="18288" bIns="18288" anchor="t">
-            <a:spAutoFit/>
-          </a:bodyPr>
-          <a:lstStyle/>
-          <a:p>
-            <a:pPr algn="l"/>
-            <a:r>
-              <a:rPr sz="1700" b="0" i="1">
-                <a:solidFill>
-                  <a:srgbClr val="6B6B6B"/>
-                </a:solidFill>
-                <a:latin typeface="Century Schoolbook"/>
-              </a:rPr>
-              <a:t>On your own. Four minutes. No notes.</a:t>
-            </a:r>
-          </a:p>
-        </p:txBody>
-      </p:sp>
       <p:cxnSp>
         <p:nvCxnSpPr>
-          <p:cNvPr id="6" name="Connector 5"/>
+          <p:cNvPr id="5" name="Connector 4"/>
           <p:cNvCxnSpPr/>
           <p:nvPr/>
         </p:nvCxnSpPr>
@@ -7783,7 +7061,7 @@
       </p:cxnSp>
       <p:sp>
         <p:nvSpPr>
-          <p:cNvPr id="7" name="TextBox 6"/>
+          <p:cNvPr id="6" name="TextBox 5"/>
           <p:cNvSpPr txBox="1"/>
           <p:nvPr/>
         </p:nvSpPr>
@@ -7818,7 +7096,7 @@
       </p:sp>
       <p:sp>
         <p:nvSpPr>
-          <p:cNvPr id="8" name="TextBox 7"/>
+          <p:cNvPr id="7" name="TextBox 6"/>
           <p:cNvSpPr txBox="1"/>
           <p:nvPr/>
         </p:nvSpPr>
@@ -7853,13 +7131,13 @@
       </p:sp>
       <p:sp>
         <p:nvSpPr>
-          <p:cNvPr id="9" name="TextBox 8"/>
-          <p:cNvSpPr txBox="1"/>
-          <p:nvPr/>
-        </p:nvSpPr>
-        <p:spPr>
-          <a:xfrm>
-            <a:off x="1874519" y="1760220"/>
+          <p:cNvPr id="8" name="TextBox 7"/>
+          <p:cNvSpPr txBox="1"/>
+          <p:nvPr/>
+        </p:nvSpPr>
+        <p:spPr>
+          <a:xfrm>
+            <a:off x="1874519" y="1440180"/>
             <a:ext cx="720605" cy="457200"/>
           </a:xfrm>
           <a:prstGeom prst="rect">
@@ -7888,7 +7166,7 @@
       </p:sp>
       <p:pic>
         <p:nvPicPr>
-          <p:cNvPr id="10" name="Picture 9" descr="0ae0cbe9590d6d51.png"/>
+          <p:cNvPr id="9" name="Picture 8" descr="0ae0cbe9590d6d51.png"/>
           <p:cNvPicPr>
             <a:picLocks noChangeAspect="1"/>
           </p:cNvPicPr>
@@ -7902,7 +7180,7 @@
         </p:blipFill>
         <p:spPr>
           <a:xfrm>
-            <a:off x="2457965" y="1784604"/>
+            <a:off x="2457965" y="1464564"/>
             <a:ext cx="688848" cy="408432"/>
           </a:xfrm>
           <a:prstGeom prst="rect">
@@ -7912,13 +7190,13 @@
       </p:pic>
       <p:sp>
         <p:nvSpPr>
-          <p:cNvPr id="11" name="TextBox 10"/>
-          <p:cNvSpPr txBox="1"/>
-          <p:nvPr/>
-        </p:nvSpPr>
-        <p:spPr>
-          <a:xfrm>
-            <a:off x="1874519" y="2372868"/>
+          <p:cNvPr id="10" name="TextBox 9"/>
+          <p:cNvSpPr txBox="1"/>
+          <p:nvPr/>
+        </p:nvSpPr>
+        <p:spPr>
+          <a:xfrm>
+            <a:off x="1874519" y="2052828"/>
             <a:ext cx="6163986" cy="457200"/>
           </a:xfrm>
           <a:prstGeom prst="rect">
@@ -7947,7 +7225,7 @@
       </p:sp>
       <p:pic>
         <p:nvPicPr>
-          <p:cNvPr id="12" name="Picture 11" descr="bab7398c9b21b51a.png"/>
+          <p:cNvPr id="11" name="Picture 10" descr="bab7398c9b21b51a.png"/>
           <p:cNvPicPr>
             <a:picLocks noChangeAspect="1"/>
           </p:cNvPicPr>
@@ -7961,7 +7239,7 @@
         </p:blipFill>
         <p:spPr>
           <a:xfrm>
-            <a:off x="7901346" y="2397252"/>
+            <a:off x="7901346" y="2077212"/>
             <a:ext cx="688848" cy="408432"/>
           </a:xfrm>
           <a:prstGeom prst="rect">
@@ -7971,13 +7249,13 @@
       </p:pic>
       <p:sp>
         <p:nvSpPr>
-          <p:cNvPr id="13" name="TextBox 12"/>
-          <p:cNvSpPr txBox="1"/>
-          <p:nvPr/>
-        </p:nvSpPr>
-        <p:spPr>
-          <a:xfrm>
-            <a:off x="8590194" y="2372868"/>
+          <p:cNvPr id="12" name="TextBox 11"/>
+          <p:cNvSpPr txBox="1"/>
+          <p:nvPr/>
+        </p:nvSpPr>
+        <p:spPr>
+          <a:xfrm>
+            <a:off x="8590194" y="2052828"/>
             <a:ext cx="347771" cy="457200"/>
           </a:xfrm>
           <a:prstGeom prst="rect">
@@ -8006,13 +7284,13 @@
       </p:sp>
       <p:sp>
         <p:nvSpPr>
-          <p:cNvPr id="14" name="TextBox 13"/>
-          <p:cNvSpPr txBox="1"/>
-          <p:nvPr/>
-        </p:nvSpPr>
-        <p:spPr>
-          <a:xfrm>
-            <a:off x="1874519" y="2985516"/>
+          <p:cNvPr id="13" name="TextBox 12"/>
+          <p:cNvSpPr txBox="1"/>
+          <p:nvPr/>
+        </p:nvSpPr>
+        <p:spPr>
+          <a:xfrm>
+            <a:off x="1874519" y="2665476"/>
             <a:ext cx="1652008" cy="457200"/>
           </a:xfrm>
           <a:prstGeom prst="rect">
@@ -8041,7 +7319,7 @@
       </p:sp>
       <p:pic>
         <p:nvPicPr>
-          <p:cNvPr id="15" name="Picture 14" descr="d836f789d7988873.png"/>
+          <p:cNvPr id="14" name="Picture 13" descr="d836f789d7988873.png"/>
           <p:cNvPicPr>
             <a:picLocks noChangeAspect="1"/>
           </p:cNvPicPr>
@@ -8055,7 +7333,7 @@
         </p:blipFill>
         <p:spPr>
           <a:xfrm>
-            <a:off x="3389368" y="3098292"/>
+            <a:off x="3389368" y="2778252"/>
             <a:ext cx="1402080" cy="231648"/>
           </a:xfrm>
           <a:prstGeom prst="rect">
@@ -8065,13 +7343,13 @@
       </p:pic>
       <p:sp>
         <p:nvSpPr>
-          <p:cNvPr id="16" name="TextBox 15"/>
-          <p:cNvSpPr txBox="1"/>
-          <p:nvPr/>
-        </p:nvSpPr>
-        <p:spPr>
-          <a:xfrm>
-            <a:off x="1874519" y="3669792"/>
+          <p:cNvPr id="15" name="TextBox 14"/>
+          <p:cNvSpPr txBox="1"/>
+          <p:nvPr/>
+        </p:nvSpPr>
+        <p:spPr>
+          <a:xfrm>
+            <a:off x="1874519" y="3349752"/>
             <a:ext cx="2190435" cy="457200"/>
           </a:xfrm>
           <a:prstGeom prst="rect">
@@ -8100,7 +7378,7 @@
       </p:sp>
       <p:pic>
         <p:nvPicPr>
-          <p:cNvPr id="17" name="Picture 16" descr="ec4478436d606ed4.png"/>
+          <p:cNvPr id="16" name="Picture 15" descr="ec4478436d606ed4.png"/>
           <p:cNvPicPr>
             <a:picLocks noChangeAspect="1"/>
           </p:cNvPicPr>
@@ -8114,7 +7392,7 @@
         </p:blipFill>
         <p:spPr>
           <a:xfrm>
-            <a:off x="3927795" y="3621024"/>
+            <a:off x="3927795" y="3300984"/>
             <a:ext cx="637032" cy="554736"/>
           </a:xfrm>
           <a:prstGeom prst="rect">
@@ -8245,44 +7523,9 @@
           </a:fontRef>
         </p:style>
       </p:cxnSp>
-      <p:sp>
-        <p:nvSpPr>
-          <p:cNvPr id="5" name="TextBox 4"/>
-          <p:cNvSpPr txBox="1"/>
-          <p:nvPr/>
-        </p:nvSpPr>
-        <p:spPr>
-          <a:xfrm>
-            <a:off x="777240" y="1261872"/>
-            <a:ext cx="10607040" cy="310896"/>
-          </a:xfrm>
-          <a:prstGeom prst="rect">
-            <a:avLst/>
-          </a:prstGeom>
-          <a:noFill/>
-        </p:spPr>
-        <p:txBody>
-          <a:bodyPr wrap="square" lIns="45720" rIns="45720" tIns="18288" bIns="18288" anchor="t">
-            <a:spAutoFit/>
-          </a:bodyPr>
-          <a:lstStyle/>
-          <a:p>
-            <a:pPr algn="l"/>
-            <a:r>
-              <a:rPr sz="1700" b="0" i="1">
-                <a:solidFill>
-                  <a:srgbClr val="6B6B6B"/>
-                </a:solidFill>
-                <a:latin typeface="Century Schoolbook"/>
-              </a:rPr>
-              <a:t>Boards up on three.</a:t>
-            </a:r>
-          </a:p>
-        </p:txBody>
-      </p:sp>
       <p:cxnSp>
         <p:nvCxnSpPr>
-          <p:cNvPr id="6" name="Connector 5"/>
+          <p:cNvPr id="5" name="Connector 4"/>
           <p:cNvCxnSpPr/>
           <p:nvPr/>
         </p:nvCxnSpPr>
@@ -8317,7 +7560,7 @@
       </p:cxnSp>
       <p:sp>
         <p:nvSpPr>
-          <p:cNvPr id="7" name="TextBox 6"/>
+          <p:cNvPr id="6" name="TextBox 5"/>
           <p:cNvSpPr txBox="1"/>
           <p:nvPr/>
         </p:nvSpPr>
@@ -8352,7 +7595,7 @@
       </p:sp>
       <p:sp>
         <p:nvSpPr>
-          <p:cNvPr id="8" name="TextBox 7"/>
+          <p:cNvPr id="7" name="TextBox 6"/>
           <p:cNvSpPr txBox="1"/>
           <p:nvPr/>
         </p:nvSpPr>
@@ -8387,7 +7630,7 @@
       </p:sp>
       <p:pic>
         <p:nvPicPr>
-          <p:cNvPr id="9" name="Picture 8" descr="0682cf5d6aba1b5d.png"/>
+          <p:cNvPr id="8" name="Picture 7" descr="0682cf5d6aba1b5d.png"/>
           <p:cNvPicPr>
             <a:picLocks noChangeAspect="1"/>
           </p:cNvPicPr>
@@ -8411,7 +7654,7 @@
       </p:pic>
       <p:sp>
         <p:nvSpPr>
-          <p:cNvPr id="10" name="TextBox 9"/>
+          <p:cNvPr id="9" name="TextBox 8"/>
           <p:cNvSpPr txBox="1"/>
           <p:nvPr/>
         </p:nvSpPr>
@@ -8440,41 +7683,6 @@
                 <a:latin typeface="Century Schoolbook"/>
               </a:rPr>
               <a:t>Answer it.</a:t>
-            </a:r>
-          </a:p>
-        </p:txBody>
-      </p:sp>
-      <p:sp>
-        <p:nvSpPr>
-          <p:cNvPr id="11" name="TextBox 10"/>
-          <p:cNvSpPr txBox="1"/>
-          <p:nvPr/>
-        </p:nvSpPr>
-        <p:spPr>
-          <a:xfrm>
-            <a:off x="777240" y="4828032"/>
-            <a:ext cx="10607040" cy="365760"/>
-          </a:xfrm>
-          <a:prstGeom prst="rect">
-            <a:avLst/>
-          </a:prstGeom>
-          <a:noFill/>
-        </p:spPr>
-        <p:txBody>
-          <a:bodyPr wrap="square" lIns="45720" rIns="45720" tIns="18288" bIns="18288" anchor="t">
-            <a:spAutoFit/>
-          </a:bodyPr>
-          <a:lstStyle/>
-          <a:p>
-            <a:pPr algn="ctr"/>
-            <a:r>
-              <a:rPr sz="1900" b="0" i="1">
-                <a:solidFill>
-                  <a:srgbClr val="6B6B6B"/>
-                </a:solidFill>
-                <a:latin typeface="Century Schoolbook"/>
-              </a:rPr>
-              <a:t>Find the value.</a:t>
             </a:r>
           </a:p>
         </p:txBody>
@@ -8602,44 +7810,9 @@
           </a:fontRef>
         </p:style>
       </p:cxnSp>
-      <p:sp>
-        <p:nvSpPr>
-          <p:cNvPr id="5" name="TextBox 4"/>
-          <p:cNvSpPr txBox="1"/>
-          <p:nvPr/>
-        </p:nvSpPr>
-        <p:spPr>
-          <a:xfrm>
-            <a:off x="777240" y="1261872"/>
-            <a:ext cx="10607040" cy="310896"/>
-          </a:xfrm>
-          <a:prstGeom prst="rect">
-            <a:avLst/>
-          </a:prstGeom>
-          <a:noFill/>
-        </p:spPr>
-        <p:txBody>
-          <a:bodyPr wrap="square" lIns="45720" rIns="45720" tIns="18288" bIns="18288" anchor="t">
-            <a:spAutoFit/>
-          </a:bodyPr>
-          <a:lstStyle/>
-          <a:p>
-            <a:pPr algn="l"/>
-            <a:r>
-              <a:rPr sz="1700" b="0" i="1">
-                <a:solidFill>
-                  <a:srgbClr val="6B6B6B"/>
-                </a:solidFill>
-                <a:latin typeface="Century Schoolbook"/>
-              </a:rPr>
-              <a:t>Answer.</a:t>
-            </a:r>
-          </a:p>
-        </p:txBody>
-      </p:sp>
       <p:cxnSp>
         <p:nvCxnSpPr>
-          <p:cNvPr id="6" name="Connector 5"/>
+          <p:cNvPr id="5" name="Connector 4"/>
           <p:cNvCxnSpPr/>
           <p:nvPr/>
         </p:nvCxnSpPr>
@@ -8674,7 +7847,7 @@
       </p:cxnSp>
       <p:sp>
         <p:nvSpPr>
-          <p:cNvPr id="7" name="TextBox 6"/>
+          <p:cNvPr id="6" name="TextBox 5"/>
           <p:cNvSpPr txBox="1"/>
           <p:nvPr/>
         </p:nvSpPr>
@@ -8709,7 +7882,7 @@
       </p:sp>
       <p:sp>
         <p:nvSpPr>
-          <p:cNvPr id="8" name="TextBox 7"/>
+          <p:cNvPr id="7" name="TextBox 6"/>
           <p:cNvSpPr txBox="1"/>
           <p:nvPr/>
         </p:nvSpPr>
@@ -8744,7 +7917,7 @@
       </p:sp>
       <p:pic>
         <p:nvPicPr>
-          <p:cNvPr id="9" name="Picture 8" descr="b6b82c3fc17cdb45.png"/>
+          <p:cNvPr id="8" name="Picture 7" descr="b6b82c3fc17cdb45.png"/>
           <p:cNvPicPr>
             <a:picLocks noChangeAspect="1"/>
           </p:cNvPicPr>
@@ -8768,87 +7941,7 @@
       </p:pic>
       <p:sp>
         <p:nvSpPr>
-          <p:cNvPr id="10" name="TextBox 9"/>
-          <p:cNvSpPr txBox="1"/>
-          <p:nvPr/>
-        </p:nvSpPr>
-        <p:spPr>
-          <a:xfrm>
-            <a:off x="1828800" y="2892552"/>
-            <a:ext cx="8503920" cy="548640"/>
-          </a:xfrm>
-          <a:prstGeom prst="rect">
-            <a:avLst/>
-          </a:prstGeom>
-          <a:noFill/>
-        </p:spPr>
-        <p:txBody>
-          <a:bodyPr wrap="square" lIns="45720" rIns="45720" tIns="18288" bIns="18288" anchor="t">
-            <a:spAutoFit/>
-          </a:bodyPr>
-          <a:lstStyle/>
-          <a:p>
-            <a:pPr algn="ctr"/>
-            <a:r>
-              <a:rPr sz="2400" b="0" i="0">
-                <a:solidFill>
-                  <a:srgbClr val="6B6B6B"/>
-                </a:solidFill>
-                <a:latin typeface="Century Schoolbook"/>
-              </a:rPr>
-              <a:t>2</a:t>
-            </a:r>
-            <a:r>
-              <a:rPr sz="2400" b="0" i="0" baseline="30000">
-                <a:solidFill>
-                  <a:srgbClr val="6B6B6B"/>
-                </a:solidFill>
-                <a:latin typeface="Century Schoolbook"/>
-              </a:rPr>
-              <a:t>3</a:t>
-            </a:r>
-            <a:r>
-              <a:rPr sz="2400" b="0" i="0">
-                <a:solidFill>
-                  <a:srgbClr val="6B6B6B"/>
-                </a:solidFill>
-                <a:latin typeface="Century Schoolbook"/>
-              </a:rPr>
-              <a:t> · 5</a:t>
-            </a:r>
-            <a:r>
-              <a:rPr sz="2400" b="0" i="0" baseline="30000">
-                <a:solidFill>
-                  <a:srgbClr val="6B6B6B"/>
-                </a:solidFill>
-                <a:latin typeface="Century Schoolbook"/>
-              </a:rPr>
-              <a:t>3</a:t>
-            </a:r>
-            <a:r>
-              <a:rPr sz="2400" b="0" i="0">
-                <a:solidFill>
-                  <a:srgbClr val="6B6B6B"/>
-                </a:solidFill>
-                <a:latin typeface="Century Schoolbook"/>
-              </a:rPr>
-              <a:t> = 8 · 125, or 10</a:t>
-            </a:r>
-            <a:r>
-              <a:rPr sz="2400" b="0" i="0" baseline="30000">
-                <a:solidFill>
-                  <a:srgbClr val="6B6B6B"/>
-                </a:solidFill>
-                <a:latin typeface="Century Schoolbook"/>
-              </a:rPr>
-              <a:t>3</a:t>
-            </a:r>
-          </a:p>
-        </p:txBody>
-      </p:sp>
-      <p:sp>
-        <p:nvSpPr>
-          <p:cNvPr id="11" name="TextBox 10"/>
+          <p:cNvPr id="9" name="TextBox 8"/>
           <p:cNvSpPr txBox="1"/>
           <p:nvPr/>
         </p:nvSpPr>
@@ -9004,44 +8097,9 @@
           </a:fontRef>
         </p:style>
       </p:cxnSp>
-      <p:sp>
-        <p:nvSpPr>
-          <p:cNvPr id="5" name="TextBox 4"/>
-          <p:cNvSpPr txBox="1"/>
-          <p:nvPr/>
-        </p:nvSpPr>
-        <p:spPr>
-          <a:xfrm>
-            <a:off x="777240" y="1261872"/>
-            <a:ext cx="10607040" cy="310896"/>
-          </a:xfrm>
-          <a:prstGeom prst="rect">
-            <a:avLst/>
-          </a:prstGeom>
-          <a:noFill/>
-        </p:spPr>
-        <p:txBody>
-          <a:bodyPr wrap="square" lIns="45720" rIns="45720" tIns="18288" bIns="18288" anchor="t">
-            <a:spAutoFit/>
-          </a:bodyPr>
-          <a:lstStyle/>
-          <a:p>
-            <a:pPr algn="l"/>
-            <a:r>
-              <a:rPr sz="1700" b="0" i="1">
-                <a:solidFill>
-                  <a:srgbClr val="6B6B6B"/>
-                </a:solidFill>
-                <a:latin typeface="Century Schoolbook"/>
-              </a:rPr>
-              <a:t>Boards up on three.</a:t>
-            </a:r>
-          </a:p>
-        </p:txBody>
-      </p:sp>
       <p:cxnSp>
         <p:nvCxnSpPr>
-          <p:cNvPr id="6" name="Connector 5"/>
+          <p:cNvPr id="5" name="Connector 4"/>
           <p:cNvCxnSpPr/>
           <p:nvPr/>
         </p:nvCxnSpPr>
@@ -9076,7 +8134,7 @@
       </p:cxnSp>
       <p:sp>
         <p:nvSpPr>
-          <p:cNvPr id="7" name="TextBox 6"/>
+          <p:cNvPr id="6" name="TextBox 5"/>
           <p:cNvSpPr txBox="1"/>
           <p:nvPr/>
         </p:nvSpPr>
@@ -9111,7 +8169,7 @@
       </p:sp>
       <p:sp>
         <p:nvSpPr>
-          <p:cNvPr id="8" name="TextBox 7"/>
+          <p:cNvPr id="7" name="TextBox 6"/>
           <p:cNvSpPr txBox="1"/>
           <p:nvPr/>
         </p:nvSpPr>
@@ -9146,7 +8204,7 @@
       </p:sp>
       <p:pic>
         <p:nvPicPr>
-          <p:cNvPr id="9" name="Picture 8" descr="d3482028085e5061.png"/>
+          <p:cNvPr id="8" name="Picture 7" descr="d3482028085e5061.png"/>
           <p:cNvPicPr>
             <a:picLocks noChangeAspect="1"/>
           </p:cNvPicPr>
@@ -9170,7 +8228,7 @@
       </p:pic>
       <p:sp>
         <p:nvSpPr>
-          <p:cNvPr id="10" name="TextBox 9"/>
+          <p:cNvPr id="9" name="TextBox 8"/>
           <p:cNvSpPr txBox="1"/>
           <p:nvPr/>
         </p:nvSpPr>
@@ -9199,41 +8257,6 @@
                 <a:latin typeface="Century Schoolbook"/>
               </a:rPr>
               <a:t>Answer it.</a:t>
-            </a:r>
-          </a:p>
-        </p:txBody>
-      </p:sp>
-      <p:sp>
-        <p:nvSpPr>
-          <p:cNvPr id="11" name="TextBox 10"/>
-          <p:cNvSpPr txBox="1"/>
-          <p:nvPr/>
-        </p:nvSpPr>
-        <p:spPr>
-          <a:xfrm>
-            <a:off x="777240" y="4828032"/>
-            <a:ext cx="10607040" cy="365760"/>
-          </a:xfrm>
-          <a:prstGeom prst="rect">
-            <a:avLst/>
-          </a:prstGeom>
-          <a:noFill/>
-        </p:spPr>
-        <p:txBody>
-          <a:bodyPr wrap="square" lIns="45720" rIns="45720" tIns="18288" bIns="18288" anchor="t">
-            <a:spAutoFit/>
-          </a:bodyPr>
-          <a:lstStyle/>
-          <a:p>
-            <a:pPr algn="ctr"/>
-            <a:r>
-              <a:rPr sz="1900" b="0" i="1">
-                <a:solidFill>
-                  <a:srgbClr val="6B6B6B"/>
-                </a:solidFill>
-                <a:latin typeface="Century Schoolbook"/>
-              </a:rPr>
-              <a:t>Write it as one power.</a:t>
             </a:r>
           </a:p>
         </p:txBody>
@@ -9361,44 +8384,9 @@
           </a:fontRef>
         </p:style>
       </p:cxnSp>
-      <p:sp>
-        <p:nvSpPr>
-          <p:cNvPr id="5" name="TextBox 4"/>
-          <p:cNvSpPr txBox="1"/>
-          <p:nvPr/>
-        </p:nvSpPr>
-        <p:spPr>
-          <a:xfrm>
-            <a:off x="777240" y="1261872"/>
-            <a:ext cx="10607040" cy="310896"/>
-          </a:xfrm>
-          <a:prstGeom prst="rect">
-            <a:avLst/>
-          </a:prstGeom>
-          <a:noFill/>
-        </p:spPr>
-        <p:txBody>
-          <a:bodyPr wrap="square" lIns="45720" rIns="45720" tIns="18288" bIns="18288" anchor="t">
-            <a:spAutoFit/>
-          </a:bodyPr>
-          <a:lstStyle/>
-          <a:p>
-            <a:pPr algn="l"/>
-            <a:r>
-              <a:rPr sz="1700" b="0" i="1">
-                <a:solidFill>
-                  <a:srgbClr val="6B6B6B"/>
-                </a:solidFill>
-                <a:latin typeface="Century Schoolbook"/>
-              </a:rPr>
-              <a:t>Answer.</a:t>
-            </a:r>
-          </a:p>
-        </p:txBody>
-      </p:sp>
       <p:cxnSp>
         <p:nvCxnSpPr>
-          <p:cNvPr id="6" name="Connector 5"/>
+          <p:cNvPr id="5" name="Connector 4"/>
           <p:cNvCxnSpPr/>
           <p:nvPr/>
         </p:nvCxnSpPr>
@@ -9433,7 +8421,7 @@
       </p:cxnSp>
       <p:sp>
         <p:nvSpPr>
-          <p:cNvPr id="7" name="TextBox 6"/>
+          <p:cNvPr id="6" name="TextBox 5"/>
           <p:cNvSpPr txBox="1"/>
           <p:nvPr/>
         </p:nvSpPr>
@@ -9468,7 +8456,7 @@
       </p:sp>
       <p:sp>
         <p:nvSpPr>
-          <p:cNvPr id="8" name="TextBox 7"/>
+          <p:cNvPr id="7" name="TextBox 6"/>
           <p:cNvSpPr txBox="1"/>
           <p:nvPr/>
         </p:nvSpPr>
@@ -9503,7 +8491,7 @@
       </p:sp>
       <p:pic>
         <p:nvPicPr>
-          <p:cNvPr id="9" name="Picture 8" descr="35097bf00c93665c.png"/>
+          <p:cNvPr id="8" name="Picture 7" descr="35097bf00c93665c.png"/>
           <p:cNvPicPr>
             <a:picLocks noChangeAspect="1"/>
           </p:cNvPicPr>
@@ -9527,60 +8515,7 @@
       </p:pic>
       <p:sp>
         <p:nvSpPr>
-          <p:cNvPr id="10" name="TextBox 9"/>
-          <p:cNvSpPr txBox="1"/>
-          <p:nvPr/>
-        </p:nvSpPr>
-        <p:spPr>
-          <a:xfrm>
-            <a:off x="1828800" y="2895599"/>
-            <a:ext cx="8503920" cy="548640"/>
-          </a:xfrm>
-          <a:prstGeom prst="rect">
-            <a:avLst/>
-          </a:prstGeom>
-          <a:noFill/>
-        </p:spPr>
-        <p:txBody>
-          <a:bodyPr wrap="square" lIns="45720" rIns="45720" tIns="18288" bIns="18288" anchor="t">
-            <a:spAutoFit/>
-          </a:bodyPr>
-          <a:lstStyle/>
-          <a:p>
-            <a:pPr algn="ctr"/>
-            <a:r>
-              <a:rPr sz="2400" b="0" i="0">
-                <a:solidFill>
-                  <a:srgbClr val="6B6B6B"/>
-                </a:solidFill>
-                <a:latin typeface="Century Schoolbook"/>
-              </a:rPr>
-              <a:t>four copies of 3</a:t>
-            </a:r>
-            <a:r>
-              <a:rPr sz="2400" b="0" i="0" baseline="30000">
-                <a:solidFill>
-                  <a:srgbClr val="6B6B6B"/>
-                </a:solidFill>
-                <a:latin typeface="Century Schoolbook"/>
-              </a:rPr>
-              <a:t>2</a:t>
-            </a:r>
-            <a:r>
-              <a:rPr sz="2400" b="0" i="0">
-                <a:solidFill>
-                  <a:srgbClr val="6B6B6B"/>
-                </a:solidFill>
-                <a:latin typeface="Century Schoolbook"/>
-              </a:rPr>
-              <a:t>, so eight 3s</a:t>
-            </a:r>
-          </a:p>
-        </p:txBody>
-      </p:sp>
-      <p:sp>
-        <p:nvSpPr>
-          <p:cNvPr id="11" name="TextBox 10"/>
+          <p:cNvPr id="9" name="TextBox 8"/>
           <p:cNvSpPr txBox="1"/>
           <p:nvPr/>
         </p:nvSpPr>
@@ -9615,7 +8550,7 @@
       </p:sp>
       <p:pic>
         <p:nvPicPr>
-          <p:cNvPr id="12" name="Picture 11" descr="46595cae23e895d4.png"/>
+          <p:cNvPr id="10" name="Picture 9" descr="46595cae23e895d4.png"/>
           <p:cNvPicPr>
             <a:picLocks noChangeAspect="1"/>
           </p:cNvPicPr>
@@ -9760,44 +8695,9 @@
           </a:fontRef>
         </p:style>
       </p:cxnSp>
-      <p:sp>
-        <p:nvSpPr>
-          <p:cNvPr id="5" name="TextBox 4"/>
-          <p:cNvSpPr txBox="1"/>
-          <p:nvPr/>
-        </p:nvSpPr>
-        <p:spPr>
-          <a:xfrm>
-            <a:off x="777240" y="1261872"/>
-            <a:ext cx="10607040" cy="310896"/>
-          </a:xfrm>
-          <a:prstGeom prst="rect">
-            <a:avLst/>
-          </a:prstGeom>
-          <a:noFill/>
-        </p:spPr>
-        <p:txBody>
-          <a:bodyPr wrap="square" lIns="45720" rIns="45720" tIns="18288" bIns="18288" anchor="t">
-            <a:spAutoFit/>
-          </a:bodyPr>
-          <a:lstStyle/>
-          <a:p>
-            <a:pPr algn="l"/>
-            <a:r>
-              <a:rPr sz="1700" b="0" i="1">
-                <a:solidFill>
-                  <a:srgbClr val="6B6B6B"/>
-                </a:solidFill>
-                <a:latin typeface="Century Schoolbook"/>
-              </a:rPr>
-              <a:t>Boards up on three.</a:t>
-            </a:r>
-          </a:p>
-        </p:txBody>
-      </p:sp>
       <p:cxnSp>
         <p:nvCxnSpPr>
-          <p:cNvPr id="6" name="Connector 5"/>
+          <p:cNvPr id="5" name="Connector 4"/>
           <p:cNvCxnSpPr/>
           <p:nvPr/>
         </p:nvCxnSpPr>
@@ -9832,7 +8732,7 @@
       </p:cxnSp>
       <p:sp>
         <p:nvSpPr>
-          <p:cNvPr id="7" name="TextBox 6"/>
+          <p:cNvPr id="6" name="TextBox 5"/>
           <p:cNvSpPr txBox="1"/>
           <p:nvPr/>
         </p:nvSpPr>
@@ -9867,7 +8767,7 @@
       </p:sp>
       <p:sp>
         <p:nvSpPr>
-          <p:cNvPr id="8" name="TextBox 7"/>
+          <p:cNvPr id="7" name="TextBox 6"/>
           <p:cNvSpPr txBox="1"/>
           <p:nvPr/>
         </p:nvSpPr>
@@ -9902,7 +8802,7 @@
       </p:sp>
       <p:pic>
         <p:nvPicPr>
-          <p:cNvPr id="9" name="Picture 8" descr="fba9bd108908810b.png"/>
+          <p:cNvPr id="8" name="Picture 7" descr="fba9bd108908810b.png"/>
           <p:cNvPicPr>
             <a:picLocks noChangeAspect="1"/>
           </p:cNvPicPr>
@@ -9926,7 +8826,7 @@
       </p:pic>
       <p:sp>
         <p:nvSpPr>
-          <p:cNvPr id="10" name="TextBox 9"/>
+          <p:cNvPr id="9" name="TextBox 8"/>
           <p:cNvSpPr txBox="1"/>
           <p:nvPr/>
         </p:nvSpPr>
@@ -9961,7 +8861,7 @@
       </p:sp>
       <p:sp>
         <p:nvSpPr>
-          <p:cNvPr id="11" name="TextBox 10"/>
+          <p:cNvPr id="10" name="TextBox 9"/>
           <p:cNvSpPr txBox="1"/>
           <p:nvPr/>
         </p:nvSpPr>
@@ -10014,7 +8914,7 @@
       </p:sp>
       <p:sp>
         <p:nvSpPr>
-          <p:cNvPr id="12" name="TextBox 11"/>
+          <p:cNvPr id="11" name="TextBox 10"/>
           <p:cNvSpPr txBox="1"/>
           <p:nvPr/>
         </p:nvSpPr>
@@ -10067,7 +8967,7 @@
       </p:sp>
       <p:sp>
         <p:nvSpPr>
-          <p:cNvPr id="13" name="TextBox 12"/>
+          <p:cNvPr id="12" name="TextBox 11"/>
           <p:cNvSpPr txBox="1"/>
           <p:nvPr/>
         </p:nvSpPr>
@@ -10120,7 +9020,7 @@
       </p:sp>
       <p:sp>
         <p:nvSpPr>
-          <p:cNvPr id="14" name="TextBox 13"/>
+          <p:cNvPr id="13" name="TextBox 12"/>
           <p:cNvSpPr txBox="1"/>
           <p:nvPr/>
         </p:nvSpPr>
@@ -10173,7 +9073,7 @@
       </p:sp>
       <p:sp>
         <p:nvSpPr>
-          <p:cNvPr id="15" name="TextBox 14"/>
+          <p:cNvPr id="14" name="TextBox 13"/>
           <p:cNvSpPr txBox="1"/>
           <p:nvPr/>
         </p:nvSpPr>
@@ -10329,44 +9229,9 @@
           </a:fontRef>
         </p:style>
       </p:cxnSp>
-      <p:sp>
-        <p:nvSpPr>
-          <p:cNvPr id="5" name="TextBox 4"/>
-          <p:cNvSpPr txBox="1"/>
-          <p:nvPr/>
-        </p:nvSpPr>
-        <p:spPr>
-          <a:xfrm>
-            <a:off x="777240" y="1261872"/>
-            <a:ext cx="10607040" cy="310896"/>
-          </a:xfrm>
-          <a:prstGeom prst="rect">
-            <a:avLst/>
-          </a:prstGeom>
-          <a:noFill/>
-        </p:spPr>
-        <p:txBody>
-          <a:bodyPr wrap="square" lIns="45720" rIns="45720" tIns="18288" bIns="18288" anchor="t">
-            <a:spAutoFit/>
-          </a:bodyPr>
-          <a:lstStyle/>
-          <a:p>
-            <a:pPr algn="l"/>
-            <a:r>
-              <a:rPr sz="1700" b="0" i="1">
-                <a:solidFill>
-                  <a:srgbClr val="6B6B6B"/>
-                </a:solidFill>
-                <a:latin typeface="Century Schoolbook"/>
-              </a:rPr>
-              <a:t>Answer.</a:t>
-            </a:r>
-          </a:p>
-        </p:txBody>
-      </p:sp>
       <p:cxnSp>
         <p:nvCxnSpPr>
-          <p:cNvPr id="6" name="Connector 5"/>
+          <p:cNvPr id="5" name="Connector 4"/>
           <p:cNvCxnSpPr/>
           <p:nvPr/>
         </p:nvCxnSpPr>
@@ -10401,7 +9266,7 @@
       </p:cxnSp>
       <p:sp>
         <p:nvSpPr>
-          <p:cNvPr id="7" name="TextBox 6"/>
+          <p:cNvPr id="6" name="TextBox 5"/>
           <p:cNvSpPr txBox="1"/>
           <p:nvPr/>
         </p:nvSpPr>
@@ -10436,7 +9301,7 @@
       </p:sp>
       <p:sp>
         <p:nvSpPr>
-          <p:cNvPr id="8" name="TextBox 7"/>
+          <p:cNvPr id="7" name="TextBox 6"/>
           <p:cNvSpPr txBox="1"/>
           <p:nvPr/>
         </p:nvSpPr>
@@ -10471,7 +9336,7 @@
       </p:sp>
       <p:pic>
         <p:nvPicPr>
-          <p:cNvPr id="9" name="Picture 8" descr="fc3793d359b5cfff.png"/>
+          <p:cNvPr id="8" name="Picture 7" descr="fc3793d359b5cfff.png"/>
           <p:cNvPicPr>
             <a:picLocks noChangeAspect="1"/>
           </p:cNvPicPr>
@@ -10495,7 +9360,7 @@
       </p:pic>
       <p:sp>
         <p:nvSpPr>
-          <p:cNvPr id="10" name="TextBox 9"/>
+          <p:cNvPr id="9" name="TextBox 8"/>
           <p:cNvSpPr txBox="1"/>
           <p:nvPr/>
         </p:nvSpPr>
@@ -10530,7 +9395,7 @@
       </p:sp>
       <p:sp>
         <p:nvSpPr>
-          <p:cNvPr id="11" name="TextBox 10"/>
+          <p:cNvPr id="10" name="TextBox 9"/>
           <p:cNvSpPr txBox="1"/>
           <p:nvPr/>
         </p:nvSpPr>
@@ -10583,7 +9448,7 @@
       </p:sp>
       <p:sp>
         <p:nvSpPr>
-          <p:cNvPr id="12" name="TextBox 11"/>
+          <p:cNvPr id="11" name="TextBox 10"/>
           <p:cNvSpPr txBox="1"/>
           <p:nvPr/>
         </p:nvSpPr>
@@ -10636,7 +9501,7 @@
       </p:sp>
       <p:sp>
         <p:nvSpPr>
-          <p:cNvPr id="13" name="TextBox 12"/>
+          <p:cNvPr id="12" name="TextBox 11"/>
           <p:cNvSpPr txBox="1"/>
           <p:nvPr/>
         </p:nvSpPr>
@@ -10689,7 +9554,7 @@
       </p:sp>
       <p:sp>
         <p:nvSpPr>
-          <p:cNvPr id="14" name="TextBox 13"/>
+          <p:cNvPr id="13" name="TextBox 12"/>
           <p:cNvSpPr txBox="1"/>
           <p:nvPr/>
         </p:nvSpPr>
@@ -10742,7 +9607,7 @@
       </p:sp>
       <p:sp>
         <p:nvSpPr>
-          <p:cNvPr id="15" name="TextBox 14"/>
+          <p:cNvPr id="14" name="TextBox 13"/>
           <p:cNvSpPr txBox="1"/>
           <p:nvPr/>
         </p:nvSpPr>
@@ -10907,44 +9772,9 @@
           </a:fontRef>
         </p:style>
       </p:cxnSp>
-      <p:sp>
-        <p:nvSpPr>
-          <p:cNvPr id="5" name="TextBox 4"/>
-          <p:cNvSpPr txBox="1"/>
-          <p:nvPr/>
-        </p:nvSpPr>
-        <p:spPr>
-          <a:xfrm>
-            <a:off x="777240" y="1261872"/>
-            <a:ext cx="10607040" cy="310896"/>
-          </a:xfrm>
-          <a:prstGeom prst="rect">
-            <a:avLst/>
-          </a:prstGeom>
-          <a:noFill/>
-        </p:spPr>
-        <p:txBody>
-          <a:bodyPr wrap="square" lIns="45720" rIns="45720" tIns="18288" bIns="18288" anchor="t">
-            <a:spAutoFit/>
-          </a:bodyPr>
-          <a:lstStyle/>
-          <a:p>
-            <a:pPr algn="l"/>
-            <a:r>
-              <a:rPr sz="1700" b="0" i="1">
-                <a:solidFill>
-                  <a:srgbClr val="6B6B6B"/>
-                </a:solidFill>
-                <a:latin typeface="Century Schoolbook"/>
-              </a:rPr>
-              <a:t>Boards up on three.</a:t>
-            </a:r>
-          </a:p>
-        </p:txBody>
-      </p:sp>
       <p:cxnSp>
         <p:nvCxnSpPr>
-          <p:cNvPr id="6" name="Connector 5"/>
+          <p:cNvPr id="5" name="Connector 4"/>
           <p:cNvCxnSpPr/>
           <p:nvPr/>
         </p:nvCxnSpPr>
@@ -10979,7 +9809,7 @@
       </p:cxnSp>
       <p:sp>
         <p:nvSpPr>
-          <p:cNvPr id="7" name="TextBox 6"/>
+          <p:cNvPr id="6" name="TextBox 5"/>
           <p:cNvSpPr txBox="1"/>
           <p:nvPr/>
         </p:nvSpPr>
@@ -11014,7 +9844,7 @@
       </p:sp>
       <p:sp>
         <p:nvSpPr>
-          <p:cNvPr id="8" name="TextBox 7"/>
+          <p:cNvPr id="7" name="TextBox 6"/>
           <p:cNvSpPr txBox="1"/>
           <p:nvPr/>
         </p:nvSpPr>
@@ -11049,7 +9879,7 @@
       </p:sp>
       <p:pic>
         <p:nvPicPr>
-          <p:cNvPr id="9" name="Picture 8" descr="806ea7b0be26cfa4.png"/>
+          <p:cNvPr id="8" name="Picture 7" descr="806ea7b0be26cfa4.png"/>
           <p:cNvPicPr>
             <a:picLocks noChangeAspect="1"/>
           </p:cNvPicPr>
@@ -11073,7 +9903,7 @@
       </p:pic>
       <p:sp>
         <p:nvSpPr>
-          <p:cNvPr id="10" name="TextBox 9"/>
+          <p:cNvPr id="9" name="TextBox 8"/>
           <p:cNvSpPr txBox="1"/>
           <p:nvPr/>
         </p:nvSpPr>
@@ -11108,7 +9938,7 @@
       </p:sp>
       <p:sp>
         <p:nvSpPr>
-          <p:cNvPr id="11" name="TextBox 10"/>
+          <p:cNvPr id="10" name="TextBox 9"/>
           <p:cNvSpPr txBox="1"/>
           <p:nvPr/>
         </p:nvSpPr>
@@ -11161,7 +9991,7 @@
       </p:sp>
       <p:sp>
         <p:nvSpPr>
-          <p:cNvPr id="12" name="TextBox 11"/>
+          <p:cNvPr id="11" name="TextBox 10"/>
           <p:cNvSpPr txBox="1"/>
           <p:nvPr/>
         </p:nvSpPr>
@@ -11214,7 +10044,7 @@
       </p:sp>
       <p:sp>
         <p:nvSpPr>
-          <p:cNvPr id="13" name="TextBox 12"/>
+          <p:cNvPr id="12" name="TextBox 11"/>
           <p:cNvSpPr txBox="1"/>
           <p:nvPr/>
         </p:nvSpPr>
@@ -11267,7 +10097,7 @@
       </p:sp>
       <p:sp>
         <p:nvSpPr>
-          <p:cNvPr id="14" name="TextBox 13"/>
+          <p:cNvPr id="13" name="TextBox 12"/>
           <p:cNvSpPr txBox="1"/>
           <p:nvPr/>
         </p:nvSpPr>
@@ -11320,7 +10150,7 @@
       </p:sp>
       <p:sp>
         <p:nvSpPr>
-          <p:cNvPr id="15" name="TextBox 14"/>
+          <p:cNvPr id="14" name="TextBox 13"/>
           <p:cNvSpPr txBox="1"/>
           <p:nvPr/>
         </p:nvSpPr>
@@ -11476,44 +10306,9 @@
           </a:fontRef>
         </p:style>
       </p:cxnSp>
-      <p:sp>
-        <p:nvSpPr>
-          <p:cNvPr id="5" name="TextBox 4"/>
-          <p:cNvSpPr txBox="1"/>
-          <p:nvPr/>
-        </p:nvSpPr>
-        <p:spPr>
-          <a:xfrm>
-            <a:off x="777240" y="1261872"/>
-            <a:ext cx="10607040" cy="310896"/>
-          </a:xfrm>
-          <a:prstGeom prst="rect">
-            <a:avLst/>
-          </a:prstGeom>
-          <a:noFill/>
-        </p:spPr>
-        <p:txBody>
-          <a:bodyPr wrap="square" lIns="45720" rIns="45720" tIns="18288" bIns="18288" anchor="t">
-            <a:spAutoFit/>
-          </a:bodyPr>
-          <a:lstStyle/>
-          <a:p>
-            <a:pPr algn="l"/>
-            <a:r>
-              <a:rPr sz="1700" b="0" i="1">
-                <a:solidFill>
-                  <a:srgbClr val="6B6B6B"/>
-                </a:solidFill>
-                <a:latin typeface="Century Schoolbook"/>
-              </a:rPr>
-              <a:t>Answer.</a:t>
-            </a:r>
-          </a:p>
-        </p:txBody>
-      </p:sp>
       <p:cxnSp>
         <p:nvCxnSpPr>
-          <p:cNvPr id="6" name="Connector 5"/>
+          <p:cNvPr id="5" name="Connector 4"/>
           <p:cNvCxnSpPr/>
           <p:nvPr/>
         </p:nvCxnSpPr>
@@ -11548,7 +10343,7 @@
       </p:cxnSp>
       <p:sp>
         <p:nvSpPr>
-          <p:cNvPr id="7" name="TextBox 6"/>
+          <p:cNvPr id="6" name="TextBox 5"/>
           <p:cNvSpPr txBox="1"/>
           <p:nvPr/>
         </p:nvSpPr>
@@ -11583,7 +10378,7 @@
       </p:sp>
       <p:sp>
         <p:nvSpPr>
-          <p:cNvPr id="8" name="TextBox 7"/>
+          <p:cNvPr id="7" name="TextBox 6"/>
           <p:cNvSpPr txBox="1"/>
           <p:nvPr/>
         </p:nvSpPr>
@@ -11618,7 +10413,7 @@
       </p:sp>
       <p:pic>
         <p:nvPicPr>
-          <p:cNvPr id="9" name="Picture 8" descr="0fac146190426fe8.png"/>
+          <p:cNvPr id="8" name="Picture 7" descr="0fac146190426fe8.png"/>
           <p:cNvPicPr>
             <a:picLocks noChangeAspect="1"/>
           </p:cNvPicPr>
@@ -11642,7 +10437,7 @@
       </p:pic>
       <p:sp>
         <p:nvSpPr>
-          <p:cNvPr id="10" name="TextBox 9"/>
+          <p:cNvPr id="9" name="TextBox 8"/>
           <p:cNvSpPr txBox="1"/>
           <p:nvPr/>
         </p:nvSpPr>
@@ -11677,7 +10472,7 @@
       </p:sp>
       <p:sp>
         <p:nvSpPr>
-          <p:cNvPr id="11" name="TextBox 10"/>
+          <p:cNvPr id="10" name="TextBox 9"/>
           <p:cNvSpPr txBox="1"/>
           <p:nvPr/>
         </p:nvSpPr>
@@ -11730,7 +10525,7 @@
       </p:sp>
       <p:sp>
         <p:nvSpPr>
-          <p:cNvPr id="12" name="TextBox 11"/>
+          <p:cNvPr id="11" name="TextBox 10"/>
           <p:cNvSpPr txBox="1"/>
           <p:nvPr/>
         </p:nvSpPr>
@@ -11783,7 +10578,7 @@
       </p:sp>
       <p:sp>
         <p:nvSpPr>
-          <p:cNvPr id="13" name="TextBox 12"/>
+          <p:cNvPr id="12" name="TextBox 11"/>
           <p:cNvSpPr txBox="1"/>
           <p:nvPr/>
         </p:nvSpPr>
@@ -11836,7 +10631,7 @@
       </p:sp>
       <p:sp>
         <p:nvSpPr>
-          <p:cNvPr id="14" name="TextBox 13"/>
+          <p:cNvPr id="13" name="TextBox 12"/>
           <p:cNvSpPr txBox="1"/>
           <p:nvPr/>
         </p:nvSpPr>
@@ -11889,7 +10684,7 @@
       </p:sp>
       <p:sp>
         <p:nvSpPr>
-          <p:cNvPr id="15" name="TextBox 14"/>
+          <p:cNvPr id="14" name="TextBox 13"/>
           <p:cNvSpPr txBox="1"/>
           <p:nvPr/>
         </p:nvSpPr>
@@ -12054,44 +10849,9 @@
           </a:fontRef>
         </p:style>
       </p:cxnSp>
-      <p:sp>
-        <p:nvSpPr>
-          <p:cNvPr id="5" name="TextBox 4"/>
-          <p:cNvSpPr txBox="1"/>
-          <p:nvPr/>
-        </p:nvSpPr>
-        <p:spPr>
-          <a:xfrm>
-            <a:off x="777240" y="1261872"/>
-            <a:ext cx="10607040" cy="310896"/>
-          </a:xfrm>
-          <a:prstGeom prst="rect">
-            <a:avLst/>
-          </a:prstGeom>
-          <a:noFill/>
-        </p:spPr>
-        <p:txBody>
-          <a:bodyPr wrap="square" lIns="45720" rIns="45720" tIns="18288" bIns="18288" anchor="t">
-            <a:spAutoFit/>
-          </a:bodyPr>
-          <a:lstStyle/>
-          <a:p>
-            <a:pPr algn="l"/>
-            <a:r>
-              <a:rPr sz="1700" b="0" i="1">
-                <a:solidFill>
-                  <a:srgbClr val="6B6B6B"/>
-                </a:solidFill>
-                <a:latin typeface="Century Schoolbook"/>
-              </a:rPr>
-              <a:t>Boards up on three.</a:t>
-            </a:r>
-          </a:p>
-        </p:txBody>
-      </p:sp>
       <p:cxnSp>
         <p:nvCxnSpPr>
-          <p:cNvPr id="6" name="Connector 5"/>
+          <p:cNvPr id="5" name="Connector 4"/>
           <p:cNvCxnSpPr/>
           <p:nvPr/>
         </p:nvCxnSpPr>
@@ -12126,7 +10886,7 @@
       </p:cxnSp>
       <p:sp>
         <p:nvSpPr>
-          <p:cNvPr id="7" name="TextBox 6"/>
+          <p:cNvPr id="6" name="TextBox 5"/>
           <p:cNvSpPr txBox="1"/>
           <p:nvPr/>
         </p:nvSpPr>
@@ -12161,7 +10921,7 @@
       </p:sp>
       <p:sp>
         <p:nvSpPr>
-          <p:cNvPr id="8" name="TextBox 7"/>
+          <p:cNvPr id="7" name="TextBox 6"/>
           <p:cNvSpPr txBox="1"/>
           <p:nvPr/>
         </p:nvSpPr>
@@ -12196,7 +10956,7 @@
       </p:sp>
       <p:pic>
         <p:nvPicPr>
-          <p:cNvPr id="9" name="Picture 8" descr="80e874aaffdac41d.png"/>
+          <p:cNvPr id="8" name="Picture 7" descr="80e874aaffdac41d.png"/>
           <p:cNvPicPr>
             <a:picLocks noChangeAspect="1"/>
           </p:cNvPicPr>
@@ -12220,7 +10980,7 @@
       </p:pic>
       <p:sp>
         <p:nvSpPr>
-          <p:cNvPr id="10" name="TextBox 9"/>
+          <p:cNvPr id="9" name="TextBox 8"/>
           <p:cNvSpPr txBox="1"/>
           <p:nvPr/>
         </p:nvSpPr>
@@ -12249,41 +11009,6 @@
                 <a:latin typeface="Century Schoolbook"/>
               </a:rPr>
               <a:t>Answer it.</a:t>
-            </a:r>
-          </a:p>
-        </p:txBody>
-      </p:sp>
-      <p:sp>
-        <p:nvSpPr>
-          <p:cNvPr id="11" name="TextBox 10"/>
-          <p:cNvSpPr txBox="1"/>
-          <p:nvPr/>
-        </p:nvSpPr>
-        <p:spPr>
-          <a:xfrm>
-            <a:off x="777240" y="4828032"/>
-            <a:ext cx="10607040" cy="365760"/>
-          </a:xfrm>
-          <a:prstGeom prst="rect">
-            <a:avLst/>
-          </a:prstGeom>
-          <a:noFill/>
-        </p:spPr>
-        <p:txBody>
-          <a:bodyPr wrap="square" lIns="45720" rIns="45720" tIns="18288" bIns="18288" anchor="t">
-            <a:spAutoFit/>
-          </a:bodyPr>
-          <a:lstStyle/>
-          <a:p>
-            <a:pPr algn="ctr"/>
-            <a:r>
-              <a:rPr sz="1900" b="0" i="1">
-                <a:solidFill>
-                  <a:srgbClr val="6B6B6B"/>
-                </a:solidFill>
-                <a:latin typeface="Century Schoolbook"/>
-              </a:rPr>
-              <a:t>Find the value.</a:t>
             </a:r>
           </a:p>
         </p:txBody>
@@ -12411,44 +11136,9 @@
           </a:fontRef>
         </p:style>
       </p:cxnSp>
-      <p:sp>
-        <p:nvSpPr>
-          <p:cNvPr id="5" name="TextBox 4"/>
-          <p:cNvSpPr txBox="1"/>
-          <p:nvPr/>
-        </p:nvSpPr>
-        <p:spPr>
-          <a:xfrm>
-            <a:off x="777240" y="1261872"/>
-            <a:ext cx="10607040" cy="310896"/>
-          </a:xfrm>
-          <a:prstGeom prst="rect">
-            <a:avLst/>
-          </a:prstGeom>
-          <a:noFill/>
-        </p:spPr>
-        <p:txBody>
-          <a:bodyPr wrap="square" lIns="45720" rIns="45720" tIns="18288" bIns="18288" anchor="t">
-            <a:spAutoFit/>
-          </a:bodyPr>
-          <a:lstStyle/>
-          <a:p>
-            <a:pPr algn="l"/>
-            <a:r>
-              <a:rPr sz="1700" b="0" i="1">
-                <a:solidFill>
-                  <a:srgbClr val="6B6B6B"/>
-                </a:solidFill>
-                <a:latin typeface="Century Schoolbook"/>
-              </a:rPr>
-              <a:t>Answer.</a:t>
-            </a:r>
-          </a:p>
-        </p:txBody>
-      </p:sp>
       <p:cxnSp>
         <p:nvCxnSpPr>
-          <p:cNvPr id="6" name="Connector 5"/>
+          <p:cNvPr id="5" name="Connector 4"/>
           <p:cNvCxnSpPr/>
           <p:nvPr/>
         </p:nvCxnSpPr>
@@ -12483,7 +11173,7 @@
       </p:cxnSp>
       <p:sp>
         <p:nvSpPr>
-          <p:cNvPr id="7" name="TextBox 6"/>
+          <p:cNvPr id="6" name="TextBox 5"/>
           <p:cNvSpPr txBox="1"/>
           <p:nvPr/>
         </p:nvSpPr>
@@ -12518,7 +11208,7 @@
       </p:sp>
       <p:sp>
         <p:nvSpPr>
-          <p:cNvPr id="8" name="TextBox 7"/>
+          <p:cNvPr id="7" name="TextBox 6"/>
           <p:cNvSpPr txBox="1"/>
           <p:nvPr/>
         </p:nvSpPr>
@@ -12553,7 +11243,7 @@
       </p:sp>
       <p:pic>
         <p:nvPicPr>
-          <p:cNvPr id="9" name="Picture 8" descr="5b98b74270202968.png"/>
+          <p:cNvPr id="8" name="Picture 7" descr="5b98b74270202968.png"/>
           <p:cNvPicPr>
             <a:picLocks noChangeAspect="1"/>
           </p:cNvPicPr>
@@ -12577,60 +11267,7 @@
       </p:pic>
       <p:sp>
         <p:nvSpPr>
-          <p:cNvPr id="10" name="TextBox 9"/>
-          <p:cNvSpPr txBox="1"/>
-          <p:nvPr/>
-        </p:nvSpPr>
-        <p:spPr>
-          <a:xfrm>
-            <a:off x="1828800" y="2895599"/>
-            <a:ext cx="8503920" cy="548640"/>
-          </a:xfrm>
-          <a:prstGeom prst="rect">
-            <a:avLst/>
-          </a:prstGeom>
-          <a:noFill/>
-        </p:spPr>
-        <p:txBody>
-          <a:bodyPr wrap="square" lIns="45720" rIns="45720" tIns="18288" bIns="18288" anchor="t">
-            <a:spAutoFit/>
-          </a:bodyPr>
-          <a:lstStyle/>
-          <a:p>
-            <a:pPr algn="ctr"/>
-            <a:r>
-              <a:rPr sz="2400" b="0" i="0">
-                <a:solidFill>
-                  <a:srgbClr val="6B6B6B"/>
-                </a:solidFill>
-                <a:latin typeface="Century Schoolbook"/>
-              </a:rPr>
-              <a:t>(−3)</a:t>
-            </a:r>
-            <a:r>
-              <a:rPr sz="2400" b="0" i="0" baseline="30000">
-                <a:solidFill>
-                  <a:srgbClr val="6B6B6B"/>
-                </a:solidFill>
-                <a:latin typeface="Century Schoolbook"/>
-              </a:rPr>
-              <a:t>3</a:t>
-            </a:r>
-            <a:r>
-              <a:rPr sz="2400" b="0" i="0">
-                <a:solidFill>
-                  <a:srgbClr val="6B6B6B"/>
-                </a:solidFill>
-                <a:latin typeface="Century Schoolbook"/>
-              </a:rPr>
-              <a:t> — three negative factors</a:t>
-            </a:r>
-          </a:p>
-        </p:txBody>
-      </p:sp>
-      <p:sp>
-        <p:nvSpPr>
-          <p:cNvPr id="11" name="TextBox 10"/>
+          <p:cNvPr id="9" name="TextBox 8"/>
           <p:cNvSpPr txBox="1"/>
           <p:nvPr/>
         </p:nvSpPr>
@@ -12786,44 +11423,9 @@
           </a:fontRef>
         </p:style>
       </p:cxnSp>
-      <p:sp>
-        <p:nvSpPr>
-          <p:cNvPr id="5" name="TextBox 4"/>
-          <p:cNvSpPr txBox="1"/>
-          <p:nvPr/>
-        </p:nvSpPr>
-        <p:spPr>
-          <a:xfrm>
-            <a:off x="777240" y="1261872"/>
-            <a:ext cx="10607040" cy="310896"/>
-          </a:xfrm>
-          <a:prstGeom prst="rect">
-            <a:avLst/>
-          </a:prstGeom>
-          <a:noFill/>
-        </p:spPr>
-        <p:txBody>
-          <a:bodyPr wrap="square" lIns="45720" rIns="45720" tIns="18288" bIns="18288" anchor="t">
-            <a:spAutoFit/>
-          </a:bodyPr>
-          <a:lstStyle/>
-          <a:p>
-            <a:pPr algn="l"/>
-            <a:r>
-              <a:rPr sz="1700" b="0" i="1">
-                <a:solidFill>
-                  <a:srgbClr val="6B6B6B"/>
-                </a:solidFill>
-                <a:latin typeface="Century Schoolbook"/>
-              </a:rPr>
-              <a:t>Answers.</a:t>
-            </a:r>
-          </a:p>
-        </p:txBody>
-      </p:sp>
       <p:cxnSp>
         <p:nvCxnSpPr>
-          <p:cNvPr id="6" name="Connector 5"/>
+          <p:cNvPr id="5" name="Connector 4"/>
           <p:cNvCxnSpPr/>
           <p:nvPr/>
         </p:nvCxnSpPr>
@@ -12858,7 +11460,7 @@
       </p:cxnSp>
       <p:sp>
         <p:nvSpPr>
-          <p:cNvPr id="7" name="TextBox 6"/>
+          <p:cNvPr id="6" name="TextBox 5"/>
           <p:cNvSpPr txBox="1"/>
           <p:nvPr/>
         </p:nvSpPr>
@@ -12893,7 +11495,7 @@
       </p:sp>
       <p:sp>
         <p:nvSpPr>
-          <p:cNvPr id="8" name="TextBox 7"/>
+          <p:cNvPr id="7" name="TextBox 6"/>
           <p:cNvSpPr txBox="1"/>
           <p:nvPr/>
         </p:nvSpPr>
@@ -12928,13 +11530,13 @@
       </p:sp>
       <p:sp>
         <p:nvSpPr>
-          <p:cNvPr id="9" name="TextBox 8"/>
-          <p:cNvSpPr txBox="1"/>
-          <p:nvPr/>
-        </p:nvSpPr>
-        <p:spPr>
-          <a:xfrm>
-            <a:off x="1874519" y="1760220"/>
+          <p:cNvPr id="8" name="TextBox 7"/>
+          <p:cNvSpPr txBox="1"/>
+          <p:nvPr/>
+        </p:nvSpPr>
+        <p:spPr>
+          <a:xfrm>
+            <a:off x="1874519" y="1440180"/>
             <a:ext cx="720605" cy="457200"/>
           </a:xfrm>
           <a:prstGeom prst="rect">
@@ -12963,7 +11565,7 @@
       </p:sp>
       <p:pic>
         <p:nvPicPr>
-          <p:cNvPr id="10" name="Picture 9" descr="0ae0cbe9590d6d51.png"/>
+          <p:cNvPr id="9" name="Picture 8" descr="0ae0cbe9590d6d51.png"/>
           <p:cNvPicPr>
             <a:picLocks noChangeAspect="1"/>
           </p:cNvPicPr>
@@ -12977,7 +11579,7 @@
         </p:blipFill>
         <p:spPr>
           <a:xfrm>
-            <a:off x="2457965" y="1784604"/>
+            <a:off x="2457965" y="1464564"/>
             <a:ext cx="688848" cy="408432"/>
           </a:xfrm>
           <a:prstGeom prst="rect">
@@ -12987,13 +11589,13 @@
       </p:pic>
       <p:sp>
         <p:nvSpPr>
-          <p:cNvPr id="11" name="TextBox 10"/>
-          <p:cNvSpPr txBox="1"/>
-          <p:nvPr/>
-        </p:nvSpPr>
-        <p:spPr>
-          <a:xfrm>
-            <a:off x="3695453" y="1760220"/>
+          <p:cNvPr id="10" name="TextBox 9"/>
+          <p:cNvSpPr txBox="1"/>
+          <p:nvPr/>
+        </p:nvSpPr>
+        <p:spPr>
+          <a:xfrm>
+            <a:off x="3695453" y="1440180"/>
             <a:ext cx="388052" cy="457200"/>
           </a:xfrm>
           <a:prstGeom prst="rect">
@@ -13022,13 +11624,13 @@
       </p:sp>
       <p:sp>
         <p:nvSpPr>
-          <p:cNvPr id="12" name="TextBox 11"/>
-          <p:cNvSpPr txBox="1"/>
-          <p:nvPr/>
-        </p:nvSpPr>
-        <p:spPr>
-          <a:xfrm>
-            <a:off x="1874519" y="2372868"/>
+          <p:cNvPr id="11" name="TextBox 10"/>
+          <p:cNvSpPr txBox="1"/>
+          <p:nvPr/>
+        </p:nvSpPr>
+        <p:spPr>
+          <a:xfrm>
+            <a:off x="1874519" y="2052828"/>
             <a:ext cx="6163986" cy="457200"/>
           </a:xfrm>
           <a:prstGeom prst="rect">
@@ -13057,7 +11659,7 @@
       </p:sp>
       <p:pic>
         <p:nvPicPr>
-          <p:cNvPr id="13" name="Picture 12" descr="bab7398c9b21b51a.png"/>
+          <p:cNvPr id="12" name="Picture 11" descr="bab7398c9b21b51a.png"/>
           <p:cNvPicPr>
             <a:picLocks noChangeAspect="1"/>
           </p:cNvPicPr>
@@ -13071,7 +11673,7 @@
         </p:blipFill>
         <p:spPr>
           <a:xfrm>
-            <a:off x="7901346" y="2397252"/>
+            <a:off x="7901346" y="2077212"/>
             <a:ext cx="688848" cy="408432"/>
           </a:xfrm>
           <a:prstGeom prst="rect">
@@ -13081,13 +11683,13 @@
       </p:pic>
       <p:sp>
         <p:nvSpPr>
-          <p:cNvPr id="14" name="TextBox 13"/>
-          <p:cNvSpPr txBox="1"/>
-          <p:nvPr/>
-        </p:nvSpPr>
-        <p:spPr>
-          <a:xfrm>
-            <a:off x="8590194" y="2372868"/>
+          <p:cNvPr id="13" name="TextBox 12"/>
+          <p:cNvSpPr txBox="1"/>
+          <p:nvPr/>
+        </p:nvSpPr>
+        <p:spPr>
+          <a:xfrm>
+            <a:off x="8590194" y="2052828"/>
             <a:ext cx="347771" cy="457200"/>
           </a:xfrm>
           <a:prstGeom prst="rect">
@@ -13116,13 +11718,13 @@
       </p:sp>
       <p:sp>
         <p:nvSpPr>
-          <p:cNvPr id="15" name="TextBox 14"/>
-          <p:cNvSpPr txBox="1"/>
-          <p:nvPr/>
-        </p:nvSpPr>
-        <p:spPr>
-          <a:xfrm>
-            <a:off x="9349446" y="2372868"/>
+          <p:cNvPr id="14" name="TextBox 13"/>
+          <p:cNvSpPr txBox="1"/>
+          <p:nvPr/>
+        </p:nvSpPr>
+        <p:spPr>
+          <a:xfrm>
+            <a:off x="9349446" y="2052828"/>
             <a:ext cx="1351321" cy="457200"/>
           </a:xfrm>
           <a:prstGeom prst="rect">
@@ -13151,13 +11753,13 @@
       </p:sp>
       <p:sp>
         <p:nvSpPr>
-          <p:cNvPr id="16" name="TextBox 15"/>
-          <p:cNvSpPr txBox="1"/>
-          <p:nvPr/>
-        </p:nvSpPr>
-        <p:spPr>
-          <a:xfrm>
-            <a:off x="1874519" y="2985516"/>
+          <p:cNvPr id="15" name="TextBox 14"/>
+          <p:cNvSpPr txBox="1"/>
+          <p:nvPr/>
+        </p:nvSpPr>
+        <p:spPr>
+          <a:xfrm>
+            <a:off x="1874519" y="2665476"/>
             <a:ext cx="1652008" cy="457200"/>
           </a:xfrm>
           <a:prstGeom prst="rect">
@@ -13186,7 +11788,7 @@
       </p:sp>
       <p:pic>
         <p:nvPicPr>
-          <p:cNvPr id="17" name="Picture 16" descr="d836f789d7988873.png"/>
+          <p:cNvPr id="16" name="Picture 15" descr="d836f789d7988873.png"/>
           <p:cNvPicPr>
             <a:picLocks noChangeAspect="1"/>
           </p:cNvPicPr>
@@ -13200,7 +11802,7 @@
         </p:blipFill>
         <p:spPr>
           <a:xfrm>
-            <a:off x="3389368" y="3098292"/>
+            <a:off x="3389368" y="2778252"/>
             <a:ext cx="1402080" cy="231648"/>
           </a:xfrm>
           <a:prstGeom prst="rect">
@@ -13210,13 +11812,13 @@
       </p:pic>
       <p:sp>
         <p:nvSpPr>
-          <p:cNvPr id="18" name="TextBox 17"/>
-          <p:cNvSpPr txBox="1"/>
-          <p:nvPr/>
-        </p:nvSpPr>
-        <p:spPr>
-          <a:xfrm>
-            <a:off x="5340088" y="2985516"/>
+          <p:cNvPr id="17" name="TextBox 16"/>
+          <p:cNvSpPr txBox="1"/>
+          <p:nvPr/>
+        </p:nvSpPr>
+        <p:spPr>
+          <a:xfrm>
+            <a:off x="5340088" y="2665476"/>
             <a:ext cx="942623" cy="457200"/>
           </a:xfrm>
           <a:prstGeom prst="rect">
@@ -13245,13 +11847,13 @@
       </p:sp>
       <p:sp>
         <p:nvSpPr>
-          <p:cNvPr id="19" name="TextBox 18"/>
-          <p:cNvSpPr txBox="1"/>
-          <p:nvPr/>
-        </p:nvSpPr>
-        <p:spPr>
-          <a:xfrm>
-            <a:off x="1874519" y="3669792"/>
+          <p:cNvPr id="18" name="TextBox 17"/>
+          <p:cNvSpPr txBox="1"/>
+          <p:nvPr/>
+        </p:nvSpPr>
+        <p:spPr>
+          <a:xfrm>
+            <a:off x="1874519" y="3349752"/>
             <a:ext cx="2190435" cy="457200"/>
           </a:xfrm>
           <a:prstGeom prst="rect">
@@ -13280,7 +11882,7 @@
       </p:sp>
       <p:pic>
         <p:nvPicPr>
-          <p:cNvPr id="20" name="Picture 19" descr="ec4478436d606ed4.png"/>
+          <p:cNvPr id="19" name="Picture 18" descr="ec4478436d606ed4.png"/>
           <p:cNvPicPr>
             <a:picLocks noChangeAspect="1"/>
           </p:cNvPicPr>
@@ -13294,7 +11896,7 @@
         </p:blipFill>
         <p:spPr>
           <a:xfrm>
-            <a:off x="3927795" y="3621024"/>
+            <a:off x="3927795" y="3300984"/>
             <a:ext cx="637032" cy="554736"/>
           </a:xfrm>
           <a:prstGeom prst="rect">
@@ -13304,7 +11906,7 @@
       </p:pic>
       <p:pic>
         <p:nvPicPr>
-          <p:cNvPr id="21" name="Picture 20" descr="3a92952d92bb77ab.png"/>
+          <p:cNvPr id="20" name="Picture 19" descr="3a92952d92bb77ab.png"/>
           <p:cNvPicPr>
             <a:picLocks noChangeAspect="1"/>
           </p:cNvPicPr>
@@ -13318,7 +11920,7 @@
         </p:blipFill>
         <p:spPr>
           <a:xfrm>
-            <a:off x="5113467" y="3621024"/>
+            <a:off x="5113467" y="3300984"/>
             <a:ext cx="170688" cy="557784"/>
           </a:xfrm>
           <a:prstGeom prst="rect">
@@ -13449,44 +12051,9 @@
           </a:fontRef>
         </p:style>
       </p:cxnSp>
-      <p:sp>
-        <p:nvSpPr>
-          <p:cNvPr id="5" name="TextBox 4"/>
-          <p:cNvSpPr txBox="1"/>
-          <p:nvPr/>
-        </p:nvSpPr>
-        <p:spPr>
-          <a:xfrm>
-            <a:off x="777240" y="1261872"/>
-            <a:ext cx="10607040" cy="310896"/>
-          </a:xfrm>
-          <a:prstGeom prst="rect">
-            <a:avLst/>
-          </a:prstGeom>
-          <a:noFill/>
-        </p:spPr>
-        <p:txBody>
-          <a:bodyPr wrap="square" lIns="45720" rIns="45720" tIns="18288" bIns="18288" anchor="t">
-            <a:spAutoFit/>
-          </a:bodyPr>
-          <a:lstStyle/>
-          <a:p>
-            <a:pPr algn="l"/>
-            <a:r>
-              <a:rPr sz="1700" b="0" i="1">
-                <a:solidFill>
-                  <a:srgbClr val="6B6B6B"/>
-                </a:solidFill>
-                <a:latin typeface="Century Schoolbook"/>
-              </a:rPr>
-              <a:t>Boards up on three.</a:t>
-            </a:r>
-          </a:p>
-        </p:txBody>
-      </p:sp>
       <p:cxnSp>
         <p:nvCxnSpPr>
-          <p:cNvPr id="6" name="Connector 5"/>
+          <p:cNvPr id="5" name="Connector 4"/>
           <p:cNvCxnSpPr/>
           <p:nvPr/>
         </p:nvCxnSpPr>
@@ -13521,7 +12088,7 @@
       </p:cxnSp>
       <p:sp>
         <p:nvSpPr>
-          <p:cNvPr id="7" name="TextBox 6"/>
+          <p:cNvPr id="6" name="TextBox 5"/>
           <p:cNvSpPr txBox="1"/>
           <p:nvPr/>
         </p:nvSpPr>
@@ -13556,7 +12123,7 @@
       </p:sp>
       <p:sp>
         <p:nvSpPr>
-          <p:cNvPr id="8" name="TextBox 7"/>
+          <p:cNvPr id="7" name="TextBox 6"/>
           <p:cNvSpPr txBox="1"/>
           <p:nvPr/>
         </p:nvSpPr>
@@ -13591,7 +12158,7 @@
       </p:sp>
       <p:pic>
         <p:nvPicPr>
-          <p:cNvPr id="9" name="Picture 8" descr="f58654af4b9460c1.png"/>
+          <p:cNvPr id="8" name="Picture 7" descr="f58654af4b9460c1.png"/>
           <p:cNvPicPr>
             <a:picLocks noChangeAspect="1"/>
           </p:cNvPicPr>
@@ -13615,7 +12182,7 @@
       </p:pic>
       <p:sp>
         <p:nvSpPr>
-          <p:cNvPr id="10" name="TextBox 9"/>
+          <p:cNvPr id="9" name="TextBox 8"/>
           <p:cNvSpPr txBox="1"/>
           <p:nvPr/>
         </p:nvSpPr>
@@ -13644,41 +12211,6 @@
                 <a:latin typeface="Century Schoolbook"/>
               </a:rPr>
               <a:t>Answer it.</a:t>
-            </a:r>
-          </a:p>
-        </p:txBody>
-      </p:sp>
-      <p:sp>
-        <p:nvSpPr>
-          <p:cNvPr id="11" name="TextBox 10"/>
-          <p:cNvSpPr txBox="1"/>
-          <p:nvPr/>
-        </p:nvSpPr>
-        <p:spPr>
-          <a:xfrm>
-            <a:off x="777240" y="4828032"/>
-            <a:ext cx="10607040" cy="365760"/>
-          </a:xfrm>
-          <a:prstGeom prst="rect">
-            <a:avLst/>
-          </a:prstGeom>
-          <a:noFill/>
-        </p:spPr>
-        <p:txBody>
-          <a:bodyPr wrap="square" lIns="45720" rIns="45720" tIns="18288" bIns="18288" anchor="t">
-            <a:spAutoFit/>
-          </a:bodyPr>
-          <a:lstStyle/>
-          <a:p>
-            <a:pPr algn="ctr"/>
-            <a:r>
-              <a:rPr sz="1900" b="0" i="1">
-                <a:solidFill>
-                  <a:srgbClr val="6B6B6B"/>
-                </a:solidFill>
-                <a:latin typeface="Century Schoolbook"/>
-              </a:rPr>
-              <a:t>Find the value.</a:t>
             </a:r>
           </a:p>
         </p:txBody>
@@ -13806,44 +12338,9 @@
           </a:fontRef>
         </p:style>
       </p:cxnSp>
-      <p:sp>
-        <p:nvSpPr>
-          <p:cNvPr id="5" name="TextBox 4"/>
-          <p:cNvSpPr txBox="1"/>
-          <p:nvPr/>
-        </p:nvSpPr>
-        <p:spPr>
-          <a:xfrm>
-            <a:off x="777240" y="1261872"/>
-            <a:ext cx="10607040" cy="310896"/>
-          </a:xfrm>
-          <a:prstGeom prst="rect">
-            <a:avLst/>
-          </a:prstGeom>
-          <a:noFill/>
-        </p:spPr>
-        <p:txBody>
-          <a:bodyPr wrap="square" lIns="45720" rIns="45720" tIns="18288" bIns="18288" anchor="t">
-            <a:spAutoFit/>
-          </a:bodyPr>
-          <a:lstStyle/>
-          <a:p>
-            <a:pPr algn="l"/>
-            <a:r>
-              <a:rPr sz="1700" b="0" i="1">
-                <a:solidFill>
-                  <a:srgbClr val="6B6B6B"/>
-                </a:solidFill>
-                <a:latin typeface="Century Schoolbook"/>
-              </a:rPr>
-              <a:t>Answer.</a:t>
-            </a:r>
-          </a:p>
-        </p:txBody>
-      </p:sp>
       <p:cxnSp>
         <p:nvCxnSpPr>
-          <p:cNvPr id="6" name="Connector 5"/>
+          <p:cNvPr id="5" name="Connector 4"/>
           <p:cNvCxnSpPr/>
           <p:nvPr/>
         </p:nvCxnSpPr>
@@ -13878,7 +12375,7 @@
       </p:cxnSp>
       <p:sp>
         <p:nvSpPr>
-          <p:cNvPr id="7" name="TextBox 6"/>
+          <p:cNvPr id="6" name="TextBox 5"/>
           <p:cNvSpPr txBox="1"/>
           <p:nvPr/>
         </p:nvSpPr>
@@ -13913,7 +12410,7 @@
       </p:sp>
       <p:sp>
         <p:nvSpPr>
-          <p:cNvPr id="8" name="TextBox 7"/>
+          <p:cNvPr id="7" name="TextBox 6"/>
           <p:cNvSpPr txBox="1"/>
           <p:nvPr/>
         </p:nvSpPr>
@@ -13948,7 +12445,7 @@
       </p:sp>
       <p:pic>
         <p:nvPicPr>
-          <p:cNvPr id="9" name="Picture 8" descr="a9bbd2622d9f1514.png"/>
+          <p:cNvPr id="8" name="Picture 7" descr="a9bbd2622d9f1514.png"/>
           <p:cNvPicPr>
             <a:picLocks noChangeAspect="1"/>
           </p:cNvPicPr>
@@ -13972,51 +12469,7 @@
       </p:pic>
       <p:sp>
         <p:nvSpPr>
-          <p:cNvPr id="10" name="TextBox 9"/>
-          <p:cNvSpPr txBox="1"/>
-          <p:nvPr/>
-        </p:nvSpPr>
-        <p:spPr>
-          <a:xfrm>
-            <a:off x="1828800" y="3227832"/>
-            <a:ext cx="8503920" cy="548640"/>
-          </a:xfrm>
-          <a:prstGeom prst="rect">
-            <a:avLst/>
-          </a:prstGeom>
-          <a:noFill/>
-        </p:spPr>
-        <p:txBody>
-          <a:bodyPr wrap="square" lIns="45720" rIns="45720" tIns="18288" bIns="18288" anchor="t">
-            <a:spAutoFit/>
-          </a:bodyPr>
-          <a:lstStyle/>
-          <a:p>
-            <a:pPr algn="ctr"/>
-            <a:r>
-              <a:rPr sz="2400" b="0" i="0">
-                <a:solidFill>
-                  <a:srgbClr val="6B6B6B"/>
-                </a:solidFill>
-                <a:latin typeface="Century Schoolbook"/>
-              </a:rPr>
-              <a:t>(½)</a:t>
-            </a:r>
-            <a:r>
-              <a:rPr sz="2400" b="0" i="0" baseline="30000">
-                <a:solidFill>
-                  <a:srgbClr val="6B6B6B"/>
-                </a:solidFill>
-                <a:latin typeface="Century Schoolbook"/>
-              </a:rPr>
-              <a:t>5</a:t>
-            </a:r>
-          </a:p>
-        </p:txBody>
-      </p:sp>
-      <p:sp>
-        <p:nvSpPr>
-          <p:cNvPr id="11" name="TextBox 10"/>
+          <p:cNvPr id="9" name="TextBox 8"/>
           <p:cNvSpPr txBox="1"/>
           <p:nvPr/>
         </p:nvSpPr>
@@ -14051,7 +12504,7 @@
       </p:sp>
       <p:pic>
         <p:nvPicPr>
-          <p:cNvPr id="12" name="Picture 11" descr="08b8d08dca6c5152.png"/>
+          <p:cNvPr id="10" name="Picture 9" descr="08b8d08dca6c5152.png"/>
           <p:cNvPicPr>
             <a:picLocks noChangeAspect="1"/>
           </p:cNvPicPr>
@@ -14196,44 +12649,9 @@
           </a:fontRef>
         </p:style>
       </p:cxnSp>
-      <p:sp>
-        <p:nvSpPr>
-          <p:cNvPr id="5" name="TextBox 4"/>
-          <p:cNvSpPr txBox="1"/>
-          <p:nvPr/>
-        </p:nvSpPr>
-        <p:spPr>
-          <a:xfrm>
-            <a:off x="777240" y="1261872"/>
-            <a:ext cx="10607040" cy="310896"/>
-          </a:xfrm>
-          <a:prstGeom prst="rect">
-            <a:avLst/>
-          </a:prstGeom>
-          <a:noFill/>
-        </p:spPr>
-        <p:txBody>
-          <a:bodyPr wrap="square" lIns="45720" rIns="45720" tIns="18288" bIns="18288" anchor="t">
-            <a:spAutoFit/>
-          </a:bodyPr>
-          <a:lstStyle/>
-          <a:p>
-            <a:pPr algn="l"/>
-            <a:r>
-              <a:rPr sz="1700" b="0" i="1">
-                <a:solidFill>
-                  <a:srgbClr val="6B6B6B"/>
-                </a:solidFill>
-                <a:latin typeface="Century Schoolbook"/>
-              </a:rPr>
-              <a:t>Take your time. Boards up when you have written it.</a:t>
-            </a:r>
-          </a:p>
-        </p:txBody>
-      </p:sp>
       <p:cxnSp>
         <p:nvCxnSpPr>
-          <p:cNvPr id="6" name="Connector 5"/>
+          <p:cNvPr id="5" name="Connector 4"/>
           <p:cNvCxnSpPr/>
           <p:nvPr/>
         </p:nvCxnSpPr>
@@ -14268,7 +12686,7 @@
       </p:cxnSp>
       <p:sp>
         <p:nvSpPr>
-          <p:cNvPr id="7" name="TextBox 6"/>
+          <p:cNvPr id="6" name="TextBox 5"/>
           <p:cNvSpPr txBox="1"/>
           <p:nvPr/>
         </p:nvSpPr>
@@ -14303,7 +12721,7 @@
       </p:sp>
       <p:sp>
         <p:nvSpPr>
-          <p:cNvPr id="8" name="TextBox 7"/>
+          <p:cNvPr id="7" name="TextBox 6"/>
           <p:cNvSpPr txBox="1"/>
           <p:nvPr/>
         </p:nvSpPr>
@@ -14338,7 +12756,7 @@
       </p:sp>
       <p:sp>
         <p:nvSpPr>
-          <p:cNvPr id="9" name="TextBox 8"/>
+          <p:cNvPr id="8" name="TextBox 7"/>
           <p:cNvSpPr txBox="1"/>
           <p:nvPr/>
         </p:nvSpPr>
@@ -14373,7 +12791,7 @@
       </p:sp>
       <p:sp>
         <p:nvSpPr>
-          <p:cNvPr id="10" name="TextBox 9"/>
+          <p:cNvPr id="9" name="TextBox 8"/>
           <p:cNvSpPr txBox="1"/>
           <p:nvPr/>
         </p:nvSpPr>
@@ -14408,7 +12826,7 @@
       </p:sp>
       <p:pic>
         <p:nvPicPr>
-          <p:cNvPr id="11" name="Picture 10" descr="c4163b4848547f9b.png"/>
+          <p:cNvPr id="10" name="Picture 9" descr="c4163b4848547f9b.png"/>
           <p:cNvPicPr>
             <a:picLocks noChangeAspect="1"/>
           </p:cNvPicPr>
@@ -14432,7 +12850,7 @@
       </p:pic>
       <p:sp>
         <p:nvSpPr>
-          <p:cNvPr id="12" name="TextBox 11"/>
+          <p:cNvPr id="11" name="TextBox 10"/>
           <p:cNvSpPr txBox="1"/>
           <p:nvPr/>
         </p:nvSpPr>
@@ -14467,7 +12885,7 @@
       </p:sp>
       <p:sp>
         <p:nvSpPr>
-          <p:cNvPr id="13" name="TextBox 12"/>
+          <p:cNvPr id="12" name="TextBox 11"/>
           <p:cNvSpPr txBox="1"/>
           <p:nvPr/>
         </p:nvSpPr>
@@ -14496,41 +12914,6 @@
                 <a:latin typeface="Century Schoolbook"/>
               </a:rPr>
               <a:t>Write your answer in sentences.</a:t>
-            </a:r>
-          </a:p>
-        </p:txBody>
-      </p:sp>
-      <p:sp>
-        <p:nvSpPr>
-          <p:cNvPr id="14" name="TextBox 13"/>
-          <p:cNvSpPr txBox="1"/>
-          <p:nvPr/>
-        </p:nvSpPr>
-        <p:spPr>
-          <a:xfrm>
-            <a:off x="777240" y="4828032"/>
-            <a:ext cx="10607040" cy="365760"/>
-          </a:xfrm>
-          <a:prstGeom prst="rect">
-            <a:avLst/>
-          </a:prstGeom>
-          <a:noFill/>
-        </p:spPr>
-        <p:txBody>
-          <a:bodyPr wrap="square" lIns="45720" rIns="45720" tIns="18288" bIns="18288" anchor="t">
-            <a:spAutoFit/>
-          </a:bodyPr>
-          <a:lstStyle/>
-          <a:p>
-            <a:pPr algn="ctr"/>
-            <a:r>
-              <a:rPr sz="1900" b="0" i="1">
-                <a:solidFill>
-                  <a:srgbClr val="6B6B6B"/>
-                </a:solidFill>
-                <a:latin typeface="Century Schoolbook"/>
-              </a:rPr>
-              <a:t>Say what the law needs, and show the value.</a:t>
             </a:r>
           </a:p>
         </p:txBody>
@@ -14658,44 +13041,9 @@
           </a:fontRef>
         </p:style>
       </p:cxnSp>
-      <p:sp>
-        <p:nvSpPr>
-          <p:cNvPr id="5" name="TextBox 4"/>
-          <p:cNvSpPr txBox="1"/>
-          <p:nvPr/>
-        </p:nvSpPr>
-        <p:spPr>
-          <a:xfrm>
-            <a:off x="777240" y="1261872"/>
-            <a:ext cx="10607040" cy="310896"/>
-          </a:xfrm>
-          <a:prstGeom prst="rect">
-            <a:avLst/>
-          </a:prstGeom>
-          <a:noFill/>
-        </p:spPr>
-        <p:txBody>
-          <a:bodyPr wrap="square" lIns="45720" rIns="45720" tIns="18288" bIns="18288" anchor="t">
-            <a:spAutoFit/>
-          </a:bodyPr>
-          <a:lstStyle/>
-          <a:p>
-            <a:pPr algn="l"/>
-            <a:r>
-              <a:rPr sz="1700" b="0" i="1">
-                <a:solidFill>
-                  <a:srgbClr val="6B6B6B"/>
-                </a:solidFill>
-                <a:latin typeface="Century Schoolbook"/>
-              </a:rPr>
-              <a:t>Answer.</a:t>
-            </a:r>
-          </a:p>
-        </p:txBody>
-      </p:sp>
       <p:cxnSp>
         <p:nvCxnSpPr>
-          <p:cNvPr id="6" name="Connector 5"/>
+          <p:cNvPr id="5" name="Connector 4"/>
           <p:cNvCxnSpPr/>
           <p:nvPr/>
         </p:nvCxnSpPr>
@@ -14730,7 +13078,7 @@
       </p:cxnSp>
       <p:sp>
         <p:nvSpPr>
-          <p:cNvPr id="7" name="TextBox 6"/>
+          <p:cNvPr id="6" name="TextBox 5"/>
           <p:cNvSpPr txBox="1"/>
           <p:nvPr/>
         </p:nvSpPr>
@@ -14765,7 +13113,7 @@
       </p:sp>
       <p:sp>
         <p:nvSpPr>
-          <p:cNvPr id="8" name="TextBox 7"/>
+          <p:cNvPr id="7" name="TextBox 6"/>
           <p:cNvSpPr txBox="1"/>
           <p:nvPr/>
         </p:nvSpPr>
@@ -14800,7 +13148,7 @@
       </p:sp>
       <p:sp>
         <p:nvSpPr>
-          <p:cNvPr id="9" name="TextBox 8"/>
+          <p:cNvPr id="8" name="TextBox 7"/>
           <p:cNvSpPr txBox="1"/>
           <p:nvPr/>
         </p:nvSpPr>
@@ -14835,7 +13183,7 @@
       </p:sp>
       <p:sp>
         <p:nvSpPr>
-          <p:cNvPr id="10" name="TextBox 9"/>
+          <p:cNvPr id="9" name="TextBox 8"/>
           <p:cNvSpPr txBox="1"/>
           <p:nvPr/>
         </p:nvSpPr>
@@ -14870,7 +13218,7 @@
       </p:sp>
       <p:pic>
         <p:nvPicPr>
-          <p:cNvPr id="11" name="Picture 10" descr="45831de1d391fe0a.png"/>
+          <p:cNvPr id="10" name="Picture 9" descr="45831de1d391fe0a.png"/>
           <p:cNvPicPr>
             <a:picLocks noChangeAspect="1"/>
           </p:cNvPicPr>
@@ -14894,7 +13242,7 @@
       </p:pic>
       <p:sp>
         <p:nvSpPr>
-          <p:cNvPr id="12" name="TextBox 11"/>
+          <p:cNvPr id="11" name="TextBox 10"/>
           <p:cNvSpPr txBox="1"/>
           <p:nvPr/>
         </p:nvSpPr>
@@ -14929,42 +13277,7 @@
       </p:sp>
       <p:sp>
         <p:nvSpPr>
-          <p:cNvPr id="13" name="TextBox 12"/>
-          <p:cNvSpPr txBox="1"/>
-          <p:nvPr/>
-        </p:nvSpPr>
-        <p:spPr>
-          <a:xfrm>
-            <a:off x="1828800" y="3409519"/>
-            <a:ext cx="8503920" cy="548640"/>
-          </a:xfrm>
-          <a:prstGeom prst="rect">
-            <a:avLst/>
-          </a:prstGeom>
-          <a:noFill/>
-        </p:spPr>
-        <p:txBody>
-          <a:bodyPr wrap="square" lIns="45720" rIns="45720" tIns="18288" bIns="18288" anchor="t">
-            <a:spAutoFit/>
-          </a:bodyPr>
-          <a:lstStyle/>
-          <a:p>
-            <a:pPr algn="ctr"/>
-            <a:r>
-              <a:rPr sz="2400" b="0" i="0">
-                <a:solidFill>
-                  <a:srgbClr val="6B6B6B"/>
-                </a:solidFill>
-                <a:latin typeface="Century Schoolbook"/>
-              </a:rPr>
-              <a:t>the parentheses hold a SUM, not a product</a:t>
-            </a:r>
-          </a:p>
-        </p:txBody>
-      </p:sp>
-      <p:sp>
-        <p:nvSpPr>
-          <p:cNvPr id="14" name="TextBox 13"/>
+          <p:cNvPr id="12" name="TextBox 11"/>
           <p:cNvSpPr txBox="1"/>
           <p:nvPr/>
         </p:nvSpPr>
@@ -15156,44 +13469,9 @@
           </a:fontRef>
         </p:style>
       </p:cxnSp>
-      <p:sp>
-        <p:nvSpPr>
-          <p:cNvPr id="5" name="TextBox 4"/>
-          <p:cNvSpPr txBox="1"/>
-          <p:nvPr/>
-        </p:nvSpPr>
-        <p:spPr>
-          <a:xfrm>
-            <a:off x="777240" y="1261872"/>
-            <a:ext cx="10607040" cy="310896"/>
-          </a:xfrm>
-          <a:prstGeom prst="rect">
-            <a:avLst/>
-          </a:prstGeom>
-          <a:noFill/>
-        </p:spPr>
-        <p:txBody>
-          <a:bodyPr wrap="square" lIns="45720" rIns="45720" tIns="18288" bIns="18288" anchor="t">
-            <a:spAutoFit/>
-          </a:bodyPr>
-          <a:lstStyle/>
-          <a:p>
-            <a:pPr algn="l"/>
-            <a:r>
-              <a:rPr sz="1700" b="0" i="1">
-                <a:solidFill>
-                  <a:srgbClr val="6B6B6B"/>
-                </a:solidFill>
-                <a:latin typeface="Century Schoolbook"/>
-              </a:rPr>
-              <a:t>Six questions. On your own, in silence.</a:t>
-            </a:r>
-          </a:p>
-        </p:txBody>
-      </p:sp>
       <p:cxnSp>
         <p:nvCxnSpPr>
-          <p:cNvPr id="6" name="Connector 5"/>
+          <p:cNvPr id="5" name="Connector 4"/>
           <p:cNvCxnSpPr/>
           <p:nvPr/>
         </p:nvCxnSpPr>
@@ -15228,7 +13506,7 @@
       </p:cxnSp>
       <p:sp>
         <p:nvSpPr>
-          <p:cNvPr id="7" name="TextBox 6"/>
+          <p:cNvPr id="6" name="TextBox 5"/>
           <p:cNvSpPr txBox="1"/>
           <p:nvPr/>
         </p:nvSpPr>
@@ -15263,7 +13541,7 @@
       </p:sp>
       <p:sp>
         <p:nvSpPr>
-          <p:cNvPr id="8" name="TextBox 7"/>
+          <p:cNvPr id="7" name="TextBox 6"/>
           <p:cNvSpPr txBox="1"/>
           <p:nvPr/>
         </p:nvSpPr>
@@ -15298,7 +13576,7 @@
       </p:sp>
       <p:sp>
         <p:nvSpPr>
-          <p:cNvPr id="9" name="TextBox 8"/>
+          <p:cNvPr id="8" name="TextBox 7"/>
           <p:cNvSpPr txBox="1"/>
           <p:nvPr/>
         </p:nvSpPr>
@@ -15333,7 +13611,7 @@
       </p:sp>
       <p:sp>
         <p:nvSpPr>
-          <p:cNvPr id="10" name="TextBox 9"/>
+          <p:cNvPr id="9" name="TextBox 8"/>
           <p:cNvSpPr txBox="1"/>
           <p:nvPr/>
         </p:nvSpPr>
@@ -15368,7 +13646,7 @@
       </p:sp>
       <p:sp>
         <p:nvSpPr>
-          <p:cNvPr id="11" name="TextBox 10"/>
+          <p:cNvPr id="10" name="TextBox 9"/>
           <p:cNvSpPr txBox="1"/>
           <p:nvPr/>
         </p:nvSpPr>
@@ -15403,7 +13681,7 @@
       </p:sp>
       <p:sp>
         <p:nvSpPr>
-          <p:cNvPr id="12" name="TextBox 11"/>
+          <p:cNvPr id="11" name="TextBox 10"/>
           <p:cNvSpPr txBox="1"/>
           <p:nvPr/>
         </p:nvSpPr>
@@ -15438,7 +13716,7 @@
       </p:sp>
       <p:sp>
         <p:nvSpPr>
-          <p:cNvPr id="13" name="TextBox 12"/>
+          <p:cNvPr id="12" name="TextBox 11"/>
           <p:cNvSpPr txBox="1"/>
           <p:nvPr/>
         </p:nvSpPr>
@@ -15473,7 +13751,7 @@
       </p:sp>
       <p:sp>
         <p:nvSpPr>
-          <p:cNvPr id="14" name="TextBox 13"/>
+          <p:cNvPr id="13" name="TextBox 12"/>
           <p:cNvSpPr txBox="1"/>
           <p:nvPr/>
         </p:nvSpPr>
@@ -15629,44 +13907,9 @@
           </a:fontRef>
         </p:style>
       </p:cxnSp>
-      <p:sp>
-        <p:nvSpPr>
-          <p:cNvPr id="5" name="TextBox 4"/>
-          <p:cNvSpPr txBox="1"/>
-          <p:nvPr/>
-        </p:nvSpPr>
-        <p:spPr>
-          <a:xfrm>
-            <a:off x="777240" y="1261872"/>
-            <a:ext cx="10607040" cy="310896"/>
-          </a:xfrm>
-          <a:prstGeom prst="rect">
-            <a:avLst/>
-          </a:prstGeom>
-          <a:noFill/>
-        </p:spPr>
-        <p:txBody>
-          <a:bodyPr wrap="square" lIns="45720" rIns="45720" tIns="18288" bIns="18288" anchor="t">
-            <a:spAutoFit/>
-          </a:bodyPr>
-          <a:lstStyle/>
-          <a:p>
-            <a:pPr algn="l"/>
-            <a:r>
-              <a:rPr sz="1700" b="0" i="1">
-                <a:solidFill>
-                  <a:srgbClr val="6B6B6B"/>
-                </a:solidFill>
-                <a:latin typeface="Century Schoolbook"/>
-              </a:rPr>
-              <a:t>Last five minutes.</a:t>
-            </a:r>
-          </a:p>
-        </p:txBody>
-      </p:sp>
       <p:cxnSp>
         <p:nvCxnSpPr>
-          <p:cNvPr id="6" name="Connector 5"/>
+          <p:cNvPr id="5" name="Connector 4"/>
           <p:cNvCxnSpPr/>
           <p:nvPr/>
         </p:nvCxnSpPr>
@@ -15701,7 +13944,7 @@
       </p:cxnSp>
       <p:sp>
         <p:nvSpPr>
-          <p:cNvPr id="7" name="TextBox 6"/>
+          <p:cNvPr id="6" name="TextBox 5"/>
           <p:cNvSpPr txBox="1"/>
           <p:nvPr/>
         </p:nvSpPr>
@@ -15736,7 +13979,7 @@
       </p:sp>
       <p:sp>
         <p:nvSpPr>
-          <p:cNvPr id="8" name="TextBox 7"/>
+          <p:cNvPr id="7" name="TextBox 6"/>
           <p:cNvSpPr txBox="1"/>
           <p:nvPr/>
         </p:nvSpPr>
@@ -15771,7 +14014,7 @@
       </p:sp>
       <p:sp>
         <p:nvSpPr>
-          <p:cNvPr id="9" name="TextBox 8"/>
+          <p:cNvPr id="8" name="TextBox 7"/>
           <p:cNvSpPr txBox="1"/>
           <p:nvPr/>
         </p:nvSpPr>
@@ -15806,7 +14049,7 @@
       </p:sp>
       <p:sp>
         <p:nvSpPr>
-          <p:cNvPr id="10" name="TextBox 9"/>
+          <p:cNvPr id="9" name="TextBox 8"/>
           <p:cNvSpPr txBox="1"/>
           <p:nvPr/>
         </p:nvSpPr>
@@ -15841,7 +14084,7 @@
       </p:sp>
       <p:sp>
         <p:nvSpPr>
-          <p:cNvPr id="11" name="TextBox 10"/>
+          <p:cNvPr id="10" name="TextBox 9"/>
           <p:cNvSpPr txBox="1"/>
           <p:nvPr/>
         </p:nvSpPr>
@@ -15876,7 +14119,7 @@
       </p:sp>
       <p:sp>
         <p:nvSpPr>
-          <p:cNvPr id="12" name="TextBox 11"/>
+          <p:cNvPr id="11" name="TextBox 10"/>
           <p:cNvSpPr txBox="1"/>
           <p:nvPr/>
         </p:nvSpPr>
@@ -15911,7 +14154,7 @@
       </p:sp>
       <p:sp>
         <p:nvSpPr>
-          <p:cNvPr id="13" name="TextBox 12"/>
+          <p:cNvPr id="12" name="TextBox 11"/>
           <p:cNvSpPr txBox="1"/>
           <p:nvPr/>
         </p:nvSpPr>
@@ -15946,7 +14189,7 @@
       </p:sp>
       <p:sp>
         <p:nvSpPr>
-          <p:cNvPr id="14" name="TextBox 13"/>
+          <p:cNvPr id="13" name="TextBox 12"/>
           <p:cNvSpPr txBox="1"/>
           <p:nvPr/>
         </p:nvSpPr>
@@ -15981,7 +14224,7 @@
       </p:sp>
       <p:sp>
         <p:nvSpPr>
-          <p:cNvPr id="15" name="TextBox 14"/>
+          <p:cNvPr id="14" name="TextBox 13"/>
           <p:cNvSpPr txBox="1"/>
           <p:nvPr/>
         </p:nvSpPr>
@@ -16016,7 +14259,7 @@
       </p:sp>
       <p:sp>
         <p:nvSpPr>
-          <p:cNvPr id="16" name="TextBox 15"/>
+          <p:cNvPr id="15" name="TextBox 14"/>
           <p:cNvSpPr txBox="1"/>
           <p:nvPr/>
         </p:nvSpPr>
@@ -16051,7 +14294,7 @@
       </p:sp>
       <p:sp>
         <p:nvSpPr>
-          <p:cNvPr id="17" name="TextBox 16"/>
+          <p:cNvPr id="16" name="TextBox 15"/>
           <p:cNvSpPr txBox="1"/>
           <p:nvPr/>
         </p:nvSpPr>
@@ -16086,7 +14329,7 @@
       </p:sp>
       <p:sp>
         <p:nvSpPr>
-          <p:cNvPr id="18" name="TextBox 17"/>
+          <p:cNvPr id="17" name="TextBox 16"/>
           <p:cNvSpPr txBox="1"/>
           <p:nvPr/>
         </p:nvSpPr>
@@ -16121,7 +14364,7 @@
       </p:sp>
       <p:sp>
         <p:nvSpPr>
-          <p:cNvPr id="19" name="TextBox 18"/>
+          <p:cNvPr id="18" name="TextBox 17"/>
           <p:cNvSpPr txBox="1"/>
           <p:nvPr/>
         </p:nvSpPr>
@@ -16277,44 +14520,9 @@
           </a:fontRef>
         </p:style>
       </p:cxnSp>
-      <p:sp>
-        <p:nvSpPr>
-          <p:cNvPr id="5" name="TextBox 4"/>
-          <p:cNvSpPr txBox="1"/>
-          <p:nvPr/>
-        </p:nvSpPr>
-        <p:spPr>
-          <a:xfrm>
-            <a:off x="777240" y="1261872"/>
-            <a:ext cx="10607040" cy="310896"/>
-          </a:xfrm>
-          <a:prstGeom prst="rect">
-            <a:avLst/>
-          </a:prstGeom>
-          <a:noFill/>
-        </p:spPr>
-        <p:txBody>
-          <a:bodyPr wrap="square" lIns="45720" rIns="45720" tIns="18288" bIns="18288" anchor="t">
-            <a:spAutoFit/>
-          </a:bodyPr>
-          <a:lstStyle/>
-          <a:p>
-            <a:pPr algn="l"/>
-            <a:r>
-              <a:rPr sz="1700" b="0" i="1">
-                <a:solidFill>
-                  <a:srgbClr val="6B6B6B"/>
-                </a:solidFill>
-                <a:latin typeface="Century Schoolbook"/>
-              </a:rPr>
-              <a:t>Copy the three words.</a:t>
-            </a:r>
-          </a:p>
-        </p:txBody>
-      </p:sp>
       <p:cxnSp>
         <p:nvCxnSpPr>
-          <p:cNvPr id="6" name="Connector 5"/>
+          <p:cNvPr id="5" name="Connector 4"/>
           <p:cNvCxnSpPr/>
           <p:nvPr/>
         </p:nvCxnSpPr>
@@ -16349,7 +14557,7 @@
       </p:cxnSp>
       <p:sp>
         <p:nvSpPr>
-          <p:cNvPr id="7" name="TextBox 6"/>
+          <p:cNvPr id="6" name="TextBox 5"/>
           <p:cNvSpPr txBox="1"/>
           <p:nvPr/>
         </p:nvSpPr>
@@ -16384,7 +14592,7 @@
       </p:sp>
       <p:sp>
         <p:nvSpPr>
-          <p:cNvPr id="8" name="TextBox 7"/>
+          <p:cNvPr id="7" name="TextBox 6"/>
           <p:cNvSpPr txBox="1"/>
           <p:nvPr/>
         </p:nvSpPr>
@@ -16419,13 +14627,13 @@
       </p:sp>
       <p:sp>
         <p:nvSpPr>
-          <p:cNvPr id="9" name="TextBox 8"/>
-          <p:cNvSpPr txBox="1"/>
-          <p:nvPr/>
-        </p:nvSpPr>
-        <p:spPr>
-          <a:xfrm>
-            <a:off x="777240" y="1737360"/>
+          <p:cNvPr id="8" name="TextBox 7"/>
+          <p:cNvSpPr txBox="1"/>
+          <p:nvPr/>
+        </p:nvSpPr>
+        <p:spPr>
+          <a:xfrm>
+            <a:off x="777240" y="1389888"/>
             <a:ext cx="10607040" cy="402336"/>
           </a:xfrm>
           <a:prstGeom prst="rect">
@@ -16454,13 +14662,13 @@
       </p:sp>
       <p:cxnSp>
         <p:nvCxnSpPr>
-          <p:cNvPr id="10" name="Connector 9"/>
+          <p:cNvPr id="9" name="Connector 8"/>
           <p:cNvCxnSpPr/>
           <p:nvPr/>
         </p:nvCxnSpPr>
         <p:spPr>
           <a:xfrm>
-            <a:off x="777240" y="2176272"/>
+            <a:off x="777240" y="1828800"/>
             <a:ext cx="10607040" cy="0"/>
           </a:xfrm>
           <a:prstGeom prst="line">
@@ -16489,13 +14697,13 @@
       </p:cxnSp>
       <p:sp>
         <p:nvSpPr>
-          <p:cNvPr id="11" name="Rectangle 10"/>
+          <p:cNvPr id="10" name="Rectangle 9"/>
           <p:cNvSpPr/>
           <p:nvPr/>
         </p:nvSpPr>
         <p:spPr>
           <a:xfrm>
-            <a:off x="850392" y="2322576"/>
+            <a:off x="850392" y="1975104"/>
             <a:ext cx="10405872" cy="585216"/>
           </a:xfrm>
           <a:prstGeom prst="rect">
@@ -16533,14 +14741,49 @@
       </p:sp>
       <p:sp>
         <p:nvSpPr>
+          <p:cNvPr id="11" name="TextBox 10"/>
+          <p:cNvSpPr txBox="1"/>
+          <p:nvPr/>
+        </p:nvSpPr>
+        <p:spPr>
+          <a:xfrm>
+            <a:off x="987552" y="2057400"/>
+            <a:ext cx="548640" cy="384048"/>
+          </a:xfrm>
+          <a:prstGeom prst="rect">
+            <a:avLst/>
+          </a:prstGeom>
+          <a:noFill/>
+        </p:spPr>
+        <p:txBody>
+          <a:bodyPr wrap="square" lIns="45720" rIns="45720" tIns="18288" bIns="18288" anchor="t">
+            <a:spAutoFit/>
+          </a:bodyPr>
+          <a:lstStyle/>
+          <a:p>
+            <a:pPr algn="l"/>
+            <a:r>
+              <a:rPr sz="2300" b="0" i="0">
+                <a:solidFill>
+                  <a:srgbClr val="1A1A1A"/>
+                </a:solidFill>
+                <a:latin typeface="Century Schoolbook"/>
+              </a:rPr>
+              <a:t>A.</a:t>
+            </a:r>
+          </a:p>
+        </p:txBody>
+      </p:sp>
+      <p:sp>
+        <p:nvSpPr>
           <p:cNvPr id="12" name="TextBox 11"/>
           <p:cNvSpPr txBox="1"/>
           <p:nvPr/>
         </p:nvSpPr>
         <p:spPr>
           <a:xfrm>
-            <a:off x="987552" y="2404872"/>
-            <a:ext cx="548640" cy="384048"/>
+            <a:off x="1581912" y="2057400"/>
+            <a:ext cx="9537192" cy="475488"/>
           </a:xfrm>
           <a:prstGeom prst="rect">
             <a:avLst/>
@@ -16555,56 +14798,21 @@
           <a:p>
             <a:pPr algn="l"/>
             <a:r>
+              <a:rPr sz="2500" b="1" i="0">
+                <a:solidFill>
+                  <a:srgbClr val="0B5394"/>
+                </a:solidFill>
+                <a:latin typeface="Century Schoolbook"/>
+              </a:rPr>
+              <a:t>base</a:t>
+            </a:r>
+            <a:r>
               <a:rPr sz="2300" b="0" i="0">
                 <a:solidFill>
                   <a:srgbClr val="1A1A1A"/>
                 </a:solidFill>
                 <a:latin typeface="Century Schoolbook"/>
               </a:rPr>
-              <a:t>A.</a:t>
-            </a:r>
-          </a:p>
-        </p:txBody>
-      </p:sp>
-      <p:sp>
-        <p:nvSpPr>
-          <p:cNvPr id="13" name="TextBox 12"/>
-          <p:cNvSpPr txBox="1"/>
-          <p:nvPr/>
-        </p:nvSpPr>
-        <p:spPr>
-          <a:xfrm>
-            <a:off x="1581912" y="2404872"/>
-            <a:ext cx="9537192" cy="475488"/>
-          </a:xfrm>
-          <a:prstGeom prst="rect">
-            <a:avLst/>
-          </a:prstGeom>
-          <a:noFill/>
-        </p:spPr>
-        <p:txBody>
-          <a:bodyPr wrap="square" lIns="45720" rIns="45720" tIns="18288" bIns="18288" anchor="t">
-            <a:spAutoFit/>
-          </a:bodyPr>
-          <a:lstStyle/>
-          <a:p>
-            <a:pPr algn="l"/>
-            <a:r>
-              <a:rPr sz="2500" b="1" i="0">
-                <a:solidFill>
-                  <a:srgbClr val="0B5394"/>
-                </a:solidFill>
-                <a:latin typeface="Century Schoolbook"/>
-              </a:rPr>
-              <a:t>base</a:t>
-            </a:r>
-            <a:r>
-              <a:rPr sz="2300" b="0" i="0">
-                <a:solidFill>
-                  <a:srgbClr val="1A1A1A"/>
-                </a:solidFill>
-                <a:latin typeface="Century Schoolbook"/>
-              </a:rPr>
               <a:t>   —   the number used as a factor</a:t>
             </a:r>
           </a:p>
@@ -16612,13 +14820,13 @@
       </p:sp>
       <p:sp>
         <p:nvSpPr>
-          <p:cNvPr id="14" name="Rectangle 13"/>
+          <p:cNvPr id="13" name="Rectangle 12"/>
           <p:cNvSpPr/>
           <p:nvPr/>
         </p:nvSpPr>
         <p:spPr>
           <a:xfrm>
-            <a:off x="850392" y="3054096"/>
+            <a:off x="850392" y="2706624"/>
             <a:ext cx="10405872" cy="585216"/>
           </a:xfrm>
           <a:prstGeom prst="rect">
@@ -16656,14 +14864,49 @@
       </p:sp>
       <p:sp>
         <p:nvSpPr>
+          <p:cNvPr id="14" name="TextBox 13"/>
+          <p:cNvSpPr txBox="1"/>
+          <p:nvPr/>
+        </p:nvSpPr>
+        <p:spPr>
+          <a:xfrm>
+            <a:off x="987552" y="2788920"/>
+            <a:ext cx="548640" cy="384048"/>
+          </a:xfrm>
+          <a:prstGeom prst="rect">
+            <a:avLst/>
+          </a:prstGeom>
+          <a:noFill/>
+        </p:spPr>
+        <p:txBody>
+          <a:bodyPr wrap="square" lIns="45720" rIns="45720" tIns="18288" bIns="18288" anchor="t">
+            <a:spAutoFit/>
+          </a:bodyPr>
+          <a:lstStyle/>
+          <a:p>
+            <a:pPr algn="l"/>
+            <a:r>
+              <a:rPr sz="2300" b="0" i="0">
+                <a:solidFill>
+                  <a:srgbClr val="1A1A1A"/>
+                </a:solidFill>
+                <a:latin typeface="Century Schoolbook"/>
+              </a:rPr>
+              <a:t>B.</a:t>
+            </a:r>
+          </a:p>
+        </p:txBody>
+      </p:sp>
+      <p:sp>
+        <p:nvSpPr>
           <p:cNvPr id="15" name="TextBox 14"/>
           <p:cNvSpPr txBox="1"/>
           <p:nvPr/>
         </p:nvSpPr>
         <p:spPr>
           <a:xfrm>
-            <a:off x="987552" y="3136391"/>
-            <a:ext cx="548640" cy="384048"/>
+            <a:off x="1581912" y="2788920"/>
+            <a:ext cx="9537192" cy="475488"/>
           </a:xfrm>
           <a:prstGeom prst="rect">
             <a:avLst/>
@@ -16678,56 +14921,21 @@
           <a:p>
             <a:pPr algn="l"/>
             <a:r>
+              <a:rPr sz="2500" b="1" i="0">
+                <a:solidFill>
+                  <a:srgbClr val="0B5394"/>
+                </a:solidFill>
+                <a:latin typeface="Century Schoolbook"/>
+              </a:rPr>
+              <a:t>exponent</a:t>
+            </a:r>
+            <a:r>
               <a:rPr sz="2300" b="0" i="0">
                 <a:solidFill>
                   <a:srgbClr val="1A1A1A"/>
                 </a:solidFill>
                 <a:latin typeface="Century Schoolbook"/>
               </a:rPr>
-              <a:t>B.</a:t>
-            </a:r>
-          </a:p>
-        </p:txBody>
-      </p:sp>
-      <p:sp>
-        <p:nvSpPr>
-          <p:cNvPr id="16" name="TextBox 15"/>
-          <p:cNvSpPr txBox="1"/>
-          <p:nvPr/>
-        </p:nvSpPr>
-        <p:spPr>
-          <a:xfrm>
-            <a:off x="1581912" y="3136391"/>
-            <a:ext cx="9537192" cy="475488"/>
-          </a:xfrm>
-          <a:prstGeom prst="rect">
-            <a:avLst/>
-          </a:prstGeom>
-          <a:noFill/>
-        </p:spPr>
-        <p:txBody>
-          <a:bodyPr wrap="square" lIns="45720" rIns="45720" tIns="18288" bIns="18288" anchor="t">
-            <a:spAutoFit/>
-          </a:bodyPr>
-          <a:lstStyle/>
-          <a:p>
-            <a:pPr algn="l"/>
-            <a:r>
-              <a:rPr sz="2500" b="1" i="0">
-                <a:solidFill>
-                  <a:srgbClr val="0B5394"/>
-                </a:solidFill>
-                <a:latin typeface="Century Schoolbook"/>
-              </a:rPr>
-              <a:t>exponent</a:t>
-            </a:r>
-            <a:r>
-              <a:rPr sz="2300" b="0" i="0">
-                <a:solidFill>
-                  <a:srgbClr val="1A1A1A"/>
-                </a:solidFill>
-                <a:latin typeface="Century Schoolbook"/>
-              </a:rPr>
               <a:t>   —   how many times the base is a factor</a:t>
             </a:r>
           </a:p>
@@ -16735,13 +14943,13 @@
       </p:sp>
       <p:sp>
         <p:nvSpPr>
-          <p:cNvPr id="17" name="Rectangle 16"/>
+          <p:cNvPr id="16" name="Rectangle 15"/>
           <p:cNvSpPr/>
           <p:nvPr/>
         </p:nvSpPr>
         <p:spPr>
           <a:xfrm>
-            <a:off x="850392" y="3785616"/>
+            <a:off x="850392" y="3438144"/>
             <a:ext cx="10405872" cy="585216"/>
           </a:xfrm>
           <a:prstGeom prst="rect">
@@ -16779,48 +14987,48 @@
       </p:sp>
       <p:sp>
         <p:nvSpPr>
+          <p:cNvPr id="17" name="TextBox 16"/>
+          <p:cNvSpPr txBox="1"/>
+          <p:nvPr/>
+        </p:nvSpPr>
+        <p:spPr>
+          <a:xfrm>
+            <a:off x="987552" y="3520439"/>
+            <a:ext cx="548640" cy="384048"/>
+          </a:xfrm>
+          <a:prstGeom prst="rect">
+            <a:avLst/>
+          </a:prstGeom>
+          <a:noFill/>
+        </p:spPr>
+        <p:txBody>
+          <a:bodyPr wrap="square" lIns="45720" rIns="45720" tIns="18288" bIns="18288" anchor="t">
+            <a:spAutoFit/>
+          </a:bodyPr>
+          <a:lstStyle/>
+          <a:p>
+            <a:pPr algn="l"/>
+            <a:r>
+              <a:rPr sz="2300" b="0" i="0">
+                <a:solidFill>
+                  <a:srgbClr val="1A1A1A"/>
+                </a:solidFill>
+                <a:latin typeface="Century Schoolbook"/>
+              </a:rPr>
+              <a:t>C.</a:t>
+            </a:r>
+          </a:p>
+        </p:txBody>
+      </p:sp>
+      <p:sp>
+        <p:nvSpPr>
           <p:cNvPr id="18" name="TextBox 17"/>
           <p:cNvSpPr txBox="1"/>
           <p:nvPr/>
         </p:nvSpPr>
         <p:spPr>
           <a:xfrm>
-            <a:off x="987552" y="3867912"/>
-            <a:ext cx="548640" cy="384048"/>
-          </a:xfrm>
-          <a:prstGeom prst="rect">
-            <a:avLst/>
-          </a:prstGeom>
-          <a:noFill/>
-        </p:spPr>
-        <p:txBody>
-          <a:bodyPr wrap="square" lIns="45720" rIns="45720" tIns="18288" bIns="18288" anchor="t">
-            <a:spAutoFit/>
-          </a:bodyPr>
-          <a:lstStyle/>
-          <a:p>
-            <a:pPr algn="l"/>
-            <a:r>
-              <a:rPr sz="2300" b="0" i="0">
-                <a:solidFill>
-                  <a:srgbClr val="1A1A1A"/>
-                </a:solidFill>
-                <a:latin typeface="Century Schoolbook"/>
-              </a:rPr>
-              <a:t>C.</a:t>
-            </a:r>
-          </a:p>
-        </p:txBody>
-      </p:sp>
-      <p:sp>
-        <p:nvSpPr>
-          <p:cNvPr id="19" name="TextBox 18"/>
-          <p:cNvSpPr txBox="1"/>
-          <p:nvPr/>
-        </p:nvSpPr>
-        <p:spPr>
-          <a:xfrm>
-            <a:off x="1581912" y="3867912"/>
+            <a:off x="1581912" y="3520439"/>
             <a:ext cx="9537192" cy="475488"/>
           </a:xfrm>
           <a:prstGeom prst="rect">
@@ -16858,7 +15066,7 @@
       </p:sp>
       <p:pic>
         <p:nvPicPr>
-          <p:cNvPr id="20" name="Picture 19" descr="0ab145e8ca7379f4.png"/>
+          <p:cNvPr id="19" name="Picture 18" descr="0ab145e8ca7379f4.png"/>
           <p:cNvPicPr>
             <a:picLocks noChangeAspect="1"/>
           </p:cNvPicPr>
@@ -16872,7 +15080,7 @@
         </p:blipFill>
         <p:spPr>
           <a:xfrm>
-            <a:off x="3175500" y="4709160"/>
+            <a:off x="3175500" y="4361688"/>
             <a:ext cx="2410968" cy="344424"/>
           </a:xfrm>
           <a:prstGeom prst="rect">
@@ -16882,13 +15090,13 @@
       </p:pic>
       <p:sp>
         <p:nvSpPr>
-          <p:cNvPr id="21" name="TextBox 20"/>
-          <p:cNvSpPr txBox="1"/>
-          <p:nvPr/>
-        </p:nvSpPr>
-        <p:spPr>
-          <a:xfrm>
-            <a:off x="5586468" y="4652772"/>
+          <p:cNvPr id="20" name="TextBox 19"/>
+          <p:cNvSpPr txBox="1"/>
+          <p:nvPr/>
+        </p:nvSpPr>
+        <p:spPr>
+          <a:xfrm>
+            <a:off x="5586468" y="4305300"/>
             <a:ext cx="988583" cy="457200"/>
           </a:xfrm>
           <a:prstGeom prst="rect">
@@ -16917,7 +15125,7 @@
       </p:sp>
       <p:pic>
         <p:nvPicPr>
-          <p:cNvPr id="22" name="Picture 21" descr="3b6b0e0ba8659f8d.png"/>
+          <p:cNvPr id="21" name="Picture 20" descr="3b6b0e0ba8659f8d.png"/>
           <p:cNvPicPr>
             <a:picLocks noChangeAspect="1"/>
           </p:cNvPicPr>
@@ -16931,7 +15139,7 @@
         </p:blipFill>
         <p:spPr>
           <a:xfrm>
-            <a:off x="6437891" y="4535424"/>
+            <a:off x="6437891" y="4187952"/>
             <a:ext cx="2548128" cy="691896"/>
           </a:xfrm>
           <a:prstGeom prst="rect">
@@ -17062,44 +15270,9 @@
           </a:fontRef>
         </p:style>
       </p:cxnSp>
-      <p:sp>
-        <p:nvSpPr>
-          <p:cNvPr id="5" name="TextBox 4"/>
-          <p:cNvSpPr txBox="1"/>
-          <p:nvPr/>
-        </p:nvSpPr>
-        <p:spPr>
-          <a:xfrm>
-            <a:off x="777240" y="1261872"/>
-            <a:ext cx="10607040" cy="310896"/>
-          </a:xfrm>
-          <a:prstGeom prst="rect">
-            <a:avLst/>
-          </a:prstGeom>
-          <a:noFill/>
-        </p:spPr>
-        <p:txBody>
-          <a:bodyPr wrap="square" lIns="45720" rIns="45720" tIns="18288" bIns="18288" anchor="t">
-            <a:spAutoFit/>
-          </a:bodyPr>
-          <a:lstStyle/>
-          <a:p>
-            <a:pPr algn="l"/>
-            <a:r>
-              <a:rPr sz="1700" b="0" i="1">
-                <a:solidFill>
-                  <a:srgbClr val="6B6B6B"/>
-                </a:solidFill>
-                <a:latin typeface="Century Schoolbook"/>
-              </a:rPr>
-              <a:t>Where the rule comes from.</a:t>
-            </a:r>
-          </a:p>
-        </p:txBody>
-      </p:sp>
       <p:cxnSp>
         <p:nvCxnSpPr>
-          <p:cNvPr id="6" name="Connector 5"/>
+          <p:cNvPr id="5" name="Connector 4"/>
           <p:cNvCxnSpPr/>
           <p:nvPr/>
         </p:nvCxnSpPr>
@@ -17134,7 +15307,7 @@
       </p:cxnSp>
       <p:sp>
         <p:nvSpPr>
-          <p:cNvPr id="7" name="TextBox 6"/>
+          <p:cNvPr id="6" name="TextBox 5"/>
           <p:cNvSpPr txBox="1"/>
           <p:nvPr/>
         </p:nvSpPr>
@@ -17169,7 +15342,7 @@
       </p:sp>
       <p:sp>
         <p:nvSpPr>
-          <p:cNvPr id="8" name="TextBox 7"/>
+          <p:cNvPr id="7" name="TextBox 6"/>
           <p:cNvSpPr txBox="1"/>
           <p:nvPr/>
         </p:nvSpPr>
@@ -17204,13 +15377,13 @@
       </p:sp>
       <p:sp>
         <p:nvSpPr>
-          <p:cNvPr id="9" name="TextBox 8"/>
-          <p:cNvSpPr txBox="1"/>
-          <p:nvPr/>
-        </p:nvSpPr>
-        <p:spPr>
-          <a:xfrm>
-            <a:off x="777240" y="1737360"/>
+          <p:cNvPr id="8" name="TextBox 7"/>
+          <p:cNvSpPr txBox="1"/>
+          <p:nvPr/>
+        </p:nvSpPr>
+        <p:spPr>
+          <a:xfrm>
+            <a:off x="777240" y="1389888"/>
             <a:ext cx="10607040" cy="402336"/>
           </a:xfrm>
           <a:prstGeom prst="rect">
@@ -17239,13 +15412,13 @@
       </p:sp>
       <p:cxnSp>
         <p:nvCxnSpPr>
-          <p:cNvPr id="10" name="Connector 9"/>
+          <p:cNvPr id="9" name="Connector 8"/>
           <p:cNvCxnSpPr/>
           <p:nvPr/>
         </p:nvCxnSpPr>
         <p:spPr>
           <a:xfrm>
-            <a:off x="777240" y="2176272"/>
+            <a:off x="777240" y="1828800"/>
             <a:ext cx="10607040" cy="0"/>
           </a:xfrm>
           <a:prstGeom prst="line">
@@ -17274,7 +15447,7 @@
       </p:cxnSp>
       <p:pic>
         <p:nvPicPr>
-          <p:cNvPr id="11" name="Picture 10" descr="979221dae3c66bd9.png"/>
+          <p:cNvPr id="10" name="Picture 9" descr="979221dae3c66bd9.png"/>
           <p:cNvPicPr>
             <a:picLocks noChangeAspect="1"/>
           </p:cNvPicPr>
@@ -17288,7 +15461,7 @@
         </p:blipFill>
         <p:spPr>
           <a:xfrm>
-            <a:off x="3907536" y="2340864"/>
+            <a:off x="3907536" y="1993392"/>
             <a:ext cx="4346448" cy="411480"/>
           </a:xfrm>
           <a:prstGeom prst="rect">
@@ -17298,7 +15471,7 @@
       </p:pic>
       <p:pic>
         <p:nvPicPr>
-          <p:cNvPr id="12" name="Picture 11" descr="3ebe349f0ffa36d4.png"/>
+          <p:cNvPr id="11" name="Picture 10" descr="3ebe349f0ffa36d4.png"/>
           <p:cNvPicPr>
             <a:picLocks noChangeAspect="1"/>
           </p:cNvPicPr>
@@ -17312,7 +15485,7 @@
         </p:blipFill>
         <p:spPr>
           <a:xfrm>
-            <a:off x="1672781" y="3028188"/>
+            <a:off x="1672781" y="2680716"/>
             <a:ext cx="3596640" cy="408432"/>
           </a:xfrm>
           <a:prstGeom prst="rect">
@@ -17322,13 +15495,13 @@
       </p:pic>
       <p:sp>
         <p:nvSpPr>
-          <p:cNvPr id="13" name="TextBox 12"/>
-          <p:cNvSpPr txBox="1"/>
-          <p:nvPr/>
-        </p:nvSpPr>
-        <p:spPr>
-          <a:xfrm>
-            <a:off x="5269421" y="3003804"/>
+          <p:cNvPr id="12" name="TextBox 11"/>
+          <p:cNvSpPr txBox="1"/>
+          <p:nvPr/>
+        </p:nvSpPr>
+        <p:spPr>
+          <a:xfrm>
+            <a:off x="5269421" y="2656332"/>
             <a:ext cx="5356477" cy="457200"/>
           </a:xfrm>
           <a:prstGeom prst="rect">
@@ -17357,13 +15530,13 @@
       </p:sp>
       <p:sp>
         <p:nvSpPr>
-          <p:cNvPr id="14" name="TextBox 13"/>
-          <p:cNvSpPr txBox="1"/>
-          <p:nvPr/>
-        </p:nvSpPr>
-        <p:spPr>
-          <a:xfrm>
-            <a:off x="987552" y="3735324"/>
+          <p:cNvPr id="13" name="TextBox 12"/>
+          <p:cNvSpPr txBox="1"/>
+          <p:nvPr/>
+        </p:nvSpPr>
+        <p:spPr>
+          <a:xfrm>
+            <a:off x="987552" y="3387852"/>
             <a:ext cx="3419263" cy="457200"/>
           </a:xfrm>
           <a:prstGeom prst="rect">
@@ -17392,7 +15565,7 @@
       </p:sp>
       <p:pic>
         <p:nvPicPr>
-          <p:cNvPr id="15" name="Picture 14" descr="90652a6387118d5a.png"/>
+          <p:cNvPr id="14" name="Picture 13" descr="90652a6387118d5a.png"/>
           <p:cNvPicPr>
             <a:picLocks noChangeAspect="1"/>
           </p:cNvPicPr>
@@ -17406,7 +15579,7 @@
         </p:blipFill>
         <p:spPr>
           <a:xfrm>
-            <a:off x="4269655" y="3810000"/>
+            <a:off x="4269655" y="3462528"/>
             <a:ext cx="2313432" cy="307848"/>
           </a:xfrm>
           <a:prstGeom prst="rect">
@@ -17416,13 +15589,13 @@
       </p:pic>
       <p:sp>
         <p:nvSpPr>
-          <p:cNvPr id="16" name="TextBox 15"/>
-          <p:cNvSpPr txBox="1"/>
-          <p:nvPr/>
-        </p:nvSpPr>
-        <p:spPr>
-          <a:xfrm>
-            <a:off x="987552" y="4402836"/>
+          <p:cNvPr id="15" name="TextBox 14"/>
+          <p:cNvSpPr txBox="1"/>
+          <p:nvPr/>
+        </p:nvSpPr>
+        <p:spPr>
+          <a:xfrm>
+            <a:off x="987552" y="4055363"/>
             <a:ext cx="3088445" cy="457200"/>
           </a:xfrm>
           <a:prstGeom prst="rect">
@@ -17451,7 +15624,7 @@
       </p:sp>
       <p:pic>
         <p:nvPicPr>
-          <p:cNvPr id="17" name="Picture 16" descr="381f7ba218ba42db.png"/>
+          <p:cNvPr id="16" name="Picture 15" descr="381f7ba218ba42db.png"/>
           <p:cNvPicPr>
             <a:picLocks noChangeAspect="1"/>
           </p:cNvPicPr>
@@ -17465,7 +15638,7 @@
         </p:blipFill>
         <p:spPr>
           <a:xfrm>
-            <a:off x="3938837" y="4454652"/>
+            <a:off x="3938837" y="4107179"/>
             <a:ext cx="3934968" cy="353568"/>
           </a:xfrm>
           <a:prstGeom prst="rect">
@@ -17709,7 +15882,7 @@
         </p:nvSpPr>
         <p:spPr>
           <a:xfrm>
-            <a:off x="777240" y="1737360"/>
+            <a:off x="777240" y="1389888"/>
             <a:ext cx="10607040" cy="402336"/>
           </a:xfrm>
           <a:prstGeom prst="rect">
@@ -17744,7 +15917,7 @@
         </p:nvCxnSpPr>
         <p:spPr>
           <a:xfrm>
-            <a:off x="777240" y="2176272"/>
+            <a:off x="777240" y="1828800"/>
             <a:ext cx="10607040" cy="0"/>
           </a:xfrm>
           <a:prstGeom prst="line">
@@ -17787,7 +15960,7 @@
         </p:blipFill>
         <p:spPr>
           <a:xfrm>
-            <a:off x="1772411" y="2342388"/>
+            <a:off x="1772411" y="1994916"/>
             <a:ext cx="8616696" cy="408432"/>
           </a:xfrm>
           <a:prstGeom prst="rect">
@@ -17803,7 +15976,7 @@
         </p:nvSpPr>
         <p:spPr>
           <a:xfrm>
-            <a:off x="987552" y="3049524"/>
+            <a:off x="987552" y="2702052"/>
             <a:ext cx="3530167" cy="457200"/>
           </a:xfrm>
           <a:prstGeom prst="rect">
@@ -17846,7 +16019,7 @@
         </p:blipFill>
         <p:spPr>
           <a:xfrm>
-            <a:off x="4380559" y="3104388"/>
+            <a:off x="4380559" y="2756916"/>
             <a:ext cx="2420112" cy="347472"/>
           </a:xfrm>
           <a:prstGeom prst="rect">
@@ -17862,7 +16035,7 @@
         </p:nvSpPr>
         <p:spPr>
           <a:xfrm>
-            <a:off x="987552" y="3758184"/>
+            <a:off x="987552" y="3410712"/>
             <a:ext cx="10131551" cy="475488"/>
           </a:xfrm>
           <a:prstGeom prst="rect">
@@ -17905,7 +16078,7 @@
         </p:blipFill>
         <p:spPr>
           <a:xfrm>
-            <a:off x="987552" y="4472940"/>
+            <a:off x="987552" y="4125468"/>
             <a:ext cx="3739896" cy="408432"/>
           </a:xfrm>
           <a:prstGeom prst="rect">
@@ -17921,7 +16094,7 @@
         </p:nvSpPr>
         <p:spPr>
           <a:xfrm>
-            <a:off x="4727448" y="4448555"/>
+            <a:off x="4727448" y="4101083"/>
             <a:ext cx="1208603" cy="457200"/>
           </a:xfrm>
           <a:prstGeom prst="rect">
@@ -17964,7 +16137,7 @@
         </p:blipFill>
         <p:spPr>
           <a:xfrm>
-            <a:off x="5798891" y="4472940"/>
+            <a:off x="5798891" y="4125468"/>
             <a:ext cx="2840736" cy="408432"/>
           </a:xfrm>
           <a:prstGeom prst="rect">
@@ -18208,7 +16381,7 @@
         </p:nvSpPr>
         <p:spPr>
           <a:xfrm>
-            <a:off x="777240" y="1737360"/>
+            <a:off x="777240" y="1389888"/>
             <a:ext cx="10607040" cy="402336"/>
           </a:xfrm>
           <a:prstGeom prst="rect">
@@ -18243,7 +16416,7 @@
         </p:nvCxnSpPr>
         <p:spPr>
           <a:xfrm>
-            <a:off x="777240" y="2176272"/>
+            <a:off x="777240" y="1828800"/>
             <a:ext cx="10607040" cy="0"/>
           </a:xfrm>
           <a:prstGeom prst="line">
@@ -18279,7 +16452,7 @@
           <p:nvPr/>
         </p:nvGraphicFramePr>
         <p:xfrm>
-          <a:off x="1325879" y="2340864"/>
+          <a:off x="1325879" y="1993392"/>
           <a:ext cx="9509760" cy="1536192"/>
         </p:xfrm>
         <a:graphic>
@@ -19093,7 +17266,7 @@
         </p:nvSpPr>
         <p:spPr>
           <a:xfrm>
-            <a:off x="987552" y="4128515"/>
+            <a:off x="987552" y="3781044"/>
             <a:ext cx="3248043" cy="457200"/>
           </a:xfrm>
           <a:prstGeom prst="rect">
@@ -19136,7 +17309,7 @@
         </p:blipFill>
         <p:spPr>
           <a:xfrm>
-            <a:off x="4098435" y="4183380"/>
+            <a:off x="4098435" y="3835908"/>
             <a:ext cx="1837943" cy="347472"/>
           </a:xfrm>
           <a:prstGeom prst="rect">
@@ -19152,7 +17325,7 @@
         </p:nvSpPr>
         <p:spPr>
           <a:xfrm>
-            <a:off x="5936379" y="4128515"/>
+            <a:off x="5936379" y="3781044"/>
             <a:ext cx="2486441" cy="457200"/>
           </a:xfrm>
           <a:prstGeom prst="rect">
@@ -19195,7 +17368,7 @@
         </p:blipFill>
         <p:spPr>
           <a:xfrm>
-            <a:off x="8285661" y="4186428"/>
+            <a:off x="8285661" y="3838956"/>
             <a:ext cx="975360" cy="341376"/>
           </a:xfrm>
           <a:prstGeom prst="rect">
@@ -19326,44 +17499,9 @@
           </a:fontRef>
         </p:style>
       </p:cxnSp>
-      <p:sp>
-        <p:nvSpPr>
-          <p:cNvPr id="5" name="TextBox 4"/>
-          <p:cNvSpPr txBox="1"/>
-          <p:nvPr/>
-        </p:nvSpPr>
-        <p:spPr>
-          <a:xfrm>
-            <a:off x="777240" y="1261872"/>
-            <a:ext cx="10607040" cy="310896"/>
-          </a:xfrm>
-          <a:prstGeom prst="rect">
-            <a:avLst/>
-          </a:prstGeom>
-          <a:noFill/>
-        </p:spPr>
-        <p:txBody>
-          <a:bodyPr wrap="square" lIns="45720" rIns="45720" tIns="18288" bIns="18288" anchor="t">
-            <a:spAutoFit/>
-          </a:bodyPr>
-          <a:lstStyle/>
-          <a:p>
-            <a:pPr algn="l"/>
-            <a:r>
-              <a:rPr sz="1700" b="0" i="1">
-                <a:solidFill>
-                  <a:srgbClr val="6B6B6B"/>
-                </a:solidFill>
-                <a:latin typeface="Century Schoolbook"/>
-              </a:rPr>
-              <a:t>Two ways to the same value.</a:t>
-            </a:r>
-          </a:p>
-        </p:txBody>
-      </p:sp>
       <p:cxnSp>
         <p:nvCxnSpPr>
-          <p:cNvPr id="6" name="Connector 5"/>
+          <p:cNvPr id="5" name="Connector 4"/>
           <p:cNvCxnSpPr/>
           <p:nvPr/>
         </p:nvCxnSpPr>
@@ -19398,7 +17536,7 @@
       </p:cxnSp>
       <p:sp>
         <p:nvSpPr>
-          <p:cNvPr id="7" name="TextBox 6"/>
+          <p:cNvPr id="6" name="TextBox 5"/>
           <p:cNvSpPr txBox="1"/>
           <p:nvPr/>
         </p:nvSpPr>
@@ -19433,7 +17571,7 @@
       </p:sp>
       <p:sp>
         <p:nvSpPr>
-          <p:cNvPr id="8" name="TextBox 7"/>
+          <p:cNvPr id="7" name="TextBox 6"/>
           <p:cNvSpPr txBox="1"/>
           <p:nvPr/>
         </p:nvSpPr>
@@ -19468,7 +17606,7 @@
       </p:sp>
       <p:pic>
         <p:nvPicPr>
-          <p:cNvPr id="9" name="Picture 8" descr="662f7ef757f30ae7.png"/>
+          <p:cNvPr id="8" name="Picture 7" descr="662f7ef757f30ae7.png"/>
           <p:cNvPicPr>
             <a:picLocks noChangeAspect="1"/>
           </p:cNvPicPr>
@@ -19492,7 +17630,7 @@
       </p:pic>
       <p:sp>
         <p:nvSpPr>
-          <p:cNvPr id="10" name="TextBox 9"/>
+          <p:cNvPr id="9" name="TextBox 8"/>
           <p:cNvSpPr txBox="1"/>
           <p:nvPr/>
         </p:nvSpPr>
@@ -19648,44 +17786,9 @@
           </a:fontRef>
         </p:style>
       </p:cxnSp>
-      <p:sp>
-        <p:nvSpPr>
-          <p:cNvPr id="5" name="TextBox 4"/>
-          <p:cNvSpPr txBox="1"/>
-          <p:nvPr/>
-        </p:nvSpPr>
-        <p:spPr>
-          <a:xfrm>
-            <a:off x="777240" y="1261872"/>
-            <a:ext cx="10607040" cy="310896"/>
-          </a:xfrm>
-          <a:prstGeom prst="rect">
-            <a:avLst/>
-          </a:prstGeom>
-          <a:noFill/>
-        </p:spPr>
-        <p:txBody>
-          <a:bodyPr wrap="square" lIns="45720" rIns="45720" tIns="18288" bIns="18288" anchor="t">
-            <a:spAutoFit/>
-          </a:bodyPr>
-          <a:lstStyle/>
-          <a:p>
-            <a:pPr algn="l"/>
-            <a:r>
-              <a:rPr sz="1700" b="0" i="1">
-                <a:solidFill>
-                  <a:srgbClr val="6B6B6B"/>
-                </a:solidFill>
-                <a:latin typeface="Century Schoolbook"/>
-              </a:rPr>
-              <a:t>Worked both ways.</a:t>
-            </a:r>
-          </a:p>
-        </p:txBody>
-      </p:sp>
       <p:cxnSp>
         <p:nvCxnSpPr>
-          <p:cNvPr id="6" name="Connector 5"/>
+          <p:cNvPr id="5" name="Connector 4"/>
           <p:cNvCxnSpPr/>
           <p:nvPr/>
         </p:nvCxnSpPr>
@@ -19720,7 +17823,7 @@
       </p:cxnSp>
       <p:sp>
         <p:nvSpPr>
-          <p:cNvPr id="7" name="TextBox 6"/>
+          <p:cNvPr id="6" name="TextBox 5"/>
           <p:cNvSpPr txBox="1"/>
           <p:nvPr/>
         </p:nvSpPr>
@@ -19755,7 +17858,7 @@
       </p:sp>
       <p:sp>
         <p:nvSpPr>
-          <p:cNvPr id="8" name="TextBox 7"/>
+          <p:cNvPr id="7" name="TextBox 6"/>
           <p:cNvSpPr txBox="1"/>
           <p:nvPr/>
         </p:nvSpPr>
@@ -19790,7 +17893,7 @@
       </p:sp>
       <p:pic>
         <p:nvPicPr>
-          <p:cNvPr id="9" name="Picture 8" descr="1638dccdf2248bcf.png"/>
+          <p:cNvPr id="8" name="Picture 7" descr="1638dccdf2248bcf.png"/>
           <p:cNvPicPr>
             <a:picLocks noChangeAspect="1"/>
           </p:cNvPicPr>
@@ -19812,44 +17915,9 @@
           </a:prstGeom>
         </p:spPr>
       </p:pic>
-      <p:sp>
-        <p:nvSpPr>
-          <p:cNvPr id="10" name="TextBox 9"/>
-          <p:cNvSpPr txBox="1"/>
-          <p:nvPr/>
-        </p:nvSpPr>
-        <p:spPr>
-          <a:xfrm>
-            <a:off x="5163312" y="1865376"/>
-            <a:ext cx="6220967" cy="502920"/>
-          </a:xfrm>
-          <a:prstGeom prst="rect">
-            <a:avLst/>
-          </a:prstGeom>
-          <a:noFill/>
-        </p:spPr>
-        <p:txBody>
-          <a:bodyPr wrap="square" lIns="45720" rIns="45720" tIns="18288" bIns="18288" anchor="ctr">
-            <a:spAutoFit/>
-          </a:bodyPr>
-          <a:lstStyle/>
-          <a:p>
-            <a:pPr algn="l"/>
-            <a:r>
-              <a:rPr sz="2100" b="0" i="1">
-                <a:solidFill>
-                  <a:srgbClr val="6B6B6B"/>
-                </a:solidFill>
-                <a:latin typeface="Century Schoolbook"/>
-              </a:rPr>
-              <a:t>product of powers: same base, add</a:t>
-            </a:r>
-          </a:p>
-        </p:txBody>
-      </p:sp>
       <p:pic>
         <p:nvPicPr>
-          <p:cNvPr id="11" name="Picture 10" descr="4bce5fcbc09ba5a5.png"/>
+          <p:cNvPr id="9" name="Picture 8" descr="4bce5fcbc09ba5a5.png"/>
           <p:cNvPicPr>
             <a:picLocks noChangeAspect="1"/>
           </p:cNvPicPr>
@@ -19871,44 +17939,9 @@
           </a:prstGeom>
         </p:spPr>
       </p:pic>
-      <p:sp>
-        <p:nvSpPr>
-          <p:cNvPr id="12" name="TextBox 11"/>
-          <p:cNvSpPr txBox="1"/>
-          <p:nvPr/>
-        </p:nvSpPr>
-        <p:spPr>
-          <a:xfrm>
-            <a:off x="3621024" y="2487168"/>
-            <a:ext cx="6400800" cy="502920"/>
-          </a:xfrm>
-          <a:prstGeom prst="rect">
-            <a:avLst/>
-          </a:prstGeom>
-          <a:noFill/>
-        </p:spPr>
-        <p:txBody>
-          <a:bodyPr wrap="square" lIns="45720" rIns="45720" tIns="18288" bIns="18288" anchor="ctr">
-            <a:spAutoFit/>
-          </a:bodyPr>
-          <a:lstStyle/>
-          <a:p>
-            <a:pPr algn="l"/>
-            <a:r>
-              <a:rPr sz="2100" b="0" i="1">
-                <a:solidFill>
-                  <a:srgbClr val="6B6B6B"/>
-                </a:solidFill>
-                <a:latin typeface="Century Schoolbook"/>
-              </a:rPr>
-              <a:t>evaluate the single power</a:t>
-            </a:r>
-          </a:p>
-        </p:txBody>
-      </p:sp>
       <p:pic>
         <p:nvPicPr>
-          <p:cNvPr id="13" name="Picture 12" descr="939d17ddf54fca0c.png"/>
+          <p:cNvPr id="10" name="Picture 9" descr="939d17ddf54fca0c.png"/>
           <p:cNvPicPr>
             <a:picLocks noChangeAspect="1"/>
           </p:cNvPicPr>
@@ -19932,42 +17965,7 @@
       </p:pic>
       <p:sp>
         <p:nvSpPr>
-          <p:cNvPr id="14" name="TextBox 13"/>
-          <p:cNvSpPr txBox="1"/>
-          <p:nvPr/>
-        </p:nvSpPr>
-        <p:spPr>
-          <a:xfrm>
-            <a:off x="4096512" y="3078479"/>
-            <a:ext cx="6400800" cy="502920"/>
-          </a:xfrm>
-          <a:prstGeom prst="rect">
-            <a:avLst/>
-          </a:prstGeom>
-          <a:noFill/>
-        </p:spPr>
-        <p:txBody>
-          <a:bodyPr wrap="square" lIns="45720" rIns="45720" tIns="18288" bIns="18288" anchor="ctr">
-            <a:spAutoFit/>
-          </a:bodyPr>
-          <a:lstStyle/>
-          <a:p>
-            <a:pPr algn="l"/>
-            <a:r>
-              <a:rPr sz="2100" b="0" i="1">
-                <a:solidFill>
-                  <a:srgbClr val="6B6B6B"/>
-                </a:solidFill>
-                <a:latin typeface="Century Schoolbook"/>
-              </a:rPr>
-              <a:t>check: evaluate each, then multiply</a:t>
-            </a:r>
-          </a:p>
-        </p:txBody>
-      </p:sp>
-      <p:sp>
-        <p:nvSpPr>
-          <p:cNvPr id="15" name="TextBox 14"/>
+          <p:cNvPr id="11" name="TextBox 10"/>
           <p:cNvSpPr txBox="1"/>
           <p:nvPr/>
         </p:nvSpPr>

--- a/a7/packages/A7 Unit 3 - Exponents and Scientific Notation/Lessons/3.01/A7 3.01 Product Laws of Exponents - Slides.pptx
+++ b/a7/packages/A7 Unit 3 - Exponents and Scientific Notation/Lessons/3.01/A7 3.01 Product Laws of Exponents - Slides.pptx
@@ -13582,23 +13582,23 @@
         </p:nvSpPr>
         <p:spPr>
           <a:xfrm>
-            <a:off x="960120" y="2011680"/>
-            <a:ext cx="548640" cy="356616"/>
-          </a:xfrm>
-          <a:prstGeom prst="rect">
-            <a:avLst/>
-          </a:prstGeom>
-          <a:noFill/>
-        </p:spPr>
-        <p:txBody>
-          <a:bodyPr wrap="square" lIns="45720" rIns="45720" tIns="18288" bIns="18288" anchor="t">
+            <a:off x="960120" y="1495043"/>
+            <a:ext cx="548640" cy="457200"/>
+          </a:xfrm>
+          <a:prstGeom prst="rect">
+            <a:avLst/>
+          </a:prstGeom>
+          <a:noFill/>
+        </p:spPr>
+        <p:txBody>
+          <a:bodyPr wrap="square" lIns="45720" rIns="45720" tIns="18288" bIns="18288" anchor="ctr">
             <a:spAutoFit/>
           </a:bodyPr>
           <a:lstStyle/>
           <a:p>
             <a:pPr algn="l"/>
             <a:r>
-              <a:rPr sz="2100" b="1" i="0">
+              <a:rPr sz="2300" b="1" i="0">
                 <a:solidFill>
                   <a:srgbClr val="0B5394"/>
                 </a:solidFill>
@@ -13617,58 +13617,82 @@
         </p:nvSpPr>
         <p:spPr>
           <a:xfrm>
-            <a:off x="1554480" y="2011680"/>
-            <a:ext cx="9829800" cy="411480"/>
-          </a:xfrm>
-          <a:prstGeom prst="rect">
-            <a:avLst/>
-          </a:prstGeom>
-          <a:noFill/>
-        </p:spPr>
-        <p:txBody>
-          <a:bodyPr wrap="square" lIns="45720" rIns="45720" tIns="18288" bIns="18288" anchor="t">
-            <a:spAutoFit/>
+            <a:off x="1554480" y="1495044"/>
+            <a:ext cx="3168165" cy="457200"/>
+          </a:xfrm>
+          <a:prstGeom prst="rect">
+            <a:avLst/>
+          </a:prstGeom>
+          <a:noFill/>
+        </p:spPr>
+        <p:txBody>
+          <a:bodyPr wrap="none" lIns="45720" rIns="45720" tIns="18288" bIns="18288" anchor="ctr">
+            <a:noAutofit/>
           </a:bodyPr>
           <a:lstStyle/>
           <a:p>
             <a:pPr algn="l"/>
             <a:r>
-              <a:rPr sz="2100" b="0" i="0">
+              <a:rPr sz="2300" b="0" i="0">
                 <a:solidFill>
                   <a:srgbClr val="1A1A1A"/>
                 </a:solidFill>
                 <a:latin typeface="Century Schoolbook"/>
               </a:rPr>
-              <a:t>Six questions. Work down the page.</a:t>
-            </a:r>
-          </a:p>
-        </p:txBody>
-      </p:sp>
-      <p:sp>
-        <p:nvSpPr>
-          <p:cNvPr id="10" name="TextBox 9"/>
-          <p:cNvSpPr txBox="1"/>
-          <p:nvPr/>
-        </p:nvSpPr>
-        <p:spPr>
-          <a:xfrm>
-            <a:off x="960120" y="2551176"/>
-            <a:ext cx="548640" cy="356616"/>
-          </a:xfrm>
-          <a:prstGeom prst="rect">
-            <a:avLst/>
-          </a:prstGeom>
-          <a:noFill/>
-        </p:spPr>
-        <p:txBody>
-          <a:bodyPr wrap="square" lIns="45720" rIns="45720" tIns="18288" bIns="18288" anchor="t">
+              <a:t>Write as one power.  </a:t>
+            </a:r>
+          </a:p>
+        </p:txBody>
+      </p:sp>
+      <p:pic>
+        <p:nvPicPr>
+          <p:cNvPr id="10" name="Picture 9" descr="6d3773d9800b92db.png"/>
+          <p:cNvPicPr>
+            <a:picLocks noChangeAspect="1"/>
+          </p:cNvPicPr>
+          <p:nvPr/>
+        </p:nvPicPr>
+        <p:blipFill>
+          <a:blip r:embed="rId2"/>
+          <a:stretch>
+            <a:fillRect/>
+          </a:stretch>
+        </p:blipFill>
+        <p:spPr>
+          <a:xfrm>
+            <a:off x="4585485" y="1583436"/>
+            <a:ext cx="749808" cy="280416"/>
+          </a:xfrm>
+          <a:prstGeom prst="rect">
+            <a:avLst/>
+          </a:prstGeom>
+        </p:spPr>
+      </p:pic>
+      <p:sp>
+        <p:nvSpPr>
+          <p:cNvPr id="11" name="TextBox 10"/>
+          <p:cNvSpPr txBox="1"/>
+          <p:nvPr/>
+        </p:nvSpPr>
+        <p:spPr>
+          <a:xfrm>
+            <a:off x="960120" y="2089403"/>
+            <a:ext cx="548640" cy="457200"/>
+          </a:xfrm>
+          <a:prstGeom prst="rect">
+            <a:avLst/>
+          </a:prstGeom>
+          <a:noFill/>
+        </p:spPr>
+        <p:txBody>
+          <a:bodyPr wrap="square" lIns="45720" rIns="45720" tIns="18288" bIns="18288" anchor="ctr">
             <a:spAutoFit/>
           </a:bodyPr>
           <a:lstStyle/>
           <a:p>
             <a:pPr algn="l"/>
             <a:r>
-              <a:rPr sz="2100" b="1" i="0">
+              <a:rPr sz="2300" b="1" i="0">
                 <a:solidFill>
                   <a:srgbClr val="0B5394"/>
                 </a:solidFill>
@@ -13681,64 +13705,88 @@
       </p:sp>
       <p:sp>
         <p:nvSpPr>
-          <p:cNvPr id="11" name="TextBox 10"/>
-          <p:cNvSpPr txBox="1"/>
-          <p:nvPr/>
-        </p:nvSpPr>
-        <p:spPr>
-          <a:xfrm>
-            <a:off x="1554480" y="2551176"/>
-            <a:ext cx="9829800" cy="411480"/>
-          </a:xfrm>
-          <a:prstGeom prst="rect">
-            <a:avLst/>
-          </a:prstGeom>
-          <a:noFill/>
-        </p:spPr>
-        <p:txBody>
-          <a:bodyPr wrap="square" lIns="45720" rIns="45720" tIns="18288" bIns="18288" anchor="t">
-            <a:spAutoFit/>
+          <p:cNvPr id="12" name="TextBox 11"/>
+          <p:cNvSpPr txBox="1"/>
+          <p:nvPr/>
+        </p:nvSpPr>
+        <p:spPr>
+          <a:xfrm>
+            <a:off x="1554480" y="2089403"/>
+            <a:ext cx="2548440" cy="457200"/>
+          </a:xfrm>
+          <a:prstGeom prst="rect">
+            <a:avLst/>
+          </a:prstGeom>
+          <a:noFill/>
+        </p:spPr>
+        <p:txBody>
+          <a:bodyPr wrap="none" lIns="45720" rIns="45720" tIns="18288" bIns="18288" anchor="ctr">
+            <a:noAutofit/>
           </a:bodyPr>
           <a:lstStyle/>
           <a:p>
             <a:pPr algn="l"/>
             <a:r>
-              <a:rPr sz="2100" b="0" i="0">
+              <a:rPr sz="2300" b="0" i="0">
                 <a:solidFill>
                   <a:srgbClr val="1A1A1A"/>
                 </a:solidFill>
                 <a:latin typeface="Century Schoolbook"/>
               </a:rPr>
-              <a:t>Show the step that does the work, not just the answer.</a:t>
-            </a:r>
-          </a:p>
-        </p:txBody>
-      </p:sp>
-      <p:sp>
-        <p:nvSpPr>
-          <p:cNvPr id="12" name="TextBox 11"/>
-          <p:cNvSpPr txBox="1"/>
-          <p:nvPr/>
-        </p:nvSpPr>
-        <p:spPr>
-          <a:xfrm>
-            <a:off x="960120" y="3090672"/>
-            <a:ext cx="548640" cy="356616"/>
-          </a:xfrm>
-          <a:prstGeom prst="rect">
-            <a:avLst/>
-          </a:prstGeom>
-          <a:noFill/>
-        </p:spPr>
-        <p:txBody>
-          <a:bodyPr wrap="square" lIns="45720" rIns="45720" tIns="18288" bIns="18288" anchor="t">
+              <a:t>Find the value.  </a:t>
+            </a:r>
+          </a:p>
+        </p:txBody>
+      </p:sp>
+      <p:pic>
+        <p:nvPicPr>
+          <p:cNvPr id="13" name="Picture 12" descr="8b7a2cb55dcba947.png"/>
+          <p:cNvPicPr>
+            <a:picLocks noChangeAspect="1"/>
+          </p:cNvPicPr>
+          <p:nvPr/>
+        </p:nvPicPr>
+        <p:blipFill>
+          <a:blip r:embed="rId3"/>
+          <a:stretch>
+            <a:fillRect/>
+          </a:stretch>
+        </p:blipFill>
+        <p:spPr>
+          <a:xfrm>
+            <a:off x="3965760" y="2180844"/>
+            <a:ext cx="758952" cy="274320"/>
+          </a:xfrm>
+          <a:prstGeom prst="rect">
+            <a:avLst/>
+          </a:prstGeom>
+        </p:spPr>
+      </p:pic>
+      <p:sp>
+        <p:nvSpPr>
+          <p:cNvPr id="14" name="TextBox 13"/>
+          <p:cNvSpPr txBox="1"/>
+          <p:nvPr/>
+        </p:nvSpPr>
+        <p:spPr>
+          <a:xfrm>
+            <a:off x="960120" y="2683763"/>
+            <a:ext cx="548640" cy="457200"/>
+          </a:xfrm>
+          <a:prstGeom prst="rect">
+            <a:avLst/>
+          </a:prstGeom>
+          <a:noFill/>
+        </p:spPr>
+        <p:txBody>
+          <a:bodyPr wrap="square" lIns="45720" rIns="45720" tIns="18288" bIns="18288" anchor="ctr">
             <a:spAutoFit/>
           </a:bodyPr>
           <a:lstStyle/>
           <a:p>
             <a:pPr algn="l"/>
             <a:r>
-              <a:rPr sz="2100" b="1" i="0">
+              <a:rPr sz="2300" b="1" i="0">
                 <a:solidFill>
                   <a:srgbClr val="0B5394"/>
                 </a:solidFill>
@@ -13751,39 +13799,404 @@
       </p:sp>
       <p:sp>
         <p:nvSpPr>
-          <p:cNvPr id="13" name="TextBox 12"/>
-          <p:cNvSpPr txBox="1"/>
-          <p:nvPr/>
-        </p:nvSpPr>
-        <p:spPr>
-          <a:xfrm>
-            <a:off x="1554480" y="3090672"/>
-            <a:ext cx="9829800" cy="411480"/>
-          </a:xfrm>
-          <a:prstGeom prst="rect">
-            <a:avLst/>
-          </a:prstGeom>
-          <a:noFill/>
-        </p:spPr>
-        <p:txBody>
-          <a:bodyPr wrap="square" lIns="45720" rIns="45720" tIns="18288" bIns="18288" anchor="t">
-            <a:spAutoFit/>
+          <p:cNvPr id="15" name="TextBox 14"/>
+          <p:cNvSpPr txBox="1"/>
+          <p:nvPr/>
+        </p:nvSpPr>
+        <p:spPr>
+          <a:xfrm>
+            <a:off x="1554480" y="2683763"/>
+            <a:ext cx="3168165" cy="457200"/>
+          </a:xfrm>
+          <a:prstGeom prst="rect">
+            <a:avLst/>
+          </a:prstGeom>
+          <a:noFill/>
+        </p:spPr>
+        <p:txBody>
+          <a:bodyPr wrap="none" lIns="45720" rIns="45720" tIns="18288" bIns="18288" anchor="ctr">
+            <a:noAutofit/>
           </a:bodyPr>
           <a:lstStyle/>
           <a:p>
             <a:pPr algn="l"/>
             <a:r>
-              <a:rPr sz="2100" b="0" i="0">
+              <a:rPr sz="2300" b="0" i="0">
                 <a:solidFill>
                   <a:srgbClr val="1A1A1A"/>
                 </a:solidFill>
                 <a:latin typeface="Century Schoolbook"/>
               </a:rPr>
-              <a:t>Silence until the six minutes are up.</a:t>
-            </a:r>
-          </a:p>
-        </p:txBody>
-      </p:sp>
+              <a:t>Write as one power.  </a:t>
+            </a:r>
+          </a:p>
+        </p:txBody>
+      </p:sp>
+      <p:pic>
+        <p:nvPicPr>
+          <p:cNvPr id="16" name="Picture 15" descr="8e2e3ba64c00d8d6.png"/>
+          <p:cNvPicPr>
+            <a:picLocks noChangeAspect="1"/>
+          </p:cNvPicPr>
+          <p:nvPr/>
+        </p:nvPicPr>
+        <p:blipFill>
+          <a:blip r:embed="rId4"/>
+          <a:stretch>
+            <a:fillRect/>
+          </a:stretch>
+        </p:blipFill>
+        <p:spPr>
+          <a:xfrm>
+            <a:off x="4585485" y="2744723"/>
+            <a:ext cx="618744" cy="335280"/>
+          </a:xfrm>
+          <a:prstGeom prst="rect">
+            <a:avLst/>
+          </a:prstGeom>
+        </p:spPr>
+      </p:pic>
+      <p:sp>
+        <p:nvSpPr>
+          <p:cNvPr id="17" name="TextBox 16"/>
+          <p:cNvSpPr txBox="1"/>
+          <p:nvPr/>
+        </p:nvSpPr>
+        <p:spPr>
+          <a:xfrm>
+            <a:off x="960120" y="3278123"/>
+            <a:ext cx="548640" cy="457200"/>
+          </a:xfrm>
+          <a:prstGeom prst="rect">
+            <a:avLst/>
+          </a:prstGeom>
+          <a:noFill/>
+        </p:spPr>
+        <p:txBody>
+          <a:bodyPr wrap="square" lIns="45720" rIns="45720" tIns="18288" bIns="18288" anchor="ctr">
+            <a:spAutoFit/>
+          </a:bodyPr>
+          <a:lstStyle/>
+          <a:p>
+            <a:pPr algn="l"/>
+            <a:r>
+              <a:rPr sz="2300" b="1" i="0">
+                <a:solidFill>
+                  <a:srgbClr val="0B5394"/>
+                </a:solidFill>
+                <a:latin typeface="Century Schoolbook"/>
+              </a:rPr>
+              <a:t>4.</a:t>
+            </a:r>
+          </a:p>
+        </p:txBody>
+      </p:sp>
+      <p:sp>
+        <p:nvSpPr>
+          <p:cNvPr id="18" name="TextBox 17"/>
+          <p:cNvSpPr txBox="1"/>
+          <p:nvPr/>
+        </p:nvSpPr>
+        <p:spPr>
+          <a:xfrm>
+            <a:off x="1554480" y="3278123"/>
+            <a:ext cx="2548440" cy="457200"/>
+          </a:xfrm>
+          <a:prstGeom prst="rect">
+            <a:avLst/>
+          </a:prstGeom>
+          <a:noFill/>
+        </p:spPr>
+        <p:txBody>
+          <a:bodyPr wrap="none" lIns="45720" rIns="45720" tIns="18288" bIns="18288" anchor="ctr">
+            <a:noAutofit/>
+          </a:bodyPr>
+          <a:lstStyle/>
+          <a:p>
+            <a:pPr algn="l"/>
+            <a:r>
+              <a:rPr sz="2300" b="0" i="0">
+                <a:solidFill>
+                  <a:srgbClr val="1A1A1A"/>
+                </a:solidFill>
+                <a:latin typeface="Century Schoolbook"/>
+              </a:rPr>
+              <a:t>Find the value.  </a:t>
+            </a:r>
+          </a:p>
+        </p:txBody>
+      </p:sp>
+      <p:pic>
+        <p:nvPicPr>
+          <p:cNvPr id="19" name="Picture 18" descr="46f85d9f4b191651.png"/>
+          <p:cNvPicPr>
+            <a:picLocks noChangeAspect="1"/>
+          </p:cNvPicPr>
+          <p:nvPr/>
+        </p:nvPicPr>
+        <p:blipFill>
+          <a:blip r:embed="rId5"/>
+          <a:stretch>
+            <a:fillRect/>
+          </a:stretch>
+        </p:blipFill>
+        <p:spPr>
+          <a:xfrm>
+            <a:off x="3965760" y="3339083"/>
+            <a:ext cx="838200" cy="335280"/>
+          </a:xfrm>
+          <a:prstGeom prst="rect">
+            <a:avLst/>
+          </a:prstGeom>
+        </p:spPr>
+      </p:pic>
+      <p:sp>
+        <p:nvSpPr>
+          <p:cNvPr id="20" name="TextBox 19"/>
+          <p:cNvSpPr txBox="1"/>
+          <p:nvPr/>
+        </p:nvSpPr>
+        <p:spPr>
+          <a:xfrm>
+            <a:off x="960120" y="3872483"/>
+            <a:ext cx="548640" cy="457200"/>
+          </a:xfrm>
+          <a:prstGeom prst="rect">
+            <a:avLst/>
+          </a:prstGeom>
+          <a:noFill/>
+        </p:spPr>
+        <p:txBody>
+          <a:bodyPr wrap="square" lIns="45720" rIns="45720" tIns="18288" bIns="18288" anchor="ctr">
+            <a:spAutoFit/>
+          </a:bodyPr>
+          <a:lstStyle/>
+          <a:p>
+            <a:pPr algn="l"/>
+            <a:r>
+              <a:rPr sz="2300" b="1" i="0">
+                <a:solidFill>
+                  <a:srgbClr val="0B5394"/>
+                </a:solidFill>
+                <a:latin typeface="Century Schoolbook"/>
+              </a:rPr>
+              <a:t>5.</a:t>
+            </a:r>
+          </a:p>
+        </p:txBody>
+      </p:sp>
+      <p:sp>
+        <p:nvSpPr>
+          <p:cNvPr id="21" name="TextBox 20"/>
+          <p:cNvSpPr txBox="1"/>
+          <p:nvPr/>
+        </p:nvSpPr>
+        <p:spPr>
+          <a:xfrm>
+            <a:off x="1554480" y="3872483"/>
+            <a:ext cx="2548440" cy="457200"/>
+          </a:xfrm>
+          <a:prstGeom prst="rect">
+            <a:avLst/>
+          </a:prstGeom>
+          <a:noFill/>
+        </p:spPr>
+        <p:txBody>
+          <a:bodyPr wrap="none" lIns="45720" rIns="45720" tIns="18288" bIns="18288" anchor="ctr">
+            <a:noAutofit/>
+          </a:bodyPr>
+          <a:lstStyle/>
+          <a:p>
+            <a:pPr algn="l"/>
+            <a:r>
+              <a:rPr sz="2300" b="0" i="0">
+                <a:solidFill>
+                  <a:srgbClr val="1A1A1A"/>
+                </a:solidFill>
+                <a:latin typeface="Century Schoolbook"/>
+              </a:rPr>
+              <a:t>Find the value.  </a:t>
+            </a:r>
+          </a:p>
+        </p:txBody>
+      </p:sp>
+      <p:pic>
+        <p:nvPicPr>
+          <p:cNvPr id="22" name="Picture 21" descr="df0ae84d8a3187e4.png"/>
+          <p:cNvPicPr>
+            <a:picLocks noChangeAspect="1"/>
+          </p:cNvPicPr>
+          <p:nvPr/>
+        </p:nvPicPr>
+        <p:blipFill>
+          <a:blip r:embed="rId6"/>
+          <a:stretch>
+            <a:fillRect/>
+          </a:stretch>
+        </p:blipFill>
+        <p:spPr>
+          <a:xfrm>
+            <a:off x="3965760" y="3933444"/>
+            <a:ext cx="1645920" cy="335280"/>
+          </a:xfrm>
+          <a:prstGeom prst="rect">
+            <a:avLst/>
+          </a:prstGeom>
+        </p:spPr>
+      </p:pic>
+      <p:sp>
+        <p:nvSpPr>
+          <p:cNvPr id="23" name="TextBox 22"/>
+          <p:cNvSpPr txBox="1"/>
+          <p:nvPr/>
+        </p:nvSpPr>
+        <p:spPr>
+          <a:xfrm>
+            <a:off x="960120" y="4466844"/>
+            <a:ext cx="548640" cy="457200"/>
+          </a:xfrm>
+          <a:prstGeom prst="rect">
+            <a:avLst/>
+          </a:prstGeom>
+          <a:noFill/>
+        </p:spPr>
+        <p:txBody>
+          <a:bodyPr wrap="square" lIns="45720" rIns="45720" tIns="18288" bIns="18288" anchor="ctr">
+            <a:spAutoFit/>
+          </a:bodyPr>
+          <a:lstStyle/>
+          <a:p>
+            <a:pPr algn="l"/>
+            <a:r>
+              <a:rPr sz="2300" b="1" i="0">
+                <a:solidFill>
+                  <a:srgbClr val="0B5394"/>
+                </a:solidFill>
+                <a:latin typeface="Century Schoolbook"/>
+              </a:rPr>
+              <a:t>6.</a:t>
+            </a:r>
+          </a:p>
+        </p:txBody>
+      </p:sp>
+      <p:sp>
+        <p:nvSpPr>
+          <p:cNvPr id="24" name="TextBox 23"/>
+          <p:cNvSpPr txBox="1"/>
+          <p:nvPr/>
+        </p:nvSpPr>
+        <p:spPr>
+          <a:xfrm>
+            <a:off x="1554480" y="4466844"/>
+            <a:ext cx="2720291" cy="457200"/>
+          </a:xfrm>
+          <a:prstGeom prst="rect">
+            <a:avLst/>
+          </a:prstGeom>
+          <a:noFill/>
+        </p:spPr>
+        <p:txBody>
+          <a:bodyPr wrap="none" lIns="45720" rIns="45720" tIns="18288" bIns="18288" anchor="ctr">
+            <a:noAutofit/>
+          </a:bodyPr>
+          <a:lstStyle/>
+          <a:p>
+            <a:pPr algn="l"/>
+            <a:r>
+              <a:rPr sz="2300" b="0" i="0">
+                <a:solidFill>
+                  <a:srgbClr val="1A1A1A"/>
+                </a:solidFill>
+                <a:latin typeface="Century Schoolbook"/>
+              </a:rPr>
+              <a:t>Find the value of </a:t>
+            </a:r>
+          </a:p>
+        </p:txBody>
+      </p:sp>
+      <p:pic>
+        <p:nvPicPr>
+          <p:cNvPr id="25" name="Picture 24" descr="0afe177f69dd5e06.png"/>
+          <p:cNvPicPr>
+            <a:picLocks noChangeAspect="1"/>
+          </p:cNvPicPr>
+          <p:nvPr/>
+        </p:nvPicPr>
+        <p:blipFill>
+          <a:blip r:embed="rId7"/>
+          <a:stretch>
+            <a:fillRect/>
+          </a:stretch>
+        </p:blipFill>
+        <p:spPr>
+          <a:xfrm>
+            <a:off x="4137611" y="4620768"/>
+            <a:ext cx="155448" cy="149352"/>
+          </a:xfrm>
+          <a:prstGeom prst="rect">
+            <a:avLst/>
+          </a:prstGeom>
+        </p:spPr>
+      </p:pic>
+      <p:sp>
+        <p:nvSpPr>
+          <p:cNvPr id="26" name="TextBox 25"/>
+          <p:cNvSpPr txBox="1"/>
+          <p:nvPr/>
+        </p:nvSpPr>
+        <p:spPr>
+          <a:xfrm>
+            <a:off x="4293059" y="4466844"/>
+            <a:ext cx="468561" cy="457200"/>
+          </a:xfrm>
+          <a:prstGeom prst="rect">
+            <a:avLst/>
+          </a:prstGeom>
+          <a:noFill/>
+        </p:spPr>
+        <p:txBody>
+          <a:bodyPr wrap="none" lIns="45720" rIns="45720" tIns="18288" bIns="18288" anchor="ctr">
+            <a:noAutofit/>
+          </a:bodyPr>
+          <a:lstStyle/>
+          <a:p>
+            <a:pPr algn="l"/>
+            <a:r>
+              <a:rPr sz="2300" b="0" i="0">
+                <a:solidFill>
+                  <a:srgbClr val="1A1A1A"/>
+                </a:solidFill>
+                <a:latin typeface="Century Schoolbook"/>
+              </a:rPr>
+              <a:t>.  </a:t>
+            </a:r>
+          </a:p>
+        </p:txBody>
+      </p:sp>
+      <p:pic>
+        <p:nvPicPr>
+          <p:cNvPr id="27" name="Picture 26" descr="46cee507e28ffbc7.png"/>
+          <p:cNvPicPr>
+            <a:picLocks noChangeAspect="1"/>
+          </p:cNvPicPr>
+          <p:nvPr/>
+        </p:nvPicPr>
+        <p:blipFill>
+          <a:blip r:embed="rId8"/>
+          <a:stretch>
+            <a:fillRect/>
+          </a:stretch>
+        </p:blipFill>
+        <p:spPr>
+          <a:xfrm>
+            <a:off x="4624460" y="4555236"/>
+            <a:ext cx="1374648" cy="280416"/>
+          </a:xfrm>
+          <a:prstGeom prst="rect">
+            <a:avLst/>
+          </a:prstGeom>
+        </p:spPr>
+      </p:pic>
     </p:spTree>
   </p:cSld>
   <p:clrMapOvr>

--- a/a7/packages/A7 Unit 3 - Exponents and Scientific Notation/Lessons/3.01/A7 3.01 Product Laws of Exponents - Slides.pptx
+++ b/a7/packages/A7 Unit 3 - Exponents and Scientific Notation/Lessons/3.01/A7 3.01 Product Laws of Exponents - Slides.pptx
@@ -3146,11 +3146,11 @@
           <a:p>
             <a:pPr algn="ctr"/>
             <a:r>
-              <a:rPr sz="1500" b="0" i="0">
+              <a:rPr sz="1420" b="0" i="0">
                 <a:solidFill>
                   <a:srgbClr val="6B6B6B"/>
                 </a:solidFill>
-                <a:latin typeface="Century Schoolbook"/>
+                <a:latin typeface="Lexend"/>
               </a:rPr>
               <a:t>GRADE 7 ACCELERATED  ·  UNIT 3  ·  LESSON 1</a:t>
             </a:r>
@@ -3181,11 +3181,11 @@
           <a:p>
             <a:pPr algn="ctr"/>
             <a:r>
-              <a:rPr sz="3400" b="1" i="0">
+              <a:rPr sz="3229" b="1" i="0">
                 <a:solidFill>
                   <a:srgbClr val="1A1A1A"/>
                 </a:solidFill>
-                <a:latin typeface="Century Schoolbook"/>
+                <a:latin typeface="Lexend"/>
               </a:rPr>
               <a:t>Product Laws of Exponents</a:t>
             </a:r>
@@ -3286,11 +3286,11 @@
           <a:p>
             <a:pPr algn="ctr"/>
             <a:r>
-              <a:rPr sz="1600" b="1" i="0">
+              <a:rPr sz="1520" b="1" i="0">
                 <a:solidFill>
                   <a:srgbClr val="1A1A1A"/>
                 </a:solidFill>
-                <a:latin typeface="Century Schoolbook"/>
+                <a:latin typeface="Lexend"/>
               </a:rPr>
               <a:t>MA.7.NSO.1.1</a:t>
             </a:r>
@@ -3321,11 +3321,11 @@
           <a:p>
             <a:pPr algn="ctr"/>
             <a:r>
-              <a:rPr sz="1900" b="0" i="1">
+              <a:rPr sz="1810" b="0" i="0">
                 <a:solidFill>
                   <a:srgbClr val="1A1A1A"/>
                 </a:solidFill>
-                <a:latin typeface="Century Schoolbook"/>
+                <a:latin typeface="Lexend"/>
               </a:rPr>
               <a:t>I can use the product of powers, power of a product, power of a power and identity laws to rewrite and evaluate a numerical expression.</a:t>
             </a:r>
@@ -3391,11 +3391,11 @@
           <a:p>
             <a:pPr algn="l"/>
             <a:r>
-              <a:rPr sz="1100" b="0" i="1">
+              <a:rPr sz="1040" b="0" i="0">
                 <a:solidFill>
                   <a:srgbClr val="6B6B6B"/>
                 </a:solidFill>
-                <a:latin typeface="Century Schoolbook"/>
+                <a:latin typeface="Lexend"/>
               </a:rPr>
               <a:t>Grade 7 Accelerated · Unit 3 · Lesson 1 — Product Laws of Exponents</a:t>
             </a:r>
@@ -3426,11 +3426,11 @@
           <a:p>
             <a:pPr algn="r"/>
             <a:r>
-              <a:rPr sz="1100" b="0" i="0">
+              <a:rPr sz="1040" b="0" i="0">
                 <a:solidFill>
                   <a:srgbClr val="6B6B6B"/>
                 </a:solidFill>
-                <a:latin typeface="Century Schoolbook"/>
+                <a:latin typeface="Lexend"/>
               </a:rPr>
               <a:t>1</a:t>
             </a:r>
@@ -3479,11 +3479,11 @@
           <a:p>
             <a:pPr algn="l"/>
             <a:r>
-              <a:rPr sz="3600" b="1" i="0">
+              <a:rPr sz="3420" b="1" i="0">
                 <a:solidFill>
                   <a:srgbClr val="1A1A1A"/>
                 </a:solidFill>
-                <a:latin typeface="Century Schoolbook"/>
+                <a:latin typeface="Lexend"/>
               </a:rPr>
               <a:t>Your Turn</a:t>
             </a:r>
@@ -3619,11 +3619,11 @@
           <a:p>
             <a:pPr algn="l"/>
             <a:r>
-              <a:rPr sz="1100" b="0" i="1">
+              <a:rPr sz="1040" b="0" i="0">
                 <a:solidFill>
                   <a:srgbClr val="6B6B6B"/>
                 </a:solidFill>
-                <a:latin typeface="Century Schoolbook"/>
+                <a:latin typeface="Lexend"/>
               </a:rPr>
               <a:t>Grade 7 Accelerated · Unit 3 · Lesson 1 — Product Laws of Exponents</a:t>
             </a:r>
@@ -3654,11 +3654,11 @@
           <a:p>
             <a:pPr algn="r"/>
             <a:r>
-              <a:rPr sz="1100" b="0" i="0">
+              <a:rPr sz="1040" b="0" i="0">
                 <a:solidFill>
                   <a:srgbClr val="6B6B6B"/>
                 </a:solidFill>
-                <a:latin typeface="Century Schoolbook"/>
+                <a:latin typeface="Lexend"/>
               </a:rPr>
               <a:t>10</a:t>
             </a:r>
@@ -3667,7 +3667,7 @@
       </p:sp>
       <p:pic>
         <p:nvPicPr>
-          <p:cNvPr id="8" name="Picture 7" descr="0dfb72a0f6508b3b.png"/>
+          <p:cNvPr id="8" name="Picture 7" descr="b03341d68f8c1460.png"/>
           <p:cNvPicPr>
             <a:picLocks noChangeAspect="1"/>
           </p:cNvPicPr>
@@ -3681,8 +3681,8 @@
         </p:blipFill>
         <p:spPr>
           <a:xfrm>
-            <a:off x="5494020" y="2194560"/>
-            <a:ext cx="1173480" cy="426720"/>
+            <a:off x="5483351" y="1600200"/>
+            <a:ext cx="1194816" cy="414528"/>
           </a:xfrm>
           <a:prstGeom prst="rect">
             <a:avLst/>
@@ -3697,7 +3697,7 @@
         </p:nvSpPr>
         <p:spPr>
           <a:xfrm>
-            <a:off x="777240" y="3124200"/>
+            <a:off x="777240" y="2517648"/>
             <a:ext cx="10607040" cy="429370"/>
           </a:xfrm>
           <a:prstGeom prst="rect">
@@ -3713,11 +3713,11 @@
           <a:p>
             <a:pPr algn="ctr"/>
             <a:r>
-              <a:rPr sz="2400" b="1" i="0">
+              <a:rPr sz="2280" b="1" i="0">
                 <a:solidFill>
                   <a:srgbClr val="1A1A1A"/>
                 </a:solidFill>
-                <a:latin typeface="Century Schoolbook"/>
+                <a:latin typeface="Lexend"/>
               </a:rPr>
               <a:t>Which law? Then find the value.</a:t>
             </a:r>
@@ -3766,11 +3766,11 @@
           <a:p>
             <a:pPr algn="l"/>
             <a:r>
-              <a:rPr sz="3600" b="1" i="0">
+              <a:rPr sz="3420" b="1" i="0">
                 <a:solidFill>
                   <a:srgbClr val="1A1A1A"/>
                 </a:solidFill>
-                <a:latin typeface="Century Schoolbook"/>
+                <a:latin typeface="Lexend"/>
               </a:rPr>
               <a:t>Your Turn</a:t>
             </a:r>
@@ -3906,11 +3906,11 @@
           <a:p>
             <a:pPr algn="l"/>
             <a:r>
-              <a:rPr sz="1100" b="0" i="1">
+              <a:rPr sz="1040" b="0" i="0">
                 <a:solidFill>
                   <a:srgbClr val="6B6B6B"/>
                 </a:solidFill>
-                <a:latin typeface="Century Schoolbook"/>
+                <a:latin typeface="Lexend"/>
               </a:rPr>
               <a:t>Grade 7 Accelerated · Unit 3 · Lesson 1 — Product Laws of Exponents</a:t>
             </a:r>
@@ -3941,11 +3941,11 @@
           <a:p>
             <a:pPr algn="r"/>
             <a:r>
-              <a:rPr sz="1100" b="0" i="0">
+              <a:rPr sz="1040" b="0" i="0">
                 <a:solidFill>
                   <a:srgbClr val="6B6B6B"/>
                 </a:solidFill>
-                <a:latin typeface="Century Schoolbook"/>
+                <a:latin typeface="Lexend"/>
               </a:rPr>
               <a:t>11</a:t>
             </a:r>
@@ -3954,7 +3954,7 @@
       </p:sp>
       <p:pic>
         <p:nvPicPr>
-          <p:cNvPr id="8" name="Picture 7" descr="f61491015b87f325.png"/>
+          <p:cNvPr id="8" name="Picture 7" descr="e5689ca8283150b1.png"/>
           <p:cNvPicPr>
             <a:picLocks noChangeAspect="1"/>
           </p:cNvPicPr>
@@ -3968,8 +3968,8 @@
         </p:blipFill>
         <p:spPr>
           <a:xfrm>
-            <a:off x="5494020" y="2194560"/>
-            <a:ext cx="1173480" cy="420624"/>
+            <a:off x="5481827" y="1600200"/>
+            <a:ext cx="1197864" cy="414528"/>
           </a:xfrm>
           <a:prstGeom prst="rect">
             <a:avLst/>
@@ -3984,7 +3984,7 @@
         </p:nvSpPr>
         <p:spPr>
           <a:xfrm>
-            <a:off x="777240" y="3118104"/>
+            <a:off x="777240" y="2517648"/>
             <a:ext cx="10607040" cy="429370"/>
           </a:xfrm>
           <a:prstGeom prst="rect">
@@ -4000,20 +4000,68 @@
           <a:p>
             <a:pPr algn="ctr"/>
             <a:r>
-              <a:rPr sz="2400" b="1" i="0">
+              <a:rPr sz="2280" b="1" i="0">
                 <a:solidFill>
                   <a:srgbClr val="1A1A1A"/>
                 </a:solidFill>
-                <a:latin typeface="Century Schoolbook"/>
+                <a:latin typeface="Lexend"/>
               </a:rPr>
               <a:t>Which law? Then find the value.</a:t>
             </a:r>
           </a:p>
         </p:txBody>
       </p:sp>
-      <p:sp>
-        <p:nvSpPr>
-          <p:cNvPr id="10" name="TextBox 9"/>
+      <p:pic>
+        <p:nvPicPr>
+          <p:cNvPr id="10" name="Picture 9" descr="bfd4a5c1b9d0cb65.png"/>
+          <p:cNvPicPr>
+            <a:picLocks noChangeAspect="1"/>
+          </p:cNvPicPr>
+          <p:nvPr/>
+        </p:nvPicPr>
+        <p:blipFill>
+          <a:blip r:embed="rId3"/>
+          <a:stretch>
+            <a:fillRect/>
+          </a:stretch>
+        </p:blipFill>
+        <p:spPr>
+          <a:xfrm>
+            <a:off x="4844796" y="3184762"/>
+            <a:ext cx="2581656" cy="301752"/>
+          </a:xfrm>
+          <a:prstGeom prst="rect">
+            <a:avLst/>
+          </a:prstGeom>
+        </p:spPr>
+      </p:pic>
+      <p:pic>
+        <p:nvPicPr>
+          <p:cNvPr id="11" name="Picture 10" descr="93c08fb8bb36cdbf.png"/>
+          <p:cNvPicPr>
+            <a:picLocks noChangeAspect="1"/>
+          </p:cNvPicPr>
+          <p:nvPr/>
+        </p:nvPicPr>
+        <p:blipFill>
+          <a:blip r:embed="rId4"/>
+          <a:stretch>
+            <a:fillRect/>
+          </a:stretch>
+        </p:blipFill>
+        <p:spPr>
+          <a:xfrm>
+            <a:off x="4844796" y="3724258"/>
+            <a:ext cx="1197864" cy="301752"/>
+          </a:xfrm>
+          <a:prstGeom prst="rect">
+            <a:avLst/>
+          </a:prstGeom>
+        </p:spPr>
+      </p:pic>
+      <p:sp>
+        <p:nvSpPr>
+          <p:cNvPr id="12" name="TextBox 11"/>
           <p:cNvSpPr txBox="1"/>
           <p:nvPr/>
         </p:nvSpPr>
@@ -4035,29 +4083,29 @@
           <a:p>
             <a:pPr algn="ctr"/>
             <a:r>
-              <a:rPr sz="3200" b="1" i="0">
+              <a:rPr sz="3040" b="1" i="0">
                 <a:solidFill>
                   <a:srgbClr val="9E1B32"/>
                 </a:solidFill>
-                <a:latin typeface="Century Schoolbook"/>
+                <a:latin typeface="Lexend"/>
               </a:rPr>
               <a:t>Answer:   2</a:t>
             </a:r>
             <a:r>
-              <a:rPr sz="3200" b="1" i="0" baseline="30000">
+              <a:rPr sz="3040" b="1" i="0" baseline="30000">
                 <a:solidFill>
                   <a:srgbClr val="9E1B32"/>
                 </a:solidFill>
-                <a:latin typeface="Century Schoolbook"/>
+                <a:latin typeface="Lexend"/>
               </a:rPr>
               <a:t>7</a:t>
             </a:r>
             <a:r>
-              <a:rPr sz="3200" b="1" i="0">
+              <a:rPr sz="3040" b="1" i="0">
                 <a:solidFill>
                   <a:srgbClr val="9E1B32"/>
                 </a:solidFill>
-                <a:latin typeface="Century Schoolbook"/>
+                <a:latin typeface="Lexend"/>
               </a:rPr>
               <a:t> = 128</a:t>
             </a:r>
@@ -4106,11 +4154,11 @@
           <a:p>
             <a:pPr algn="l"/>
             <a:r>
-              <a:rPr sz="3600" b="1" i="0">
+              <a:rPr sz="3420" b="1" i="0">
                 <a:solidFill>
                   <a:srgbClr val="1A1A1A"/>
                 </a:solidFill>
-                <a:latin typeface="Century Schoolbook"/>
+                <a:latin typeface="Lexend"/>
               </a:rPr>
               <a:t>Example 2</a:t>
             </a:r>
@@ -4246,11 +4294,11 @@
           <a:p>
             <a:pPr algn="l"/>
             <a:r>
-              <a:rPr sz="1100" b="0" i="1">
+              <a:rPr sz="1040" b="0" i="0">
                 <a:solidFill>
                   <a:srgbClr val="6B6B6B"/>
                 </a:solidFill>
-                <a:latin typeface="Century Schoolbook"/>
+                <a:latin typeface="Lexend"/>
               </a:rPr>
               <a:t>Grade 7 Accelerated · Unit 3 · Lesson 1 — Product Laws of Exponents</a:t>
             </a:r>
@@ -4281,11 +4329,11 @@
           <a:p>
             <a:pPr algn="r"/>
             <a:r>
-              <a:rPr sz="1100" b="0" i="0">
+              <a:rPr sz="1040" b="0" i="0">
                 <a:solidFill>
                   <a:srgbClr val="6B6B6B"/>
                 </a:solidFill>
-                <a:latin typeface="Century Schoolbook"/>
+                <a:latin typeface="Lexend"/>
               </a:rPr>
               <a:t>12</a:t>
             </a:r>
@@ -4294,7 +4342,7 @@
       </p:sp>
       <p:pic>
         <p:nvPicPr>
-          <p:cNvPr id="8" name="Picture 7" descr="111bd13923d7f5ee.png"/>
+          <p:cNvPr id="8" name="Picture 7" descr="f74b6125835b4734.png"/>
           <p:cNvPicPr>
             <a:picLocks noChangeAspect="1"/>
           </p:cNvPicPr>
@@ -4308,8 +4356,8 @@
         </p:blipFill>
         <p:spPr>
           <a:xfrm>
-            <a:off x="5452872" y="2103120"/>
-            <a:ext cx="1255776" cy="411480"/>
+            <a:off x="5475732" y="2103120"/>
+            <a:ext cx="1210056" cy="411480"/>
           </a:xfrm>
           <a:prstGeom prst="rect">
             <a:avLst/>
@@ -4340,11 +4388,11 @@
           <a:p>
             <a:pPr algn="ctr"/>
             <a:r>
-              <a:rPr sz="2400" b="1" i="0">
+              <a:rPr sz="2280" b="1" i="0">
                 <a:solidFill>
                   <a:srgbClr val="1A1A1A"/>
                 </a:solidFill>
-                <a:latin typeface="Century Schoolbook"/>
+                <a:latin typeface="Lexend"/>
               </a:rPr>
               <a:t>Which law? Then find the value.</a:t>
             </a:r>
@@ -4393,11 +4441,11 @@
           <a:p>
             <a:pPr algn="l"/>
             <a:r>
-              <a:rPr sz="3600" b="1" i="0">
+              <a:rPr sz="3420" b="1" i="0">
                 <a:solidFill>
                   <a:srgbClr val="1A1A1A"/>
                 </a:solidFill>
-                <a:latin typeface="Century Schoolbook"/>
+                <a:latin typeface="Lexend"/>
               </a:rPr>
               <a:t>Example 2</a:t>
             </a:r>
@@ -4533,11 +4581,11 @@
           <a:p>
             <a:pPr algn="l"/>
             <a:r>
-              <a:rPr sz="1100" b="0" i="1">
+              <a:rPr sz="1040" b="0" i="0">
                 <a:solidFill>
                   <a:srgbClr val="6B6B6B"/>
                 </a:solidFill>
-                <a:latin typeface="Century Schoolbook"/>
+                <a:latin typeface="Lexend"/>
               </a:rPr>
               <a:t>Grade 7 Accelerated · Unit 3 · Lesson 1 — Product Laws of Exponents</a:t>
             </a:r>
@@ -4568,11 +4616,11 @@
           <a:p>
             <a:pPr algn="r"/>
             <a:r>
-              <a:rPr sz="1100" b="0" i="0">
+              <a:rPr sz="1040" b="0" i="0">
                 <a:solidFill>
                   <a:srgbClr val="6B6B6B"/>
                 </a:solidFill>
-                <a:latin typeface="Century Schoolbook"/>
+                <a:latin typeface="Lexend"/>
               </a:rPr>
               <a:t>13</a:t>
             </a:r>
@@ -4581,7 +4629,7 @@
       </p:sp>
       <p:pic>
         <p:nvPicPr>
-          <p:cNvPr id="8" name="Picture 7" descr="996ff5847669506b.png"/>
+          <p:cNvPr id="8" name="Picture 7" descr="987870fb252ca50f.png"/>
           <p:cNvPicPr>
             <a:picLocks noChangeAspect="1"/>
           </p:cNvPicPr>
@@ -4596,7 +4644,7 @@
         <p:spPr>
           <a:xfrm>
             <a:off x="1828800" y="1920240"/>
-            <a:ext cx="4187952" cy="411480"/>
+            <a:ext cx="4005072" cy="414528"/>
           </a:xfrm>
           <a:prstGeom prst="rect">
             <a:avLst/>
@@ -4605,7 +4653,7 @@
       </p:pic>
       <p:pic>
         <p:nvPicPr>
-          <p:cNvPr id="9" name="Picture 8" descr="816ea1a633337a34.png"/>
+          <p:cNvPr id="9" name="Picture 8" descr="c753a81ccef19f07.png"/>
           <p:cNvPicPr>
             <a:picLocks noChangeAspect="1"/>
           </p:cNvPicPr>
@@ -4619,8 +4667,8 @@
         </p:blipFill>
         <p:spPr>
           <a:xfrm>
-            <a:off x="1828800" y="2606040"/>
-            <a:ext cx="1697736" cy="411480"/>
+            <a:off x="1828800" y="2609087"/>
+            <a:ext cx="1670304" cy="414528"/>
           </a:xfrm>
           <a:prstGeom prst="rect">
             <a:avLst/>
@@ -4629,7 +4677,7 @@
       </p:pic>
       <p:pic>
         <p:nvPicPr>
-          <p:cNvPr id="10" name="Picture 9" descr="ed67bc8f2938c145.png"/>
+          <p:cNvPr id="10" name="Picture 9" descr="da387a30282d4277.png"/>
           <p:cNvPicPr>
             <a:picLocks noChangeAspect="1"/>
           </p:cNvPicPr>
@@ -4643,8 +4691,8 @@
         </p:blipFill>
         <p:spPr>
           <a:xfrm>
-            <a:off x="1828800" y="3291840"/>
-            <a:ext cx="1697736" cy="405384"/>
+            <a:off x="1828800" y="3297935"/>
+            <a:ext cx="1679448" cy="411480"/>
           </a:xfrm>
           <a:prstGeom prst="rect">
             <a:avLst/>
@@ -4675,11 +4723,11 @@
           <a:p>
             <a:pPr algn="ctr"/>
             <a:r>
-              <a:rPr sz="3200" b="1" i="0">
+              <a:rPr sz="3040" b="1" i="0">
                 <a:solidFill>
                   <a:srgbClr val="9E1B32"/>
                 </a:solidFill>
-                <a:latin typeface="Century Schoolbook"/>
+                <a:latin typeface="Lexend"/>
               </a:rPr>
               <a:t>Answer:   64</a:t>
             </a:r>
@@ -4728,11 +4776,11 @@
           <a:p>
             <a:pPr algn="l"/>
             <a:r>
-              <a:rPr sz="3600" b="1" i="0">
+              <a:rPr sz="3420" b="1" i="0">
                 <a:solidFill>
                   <a:srgbClr val="1A1A1A"/>
                 </a:solidFill>
-                <a:latin typeface="Century Schoolbook"/>
+                <a:latin typeface="Lexend"/>
               </a:rPr>
               <a:t>Your Turn</a:t>
             </a:r>
@@ -4868,11 +4916,11 @@
           <a:p>
             <a:pPr algn="l"/>
             <a:r>
-              <a:rPr sz="1100" b="0" i="1">
+              <a:rPr sz="1040" b="0" i="0">
                 <a:solidFill>
                   <a:srgbClr val="6B6B6B"/>
                 </a:solidFill>
-                <a:latin typeface="Century Schoolbook"/>
+                <a:latin typeface="Lexend"/>
               </a:rPr>
               <a:t>Grade 7 Accelerated · Unit 3 · Lesson 1 — Product Laws of Exponents</a:t>
             </a:r>
@@ -4903,11 +4951,11 @@
           <a:p>
             <a:pPr algn="r"/>
             <a:r>
-              <a:rPr sz="1100" b="0" i="0">
+              <a:rPr sz="1040" b="0" i="0">
                 <a:solidFill>
                   <a:srgbClr val="6B6B6B"/>
                 </a:solidFill>
-                <a:latin typeface="Century Schoolbook"/>
+                <a:latin typeface="Lexend"/>
               </a:rPr>
               <a:t>14</a:t>
             </a:r>
@@ -4916,7 +4964,7 @@
       </p:sp>
       <p:pic>
         <p:nvPicPr>
-          <p:cNvPr id="8" name="Picture 7" descr="bb2905f7bc694992.png"/>
+          <p:cNvPr id="8" name="Picture 7" descr="cfb8ebff7a58f4b1.png"/>
           <p:cNvPicPr>
             <a:picLocks noChangeAspect="1"/>
           </p:cNvPicPr>
@@ -4930,8 +4978,8 @@
         </p:blipFill>
         <p:spPr>
           <a:xfrm>
-            <a:off x="5303520" y="2194560"/>
-            <a:ext cx="1554480" cy="518160"/>
+            <a:off x="5327904" y="1600200"/>
+            <a:ext cx="1505712" cy="512064"/>
           </a:xfrm>
           <a:prstGeom prst="rect">
             <a:avLst/>
@@ -4946,7 +4994,7 @@
         </p:nvSpPr>
         <p:spPr>
           <a:xfrm>
-            <a:off x="777240" y="3215640"/>
+            <a:off x="777240" y="2615184"/>
             <a:ext cx="10607040" cy="429370"/>
           </a:xfrm>
           <a:prstGeom prst="rect">
@@ -4962,11 +5010,11 @@
           <a:p>
             <a:pPr algn="ctr"/>
             <a:r>
-              <a:rPr sz="2400" b="1" i="0">
+              <a:rPr sz="2280" b="1" i="0">
                 <a:solidFill>
                   <a:srgbClr val="1A1A1A"/>
                 </a:solidFill>
-                <a:latin typeface="Century Schoolbook"/>
+                <a:latin typeface="Lexend"/>
               </a:rPr>
               <a:t>Which law? Then find the value.</a:t>
             </a:r>
@@ -5015,11 +5063,11 @@
           <a:p>
             <a:pPr algn="l"/>
             <a:r>
-              <a:rPr sz="3600" b="1" i="0">
+              <a:rPr sz="3420" b="1" i="0">
                 <a:solidFill>
                   <a:srgbClr val="1A1A1A"/>
                 </a:solidFill>
-                <a:latin typeface="Century Schoolbook"/>
+                <a:latin typeface="Lexend"/>
               </a:rPr>
               <a:t>Your Turn</a:t>
             </a:r>
@@ -5155,11 +5203,11 @@
           <a:p>
             <a:pPr algn="l"/>
             <a:r>
-              <a:rPr sz="1100" b="0" i="1">
+              <a:rPr sz="1040" b="0" i="0">
                 <a:solidFill>
                   <a:srgbClr val="6B6B6B"/>
                 </a:solidFill>
-                <a:latin typeface="Century Schoolbook"/>
+                <a:latin typeface="Lexend"/>
               </a:rPr>
               <a:t>Grade 7 Accelerated · Unit 3 · Lesson 1 — Product Laws of Exponents</a:t>
             </a:r>
@@ -5190,11 +5238,11 @@
           <a:p>
             <a:pPr algn="r"/>
             <a:r>
-              <a:rPr sz="1100" b="0" i="0">
+              <a:rPr sz="1040" b="0" i="0">
                 <a:solidFill>
                   <a:srgbClr val="6B6B6B"/>
                 </a:solidFill>
-                <a:latin typeface="Century Schoolbook"/>
+                <a:latin typeface="Lexend"/>
               </a:rPr>
               <a:t>15</a:t>
             </a:r>
@@ -5203,7 +5251,7 @@
       </p:sp>
       <p:pic>
         <p:nvPicPr>
-          <p:cNvPr id="8" name="Picture 7" descr="44c6670a1f908383.png"/>
+          <p:cNvPr id="8" name="Picture 7" descr="f91f6c751d4e9823.png"/>
           <p:cNvPicPr>
             <a:picLocks noChangeAspect="1"/>
           </p:cNvPicPr>
@@ -5217,8 +5265,8 @@
         </p:blipFill>
         <p:spPr>
           <a:xfrm>
-            <a:off x="5301996" y="2194560"/>
-            <a:ext cx="1557528" cy="518160"/>
+            <a:off x="5327904" y="1600200"/>
+            <a:ext cx="1505712" cy="509016"/>
           </a:xfrm>
           <a:prstGeom prst="rect">
             <a:avLst/>
@@ -5233,7 +5281,7 @@
         </p:nvSpPr>
         <p:spPr>
           <a:xfrm>
-            <a:off x="777240" y="3215640"/>
+            <a:off x="777240" y="2612136"/>
             <a:ext cx="10607040" cy="429370"/>
           </a:xfrm>
           <a:prstGeom prst="rect">
@@ -5249,20 +5297,68 @@
           <a:p>
             <a:pPr algn="ctr"/>
             <a:r>
-              <a:rPr sz="2400" b="1" i="0">
+              <a:rPr sz="2280" b="1" i="0">
                 <a:solidFill>
                   <a:srgbClr val="1A1A1A"/>
                 </a:solidFill>
-                <a:latin typeface="Century Schoolbook"/>
+                <a:latin typeface="Lexend"/>
               </a:rPr>
               <a:t>Which law? Then find the value.</a:t>
             </a:r>
           </a:p>
         </p:txBody>
       </p:sp>
-      <p:sp>
-        <p:nvSpPr>
-          <p:cNvPr id="10" name="TextBox 9"/>
+      <p:pic>
+        <p:nvPicPr>
+          <p:cNvPr id="10" name="Picture 9" descr="9760ae71abb97b34.png"/>
+          <p:cNvPicPr>
+            <a:picLocks noChangeAspect="1"/>
+          </p:cNvPicPr>
+          <p:nvPr/>
+        </p:nvPicPr>
+        <p:blipFill>
+          <a:blip r:embed="rId3"/>
+          <a:stretch>
+            <a:fillRect/>
+          </a:stretch>
+        </p:blipFill>
+        <p:spPr>
+          <a:xfrm>
+            <a:off x="4299204" y="3244198"/>
+            <a:ext cx="3672840" cy="371856"/>
+          </a:xfrm>
+          <a:prstGeom prst="rect">
+            <a:avLst/>
+          </a:prstGeom>
+        </p:spPr>
+      </p:pic>
+      <p:pic>
+        <p:nvPicPr>
+          <p:cNvPr id="11" name="Picture 10" descr="e55c874f9b6e9272.png"/>
+          <p:cNvPicPr>
+            <a:picLocks noChangeAspect="1"/>
+          </p:cNvPicPr>
+          <p:nvPr/>
+        </p:nvPicPr>
+        <p:blipFill>
+          <a:blip r:embed="rId4"/>
+          <a:stretch>
+            <a:fillRect/>
+          </a:stretch>
+        </p:blipFill>
+        <p:spPr>
+          <a:xfrm>
+            <a:off x="4299204" y="3783694"/>
+            <a:ext cx="1670304" cy="371856"/>
+          </a:xfrm>
+          <a:prstGeom prst="rect">
+            <a:avLst/>
+          </a:prstGeom>
+        </p:spPr>
+      </p:pic>
+      <p:sp>
+        <p:nvSpPr>
+          <p:cNvPr id="12" name="TextBox 11"/>
           <p:cNvSpPr txBox="1"/>
           <p:nvPr/>
         </p:nvSpPr>
@@ -5284,29 +5380,29 @@
           <a:p>
             <a:pPr algn="ctr"/>
             <a:r>
-              <a:rPr sz="3200" b="1" i="0">
+              <a:rPr sz="3040" b="1" i="0">
                 <a:solidFill>
                   <a:srgbClr val="9E1B32"/>
                 </a:solidFill>
-                <a:latin typeface="Century Schoolbook"/>
+                <a:latin typeface="Lexend"/>
               </a:rPr>
               <a:t>Answer:   (−3)</a:t>
             </a:r>
             <a:r>
-              <a:rPr sz="3200" b="1" i="0" baseline="30000">
+              <a:rPr sz="3040" b="1" i="0" baseline="30000">
                 <a:solidFill>
                   <a:srgbClr val="9E1B32"/>
                 </a:solidFill>
-                <a:latin typeface="Century Schoolbook"/>
+                <a:latin typeface="Lexend"/>
               </a:rPr>
               <a:t>6</a:t>
             </a:r>
             <a:r>
-              <a:rPr sz="3200" b="1" i="0">
+              <a:rPr sz="3040" b="1" i="0">
                 <a:solidFill>
                   <a:srgbClr val="9E1B32"/>
                 </a:solidFill>
-                <a:latin typeface="Century Schoolbook"/>
+                <a:latin typeface="Lexend"/>
               </a:rPr>
               <a:t> = 729</a:t>
             </a:r>
@@ -5355,11 +5451,11 @@
           <a:p>
             <a:pPr algn="l"/>
             <a:r>
-              <a:rPr sz="3400" b="1" i="0">
+              <a:rPr sz="3229" b="1" i="0">
                 <a:solidFill>
                   <a:srgbClr val="1A1A1A"/>
                 </a:solidFill>
-                <a:latin typeface="Century Schoolbook"/>
+                <a:latin typeface="Lexend"/>
               </a:rPr>
               <a:t>Whiteboards   ·   Question 1 of 9</a:t>
             </a:r>
@@ -5495,11 +5591,11 @@
           <a:p>
             <a:pPr algn="l"/>
             <a:r>
-              <a:rPr sz="1100" b="0" i="1">
+              <a:rPr sz="1040" b="0" i="0">
                 <a:solidFill>
                   <a:srgbClr val="6B6B6B"/>
                 </a:solidFill>
-                <a:latin typeface="Century Schoolbook"/>
+                <a:latin typeface="Lexend"/>
               </a:rPr>
               <a:t>Grade 7 Accelerated · Unit 3 · Lesson 1 — Product Laws of Exponents</a:t>
             </a:r>
@@ -5530,11 +5626,11 @@
           <a:p>
             <a:pPr algn="r"/>
             <a:r>
-              <a:rPr sz="1100" b="0" i="0">
+              <a:rPr sz="1040" b="0" i="0">
                 <a:solidFill>
                   <a:srgbClr val="6B6B6B"/>
                 </a:solidFill>
-                <a:latin typeface="Century Schoolbook"/>
+                <a:latin typeface="Lexend"/>
               </a:rPr>
               <a:t>16</a:t>
             </a:r>
@@ -5543,7 +5639,7 @@
       </p:sp>
       <p:pic>
         <p:nvPicPr>
-          <p:cNvPr id="8" name="Picture 7" descr="7a6e349cb4210116.png"/>
+          <p:cNvPr id="8" name="Picture 7" descr="b1e26e5bc6d68280.png"/>
           <p:cNvPicPr>
             <a:picLocks noChangeAspect="1"/>
           </p:cNvPicPr>
@@ -5557,8 +5653,8 @@
         </p:blipFill>
         <p:spPr>
           <a:xfrm>
-            <a:off x="5503163" y="2194560"/>
-            <a:ext cx="1155192" cy="432816"/>
+            <a:off x="5481827" y="2194560"/>
+            <a:ext cx="1197864" cy="420624"/>
           </a:xfrm>
           <a:prstGeom prst="rect">
             <a:avLst/>
@@ -5589,11 +5685,11 @@
           <a:p>
             <a:pPr algn="ctr"/>
             <a:r>
-              <a:rPr sz="2600" b="1" i="0">
+              <a:rPr sz="2470" b="1" i="0">
                 <a:solidFill>
                   <a:srgbClr val="1A1A1A"/>
                 </a:solidFill>
-                <a:latin typeface="Century Schoolbook"/>
+                <a:latin typeface="Lexend"/>
               </a:rPr>
               <a:t>Answer it.</a:t>
             </a:r>
@@ -5642,11 +5738,11 @@
           <a:p>
             <a:pPr algn="l"/>
             <a:r>
-              <a:rPr sz="3400" b="1" i="0">
+              <a:rPr sz="3229" b="1" i="0">
                 <a:solidFill>
                   <a:srgbClr val="1A1A1A"/>
                 </a:solidFill>
-                <a:latin typeface="Century Schoolbook"/>
+                <a:latin typeface="Lexend"/>
               </a:rPr>
               <a:t>Whiteboards   ·   Question 1 of 9</a:t>
             </a:r>
@@ -5782,11 +5878,11 @@
           <a:p>
             <a:pPr algn="l"/>
             <a:r>
-              <a:rPr sz="1100" b="0" i="1">
+              <a:rPr sz="1040" b="0" i="0">
                 <a:solidFill>
                   <a:srgbClr val="6B6B6B"/>
                 </a:solidFill>
-                <a:latin typeface="Century Schoolbook"/>
+                <a:latin typeface="Lexend"/>
               </a:rPr>
               <a:t>Grade 7 Accelerated · Unit 3 · Lesson 1 — Product Laws of Exponents</a:t>
             </a:r>
@@ -5817,11 +5913,11 @@
           <a:p>
             <a:pPr algn="r"/>
             <a:r>
-              <a:rPr sz="1100" b="0" i="0">
+              <a:rPr sz="1040" b="0" i="0">
                 <a:solidFill>
                   <a:srgbClr val="6B6B6B"/>
                 </a:solidFill>
-                <a:latin typeface="Century Schoolbook"/>
+                <a:latin typeface="Lexend"/>
               </a:rPr>
               <a:t>17</a:t>
             </a:r>
@@ -5830,7 +5926,7 @@
       </p:sp>
       <p:pic>
         <p:nvPicPr>
-          <p:cNvPr id="8" name="Picture 7" descr="c64ca1a4dc51bf5f.png"/>
+          <p:cNvPr id="8" name="Picture 7" descr="a10b19c9014489f3.png"/>
           <p:cNvPicPr>
             <a:picLocks noChangeAspect="1"/>
           </p:cNvPicPr>
@@ -5844,52 +5940,17 @@
         </p:blipFill>
         <p:spPr>
           <a:xfrm>
-            <a:off x="5501639" y="2103120"/>
-            <a:ext cx="1158240" cy="429768"/>
+            <a:off x="5480304" y="2103120"/>
+            <a:ext cx="1200912" cy="420624"/>
           </a:xfrm>
           <a:prstGeom prst="rect">
             <a:avLst/>
           </a:prstGeom>
         </p:spPr>
       </p:pic>
-      <p:sp>
-        <p:nvSpPr>
-          <p:cNvPr id="9" name="TextBox 8"/>
-          <p:cNvSpPr txBox="1"/>
-          <p:nvPr/>
-        </p:nvSpPr>
-        <p:spPr>
-          <a:xfrm>
-            <a:off x="4920995" y="4604003"/>
-            <a:ext cx="1920240" cy="548640"/>
-          </a:xfrm>
-          <a:prstGeom prst="rect">
-            <a:avLst/>
-          </a:prstGeom>
-          <a:noFill/>
-        </p:spPr>
-        <p:txBody>
-          <a:bodyPr wrap="square" lIns="45720" rIns="45720" tIns="18288" bIns="18288" anchor="ctr">
-            <a:spAutoFit/>
-          </a:bodyPr>
-          <a:lstStyle/>
-          <a:p>
-            <a:pPr algn="l"/>
-            <a:r>
-              <a:rPr sz="3200" b="1" i="0">
-                <a:solidFill>
-                  <a:srgbClr val="9E1B32"/>
-                </a:solidFill>
-                <a:latin typeface="Century Schoolbook"/>
-              </a:rPr>
-              <a:t>Answer:</a:t>
-            </a:r>
-          </a:p>
-        </p:txBody>
-      </p:sp>
       <p:pic>
         <p:nvPicPr>
-          <p:cNvPr id="10" name="Picture 9" descr="fb5a5ab64e7e7827.png"/>
+          <p:cNvPr id="9" name="Picture 8" descr="c3ef13471fa147f4.png"/>
           <p:cNvPicPr>
             <a:picLocks noChangeAspect="1"/>
           </p:cNvPicPr>
@@ -5903,8 +5964,67 @@
         </p:blipFill>
         <p:spPr>
           <a:xfrm>
-            <a:off x="6841235" y="4663440"/>
-            <a:ext cx="399288" cy="429768"/>
+            <a:off x="4847843" y="2878836"/>
+            <a:ext cx="2578608" cy="304800"/>
+          </a:xfrm>
+          <a:prstGeom prst="rect">
+            <a:avLst/>
+          </a:prstGeom>
+        </p:spPr>
+      </p:pic>
+      <p:sp>
+        <p:nvSpPr>
+          <p:cNvPr id="10" name="TextBox 9"/>
+          <p:cNvSpPr txBox="1"/>
+          <p:nvPr/>
+        </p:nvSpPr>
+        <p:spPr>
+          <a:xfrm>
+            <a:off x="4904232" y="4597908"/>
+            <a:ext cx="1920240" cy="548640"/>
+          </a:xfrm>
+          <a:prstGeom prst="rect">
+            <a:avLst/>
+          </a:prstGeom>
+          <a:noFill/>
+        </p:spPr>
+        <p:txBody>
+          <a:bodyPr wrap="square" lIns="45720" rIns="45720" tIns="18288" bIns="18288" anchor="ctr">
+            <a:spAutoFit/>
+          </a:bodyPr>
+          <a:lstStyle/>
+          <a:p>
+            <a:pPr algn="l"/>
+            <a:r>
+              <a:rPr sz="3040" b="1" i="0">
+                <a:solidFill>
+                  <a:srgbClr val="9E1B32"/>
+                </a:solidFill>
+                <a:latin typeface="Lexend"/>
+              </a:rPr>
+              <a:t>Answer:</a:t>
+            </a:r>
+          </a:p>
+        </p:txBody>
+      </p:sp>
+      <p:pic>
+        <p:nvPicPr>
+          <p:cNvPr id="11" name="Picture 10" descr="24dca2f9e99e6f01.png"/>
+          <p:cNvPicPr>
+            <a:picLocks noChangeAspect="1"/>
+          </p:cNvPicPr>
+          <p:nvPr/>
+        </p:nvPicPr>
+        <p:blipFill>
+          <a:blip r:embed="rId4"/>
+          <a:stretch>
+            <a:fillRect/>
+          </a:stretch>
+        </p:blipFill>
+        <p:spPr>
+          <a:xfrm>
+            <a:off x="6824472" y="4663440"/>
+            <a:ext cx="432816" cy="417576"/>
           </a:xfrm>
           <a:prstGeom prst="rect">
             <a:avLst/>
@@ -5953,11 +6073,11 @@
           <a:p>
             <a:pPr algn="l"/>
             <a:r>
-              <a:rPr sz="3400" b="1" i="0">
+              <a:rPr sz="3229" b="1" i="0">
                 <a:solidFill>
                   <a:srgbClr val="1A1A1A"/>
                 </a:solidFill>
-                <a:latin typeface="Century Schoolbook"/>
+                <a:latin typeface="Lexend"/>
               </a:rPr>
               <a:t>Whiteboards   ·   Question 2 of 9</a:t>
             </a:r>
@@ -6093,11 +6213,11 @@
           <a:p>
             <a:pPr algn="l"/>
             <a:r>
-              <a:rPr sz="1100" b="0" i="1">
+              <a:rPr sz="1040" b="0" i="0">
                 <a:solidFill>
                   <a:srgbClr val="6B6B6B"/>
                 </a:solidFill>
-                <a:latin typeface="Century Schoolbook"/>
+                <a:latin typeface="Lexend"/>
               </a:rPr>
               <a:t>Grade 7 Accelerated · Unit 3 · Lesson 1 — Product Laws of Exponents</a:t>
             </a:r>
@@ -6128,11 +6248,11 @@
           <a:p>
             <a:pPr algn="r"/>
             <a:r>
-              <a:rPr sz="1100" b="0" i="0">
+              <a:rPr sz="1040" b="0" i="0">
                 <a:solidFill>
                   <a:srgbClr val="6B6B6B"/>
                 </a:solidFill>
-                <a:latin typeface="Century Schoolbook"/>
+                <a:latin typeface="Lexend"/>
               </a:rPr>
               <a:t>18</a:t>
             </a:r>
@@ -6148,7 +6268,7 @@
         <p:spPr>
           <a:xfrm>
             <a:off x="1234440" y="1851660"/>
-            <a:ext cx="2440586" cy="457200"/>
+            <a:ext cx="2408454" cy="457200"/>
           </a:xfrm>
           <a:prstGeom prst="rect">
             <a:avLst/>
@@ -6163,11 +6283,11 @@
           <a:p>
             <a:pPr algn="l"/>
             <a:r>
-              <a:rPr sz="2400" b="0" i="0">
+              <a:rPr sz="2280" b="0" i="0">
                 <a:solidFill>
                   <a:srgbClr val="1A1A1A"/>
                 </a:solidFill>
-                <a:latin typeface="Century Schoolbook"/>
+                <a:latin typeface="Lexend"/>
               </a:rPr>
               <a:t>A rectangle is  </a:t>
             </a:r>
@@ -6176,7 +6296,7 @@
       </p:sp>
       <p:pic>
         <p:nvPicPr>
-          <p:cNvPr id="9" name="Picture 8" descr="d5ca6e2822ee53f9.png"/>
+          <p:cNvPr id="9" name="Picture 8" descr="be331936b361ba4d.png"/>
           <p:cNvPicPr>
             <a:picLocks noChangeAspect="1"/>
           </p:cNvPicPr>
@@ -6190,8 +6310,8 @@
         </p:blipFill>
         <p:spPr>
           <a:xfrm>
-            <a:off x="3537866" y="1941575"/>
-            <a:ext cx="268224" cy="277368"/>
+            <a:off x="3505734" y="1946147"/>
+            <a:ext cx="286512" cy="268224"/>
           </a:xfrm>
           <a:prstGeom prst="rect">
             <a:avLst/>
@@ -6206,8 +6326,8 @@
         </p:nvSpPr>
         <p:spPr>
           <a:xfrm>
-            <a:off x="3806090" y="1851660"/>
-            <a:ext cx="3699967" cy="457200"/>
+            <a:off x="3792246" y="1851660"/>
+            <a:ext cx="3701232" cy="457200"/>
           </a:xfrm>
           <a:prstGeom prst="rect">
             <a:avLst/>
@@ -6222,11 +6342,11 @@
           <a:p>
             <a:pPr algn="l"/>
             <a:r>
-              <a:rPr sz="2400" b="0" i="0">
+              <a:rPr sz="2280" b="0" i="0">
                 <a:solidFill>
                   <a:srgbClr val="1A1A1A"/>
                 </a:solidFill>
-                <a:latin typeface="Century Schoolbook"/>
+                <a:latin typeface="Lexend"/>
               </a:rPr>
               <a:t>  centimeters long and  </a:t>
             </a:r>
@@ -6235,7 +6355,7 @@
       </p:sp>
       <p:pic>
         <p:nvPicPr>
-          <p:cNvPr id="11" name="Picture 10" descr="ad43ae3bbc8b2264.png"/>
+          <p:cNvPr id="11" name="Picture 10" descr="d631b8b2f265b394.png"/>
           <p:cNvPicPr>
             <a:picLocks noChangeAspect="1"/>
           </p:cNvPicPr>
@@ -6249,8 +6369,8 @@
         </p:blipFill>
         <p:spPr>
           <a:xfrm>
-            <a:off x="7368898" y="1943100"/>
-            <a:ext cx="268224" cy="274320"/>
+            <a:off x="7356318" y="1943100"/>
+            <a:ext cx="274320" cy="274320"/>
           </a:xfrm>
           <a:prstGeom prst="rect">
             <a:avLst/>
@@ -6265,8 +6385,8 @@
         </p:nvSpPr>
         <p:spPr>
           <a:xfrm>
-            <a:off x="7637122" y="1851660"/>
-            <a:ext cx="3023764" cy="457200"/>
+            <a:off x="7630638" y="1851660"/>
+            <a:ext cx="3002638" cy="457200"/>
           </a:xfrm>
           <a:prstGeom prst="rect">
             <a:avLst/>
@@ -6281,11 +6401,11 @@
           <a:p>
             <a:pPr algn="l"/>
             <a:r>
-              <a:rPr sz="2400" b="0" i="0">
+              <a:rPr sz="2280" b="0" i="0">
                 <a:solidFill>
                   <a:srgbClr val="1A1A1A"/>
                 </a:solidFill>
-                <a:latin typeface="Century Schoolbook"/>
+                <a:latin typeface="Lexend"/>
               </a:rPr>
               <a:t>  centimeters wide.</a:t>
             </a:r>
@@ -6316,11 +6436,11 @@
           <a:p>
             <a:pPr algn="l"/>
             <a:r>
-              <a:rPr sz="2400" b="0" i="0">
+              <a:rPr sz="2280" b="0" i="0">
                 <a:solidFill>
                   <a:srgbClr val="1A1A1A"/>
                 </a:solidFill>
-                <a:latin typeface="Century Schoolbook"/>
+                <a:latin typeface="Lexend"/>
               </a:rPr>
               <a:t>Its perimeter is 40 centimeters.</a:t>
             </a:r>
@@ -6351,11 +6471,11 @@
           <a:p>
             <a:pPr algn="l"/>
             <a:r>
-              <a:rPr sz="2400" b="1" i="0">
+              <a:rPr sz="2280" b="1" i="0">
                 <a:solidFill>
                   <a:srgbClr val="1A1A1A"/>
                 </a:solidFill>
-                <a:latin typeface="Century Schoolbook"/>
+                <a:latin typeface="Lexend"/>
               </a:rPr>
               <a:t>What is the area of the rectangle, in square centimeters?</a:t>
             </a:r>
@@ -6386,11 +6506,11 @@
           <a:p>
             <a:pPr algn="ctr"/>
             <a:r>
-              <a:rPr sz="2600" b="1" i="0">
+              <a:rPr sz="2470" b="1" i="0">
                 <a:solidFill>
                   <a:srgbClr val="1A1A1A"/>
                 </a:solidFill>
-                <a:latin typeface="Century Schoolbook"/>
+                <a:latin typeface="Lexend"/>
               </a:rPr>
               <a:t>Answer it.</a:t>
             </a:r>
@@ -6439,11 +6559,11 @@
           <a:p>
             <a:pPr algn="l"/>
             <a:r>
-              <a:rPr sz="3400" b="1" i="0">
+              <a:rPr sz="3229" b="1" i="0">
                 <a:solidFill>
                   <a:srgbClr val="1A1A1A"/>
                 </a:solidFill>
-                <a:latin typeface="Century Schoolbook"/>
+                <a:latin typeface="Lexend"/>
               </a:rPr>
               <a:t>Whiteboards   ·   Question 2 of 9</a:t>
             </a:r>
@@ -6579,11 +6699,11 @@
           <a:p>
             <a:pPr algn="l"/>
             <a:r>
-              <a:rPr sz="1100" b="0" i="1">
+              <a:rPr sz="1040" b="0" i="0">
                 <a:solidFill>
                   <a:srgbClr val="6B6B6B"/>
                 </a:solidFill>
-                <a:latin typeface="Century Schoolbook"/>
+                <a:latin typeface="Lexend"/>
               </a:rPr>
               <a:t>Grade 7 Accelerated · Unit 3 · Lesson 1 — Product Laws of Exponents</a:t>
             </a:r>
@@ -6614,11 +6734,11 @@
           <a:p>
             <a:pPr algn="r"/>
             <a:r>
-              <a:rPr sz="1100" b="0" i="0">
+              <a:rPr sz="1040" b="0" i="0">
                 <a:solidFill>
                   <a:srgbClr val="6B6B6B"/>
                 </a:solidFill>
-                <a:latin typeface="Century Schoolbook"/>
+                <a:latin typeface="Lexend"/>
               </a:rPr>
               <a:t>19</a:t>
             </a:r>
@@ -6634,7 +6754,7 @@
         <p:spPr>
           <a:xfrm>
             <a:off x="1234440" y="1851660"/>
-            <a:ext cx="2440586" cy="457200"/>
+            <a:ext cx="2408454" cy="457200"/>
           </a:xfrm>
           <a:prstGeom prst="rect">
             <a:avLst/>
@@ -6649,11 +6769,11 @@
           <a:p>
             <a:pPr algn="l"/>
             <a:r>
-              <a:rPr sz="2400" b="0" i="0">
+              <a:rPr sz="2280" b="0" i="0">
                 <a:solidFill>
                   <a:srgbClr val="1A1A1A"/>
                 </a:solidFill>
-                <a:latin typeface="Century Schoolbook"/>
+                <a:latin typeface="Lexend"/>
               </a:rPr>
               <a:t>A rectangle is  </a:t>
             </a:r>
@@ -6662,7 +6782,7 @@
       </p:sp>
       <p:pic>
         <p:nvPicPr>
-          <p:cNvPr id="9" name="Picture 8" descr="5257a77d61b89134.png"/>
+          <p:cNvPr id="9" name="Picture 8" descr="c15b55b0bc0ad09d.png"/>
           <p:cNvPicPr>
             <a:picLocks noChangeAspect="1"/>
           </p:cNvPicPr>
@@ -6676,8 +6796,8 @@
         </p:blipFill>
         <p:spPr>
           <a:xfrm>
-            <a:off x="3537866" y="1943100"/>
-            <a:ext cx="274320" cy="274320"/>
+            <a:off x="3505734" y="1944623"/>
+            <a:ext cx="289560" cy="271272"/>
           </a:xfrm>
           <a:prstGeom prst="rect">
             <a:avLst/>
@@ -6692,8 +6812,8 @@
         </p:nvSpPr>
         <p:spPr>
           <a:xfrm>
-            <a:off x="3812186" y="1851660"/>
-            <a:ext cx="3699967" cy="457200"/>
+            <a:off x="3795294" y="1851660"/>
+            <a:ext cx="3701232" cy="457200"/>
           </a:xfrm>
           <a:prstGeom prst="rect">
             <a:avLst/>
@@ -6708,11 +6828,11 @@
           <a:p>
             <a:pPr algn="l"/>
             <a:r>
-              <a:rPr sz="2400" b="0" i="0">
+              <a:rPr sz="2280" b="0" i="0">
                 <a:solidFill>
                   <a:srgbClr val="1A1A1A"/>
                 </a:solidFill>
-                <a:latin typeface="Century Schoolbook"/>
+                <a:latin typeface="Lexend"/>
               </a:rPr>
               <a:t>  centimeters long and  </a:t>
             </a:r>
@@ -6721,7 +6841,7 @@
       </p:sp>
       <p:pic>
         <p:nvPicPr>
-          <p:cNvPr id="11" name="Picture 10" descr="fcc0337caf95aad5.png"/>
+          <p:cNvPr id="11" name="Picture 10" descr="2187ef2d8316cef4.png"/>
           <p:cNvPicPr>
             <a:picLocks noChangeAspect="1"/>
           </p:cNvPicPr>
@@ -6735,8 +6855,8 @@
         </p:blipFill>
         <p:spPr>
           <a:xfrm>
-            <a:off x="7374994" y="1943100"/>
-            <a:ext cx="271272" cy="274320"/>
+            <a:off x="7359366" y="1943100"/>
+            <a:ext cx="277368" cy="274320"/>
           </a:xfrm>
           <a:prstGeom prst="rect">
             <a:avLst/>
@@ -6751,8 +6871,8 @@
         </p:nvSpPr>
         <p:spPr>
           <a:xfrm>
-            <a:off x="7646266" y="1851660"/>
-            <a:ext cx="3023764" cy="457200"/>
+            <a:off x="7636734" y="1851660"/>
+            <a:ext cx="3002638" cy="457200"/>
           </a:xfrm>
           <a:prstGeom prst="rect">
             <a:avLst/>
@@ -6767,11 +6887,11 @@
           <a:p>
             <a:pPr algn="l"/>
             <a:r>
-              <a:rPr sz="2400" b="0" i="0">
+              <a:rPr sz="2280" b="0" i="0">
                 <a:solidFill>
                   <a:srgbClr val="1A1A1A"/>
                 </a:solidFill>
-                <a:latin typeface="Century Schoolbook"/>
+                <a:latin typeface="Lexend"/>
               </a:rPr>
               <a:t>  centimeters wide.</a:t>
             </a:r>
@@ -6802,11 +6922,11 @@
           <a:p>
             <a:pPr algn="l"/>
             <a:r>
-              <a:rPr sz="2400" b="0" i="0">
+              <a:rPr sz="2280" b="0" i="0">
                 <a:solidFill>
                   <a:srgbClr val="1A1A1A"/>
                 </a:solidFill>
-                <a:latin typeface="Century Schoolbook"/>
+                <a:latin typeface="Lexend"/>
               </a:rPr>
               <a:t>Its perimeter is 40 centimeters.</a:t>
             </a:r>
@@ -6837,11 +6957,11 @@
           <a:p>
             <a:pPr algn="l"/>
             <a:r>
-              <a:rPr sz="2400" b="1" i="0">
+              <a:rPr sz="2280" b="1" i="0">
                 <a:solidFill>
                   <a:srgbClr val="1A1A1A"/>
                 </a:solidFill>
-                <a:latin typeface="Century Schoolbook"/>
+                <a:latin typeface="Lexend"/>
               </a:rPr>
               <a:t>What is the area of the rectangle, in square centimeters?</a:t>
             </a:r>
@@ -6856,7 +6976,90 @@
         </p:nvSpPr>
         <p:spPr>
           <a:xfrm>
-            <a:off x="777240" y="4663440"/>
+            <a:off x="4444522" y="3661376"/>
+            <a:ext cx="3409635" cy="457200"/>
+          </a:xfrm>
+          <a:prstGeom prst="rect">
+            <a:avLst/>
+          </a:prstGeom>
+          <a:noFill/>
+        </p:spPr>
+        <p:txBody>
+          <a:bodyPr wrap="none" lIns="45720" rIns="45720" tIns="18288" bIns="18288" anchor="ctr">
+            <a:noAutofit/>
+          </a:bodyPr>
+          <a:lstStyle/>
+          <a:p>
+            <a:pPr algn="l"/>
+            <a:r>
+              <a:rPr sz="2330" b="0" i="0">
+                <a:solidFill>
+                  <a:srgbClr val="1A1A1A"/>
+                </a:solidFill>
+                <a:latin typeface="Lexend"/>
+              </a:rPr>
+              <a:t>Area = length × width</a:t>
+            </a:r>
+          </a:p>
+        </p:txBody>
+      </p:sp>
+      <p:pic>
+        <p:nvPicPr>
+          <p:cNvPr id="16" name="Picture 15" descr="00eded558c78f143.png"/>
+          <p:cNvPicPr>
+            <a:picLocks noChangeAspect="1"/>
+          </p:cNvPicPr>
+          <p:nvPr/>
+        </p:nvPicPr>
+        <p:blipFill>
+          <a:blip r:embed="rId4"/>
+          <a:stretch>
+            <a:fillRect/>
+          </a:stretch>
+        </p:blipFill>
+        <p:spPr>
+          <a:xfrm>
+            <a:off x="4499386" y="4263356"/>
+            <a:ext cx="2194560" cy="259080"/>
+          </a:xfrm>
+          <a:prstGeom prst="rect">
+            <a:avLst/>
+          </a:prstGeom>
+        </p:spPr>
+      </p:pic>
+      <p:pic>
+        <p:nvPicPr>
+          <p:cNvPr id="17" name="Picture 16" descr="8539984585d0f2a0.png"/>
+          <p:cNvPicPr>
+            <a:picLocks noChangeAspect="1"/>
+          </p:cNvPicPr>
+          <p:nvPr/>
+        </p:nvPicPr>
+        <p:blipFill>
+          <a:blip r:embed="rId5"/>
+          <a:stretch>
+            <a:fillRect/>
+          </a:stretch>
+        </p:blipFill>
+        <p:spPr>
+          <a:xfrm>
+            <a:off x="4499386" y="4766276"/>
+            <a:ext cx="890016" cy="259080"/>
+          </a:xfrm>
+          <a:prstGeom prst="rect">
+            <a:avLst/>
+          </a:prstGeom>
+        </p:spPr>
+      </p:pic>
+      <p:sp>
+        <p:nvSpPr>
+          <p:cNvPr id="18" name="TextBox 17"/>
+          <p:cNvSpPr txBox="1"/>
+          <p:nvPr/>
+        </p:nvSpPr>
+        <p:spPr>
+          <a:xfrm>
+            <a:off x="777240" y="5238716"/>
             <a:ext cx="10607040" cy="548640"/>
           </a:xfrm>
           <a:prstGeom prst="rect">
@@ -6872,29 +7075,29 @@
           <a:p>
             <a:pPr algn="ctr"/>
             <a:r>
-              <a:rPr sz="3200" b="1" i="0">
+              <a:rPr sz="3040" b="1" i="0">
                 <a:solidFill>
                   <a:srgbClr val="9E1B32"/>
                 </a:solidFill>
-                <a:latin typeface="Century Schoolbook"/>
+                <a:latin typeface="Lexend"/>
               </a:rPr>
               <a:t>Answer:   2</a:t>
             </a:r>
             <a:r>
-              <a:rPr sz="3200" b="1" i="0" baseline="30000">
+              <a:rPr sz="3040" b="1" i="0" baseline="30000">
                 <a:solidFill>
                   <a:srgbClr val="9E1B32"/>
                 </a:solidFill>
-                <a:latin typeface="Century Schoolbook"/>
+                <a:latin typeface="Lexend"/>
               </a:rPr>
               <a:t>6</a:t>
             </a:r>
             <a:r>
-              <a:rPr sz="3200" b="1" i="0">
+              <a:rPr sz="3040" b="1" i="0">
                 <a:solidFill>
                   <a:srgbClr val="9E1B32"/>
                 </a:solidFill>
-                <a:latin typeface="Century Schoolbook"/>
+                <a:latin typeface="Lexend"/>
               </a:rPr>
               <a:t> = 64 square centimeters</a:t>
             </a:r>
@@ -6943,11 +7146,11 @@
           <a:p>
             <a:pPr algn="l"/>
             <a:r>
-              <a:rPr sz="3600" b="1" i="0">
+              <a:rPr sz="3420" b="1" i="0">
                 <a:solidFill>
                   <a:srgbClr val="1A1A1A"/>
                 </a:solidFill>
-                <a:latin typeface="Century Schoolbook"/>
+                <a:latin typeface="Lexend"/>
               </a:rPr>
               <a:t>Warm-Up</a:t>
             </a:r>
@@ -7083,11 +7286,11 @@
           <a:p>
             <a:pPr algn="l"/>
             <a:r>
-              <a:rPr sz="1100" b="0" i="1">
+              <a:rPr sz="1040" b="0" i="0">
                 <a:solidFill>
                   <a:srgbClr val="6B6B6B"/>
                 </a:solidFill>
-                <a:latin typeface="Century Schoolbook"/>
+                <a:latin typeface="Lexend"/>
               </a:rPr>
               <a:t>Grade 7 Accelerated · Unit 3 · Lesson 1 — Product Laws of Exponents</a:t>
             </a:r>
@@ -7118,11 +7321,11 @@
           <a:p>
             <a:pPr algn="r"/>
             <a:r>
-              <a:rPr sz="1100" b="0" i="0">
+              <a:rPr sz="1040" b="0" i="0">
                 <a:solidFill>
                   <a:srgbClr val="6B6B6B"/>
                 </a:solidFill>
-                <a:latin typeface="Century Schoolbook"/>
+                <a:latin typeface="Lexend"/>
               </a:rPr>
               <a:t>2</a:t>
             </a:r>
@@ -7138,7 +7341,7 @@
         <p:spPr>
           <a:xfrm>
             <a:off x="1874519" y="1440180"/>
-            <a:ext cx="720605" cy="457200"/>
+            <a:ext cx="671561" cy="457200"/>
           </a:xfrm>
           <a:prstGeom prst="rect">
             <a:avLst/>
@@ -7153,11 +7356,11 @@
           <a:p>
             <a:pPr algn="l"/>
             <a:r>
-              <a:rPr sz="2300" b="0" i="0">
+              <a:rPr sz="2180" b="0" i="0">
                 <a:solidFill>
                   <a:srgbClr val="1A1A1A"/>
                 </a:solidFill>
-                <a:latin typeface="Century Schoolbook"/>
+                <a:latin typeface="Lexend"/>
               </a:rPr>
               <a:t>1.   </a:t>
             </a:r>
@@ -7166,7 +7369,7 @@
       </p:sp>
       <p:pic>
         <p:nvPicPr>
-          <p:cNvPr id="9" name="Picture 8" descr="0ae0cbe9590d6d51.png"/>
+          <p:cNvPr id="9" name="Picture 8" descr="bdfad0a4d6a24e79.png"/>
           <p:cNvPicPr>
             <a:picLocks noChangeAspect="1"/>
           </p:cNvPicPr>
@@ -7180,8 +7383,8 @@
         </p:blipFill>
         <p:spPr>
           <a:xfrm>
-            <a:off x="2457965" y="1464564"/>
-            <a:ext cx="688848" cy="408432"/>
+            <a:off x="2408921" y="1473708"/>
+            <a:ext cx="679704" cy="390144"/>
           </a:xfrm>
           <a:prstGeom prst="rect">
             <a:avLst/>
@@ -7197,7 +7400,7 @@
         <p:spPr>
           <a:xfrm>
             <a:off x="1874519" y="2052828"/>
-            <a:ext cx="6163986" cy="457200"/>
+            <a:ext cx="6063082" cy="457200"/>
           </a:xfrm>
           <a:prstGeom prst="rect">
             <a:avLst/>
@@ -7212,11 +7415,11 @@
           <a:p>
             <a:pPr algn="l"/>
             <a:r>
-              <a:rPr sz="2300" b="0" i="0">
+              <a:rPr sz="2180" b="0" i="0">
                 <a:solidFill>
                   <a:srgbClr val="1A1A1A"/>
                 </a:solidFill>
-                <a:latin typeface="Century Schoolbook"/>
+                <a:latin typeface="Lexend"/>
               </a:rPr>
               <a:t>2.   Between which two whole numbers is </a:t>
             </a:r>
@@ -7225,7 +7428,7 @@
       </p:sp>
       <p:pic>
         <p:nvPicPr>
-          <p:cNvPr id="11" name="Picture 10" descr="bab7398c9b21b51a.png"/>
+          <p:cNvPr id="11" name="Picture 10" descr="77d9db560e6d39e9.png"/>
           <p:cNvPicPr>
             <a:picLocks noChangeAspect="1"/>
           </p:cNvPicPr>
@@ -7239,8 +7442,8 @@
         </p:blipFill>
         <p:spPr>
           <a:xfrm>
-            <a:off x="7901346" y="2077212"/>
-            <a:ext cx="688848" cy="408432"/>
+            <a:off x="7800442" y="2086356"/>
+            <a:ext cx="725424" cy="390144"/>
           </a:xfrm>
           <a:prstGeom prst="rect">
             <a:avLst/>
@@ -7255,8 +7458,8 @@
         </p:nvSpPr>
         <p:spPr>
           <a:xfrm>
-            <a:off x="8590194" y="2052828"/>
-            <a:ext cx="347771" cy="457200"/>
+            <a:off x="8525866" y="2052828"/>
+            <a:ext cx="360631" cy="457200"/>
           </a:xfrm>
           <a:prstGeom prst="rect">
             <a:avLst/>
@@ -7271,11 +7474,11 @@
           <a:p>
             <a:pPr algn="l"/>
             <a:r>
-              <a:rPr sz="2300" b="0" i="0">
+              <a:rPr sz="2180" b="0" i="0">
                 <a:solidFill>
                   <a:srgbClr val="1A1A1A"/>
                 </a:solidFill>
-                <a:latin typeface="Century Schoolbook"/>
+                <a:latin typeface="Lexend"/>
               </a:rPr>
               <a:t>?</a:t>
             </a:r>
@@ -7291,7 +7494,7 @@
         <p:spPr>
           <a:xfrm>
             <a:off x="1874519" y="2665476"/>
-            <a:ext cx="1652008" cy="457200"/>
+            <a:ext cx="1612295" cy="457200"/>
           </a:xfrm>
           <a:prstGeom prst="rect">
             <a:avLst/>
@@ -7306,11 +7509,11 @@
           <a:p>
             <a:pPr algn="l"/>
             <a:r>
-              <a:rPr sz="2300" b="0" i="0">
+              <a:rPr sz="2180" b="0" i="0">
                 <a:solidFill>
                   <a:srgbClr val="1A1A1A"/>
                 </a:solidFill>
-                <a:latin typeface="Century Schoolbook"/>
+                <a:latin typeface="Lexend"/>
               </a:rPr>
               <a:t>3.   Solve  </a:t>
             </a:r>
@@ -7319,7 +7522,7 @@
       </p:sp>
       <p:pic>
         <p:nvPicPr>
-          <p:cNvPr id="14" name="Picture 13" descr="d836f789d7988873.png"/>
+          <p:cNvPr id="14" name="Picture 13" descr="e6d9f3b3b9bc147e.png"/>
           <p:cNvPicPr>
             <a:picLocks noChangeAspect="1"/>
           </p:cNvPicPr>
@@ -7333,8 +7536,8 @@
         </p:blipFill>
         <p:spPr>
           <a:xfrm>
-            <a:off x="3389368" y="2778252"/>
-            <a:ext cx="1402080" cy="231648"/>
+            <a:off x="3349655" y="2781300"/>
+            <a:ext cx="1392936" cy="225552"/>
           </a:xfrm>
           <a:prstGeom prst="rect">
             <a:avLst/>
@@ -7349,8 +7552,8 @@
         </p:nvSpPr>
         <p:spPr>
           <a:xfrm>
-            <a:off x="1874519" y="3349752"/>
-            <a:ext cx="2190435" cy="457200"/>
+            <a:off x="1874519" y="3343656"/>
+            <a:ext cx="2118555" cy="457200"/>
           </a:xfrm>
           <a:prstGeom prst="rect">
             <a:avLst/>
@@ -7365,11 +7568,11 @@
           <a:p>
             <a:pPr algn="l"/>
             <a:r>
-              <a:rPr sz="2300" b="0" i="0">
+              <a:rPr sz="2180" b="0" i="0">
                 <a:solidFill>
                   <a:srgbClr val="1A1A1A"/>
                 </a:solidFill>
-                <a:latin typeface="Century Schoolbook"/>
+                <a:latin typeface="Lexend"/>
               </a:rPr>
               <a:t>4.   Evaluate  </a:t>
             </a:r>
@@ -7378,7 +7581,7 @@
       </p:sp>
       <p:pic>
         <p:nvPicPr>
-          <p:cNvPr id="16" name="Picture 15" descr="ec4478436d606ed4.png"/>
+          <p:cNvPr id="16" name="Picture 15" descr="dec811195678918b.png"/>
           <p:cNvPicPr>
             <a:picLocks noChangeAspect="1"/>
           </p:cNvPicPr>
@@ -7392,8 +7595,8 @@
         </p:blipFill>
         <p:spPr>
           <a:xfrm>
-            <a:off x="3927795" y="3300984"/>
-            <a:ext cx="637032" cy="554736"/>
+            <a:off x="3855915" y="3300984"/>
+            <a:ext cx="640080" cy="542544"/>
           </a:xfrm>
           <a:prstGeom prst="rect">
             <a:avLst/>
@@ -7442,11 +7645,11 @@
           <a:p>
             <a:pPr algn="l"/>
             <a:r>
-              <a:rPr sz="3400" b="1" i="0">
+              <a:rPr sz="3229" b="1" i="0">
                 <a:solidFill>
                   <a:srgbClr val="1A1A1A"/>
                 </a:solidFill>
-                <a:latin typeface="Century Schoolbook"/>
+                <a:latin typeface="Lexend"/>
               </a:rPr>
               <a:t>Whiteboards   ·   Question 3 of 9</a:t>
             </a:r>
@@ -7582,11 +7785,11 @@
           <a:p>
             <a:pPr algn="l"/>
             <a:r>
-              <a:rPr sz="1100" b="0" i="1">
+              <a:rPr sz="1040" b="0" i="0">
                 <a:solidFill>
                   <a:srgbClr val="6B6B6B"/>
                 </a:solidFill>
-                <a:latin typeface="Century Schoolbook"/>
+                <a:latin typeface="Lexend"/>
               </a:rPr>
               <a:t>Grade 7 Accelerated · Unit 3 · Lesson 1 — Product Laws of Exponents</a:t>
             </a:r>
@@ -7617,11 +7820,11 @@
           <a:p>
             <a:pPr algn="r"/>
             <a:r>
-              <a:rPr sz="1100" b="0" i="0">
+              <a:rPr sz="1040" b="0" i="0">
                 <a:solidFill>
                   <a:srgbClr val="6B6B6B"/>
                 </a:solidFill>
-                <a:latin typeface="Century Schoolbook"/>
+                <a:latin typeface="Lexend"/>
               </a:rPr>
               <a:t>20</a:t>
             </a:r>
@@ -7630,7 +7833,7 @@
       </p:sp>
       <p:pic>
         <p:nvPicPr>
-          <p:cNvPr id="8" name="Picture 7" descr="0682cf5d6aba1b5d.png"/>
+          <p:cNvPr id="8" name="Picture 7" descr="5affe015bded252a.png"/>
           <p:cNvPicPr>
             <a:picLocks noChangeAspect="1"/>
           </p:cNvPicPr>
@@ -7644,8 +7847,8 @@
         </p:blipFill>
         <p:spPr>
           <a:xfrm>
-            <a:off x="5443728" y="2194560"/>
-            <a:ext cx="1274064" cy="512064"/>
+            <a:off x="5410199" y="2194560"/>
+            <a:ext cx="1341120" cy="505968"/>
           </a:xfrm>
           <a:prstGeom prst="rect">
             <a:avLst/>
@@ -7676,11 +7879,11 @@
           <a:p>
             <a:pPr algn="ctr"/>
             <a:r>
-              <a:rPr sz="2600" b="1" i="0">
+              <a:rPr sz="2470" b="1" i="0">
                 <a:solidFill>
                   <a:srgbClr val="1A1A1A"/>
                 </a:solidFill>
-                <a:latin typeface="Century Schoolbook"/>
+                <a:latin typeface="Lexend"/>
               </a:rPr>
               <a:t>Answer it.</a:t>
             </a:r>
@@ -7729,11 +7932,11 @@
           <a:p>
             <a:pPr algn="l"/>
             <a:r>
-              <a:rPr sz="3400" b="1" i="0">
+              <a:rPr sz="3229" b="1" i="0">
                 <a:solidFill>
                   <a:srgbClr val="1A1A1A"/>
                 </a:solidFill>
-                <a:latin typeface="Century Schoolbook"/>
+                <a:latin typeface="Lexend"/>
               </a:rPr>
               <a:t>Whiteboards   ·   Question 3 of 9</a:t>
             </a:r>
@@ -7869,11 +8072,11 @@
           <a:p>
             <a:pPr algn="l"/>
             <a:r>
-              <a:rPr sz="1100" b="0" i="1">
+              <a:rPr sz="1040" b="0" i="0">
                 <a:solidFill>
                   <a:srgbClr val="6B6B6B"/>
                 </a:solidFill>
-                <a:latin typeface="Century Schoolbook"/>
+                <a:latin typeface="Lexend"/>
               </a:rPr>
               <a:t>Grade 7 Accelerated · Unit 3 · Lesson 1 — Product Laws of Exponents</a:t>
             </a:r>
@@ -7904,11 +8107,11 @@
           <a:p>
             <a:pPr algn="r"/>
             <a:r>
-              <a:rPr sz="1100" b="0" i="0">
+              <a:rPr sz="1040" b="0" i="0">
                 <a:solidFill>
                   <a:srgbClr val="6B6B6B"/>
                 </a:solidFill>
-                <a:latin typeface="Century Schoolbook"/>
+                <a:latin typeface="Lexend"/>
               </a:rPr>
               <a:t>21</a:t>
             </a:r>
@@ -7917,7 +8120,7 @@
       </p:sp>
       <p:pic>
         <p:nvPicPr>
-          <p:cNvPr id="8" name="Picture 7" descr="b6b82c3fc17cdb45.png"/>
+          <p:cNvPr id="8" name="Picture 7" descr="b79ccee972120db7.png"/>
           <p:cNvPicPr>
             <a:picLocks noChangeAspect="1"/>
           </p:cNvPicPr>
@@ -7931,17 +8134,41 @@
         </p:blipFill>
         <p:spPr>
           <a:xfrm>
-            <a:off x="5440679" y="2103120"/>
-            <a:ext cx="1280160" cy="515112"/>
+            <a:off x="5410199" y="2103120"/>
+            <a:ext cx="1341120" cy="509016"/>
           </a:xfrm>
           <a:prstGeom prst="rect">
             <a:avLst/>
           </a:prstGeom>
         </p:spPr>
       </p:pic>
-      <p:sp>
-        <p:nvSpPr>
-          <p:cNvPr id="9" name="TextBox 8"/>
+      <p:pic>
+        <p:nvPicPr>
+          <p:cNvPr id="9" name="Picture 8" descr="40c6ca452737ffb3.png"/>
+          <p:cNvPicPr>
+            <a:picLocks noChangeAspect="1"/>
+          </p:cNvPicPr>
+          <p:nvPr/>
+        </p:nvPicPr>
+        <p:blipFill>
+          <a:blip r:embed="rId3"/>
+          <a:stretch>
+            <a:fillRect/>
+          </a:stretch>
+        </p:blipFill>
+        <p:spPr>
+          <a:xfrm>
+            <a:off x="3770375" y="2935224"/>
+            <a:ext cx="4730496" cy="368808"/>
+          </a:xfrm>
+          <a:prstGeom prst="rect">
+            <a:avLst/>
+          </a:prstGeom>
+        </p:spPr>
+      </p:pic>
+      <p:sp>
+        <p:nvSpPr>
+          <p:cNvPr id="10" name="TextBox 9"/>
           <p:cNvSpPr txBox="1"/>
           <p:nvPr/>
         </p:nvSpPr>
@@ -7963,11 +8190,11 @@
           <a:p>
             <a:pPr algn="ctr"/>
             <a:r>
-              <a:rPr sz="3200" b="1" i="0">
+              <a:rPr sz="3040" b="1" i="0">
                 <a:solidFill>
                   <a:srgbClr val="9E1B32"/>
                 </a:solidFill>
-                <a:latin typeface="Century Schoolbook"/>
+                <a:latin typeface="Lexend"/>
               </a:rPr>
               <a:t>Answer:   1000</a:t>
             </a:r>
@@ -8016,11 +8243,11 @@
           <a:p>
             <a:pPr algn="l"/>
             <a:r>
-              <a:rPr sz="3400" b="1" i="0">
+              <a:rPr sz="3229" b="1" i="0">
                 <a:solidFill>
                   <a:srgbClr val="1A1A1A"/>
                 </a:solidFill>
-                <a:latin typeface="Century Schoolbook"/>
+                <a:latin typeface="Lexend"/>
               </a:rPr>
               <a:t>Whiteboards   ·   Question 4 of 9</a:t>
             </a:r>
@@ -8156,11 +8383,11 @@
           <a:p>
             <a:pPr algn="l"/>
             <a:r>
-              <a:rPr sz="1100" b="0" i="1">
+              <a:rPr sz="1040" b="0" i="0">
                 <a:solidFill>
                   <a:srgbClr val="6B6B6B"/>
                 </a:solidFill>
-                <a:latin typeface="Century Schoolbook"/>
+                <a:latin typeface="Lexend"/>
               </a:rPr>
               <a:t>Grade 7 Accelerated · Unit 3 · Lesson 1 — Product Laws of Exponents</a:t>
             </a:r>
@@ -8191,11 +8418,11 @@
           <a:p>
             <a:pPr algn="r"/>
             <a:r>
-              <a:rPr sz="1100" b="0" i="0">
+              <a:rPr sz="1040" b="0" i="0">
                 <a:solidFill>
                   <a:srgbClr val="6B6B6B"/>
                 </a:solidFill>
-                <a:latin typeface="Century Schoolbook"/>
+                <a:latin typeface="Lexend"/>
               </a:rPr>
               <a:t>22</a:t>
             </a:r>
@@ -8204,7 +8431,7 @@
       </p:sp>
       <p:pic>
         <p:nvPicPr>
-          <p:cNvPr id="8" name="Picture 7" descr="d3482028085e5061.png"/>
+          <p:cNvPr id="8" name="Picture 7" descr="ef29e4c51122a892.png"/>
           <p:cNvPicPr>
             <a:picLocks noChangeAspect="1"/>
           </p:cNvPicPr>
@@ -8218,8 +8445,8 @@
         </p:blipFill>
         <p:spPr>
           <a:xfrm>
-            <a:off x="5603748" y="2194560"/>
-            <a:ext cx="954023" cy="518160"/>
+            <a:off x="5585459" y="2194560"/>
+            <a:ext cx="990599" cy="509016"/>
           </a:xfrm>
           <a:prstGeom prst="rect">
             <a:avLst/>
@@ -8250,11 +8477,11 @@
           <a:p>
             <a:pPr algn="ctr"/>
             <a:r>
-              <a:rPr sz="2600" b="1" i="0">
+              <a:rPr sz="2470" b="1" i="0">
                 <a:solidFill>
                   <a:srgbClr val="1A1A1A"/>
                 </a:solidFill>
-                <a:latin typeface="Century Schoolbook"/>
+                <a:latin typeface="Lexend"/>
               </a:rPr>
               <a:t>Answer it.</a:t>
             </a:r>
@@ -8303,11 +8530,11 @@
           <a:p>
             <a:pPr algn="l"/>
             <a:r>
-              <a:rPr sz="3400" b="1" i="0">
+              <a:rPr sz="3229" b="1" i="0">
                 <a:solidFill>
                   <a:srgbClr val="1A1A1A"/>
                 </a:solidFill>
-                <a:latin typeface="Century Schoolbook"/>
+                <a:latin typeface="Lexend"/>
               </a:rPr>
               <a:t>Whiteboards   ·   Question 4 of 9</a:t>
             </a:r>
@@ -8443,11 +8670,11 @@
           <a:p>
             <a:pPr algn="l"/>
             <a:r>
-              <a:rPr sz="1100" b="0" i="1">
+              <a:rPr sz="1040" b="0" i="0">
                 <a:solidFill>
                   <a:srgbClr val="6B6B6B"/>
                 </a:solidFill>
-                <a:latin typeface="Century Schoolbook"/>
+                <a:latin typeface="Lexend"/>
               </a:rPr>
               <a:t>Grade 7 Accelerated · Unit 3 · Lesson 1 — Product Laws of Exponents</a:t>
             </a:r>
@@ -8478,11 +8705,11 @@
           <a:p>
             <a:pPr algn="r"/>
             <a:r>
-              <a:rPr sz="1100" b="0" i="0">
+              <a:rPr sz="1040" b="0" i="0">
                 <a:solidFill>
                   <a:srgbClr val="6B6B6B"/>
                 </a:solidFill>
-                <a:latin typeface="Century Schoolbook"/>
+                <a:latin typeface="Lexend"/>
               </a:rPr>
               <a:t>23</a:t>
             </a:r>
@@ -8491,7 +8718,7 @@
       </p:sp>
       <p:pic>
         <p:nvPicPr>
-          <p:cNvPr id="8" name="Picture 7" descr="35097bf00c93665c.png"/>
+          <p:cNvPr id="8" name="Picture 7" descr="8eed60f03f689e06.png"/>
           <p:cNvPicPr>
             <a:picLocks noChangeAspect="1"/>
           </p:cNvPicPr>
@@ -8505,52 +8732,17 @@
         </p:blipFill>
         <p:spPr>
           <a:xfrm>
-            <a:off x="5603748" y="2103120"/>
-            <a:ext cx="954023" cy="518160"/>
+            <a:off x="5583936" y="2103120"/>
+            <a:ext cx="993648" cy="509016"/>
           </a:xfrm>
           <a:prstGeom prst="rect">
             <a:avLst/>
           </a:prstGeom>
         </p:spPr>
       </p:pic>
-      <p:sp>
-        <p:nvSpPr>
-          <p:cNvPr id="9" name="TextBox 8"/>
-          <p:cNvSpPr txBox="1"/>
-          <p:nvPr/>
-        </p:nvSpPr>
-        <p:spPr>
-          <a:xfrm>
-            <a:off x="4920995" y="4604003"/>
-            <a:ext cx="1920240" cy="548640"/>
-          </a:xfrm>
-          <a:prstGeom prst="rect">
-            <a:avLst/>
-          </a:prstGeom>
-          <a:noFill/>
-        </p:spPr>
-        <p:txBody>
-          <a:bodyPr wrap="square" lIns="45720" rIns="45720" tIns="18288" bIns="18288" anchor="ctr">
-            <a:spAutoFit/>
-          </a:bodyPr>
-          <a:lstStyle/>
-          <a:p>
-            <a:pPr algn="l"/>
-            <a:r>
-              <a:rPr sz="3200" b="1" i="0">
-                <a:solidFill>
-                  <a:srgbClr val="9E1B32"/>
-                </a:solidFill>
-                <a:latin typeface="Century Schoolbook"/>
-              </a:rPr>
-              <a:t>Answer:</a:t>
-            </a:r>
-          </a:p>
-        </p:txBody>
-      </p:sp>
       <p:pic>
         <p:nvPicPr>
-          <p:cNvPr id="10" name="Picture 9" descr="46595cae23e895d4.png"/>
+          <p:cNvPr id="9" name="Picture 8" descr="a192ef6ffd071b6c.png"/>
           <p:cNvPicPr>
             <a:picLocks noChangeAspect="1"/>
           </p:cNvPicPr>
@@ -8564,8 +8756,67 @@
         </p:blipFill>
         <p:spPr>
           <a:xfrm>
-            <a:off x="6841235" y="4663440"/>
-            <a:ext cx="399288" cy="429768"/>
+            <a:off x="4963667" y="2933699"/>
+            <a:ext cx="2343912" cy="371856"/>
+          </a:xfrm>
+          <a:prstGeom prst="rect">
+            <a:avLst/>
+          </a:prstGeom>
+        </p:spPr>
+      </p:pic>
+      <p:sp>
+        <p:nvSpPr>
+          <p:cNvPr id="10" name="TextBox 9"/>
+          <p:cNvSpPr txBox="1"/>
+          <p:nvPr/>
+        </p:nvSpPr>
+        <p:spPr>
+          <a:xfrm>
+            <a:off x="4905755" y="4600956"/>
+            <a:ext cx="1920240" cy="548640"/>
+          </a:xfrm>
+          <a:prstGeom prst="rect">
+            <a:avLst/>
+          </a:prstGeom>
+          <a:noFill/>
+        </p:spPr>
+        <p:txBody>
+          <a:bodyPr wrap="square" lIns="45720" rIns="45720" tIns="18288" bIns="18288" anchor="ctr">
+            <a:spAutoFit/>
+          </a:bodyPr>
+          <a:lstStyle/>
+          <a:p>
+            <a:pPr algn="l"/>
+            <a:r>
+              <a:rPr sz="3040" b="1" i="0">
+                <a:solidFill>
+                  <a:srgbClr val="9E1B32"/>
+                </a:solidFill>
+                <a:latin typeface="Lexend"/>
+              </a:rPr>
+              <a:t>Answer:</a:t>
+            </a:r>
+          </a:p>
+        </p:txBody>
+      </p:sp>
+      <p:pic>
+        <p:nvPicPr>
+          <p:cNvPr id="11" name="Picture 10" descr="4d9300a640681389.png"/>
+          <p:cNvPicPr>
+            <a:picLocks noChangeAspect="1"/>
+          </p:cNvPicPr>
+          <p:nvPr/>
+        </p:nvPicPr>
+        <p:blipFill>
+          <a:blip r:embed="rId4"/>
+          <a:stretch>
+            <a:fillRect/>
+          </a:stretch>
+        </p:blipFill>
+        <p:spPr>
+          <a:xfrm>
+            <a:off x="6825996" y="4663440"/>
+            <a:ext cx="429768" cy="423672"/>
           </a:xfrm>
           <a:prstGeom prst="rect">
             <a:avLst/>
@@ -8614,11 +8865,11 @@
           <a:p>
             <a:pPr algn="l"/>
             <a:r>
-              <a:rPr sz="3400" b="1" i="0">
+              <a:rPr sz="3229" b="1" i="0">
                 <a:solidFill>
                   <a:srgbClr val="1A1A1A"/>
                 </a:solidFill>
-                <a:latin typeface="Century Schoolbook"/>
+                <a:latin typeface="Lexend"/>
               </a:rPr>
               <a:t>Whiteboards   ·   Question 5 of 9</a:t>
             </a:r>
@@ -8754,11 +9005,11 @@
           <a:p>
             <a:pPr algn="l"/>
             <a:r>
-              <a:rPr sz="1100" b="0" i="1">
+              <a:rPr sz="1040" b="0" i="0">
                 <a:solidFill>
                   <a:srgbClr val="6B6B6B"/>
                 </a:solidFill>
-                <a:latin typeface="Century Schoolbook"/>
+                <a:latin typeface="Lexend"/>
               </a:rPr>
               <a:t>Grade 7 Accelerated · Unit 3 · Lesson 1 — Product Laws of Exponents</a:t>
             </a:r>
@@ -8789,11 +9040,11 @@
           <a:p>
             <a:pPr algn="r"/>
             <a:r>
-              <a:rPr sz="1100" b="0" i="0">
+              <a:rPr sz="1040" b="0" i="0">
                 <a:solidFill>
                   <a:srgbClr val="6B6B6B"/>
                 </a:solidFill>
-                <a:latin typeface="Century Schoolbook"/>
+                <a:latin typeface="Lexend"/>
               </a:rPr>
               <a:t>24</a:t>
             </a:r>
@@ -8802,7 +9053,7 @@
       </p:sp>
       <p:pic>
         <p:nvPicPr>
-          <p:cNvPr id="8" name="Picture 7" descr="fba9bd108908810b.png"/>
+          <p:cNvPr id="8" name="Picture 7" descr="8bbe3445ce62554d.png"/>
           <p:cNvPicPr>
             <a:picLocks noChangeAspect="1"/>
           </p:cNvPicPr>
@@ -8816,8 +9067,8 @@
         </p:blipFill>
         <p:spPr>
           <a:xfrm>
-            <a:off x="5490971" y="2194560"/>
-            <a:ext cx="1179576" cy="426720"/>
+            <a:off x="5451347" y="2194560"/>
+            <a:ext cx="1258824" cy="417576"/>
           </a:xfrm>
           <a:prstGeom prst="rect">
             <a:avLst/>
@@ -8832,7 +9083,7 @@
         </p:nvSpPr>
         <p:spPr>
           <a:xfrm>
-            <a:off x="777240" y="2849880"/>
+            <a:off x="777240" y="2840736"/>
             <a:ext cx="10607040" cy="465151"/>
           </a:xfrm>
           <a:prstGeom prst="rect">
@@ -8848,11 +9099,11 @@
           <a:p>
             <a:pPr algn="ctr"/>
             <a:r>
-              <a:rPr sz="2600" b="0" i="0">
+              <a:rPr sz="2470" b="0" i="0">
                 <a:solidFill>
                   <a:srgbClr val="1A1A1A"/>
                 </a:solidFill>
-                <a:latin typeface="Century Schoolbook"/>
+                <a:latin typeface="Lexend"/>
               </a:rPr>
               <a:t>Which expression is equivalent?</a:t>
             </a:r>
@@ -8867,7 +9118,7 @@
         </p:nvSpPr>
         <p:spPr>
           <a:xfrm>
-            <a:off x="1874519" y="3516199"/>
+            <a:off x="1874519" y="3507055"/>
             <a:ext cx="4572000" cy="548640"/>
           </a:xfrm>
           <a:prstGeom prst="rect">
@@ -8883,29 +9134,29 @@
           <a:p>
             <a:pPr algn="l"/>
             <a:r>
-              <a:rPr sz="2400" b="1" i="0">
+              <a:rPr sz="2280" b="1" i="0">
                 <a:solidFill>
                   <a:srgbClr val="1A1A1A"/>
                 </a:solidFill>
-                <a:latin typeface="Century Schoolbook"/>
+                <a:latin typeface="Lexend"/>
               </a:rPr>
               <a:t>A.   </a:t>
             </a:r>
             <a:r>
-              <a:rPr sz="2400" b="0" i="0">
+              <a:rPr sz="2280" b="0" i="0">
                 <a:solidFill>
                   <a:srgbClr val="1A1A1A"/>
                 </a:solidFill>
-                <a:latin typeface="Century Schoolbook"/>
+                <a:latin typeface="Lexend"/>
               </a:rPr>
               <a:t>16</a:t>
             </a:r>
             <a:r>
-              <a:rPr sz="2400" b="0" i="0" baseline="30000">
+              <a:rPr sz="2280" b="0" i="0" baseline="30000">
                 <a:solidFill>
                   <a:srgbClr val="1A1A1A"/>
                 </a:solidFill>
-                <a:latin typeface="Century Schoolbook"/>
+                <a:latin typeface="Lexend"/>
               </a:rPr>
               <a:t>5</a:t>
             </a:r>
@@ -8920,7 +9171,7 @@
         </p:nvSpPr>
         <p:spPr>
           <a:xfrm>
-            <a:off x="6629400" y="3516199"/>
+            <a:off x="6629400" y="3507055"/>
             <a:ext cx="4572000" cy="548640"/>
           </a:xfrm>
           <a:prstGeom prst="rect">
@@ -8936,29 +9187,29 @@
           <a:p>
             <a:pPr algn="l"/>
             <a:r>
-              <a:rPr sz="2400" b="1" i="0">
+              <a:rPr sz="2280" b="1" i="0">
                 <a:solidFill>
                   <a:srgbClr val="1A1A1A"/>
                 </a:solidFill>
-                <a:latin typeface="Century Schoolbook"/>
+                <a:latin typeface="Lexend"/>
               </a:rPr>
               <a:t>B.   </a:t>
             </a:r>
             <a:r>
-              <a:rPr sz="2400" b="0" i="0">
+              <a:rPr sz="2280" b="0" i="0">
                 <a:solidFill>
                   <a:srgbClr val="1A1A1A"/>
                 </a:solidFill>
-                <a:latin typeface="Century Schoolbook"/>
+                <a:latin typeface="Lexend"/>
               </a:rPr>
               <a:t>8</a:t>
             </a:r>
             <a:r>
-              <a:rPr sz="2400" b="0" i="0" baseline="30000">
+              <a:rPr sz="2280" b="0" i="0" baseline="30000">
                 <a:solidFill>
                   <a:srgbClr val="1A1A1A"/>
                 </a:solidFill>
-                <a:latin typeface="Century Schoolbook"/>
+                <a:latin typeface="Lexend"/>
               </a:rPr>
               <a:t>5</a:t>
             </a:r>
@@ -8973,7 +9224,7 @@
         </p:nvSpPr>
         <p:spPr>
           <a:xfrm>
-            <a:off x="1874519" y="4201999"/>
+            <a:off x="1874519" y="4192855"/>
             <a:ext cx="4572000" cy="548640"/>
           </a:xfrm>
           <a:prstGeom prst="rect">
@@ -8989,29 +9240,29 @@
           <a:p>
             <a:pPr algn="l"/>
             <a:r>
-              <a:rPr sz="2400" b="1" i="0">
+              <a:rPr sz="2280" b="1" i="0">
                 <a:solidFill>
                   <a:srgbClr val="1A1A1A"/>
                 </a:solidFill>
-                <a:latin typeface="Century Schoolbook"/>
+                <a:latin typeface="Lexend"/>
               </a:rPr>
               <a:t>C.   </a:t>
             </a:r>
             <a:r>
-              <a:rPr sz="2400" b="0" i="0">
+              <a:rPr sz="2280" b="0" i="0">
                 <a:solidFill>
                   <a:srgbClr val="1A1A1A"/>
                 </a:solidFill>
-                <a:latin typeface="Century Schoolbook"/>
+                <a:latin typeface="Lexend"/>
               </a:rPr>
               <a:t>4</a:t>
             </a:r>
             <a:r>
-              <a:rPr sz="2400" b="0" i="0" baseline="30000">
+              <a:rPr sz="2280" b="0" i="0" baseline="30000">
                 <a:solidFill>
                   <a:srgbClr val="1A1A1A"/>
                 </a:solidFill>
-                <a:latin typeface="Century Schoolbook"/>
+                <a:latin typeface="Lexend"/>
               </a:rPr>
               <a:t>6</a:t>
             </a:r>
@@ -9026,7 +9277,7 @@
         </p:nvSpPr>
         <p:spPr>
           <a:xfrm>
-            <a:off x="6629400" y="4201999"/>
+            <a:off x="6629400" y="4192855"/>
             <a:ext cx="4572000" cy="548640"/>
           </a:xfrm>
           <a:prstGeom prst="rect">
@@ -9042,29 +9293,29 @@
           <a:p>
             <a:pPr algn="l"/>
             <a:r>
-              <a:rPr sz="2400" b="1" i="0">
+              <a:rPr sz="2280" b="1" i="0">
                 <a:solidFill>
                   <a:srgbClr val="1A1A1A"/>
                 </a:solidFill>
-                <a:latin typeface="Century Schoolbook"/>
+                <a:latin typeface="Lexend"/>
               </a:rPr>
               <a:t>D.   </a:t>
             </a:r>
             <a:r>
-              <a:rPr sz="2400" b="0" i="0">
+              <a:rPr sz="2280" b="0" i="0">
                 <a:solidFill>
                   <a:srgbClr val="1A1A1A"/>
                 </a:solidFill>
-                <a:latin typeface="Century Schoolbook"/>
+                <a:latin typeface="Lexend"/>
               </a:rPr>
               <a:t>4</a:t>
             </a:r>
             <a:r>
-              <a:rPr sz="2400" b="0" i="0" baseline="30000">
+              <a:rPr sz="2280" b="0" i="0" baseline="30000">
                 <a:solidFill>
                   <a:srgbClr val="1A1A1A"/>
                 </a:solidFill>
-                <a:latin typeface="Century Schoolbook"/>
+                <a:latin typeface="Lexend"/>
               </a:rPr>
               <a:t>5</a:t>
             </a:r>
@@ -9079,7 +9330,7 @@
         </p:nvSpPr>
         <p:spPr>
           <a:xfrm>
-            <a:off x="777240" y="5207839"/>
+            <a:off x="777240" y="5198695"/>
             <a:ext cx="10607040" cy="457200"/>
           </a:xfrm>
           <a:prstGeom prst="rect">
@@ -9095,11 +9346,11 @@
           <a:p>
             <a:pPr algn="ctr"/>
             <a:r>
-              <a:rPr sz="2600" b="1" i="0">
+              <a:rPr sz="2470" b="1" i="0">
                 <a:solidFill>
                   <a:srgbClr val="1A1A1A"/>
                 </a:solidFill>
-                <a:latin typeface="Century Schoolbook"/>
+                <a:latin typeface="Lexend"/>
               </a:rPr>
               <a:t>Answer it.</a:t>
             </a:r>
@@ -9148,11 +9399,11 @@
           <a:p>
             <a:pPr algn="l"/>
             <a:r>
-              <a:rPr sz="3400" b="1" i="0">
+              <a:rPr sz="3229" b="1" i="0">
                 <a:solidFill>
                   <a:srgbClr val="1A1A1A"/>
                 </a:solidFill>
-                <a:latin typeface="Century Schoolbook"/>
+                <a:latin typeface="Lexend"/>
               </a:rPr>
               <a:t>Whiteboards   ·   Question 5 of 9</a:t>
             </a:r>
@@ -9288,11 +9539,11 @@
           <a:p>
             <a:pPr algn="l"/>
             <a:r>
-              <a:rPr sz="1100" b="0" i="1">
+              <a:rPr sz="1040" b="0" i="0">
                 <a:solidFill>
                   <a:srgbClr val="6B6B6B"/>
                 </a:solidFill>
-                <a:latin typeface="Century Schoolbook"/>
+                <a:latin typeface="Lexend"/>
               </a:rPr>
               <a:t>Grade 7 Accelerated · Unit 3 · Lesson 1 — Product Laws of Exponents</a:t>
             </a:r>
@@ -9323,11 +9574,11 @@
           <a:p>
             <a:pPr algn="r"/>
             <a:r>
-              <a:rPr sz="1100" b="0" i="0">
+              <a:rPr sz="1040" b="0" i="0">
                 <a:solidFill>
                   <a:srgbClr val="6B6B6B"/>
                 </a:solidFill>
-                <a:latin typeface="Century Schoolbook"/>
+                <a:latin typeface="Lexend"/>
               </a:rPr>
               <a:t>25</a:t>
             </a:r>
@@ -9336,7 +9587,7 @@
       </p:sp>
       <p:pic>
         <p:nvPicPr>
-          <p:cNvPr id="8" name="Picture 7" descr="fc3793d359b5cfff.png"/>
+          <p:cNvPr id="8" name="Picture 7" descr="76d2e0b73392877e.png"/>
           <p:cNvPicPr>
             <a:picLocks noChangeAspect="1"/>
           </p:cNvPicPr>
@@ -9350,8 +9601,8 @@
         </p:blipFill>
         <p:spPr>
           <a:xfrm>
-            <a:off x="5489448" y="2103120"/>
-            <a:ext cx="1182624" cy="423672"/>
+            <a:off x="5451347" y="2103120"/>
+            <a:ext cx="1258824" cy="417576"/>
           </a:xfrm>
           <a:prstGeom prst="rect">
             <a:avLst/>
@@ -9366,7 +9617,7 @@
         </p:nvSpPr>
         <p:spPr>
           <a:xfrm>
-            <a:off x="777240" y="2755392"/>
+            <a:off x="777240" y="2749295"/>
             <a:ext cx="10607040" cy="465151"/>
           </a:xfrm>
           <a:prstGeom prst="rect">
@@ -9382,27 +9633,51 @@
           <a:p>
             <a:pPr algn="ctr"/>
             <a:r>
-              <a:rPr sz="2600" b="0" i="0">
+              <a:rPr sz="2470" b="0" i="0">
                 <a:solidFill>
                   <a:srgbClr val="1A1A1A"/>
                 </a:solidFill>
-                <a:latin typeface="Century Schoolbook"/>
+                <a:latin typeface="Lexend"/>
               </a:rPr>
               <a:t>Which expression is equivalent?</a:t>
             </a:r>
           </a:p>
         </p:txBody>
       </p:sp>
-      <p:sp>
-        <p:nvSpPr>
-          <p:cNvPr id="10" name="TextBox 9"/>
-          <p:cNvSpPr txBox="1"/>
-          <p:nvPr/>
-        </p:nvSpPr>
-        <p:spPr>
-          <a:xfrm>
-            <a:off x="1874519" y="3421711"/>
-            <a:ext cx="4572000" cy="548640"/>
+      <p:pic>
+        <p:nvPicPr>
+          <p:cNvPr id="10" name="Picture 9" descr="3a724d11a6d46802.png"/>
+          <p:cNvPicPr>
+            <a:picLocks noChangeAspect="1"/>
+          </p:cNvPicPr>
+          <p:nvPr/>
+        </p:nvPicPr>
+        <p:blipFill>
+          <a:blip r:embed="rId3"/>
+          <a:stretch>
+            <a:fillRect/>
+          </a:stretch>
+        </p:blipFill>
+        <p:spPr>
+          <a:xfrm>
+            <a:off x="4809743" y="3452191"/>
+            <a:ext cx="2654808" cy="301752"/>
+          </a:xfrm>
+          <a:prstGeom prst="rect">
+            <a:avLst/>
+          </a:prstGeom>
+        </p:spPr>
+      </p:pic>
+      <p:sp>
+        <p:nvSpPr>
+          <p:cNvPr id="11" name="TextBox 10"/>
+          <p:cNvSpPr txBox="1"/>
+          <p:nvPr/>
+        </p:nvSpPr>
+        <p:spPr>
+          <a:xfrm>
+            <a:off x="777240" y="4663440"/>
+            <a:ext cx="10607040" cy="548640"/>
           </a:xfrm>
           <a:prstGeom prst="rect">
             <a:avLst/>
@@ -9415,234 +9690,22 @@
           </a:bodyPr>
           <a:lstStyle/>
           <a:p>
-            <a:pPr algn="l"/>
-            <a:r>
-              <a:rPr sz="2400" b="1" i="0">
-                <a:solidFill>
-                  <a:srgbClr val="1A1A1A"/>
-                </a:solidFill>
-                <a:latin typeface="Century Schoolbook"/>
-              </a:rPr>
-              <a:t>A.   </a:t>
-            </a:r>
-            <a:r>
-              <a:rPr sz="2400" b="0" i="0">
-                <a:solidFill>
-                  <a:srgbClr val="1A1A1A"/>
-                </a:solidFill>
-                <a:latin typeface="Century Schoolbook"/>
-              </a:rPr>
-              <a:t>16</a:t>
-            </a:r>
-            <a:r>
-              <a:rPr sz="2400" b="0" i="0" baseline="30000">
-                <a:solidFill>
-                  <a:srgbClr val="1A1A1A"/>
-                </a:solidFill>
-                <a:latin typeface="Century Schoolbook"/>
-              </a:rPr>
-              <a:t>5</a:t>
-            </a:r>
-          </a:p>
-        </p:txBody>
-      </p:sp>
-      <p:sp>
-        <p:nvSpPr>
-          <p:cNvPr id="11" name="TextBox 10"/>
-          <p:cNvSpPr txBox="1"/>
-          <p:nvPr/>
-        </p:nvSpPr>
-        <p:spPr>
-          <a:xfrm>
-            <a:off x="6629400" y="3421711"/>
-            <a:ext cx="4572000" cy="548640"/>
-          </a:xfrm>
-          <a:prstGeom prst="rect">
-            <a:avLst/>
-          </a:prstGeom>
-          <a:noFill/>
-        </p:spPr>
-        <p:txBody>
-          <a:bodyPr wrap="square" lIns="45720" rIns="45720" tIns="18288" bIns="18288" anchor="t">
-            <a:spAutoFit/>
-          </a:bodyPr>
-          <a:lstStyle/>
-          <a:p>
-            <a:pPr algn="l"/>
-            <a:r>
-              <a:rPr sz="2400" b="1" i="0">
-                <a:solidFill>
-                  <a:srgbClr val="1A1A1A"/>
-                </a:solidFill>
-                <a:latin typeface="Century Schoolbook"/>
-              </a:rPr>
-              <a:t>B.   </a:t>
-            </a:r>
-            <a:r>
-              <a:rPr sz="2400" b="0" i="0">
-                <a:solidFill>
-                  <a:srgbClr val="1A1A1A"/>
-                </a:solidFill>
-                <a:latin typeface="Century Schoolbook"/>
-              </a:rPr>
-              <a:t>8</a:t>
-            </a:r>
-            <a:r>
-              <a:rPr sz="2400" b="0" i="0" baseline="30000">
-                <a:solidFill>
-                  <a:srgbClr val="1A1A1A"/>
-                </a:solidFill>
-                <a:latin typeface="Century Schoolbook"/>
-              </a:rPr>
-              <a:t>5</a:t>
-            </a:r>
-          </a:p>
-        </p:txBody>
-      </p:sp>
-      <p:sp>
-        <p:nvSpPr>
-          <p:cNvPr id="12" name="TextBox 11"/>
-          <p:cNvSpPr txBox="1"/>
-          <p:nvPr/>
-        </p:nvSpPr>
-        <p:spPr>
-          <a:xfrm>
-            <a:off x="1874519" y="4107511"/>
-            <a:ext cx="4572000" cy="548640"/>
-          </a:xfrm>
-          <a:prstGeom prst="rect">
-            <a:avLst/>
-          </a:prstGeom>
-          <a:noFill/>
-        </p:spPr>
-        <p:txBody>
-          <a:bodyPr wrap="square" lIns="45720" rIns="45720" tIns="18288" bIns="18288" anchor="t">
-            <a:spAutoFit/>
-          </a:bodyPr>
-          <a:lstStyle/>
-          <a:p>
-            <a:pPr algn="l"/>
-            <a:r>
-              <a:rPr sz="2400" b="1" i="0">
-                <a:solidFill>
-                  <a:srgbClr val="1A1A1A"/>
-                </a:solidFill>
-                <a:latin typeface="Century Schoolbook"/>
-              </a:rPr>
-              <a:t>C.   </a:t>
-            </a:r>
-            <a:r>
-              <a:rPr sz="2400" b="0" i="0">
-                <a:solidFill>
-                  <a:srgbClr val="1A1A1A"/>
-                </a:solidFill>
-                <a:latin typeface="Century Schoolbook"/>
-              </a:rPr>
-              <a:t>4</a:t>
-            </a:r>
-            <a:r>
-              <a:rPr sz="2400" b="0" i="0" baseline="30000">
-                <a:solidFill>
-                  <a:srgbClr val="1A1A1A"/>
-                </a:solidFill>
-                <a:latin typeface="Century Schoolbook"/>
-              </a:rPr>
-              <a:t>6</a:t>
-            </a:r>
-          </a:p>
-        </p:txBody>
-      </p:sp>
-      <p:sp>
-        <p:nvSpPr>
-          <p:cNvPr id="13" name="TextBox 12"/>
-          <p:cNvSpPr txBox="1"/>
-          <p:nvPr/>
-        </p:nvSpPr>
-        <p:spPr>
-          <a:xfrm>
-            <a:off x="6629400" y="4107511"/>
-            <a:ext cx="4572000" cy="548640"/>
-          </a:xfrm>
-          <a:prstGeom prst="rect">
-            <a:avLst/>
-          </a:prstGeom>
-          <a:noFill/>
-        </p:spPr>
-        <p:txBody>
-          <a:bodyPr wrap="square" lIns="45720" rIns="45720" tIns="18288" bIns="18288" anchor="t">
-            <a:spAutoFit/>
-          </a:bodyPr>
-          <a:lstStyle/>
-          <a:p>
-            <a:pPr algn="l"/>
-            <a:r>
-              <a:rPr sz="2400" b="1" i="0">
+            <a:pPr algn="ctr"/>
+            <a:r>
+              <a:rPr sz="3040" b="1" i="0">
                 <a:solidFill>
                   <a:srgbClr val="9E1B32"/>
                 </a:solidFill>
-                <a:latin typeface="Century Schoolbook"/>
-              </a:rPr>
-              <a:t>D.   </a:t>
-            </a:r>
-            <a:r>
-              <a:rPr sz="2400" b="1" i="0">
+                <a:latin typeface="Lexend"/>
+              </a:rPr>
+              <a:t>Answer:   D — 4</a:t>
+            </a:r>
+            <a:r>
+              <a:rPr sz="3040" b="1" i="0" baseline="30000">
                 <a:solidFill>
                   <a:srgbClr val="9E1B32"/>
                 </a:solidFill>
-                <a:latin typeface="Century Schoolbook"/>
-              </a:rPr>
-              <a:t>4</a:t>
-            </a:r>
-            <a:r>
-              <a:rPr sz="2400" b="1" i="0" baseline="30000">
-                <a:solidFill>
-                  <a:srgbClr val="9E1B32"/>
-                </a:solidFill>
-                <a:latin typeface="Century Schoolbook"/>
-              </a:rPr>
-              <a:t>5</a:t>
-            </a:r>
-          </a:p>
-        </p:txBody>
-      </p:sp>
-      <p:sp>
-        <p:nvSpPr>
-          <p:cNvPr id="14" name="TextBox 13"/>
-          <p:cNvSpPr txBox="1"/>
-          <p:nvPr/>
-        </p:nvSpPr>
-        <p:spPr>
-          <a:xfrm>
-            <a:off x="777240" y="5113351"/>
-            <a:ext cx="10607040" cy="548640"/>
-          </a:xfrm>
-          <a:prstGeom prst="rect">
-            <a:avLst/>
-          </a:prstGeom>
-          <a:noFill/>
-        </p:spPr>
-        <p:txBody>
-          <a:bodyPr wrap="square" lIns="45720" rIns="45720" tIns="18288" bIns="18288" anchor="t">
-            <a:spAutoFit/>
-          </a:bodyPr>
-          <a:lstStyle/>
-          <a:p>
-            <a:pPr algn="ctr"/>
-            <a:r>
-              <a:rPr sz="3200" b="1" i="0">
-                <a:solidFill>
-                  <a:srgbClr val="9E1B32"/>
-                </a:solidFill>
-                <a:latin typeface="Century Schoolbook"/>
-              </a:rPr>
-              <a:t>Answer:   D — 4</a:t>
-            </a:r>
-            <a:r>
-              <a:rPr sz="3200" b="1" i="0" baseline="30000">
-                <a:solidFill>
-                  <a:srgbClr val="9E1B32"/>
-                </a:solidFill>
-                <a:latin typeface="Century Schoolbook"/>
+                <a:latin typeface="Lexend"/>
               </a:rPr>
               <a:t>5</a:t>
             </a:r>
@@ -9691,11 +9754,11 @@
           <a:p>
             <a:pPr algn="l"/>
             <a:r>
-              <a:rPr sz="3400" b="1" i="0">
+              <a:rPr sz="3229" b="1" i="0">
                 <a:solidFill>
                   <a:srgbClr val="1A1A1A"/>
                 </a:solidFill>
-                <a:latin typeface="Century Schoolbook"/>
+                <a:latin typeface="Lexend"/>
               </a:rPr>
               <a:t>Whiteboards   ·   Question 6 of 9</a:t>
             </a:r>
@@ -9831,11 +9894,11 @@
           <a:p>
             <a:pPr algn="l"/>
             <a:r>
-              <a:rPr sz="1100" b="0" i="1">
+              <a:rPr sz="1040" b="0" i="0">
                 <a:solidFill>
                   <a:srgbClr val="6B6B6B"/>
                 </a:solidFill>
-                <a:latin typeface="Century Schoolbook"/>
+                <a:latin typeface="Lexend"/>
               </a:rPr>
               <a:t>Grade 7 Accelerated · Unit 3 · Lesson 1 — Product Laws of Exponents</a:t>
             </a:r>
@@ -9866,11 +9929,11 @@
           <a:p>
             <a:pPr algn="r"/>
             <a:r>
-              <a:rPr sz="1100" b="0" i="0">
+              <a:rPr sz="1040" b="0" i="0">
                 <a:solidFill>
                   <a:srgbClr val="6B6B6B"/>
                 </a:solidFill>
-                <a:latin typeface="Century Schoolbook"/>
+                <a:latin typeface="Lexend"/>
               </a:rPr>
               <a:t>26</a:t>
             </a:r>
@@ -9879,7 +9942,7 @@
       </p:sp>
       <p:pic>
         <p:nvPicPr>
-          <p:cNvPr id="8" name="Picture 7" descr="806ea7b0be26cfa4.png"/>
+          <p:cNvPr id="8" name="Picture 7" descr="086b323a5a1e494d.png"/>
           <p:cNvPicPr>
             <a:picLocks noChangeAspect="1"/>
           </p:cNvPicPr>
@@ -9893,8 +9956,8 @@
         </p:blipFill>
         <p:spPr>
           <a:xfrm>
-            <a:off x="5603748" y="2194560"/>
-            <a:ext cx="954023" cy="518160"/>
+            <a:off x="5611367" y="2194560"/>
+            <a:ext cx="938784" cy="505968"/>
           </a:xfrm>
           <a:prstGeom prst="rect">
             <a:avLst/>
@@ -9909,7 +9972,7 @@
         </p:nvSpPr>
         <p:spPr>
           <a:xfrm>
-            <a:off x="777240" y="2941320"/>
+            <a:off x="777240" y="2929128"/>
             <a:ext cx="10607040" cy="465151"/>
           </a:xfrm>
           <a:prstGeom prst="rect">
@@ -9925,11 +9988,11 @@
           <a:p>
             <a:pPr algn="ctr"/>
             <a:r>
-              <a:rPr sz="2600" b="0" i="0">
+              <a:rPr sz="2470" b="0" i="0">
                 <a:solidFill>
                   <a:srgbClr val="1A1A1A"/>
                 </a:solidFill>
-                <a:latin typeface="Century Schoolbook"/>
+                <a:latin typeface="Lexend"/>
               </a:rPr>
               <a:t>Which expression is equivalent?</a:t>
             </a:r>
@@ -9944,7 +10007,7 @@
         </p:nvSpPr>
         <p:spPr>
           <a:xfrm>
-            <a:off x="1874519" y="3607639"/>
+            <a:off x="1874519" y="3595447"/>
             <a:ext cx="4572000" cy="548640"/>
           </a:xfrm>
           <a:prstGeom prst="rect">
@@ -9960,29 +10023,29 @@
           <a:p>
             <a:pPr algn="l"/>
             <a:r>
-              <a:rPr sz="2400" b="1" i="0">
+              <a:rPr sz="2280" b="1" i="0">
                 <a:solidFill>
                   <a:srgbClr val="1A1A1A"/>
                 </a:solidFill>
-                <a:latin typeface="Century Schoolbook"/>
+                <a:latin typeface="Lexend"/>
               </a:rPr>
               <a:t>A.   </a:t>
             </a:r>
             <a:r>
-              <a:rPr sz="2400" b="0" i="0">
+              <a:rPr sz="2280" b="0" i="0">
                 <a:solidFill>
                   <a:srgbClr val="1A1A1A"/>
                 </a:solidFill>
-                <a:latin typeface="Century Schoolbook"/>
+                <a:latin typeface="Lexend"/>
               </a:rPr>
               <a:t>2</a:t>
             </a:r>
             <a:r>
-              <a:rPr sz="2400" b="0" i="0" baseline="30000">
+              <a:rPr sz="2280" b="0" i="0" baseline="30000">
                 <a:solidFill>
                   <a:srgbClr val="1A1A1A"/>
                 </a:solidFill>
-                <a:latin typeface="Century Schoolbook"/>
+                <a:latin typeface="Lexend"/>
               </a:rPr>
               <a:t>5</a:t>
             </a:r>
@@ -9997,7 +10060,7 @@
         </p:nvSpPr>
         <p:spPr>
           <a:xfrm>
-            <a:off x="6629400" y="3607639"/>
+            <a:off x="6629400" y="3595447"/>
             <a:ext cx="4572000" cy="548640"/>
           </a:xfrm>
           <a:prstGeom prst="rect">
@@ -10013,29 +10076,29 @@
           <a:p>
             <a:pPr algn="l"/>
             <a:r>
-              <a:rPr sz="2400" b="1" i="0">
+              <a:rPr sz="2280" b="1" i="0">
                 <a:solidFill>
                   <a:srgbClr val="1A1A1A"/>
                 </a:solidFill>
-                <a:latin typeface="Century Schoolbook"/>
+                <a:latin typeface="Lexend"/>
               </a:rPr>
               <a:t>B.   </a:t>
             </a:r>
             <a:r>
-              <a:rPr sz="2400" b="0" i="0">
+              <a:rPr sz="2280" b="0" i="0">
                 <a:solidFill>
                   <a:srgbClr val="1A1A1A"/>
                 </a:solidFill>
-                <a:latin typeface="Century Schoolbook"/>
+                <a:latin typeface="Lexend"/>
               </a:rPr>
               <a:t>4</a:t>
             </a:r>
             <a:r>
-              <a:rPr sz="2400" b="0" i="0" baseline="30000">
+              <a:rPr sz="2280" b="0" i="0" baseline="30000">
                 <a:solidFill>
                   <a:srgbClr val="1A1A1A"/>
                 </a:solidFill>
-                <a:latin typeface="Century Schoolbook"/>
+                <a:latin typeface="Lexend"/>
               </a:rPr>
               <a:t>6</a:t>
             </a:r>
@@ -10050,7 +10113,7 @@
         </p:nvSpPr>
         <p:spPr>
           <a:xfrm>
-            <a:off x="1874519" y="4293439"/>
+            <a:off x="1874519" y="4281247"/>
             <a:ext cx="4572000" cy="548640"/>
           </a:xfrm>
           <a:prstGeom prst="rect">
@@ -10066,29 +10129,29 @@
           <a:p>
             <a:pPr algn="l"/>
             <a:r>
-              <a:rPr sz="2400" b="1" i="0">
+              <a:rPr sz="2280" b="1" i="0">
                 <a:solidFill>
                   <a:srgbClr val="1A1A1A"/>
                 </a:solidFill>
-                <a:latin typeface="Century Schoolbook"/>
+                <a:latin typeface="Lexend"/>
               </a:rPr>
               <a:t>C.   </a:t>
             </a:r>
             <a:r>
-              <a:rPr sz="2400" b="0" i="0">
+              <a:rPr sz="2280" b="0" i="0">
                 <a:solidFill>
                   <a:srgbClr val="1A1A1A"/>
                 </a:solidFill>
-                <a:latin typeface="Century Schoolbook"/>
+                <a:latin typeface="Lexend"/>
               </a:rPr>
               <a:t>2</a:t>
             </a:r>
             <a:r>
-              <a:rPr sz="2400" b="0" i="0" baseline="30000">
+              <a:rPr sz="2280" b="0" i="0" baseline="30000">
                 <a:solidFill>
                   <a:srgbClr val="1A1A1A"/>
                 </a:solidFill>
-                <a:latin typeface="Century Schoolbook"/>
+                <a:latin typeface="Lexend"/>
               </a:rPr>
               <a:t>6</a:t>
             </a:r>
@@ -10103,7 +10166,7 @@
         </p:nvSpPr>
         <p:spPr>
           <a:xfrm>
-            <a:off x="6629400" y="4293439"/>
+            <a:off x="6629400" y="4281247"/>
             <a:ext cx="4572000" cy="548640"/>
           </a:xfrm>
           <a:prstGeom prst="rect">
@@ -10119,29 +10182,29 @@
           <a:p>
             <a:pPr algn="l"/>
             <a:r>
-              <a:rPr sz="2400" b="1" i="0">
+              <a:rPr sz="2280" b="1" i="0">
                 <a:solidFill>
                   <a:srgbClr val="1A1A1A"/>
                 </a:solidFill>
-                <a:latin typeface="Century Schoolbook"/>
+                <a:latin typeface="Lexend"/>
               </a:rPr>
               <a:t>D.   </a:t>
             </a:r>
             <a:r>
-              <a:rPr sz="2400" b="0" i="0">
+              <a:rPr sz="2280" b="0" i="0">
                 <a:solidFill>
                   <a:srgbClr val="1A1A1A"/>
                 </a:solidFill>
-                <a:latin typeface="Century Schoolbook"/>
+                <a:latin typeface="Lexend"/>
               </a:rPr>
               <a:t>2</a:t>
             </a:r>
             <a:r>
-              <a:rPr sz="2400" b="0" i="0" baseline="30000">
+              <a:rPr sz="2280" b="0" i="0" baseline="30000">
                 <a:solidFill>
                   <a:srgbClr val="1A1A1A"/>
                 </a:solidFill>
-                <a:latin typeface="Century Schoolbook"/>
+                <a:latin typeface="Lexend"/>
               </a:rPr>
               <a:t>9</a:t>
             </a:r>
@@ -10156,7 +10219,7 @@
         </p:nvSpPr>
         <p:spPr>
           <a:xfrm>
-            <a:off x="777240" y="5299279"/>
+            <a:off x="777240" y="5287087"/>
             <a:ext cx="10607040" cy="457200"/>
           </a:xfrm>
           <a:prstGeom prst="rect">
@@ -10172,11 +10235,11 @@
           <a:p>
             <a:pPr algn="ctr"/>
             <a:r>
-              <a:rPr sz="2600" b="1" i="0">
+              <a:rPr sz="2470" b="1" i="0">
                 <a:solidFill>
                   <a:srgbClr val="1A1A1A"/>
                 </a:solidFill>
-                <a:latin typeface="Century Schoolbook"/>
+                <a:latin typeface="Lexend"/>
               </a:rPr>
               <a:t>Answer it.</a:t>
             </a:r>
@@ -10225,11 +10288,11 @@
           <a:p>
             <a:pPr algn="l"/>
             <a:r>
-              <a:rPr sz="3400" b="1" i="0">
+              <a:rPr sz="3229" b="1" i="0">
                 <a:solidFill>
                   <a:srgbClr val="1A1A1A"/>
                 </a:solidFill>
-                <a:latin typeface="Century Schoolbook"/>
+                <a:latin typeface="Lexend"/>
               </a:rPr>
               <a:t>Whiteboards   ·   Question 6 of 9</a:t>
             </a:r>
@@ -10365,11 +10428,11 @@
           <a:p>
             <a:pPr algn="l"/>
             <a:r>
-              <a:rPr sz="1100" b="0" i="1">
+              <a:rPr sz="1040" b="0" i="0">
                 <a:solidFill>
                   <a:srgbClr val="6B6B6B"/>
                 </a:solidFill>
-                <a:latin typeface="Century Schoolbook"/>
+                <a:latin typeface="Lexend"/>
               </a:rPr>
               <a:t>Grade 7 Accelerated · Unit 3 · Lesson 1 — Product Laws of Exponents</a:t>
             </a:r>
@@ -10400,11 +10463,11 @@
           <a:p>
             <a:pPr algn="r"/>
             <a:r>
-              <a:rPr sz="1100" b="0" i="0">
+              <a:rPr sz="1040" b="0" i="0">
                 <a:solidFill>
                   <a:srgbClr val="6B6B6B"/>
                 </a:solidFill>
-                <a:latin typeface="Century Schoolbook"/>
+                <a:latin typeface="Lexend"/>
               </a:rPr>
               <a:t>27</a:t>
             </a:r>
@@ -10413,7 +10476,7 @@
       </p:sp>
       <p:pic>
         <p:nvPicPr>
-          <p:cNvPr id="8" name="Picture 7" descr="0fac146190426fe8.png"/>
+          <p:cNvPr id="8" name="Picture 7" descr="9a96c530649f2cb7.png"/>
           <p:cNvPicPr>
             <a:picLocks noChangeAspect="1"/>
           </p:cNvPicPr>
@@ -10427,8 +10490,8 @@
         </p:blipFill>
         <p:spPr>
           <a:xfrm>
-            <a:off x="5602223" y="2103120"/>
-            <a:ext cx="957072" cy="518160"/>
+            <a:off x="5609844" y="2103120"/>
+            <a:ext cx="941832" cy="505968"/>
           </a:xfrm>
           <a:prstGeom prst="rect">
             <a:avLst/>
@@ -10443,7 +10506,7 @@
         </p:nvSpPr>
         <p:spPr>
           <a:xfrm>
-            <a:off x="777240" y="2849879"/>
+            <a:off x="777240" y="2837687"/>
             <a:ext cx="10607040" cy="465151"/>
           </a:xfrm>
           <a:prstGeom prst="rect">
@@ -10459,27 +10522,51 @@
           <a:p>
             <a:pPr algn="ctr"/>
             <a:r>
-              <a:rPr sz="2600" b="0" i="0">
+              <a:rPr sz="2470" b="0" i="0">
                 <a:solidFill>
                   <a:srgbClr val="1A1A1A"/>
                 </a:solidFill>
-                <a:latin typeface="Century Schoolbook"/>
+                <a:latin typeface="Lexend"/>
               </a:rPr>
               <a:t>Which expression is equivalent?</a:t>
             </a:r>
           </a:p>
         </p:txBody>
       </p:sp>
-      <p:sp>
-        <p:nvSpPr>
-          <p:cNvPr id="10" name="TextBox 9"/>
-          <p:cNvSpPr txBox="1"/>
-          <p:nvPr/>
-        </p:nvSpPr>
-        <p:spPr>
-          <a:xfrm>
-            <a:off x="1874519" y="3516199"/>
-            <a:ext cx="4572000" cy="548640"/>
+      <p:pic>
+        <p:nvPicPr>
+          <p:cNvPr id="10" name="Picture 9" descr="5669e1447e03fc57.png"/>
+          <p:cNvPicPr>
+            <a:picLocks noChangeAspect="1"/>
+          </p:cNvPicPr>
+          <p:nvPr/>
+        </p:nvPicPr>
+        <p:blipFill>
+          <a:blip r:embed="rId3"/>
+          <a:stretch>
+            <a:fillRect/>
+          </a:stretch>
+        </p:blipFill>
+        <p:spPr>
+          <a:xfrm>
+            <a:off x="4977383" y="3505531"/>
+            <a:ext cx="2316480" cy="371856"/>
+          </a:xfrm>
+          <a:prstGeom prst="rect">
+            <a:avLst/>
+          </a:prstGeom>
+        </p:spPr>
+      </p:pic>
+      <p:sp>
+        <p:nvSpPr>
+          <p:cNvPr id="11" name="TextBox 10"/>
+          <p:cNvSpPr txBox="1"/>
+          <p:nvPr/>
+        </p:nvSpPr>
+        <p:spPr>
+          <a:xfrm>
+            <a:off x="777240" y="4663440"/>
+            <a:ext cx="10607040" cy="548640"/>
           </a:xfrm>
           <a:prstGeom prst="rect">
             <a:avLst/>
@@ -10492,234 +10579,22 @@
           </a:bodyPr>
           <a:lstStyle/>
           <a:p>
-            <a:pPr algn="l"/>
-            <a:r>
-              <a:rPr sz="2400" b="1" i="0">
-                <a:solidFill>
-                  <a:srgbClr val="1A1A1A"/>
-                </a:solidFill>
-                <a:latin typeface="Century Schoolbook"/>
-              </a:rPr>
-              <a:t>A.   </a:t>
-            </a:r>
-            <a:r>
-              <a:rPr sz="2400" b="0" i="0">
-                <a:solidFill>
-                  <a:srgbClr val="1A1A1A"/>
-                </a:solidFill>
-                <a:latin typeface="Century Schoolbook"/>
-              </a:rPr>
-              <a:t>2</a:t>
-            </a:r>
-            <a:r>
-              <a:rPr sz="2400" b="0" i="0" baseline="30000">
-                <a:solidFill>
-                  <a:srgbClr val="1A1A1A"/>
-                </a:solidFill>
-                <a:latin typeface="Century Schoolbook"/>
-              </a:rPr>
-              <a:t>5</a:t>
-            </a:r>
-          </a:p>
-        </p:txBody>
-      </p:sp>
-      <p:sp>
-        <p:nvSpPr>
-          <p:cNvPr id="11" name="TextBox 10"/>
-          <p:cNvSpPr txBox="1"/>
-          <p:nvPr/>
-        </p:nvSpPr>
-        <p:spPr>
-          <a:xfrm>
-            <a:off x="6629400" y="3516199"/>
-            <a:ext cx="4572000" cy="548640"/>
-          </a:xfrm>
-          <a:prstGeom prst="rect">
-            <a:avLst/>
-          </a:prstGeom>
-          <a:noFill/>
-        </p:spPr>
-        <p:txBody>
-          <a:bodyPr wrap="square" lIns="45720" rIns="45720" tIns="18288" bIns="18288" anchor="t">
-            <a:spAutoFit/>
-          </a:bodyPr>
-          <a:lstStyle/>
-          <a:p>
-            <a:pPr algn="l"/>
-            <a:r>
-              <a:rPr sz="2400" b="1" i="0">
-                <a:solidFill>
-                  <a:srgbClr val="1A1A1A"/>
-                </a:solidFill>
-                <a:latin typeface="Century Schoolbook"/>
-              </a:rPr>
-              <a:t>B.   </a:t>
-            </a:r>
-            <a:r>
-              <a:rPr sz="2400" b="0" i="0">
-                <a:solidFill>
-                  <a:srgbClr val="1A1A1A"/>
-                </a:solidFill>
-                <a:latin typeface="Century Schoolbook"/>
-              </a:rPr>
-              <a:t>4</a:t>
-            </a:r>
-            <a:r>
-              <a:rPr sz="2400" b="0" i="0" baseline="30000">
-                <a:solidFill>
-                  <a:srgbClr val="1A1A1A"/>
-                </a:solidFill>
-                <a:latin typeface="Century Schoolbook"/>
-              </a:rPr>
-              <a:t>6</a:t>
-            </a:r>
-          </a:p>
-        </p:txBody>
-      </p:sp>
-      <p:sp>
-        <p:nvSpPr>
-          <p:cNvPr id="12" name="TextBox 11"/>
-          <p:cNvSpPr txBox="1"/>
-          <p:nvPr/>
-        </p:nvSpPr>
-        <p:spPr>
-          <a:xfrm>
-            <a:off x="1874519" y="4201999"/>
-            <a:ext cx="4572000" cy="548640"/>
-          </a:xfrm>
-          <a:prstGeom prst="rect">
-            <a:avLst/>
-          </a:prstGeom>
-          <a:noFill/>
-        </p:spPr>
-        <p:txBody>
-          <a:bodyPr wrap="square" lIns="45720" rIns="45720" tIns="18288" bIns="18288" anchor="t">
-            <a:spAutoFit/>
-          </a:bodyPr>
-          <a:lstStyle/>
-          <a:p>
-            <a:pPr algn="l"/>
-            <a:r>
-              <a:rPr sz="2400" b="1" i="0">
+            <a:pPr algn="ctr"/>
+            <a:r>
+              <a:rPr sz="3040" b="1" i="0">
                 <a:solidFill>
                   <a:srgbClr val="9E1B32"/>
                 </a:solidFill>
-                <a:latin typeface="Century Schoolbook"/>
-              </a:rPr>
-              <a:t>C.   </a:t>
-            </a:r>
-            <a:r>
-              <a:rPr sz="2400" b="1" i="0">
+                <a:latin typeface="Lexend"/>
+              </a:rPr>
+              <a:t>Answer:   C — 2</a:t>
+            </a:r>
+            <a:r>
+              <a:rPr sz="3040" b="1" i="0" baseline="30000">
                 <a:solidFill>
                   <a:srgbClr val="9E1B32"/>
                 </a:solidFill>
-                <a:latin typeface="Century Schoolbook"/>
-              </a:rPr>
-              <a:t>2</a:t>
-            </a:r>
-            <a:r>
-              <a:rPr sz="2400" b="1" i="0" baseline="30000">
-                <a:solidFill>
-                  <a:srgbClr val="9E1B32"/>
-                </a:solidFill>
-                <a:latin typeface="Century Schoolbook"/>
-              </a:rPr>
-              <a:t>6</a:t>
-            </a:r>
-          </a:p>
-        </p:txBody>
-      </p:sp>
-      <p:sp>
-        <p:nvSpPr>
-          <p:cNvPr id="13" name="TextBox 12"/>
-          <p:cNvSpPr txBox="1"/>
-          <p:nvPr/>
-        </p:nvSpPr>
-        <p:spPr>
-          <a:xfrm>
-            <a:off x="6629400" y="4201999"/>
-            <a:ext cx="4572000" cy="548640"/>
-          </a:xfrm>
-          <a:prstGeom prst="rect">
-            <a:avLst/>
-          </a:prstGeom>
-          <a:noFill/>
-        </p:spPr>
-        <p:txBody>
-          <a:bodyPr wrap="square" lIns="45720" rIns="45720" tIns="18288" bIns="18288" anchor="t">
-            <a:spAutoFit/>
-          </a:bodyPr>
-          <a:lstStyle/>
-          <a:p>
-            <a:pPr algn="l"/>
-            <a:r>
-              <a:rPr sz="2400" b="1" i="0">
-                <a:solidFill>
-                  <a:srgbClr val="1A1A1A"/>
-                </a:solidFill>
-                <a:latin typeface="Century Schoolbook"/>
-              </a:rPr>
-              <a:t>D.   </a:t>
-            </a:r>
-            <a:r>
-              <a:rPr sz="2400" b="0" i="0">
-                <a:solidFill>
-                  <a:srgbClr val="1A1A1A"/>
-                </a:solidFill>
-                <a:latin typeface="Century Schoolbook"/>
-              </a:rPr>
-              <a:t>2</a:t>
-            </a:r>
-            <a:r>
-              <a:rPr sz="2400" b="0" i="0" baseline="30000">
-                <a:solidFill>
-                  <a:srgbClr val="1A1A1A"/>
-                </a:solidFill>
-                <a:latin typeface="Century Schoolbook"/>
-              </a:rPr>
-              <a:t>9</a:t>
-            </a:r>
-          </a:p>
-        </p:txBody>
-      </p:sp>
-      <p:sp>
-        <p:nvSpPr>
-          <p:cNvPr id="14" name="TextBox 13"/>
-          <p:cNvSpPr txBox="1"/>
-          <p:nvPr/>
-        </p:nvSpPr>
-        <p:spPr>
-          <a:xfrm>
-            <a:off x="777240" y="5207839"/>
-            <a:ext cx="10607040" cy="548640"/>
-          </a:xfrm>
-          <a:prstGeom prst="rect">
-            <a:avLst/>
-          </a:prstGeom>
-          <a:noFill/>
-        </p:spPr>
-        <p:txBody>
-          <a:bodyPr wrap="square" lIns="45720" rIns="45720" tIns="18288" bIns="18288" anchor="t">
-            <a:spAutoFit/>
-          </a:bodyPr>
-          <a:lstStyle/>
-          <a:p>
-            <a:pPr algn="ctr"/>
-            <a:r>
-              <a:rPr sz="3200" b="1" i="0">
-                <a:solidFill>
-                  <a:srgbClr val="9E1B32"/>
-                </a:solidFill>
-                <a:latin typeface="Century Schoolbook"/>
-              </a:rPr>
-              <a:t>Answer:   C — 2</a:t>
-            </a:r>
-            <a:r>
-              <a:rPr sz="3200" b="1" i="0" baseline="30000">
-                <a:solidFill>
-                  <a:srgbClr val="9E1B32"/>
-                </a:solidFill>
-                <a:latin typeface="Century Schoolbook"/>
+                <a:latin typeface="Lexend"/>
               </a:rPr>
               <a:t>6</a:t>
             </a:r>
@@ -10768,11 +10643,11 @@
           <a:p>
             <a:pPr algn="l"/>
             <a:r>
-              <a:rPr sz="3400" b="1" i="0">
+              <a:rPr sz="3229" b="1" i="0">
                 <a:solidFill>
                   <a:srgbClr val="1A1A1A"/>
                 </a:solidFill>
-                <a:latin typeface="Century Schoolbook"/>
+                <a:latin typeface="Lexend"/>
               </a:rPr>
               <a:t>Whiteboards   ·   Question 7 of 9</a:t>
             </a:r>
@@ -10908,11 +10783,11 @@
           <a:p>
             <a:pPr algn="l"/>
             <a:r>
-              <a:rPr sz="1100" b="0" i="1">
+              <a:rPr sz="1040" b="0" i="0">
                 <a:solidFill>
                   <a:srgbClr val="6B6B6B"/>
                 </a:solidFill>
-                <a:latin typeface="Century Schoolbook"/>
+                <a:latin typeface="Lexend"/>
               </a:rPr>
               <a:t>Grade 7 Accelerated · Unit 3 · Lesson 1 — Product Laws of Exponents</a:t>
             </a:r>
@@ -10943,11 +10818,11 @@
           <a:p>
             <a:pPr algn="r"/>
             <a:r>
-              <a:rPr sz="1100" b="0" i="0">
+              <a:rPr sz="1040" b="0" i="0">
                 <a:solidFill>
                   <a:srgbClr val="6B6B6B"/>
                 </a:solidFill>
-                <a:latin typeface="Century Schoolbook"/>
+                <a:latin typeface="Lexend"/>
               </a:rPr>
               <a:t>28</a:t>
             </a:r>
@@ -10956,7 +10831,7 @@
       </p:sp>
       <p:pic>
         <p:nvPicPr>
-          <p:cNvPr id="8" name="Picture 7" descr="80e874aaffdac41d.png"/>
+          <p:cNvPr id="8" name="Picture 7" descr="d33980bdb1b2c9a9.png"/>
           <p:cNvPicPr>
             <a:picLocks noChangeAspect="1"/>
           </p:cNvPicPr>
@@ -10970,8 +10845,8 @@
         </p:blipFill>
         <p:spPr>
           <a:xfrm>
-            <a:off x="4829556" y="2194560"/>
-            <a:ext cx="2502408" cy="518160"/>
+            <a:off x="4876800" y="2194560"/>
+            <a:ext cx="2407920" cy="512064"/>
           </a:xfrm>
           <a:prstGeom prst="rect">
             <a:avLst/>
@@ -11002,11 +10877,11 @@
           <a:p>
             <a:pPr algn="ctr"/>
             <a:r>
-              <a:rPr sz="2600" b="1" i="0">
+              <a:rPr sz="2470" b="1" i="0">
                 <a:solidFill>
                   <a:srgbClr val="1A1A1A"/>
                 </a:solidFill>
-                <a:latin typeface="Century Schoolbook"/>
+                <a:latin typeface="Lexend"/>
               </a:rPr>
               <a:t>Answer it.</a:t>
             </a:r>
@@ -11055,11 +10930,11 @@
           <a:p>
             <a:pPr algn="l"/>
             <a:r>
-              <a:rPr sz="3400" b="1" i="0">
+              <a:rPr sz="3229" b="1" i="0">
                 <a:solidFill>
                   <a:srgbClr val="1A1A1A"/>
                 </a:solidFill>
-                <a:latin typeface="Century Schoolbook"/>
+                <a:latin typeface="Lexend"/>
               </a:rPr>
               <a:t>Whiteboards   ·   Question 7 of 9</a:t>
             </a:r>
@@ -11195,11 +11070,11 @@
           <a:p>
             <a:pPr algn="l"/>
             <a:r>
-              <a:rPr sz="1100" b="0" i="1">
+              <a:rPr sz="1040" b="0" i="0">
                 <a:solidFill>
                   <a:srgbClr val="6B6B6B"/>
                 </a:solidFill>
-                <a:latin typeface="Century Schoolbook"/>
+                <a:latin typeface="Lexend"/>
               </a:rPr>
               <a:t>Grade 7 Accelerated · Unit 3 · Lesson 1 — Product Laws of Exponents</a:t>
             </a:r>
@@ -11230,11 +11105,11 @@
           <a:p>
             <a:pPr algn="r"/>
             <a:r>
-              <a:rPr sz="1100" b="0" i="0">
+              <a:rPr sz="1040" b="0" i="0">
                 <a:solidFill>
                   <a:srgbClr val="6B6B6B"/>
                 </a:solidFill>
-                <a:latin typeface="Century Schoolbook"/>
+                <a:latin typeface="Lexend"/>
               </a:rPr>
               <a:t>29</a:t>
             </a:r>
@@ -11243,7 +11118,7 @@
       </p:sp>
       <p:pic>
         <p:nvPicPr>
-          <p:cNvPr id="8" name="Picture 7" descr="5b98b74270202968.png"/>
+          <p:cNvPr id="8" name="Picture 7" descr="1fa821c78ab6d226.png"/>
           <p:cNvPicPr>
             <a:picLocks noChangeAspect="1"/>
           </p:cNvPicPr>
@@ -11257,17 +11132,65 @@
         </p:blipFill>
         <p:spPr>
           <a:xfrm>
-            <a:off x="4828031" y="2103120"/>
-            <a:ext cx="2505456" cy="518160"/>
+            <a:off x="4873751" y="2103120"/>
+            <a:ext cx="2414016" cy="512064"/>
           </a:xfrm>
           <a:prstGeom prst="rect">
             <a:avLst/>
           </a:prstGeom>
         </p:spPr>
       </p:pic>
-      <p:sp>
-        <p:nvSpPr>
-          <p:cNvPr id="9" name="TextBox 8"/>
+      <p:pic>
+        <p:nvPicPr>
+          <p:cNvPr id="9" name="Picture 8" descr="f1691282fd903bca.png"/>
+          <p:cNvPicPr>
+            <a:picLocks noChangeAspect="1"/>
+          </p:cNvPicPr>
+          <p:nvPr/>
+        </p:nvPicPr>
+        <p:blipFill>
+          <a:blip r:embed="rId3"/>
+          <a:stretch>
+            <a:fillRect/>
+          </a:stretch>
+        </p:blipFill>
+        <p:spPr>
+          <a:xfrm>
+            <a:off x="3965447" y="2936748"/>
+            <a:ext cx="4340352" cy="371856"/>
+          </a:xfrm>
+          <a:prstGeom prst="rect">
+            <a:avLst/>
+          </a:prstGeom>
+        </p:spPr>
+      </p:pic>
+      <p:pic>
+        <p:nvPicPr>
+          <p:cNvPr id="10" name="Picture 9" descr="e24b5ec6ef9ddd3a.png"/>
+          <p:cNvPicPr>
+            <a:picLocks noChangeAspect="1"/>
+          </p:cNvPicPr>
+          <p:nvPr/>
+        </p:nvPicPr>
+        <p:blipFill>
+          <a:blip r:embed="rId4"/>
+          <a:stretch>
+            <a:fillRect/>
+          </a:stretch>
+        </p:blipFill>
+        <p:spPr>
+          <a:xfrm>
+            <a:off x="3965447" y="3477768"/>
+            <a:ext cx="1673352" cy="368808"/>
+          </a:xfrm>
+          <a:prstGeom prst="rect">
+            <a:avLst/>
+          </a:prstGeom>
+        </p:spPr>
+      </p:pic>
+      <p:sp>
+        <p:nvSpPr>
+          <p:cNvPr id="11" name="TextBox 10"/>
           <p:cNvSpPr txBox="1"/>
           <p:nvPr/>
         </p:nvSpPr>
@@ -11289,11 +11212,11 @@
           <a:p>
             <a:pPr algn="ctr"/>
             <a:r>
-              <a:rPr sz="3200" b="1" i="0">
+              <a:rPr sz="3040" b="1" i="0">
                 <a:solidFill>
                   <a:srgbClr val="9E1B32"/>
                 </a:solidFill>
-                <a:latin typeface="Century Schoolbook"/>
+                <a:latin typeface="Lexend"/>
               </a:rPr>
               <a:t>Answer:   −27</a:t>
             </a:r>
@@ -11342,11 +11265,11 @@
           <a:p>
             <a:pPr algn="l"/>
             <a:r>
-              <a:rPr sz="3600" b="1" i="0">
+              <a:rPr sz="3420" b="1" i="0">
                 <a:solidFill>
                   <a:srgbClr val="1A1A1A"/>
                 </a:solidFill>
-                <a:latin typeface="Century Schoolbook"/>
+                <a:latin typeface="Lexend"/>
               </a:rPr>
               <a:t>Warm-Up</a:t>
             </a:r>
@@ -11482,11 +11405,11 @@
           <a:p>
             <a:pPr algn="l"/>
             <a:r>
-              <a:rPr sz="1100" b="0" i="1">
+              <a:rPr sz="1040" b="0" i="0">
                 <a:solidFill>
                   <a:srgbClr val="6B6B6B"/>
                 </a:solidFill>
-                <a:latin typeface="Century Schoolbook"/>
+                <a:latin typeface="Lexend"/>
               </a:rPr>
               <a:t>Grade 7 Accelerated · Unit 3 · Lesson 1 — Product Laws of Exponents</a:t>
             </a:r>
@@ -11517,11 +11440,11 @@
           <a:p>
             <a:pPr algn="r"/>
             <a:r>
-              <a:rPr sz="1100" b="0" i="0">
+              <a:rPr sz="1040" b="0" i="0">
                 <a:solidFill>
                   <a:srgbClr val="6B6B6B"/>
                 </a:solidFill>
-                <a:latin typeface="Century Schoolbook"/>
+                <a:latin typeface="Lexend"/>
               </a:rPr>
               <a:t>3</a:t>
             </a:r>
@@ -11537,7 +11460,7 @@
         <p:spPr>
           <a:xfrm>
             <a:off x="1874519" y="1440180"/>
-            <a:ext cx="720605" cy="457200"/>
+            <a:ext cx="671561" cy="457200"/>
           </a:xfrm>
           <a:prstGeom prst="rect">
             <a:avLst/>
@@ -11552,11 +11475,11 @@
           <a:p>
             <a:pPr algn="l"/>
             <a:r>
-              <a:rPr sz="2300" b="0" i="0">
+              <a:rPr sz="2180" b="0" i="0">
                 <a:solidFill>
                   <a:srgbClr val="1A1A1A"/>
                 </a:solidFill>
-                <a:latin typeface="Century Schoolbook"/>
+                <a:latin typeface="Lexend"/>
               </a:rPr>
               <a:t>1.   </a:t>
             </a:r>
@@ -11565,7 +11488,7 @@
       </p:sp>
       <p:pic>
         <p:nvPicPr>
-          <p:cNvPr id="9" name="Picture 8" descr="0ae0cbe9590d6d51.png"/>
+          <p:cNvPr id="9" name="Picture 8" descr="bdfad0a4d6a24e79.png"/>
           <p:cNvPicPr>
             <a:picLocks noChangeAspect="1"/>
           </p:cNvPicPr>
@@ -11579,8 +11502,8 @@
         </p:blipFill>
         <p:spPr>
           <a:xfrm>
-            <a:off x="2457965" y="1464564"/>
-            <a:ext cx="688848" cy="408432"/>
+            <a:off x="2408921" y="1473708"/>
+            <a:ext cx="679704" cy="390144"/>
           </a:xfrm>
           <a:prstGeom prst="rect">
             <a:avLst/>
@@ -11595,8 +11518,8 @@
         </p:nvSpPr>
         <p:spPr>
           <a:xfrm>
-            <a:off x="3695453" y="1440180"/>
-            <a:ext cx="388052" cy="457200"/>
+            <a:off x="3637265" y="1440180"/>
+            <a:ext cx="380014" cy="457200"/>
           </a:xfrm>
           <a:prstGeom prst="rect">
             <a:avLst/>
@@ -11611,11 +11534,11 @@
           <a:p>
             <a:pPr algn="l"/>
             <a:r>
-              <a:rPr sz="2300" b="1" i="0">
+              <a:rPr sz="2180" b="1" i="0">
                 <a:solidFill>
                   <a:srgbClr val="9E1B32"/>
                 </a:solidFill>
-                <a:latin typeface="Century Schoolbook"/>
+                <a:latin typeface="Lexend"/>
               </a:rPr>
               <a:t>9</a:t>
             </a:r>
@@ -11631,7 +11554,7 @@
         <p:spPr>
           <a:xfrm>
             <a:off x="1874519" y="2052828"/>
-            <a:ext cx="6163986" cy="457200"/>
+            <a:ext cx="6063082" cy="457200"/>
           </a:xfrm>
           <a:prstGeom prst="rect">
             <a:avLst/>
@@ -11646,11 +11569,11 @@
           <a:p>
             <a:pPr algn="l"/>
             <a:r>
-              <a:rPr sz="2300" b="0" i="0">
+              <a:rPr sz="2180" b="0" i="0">
                 <a:solidFill>
                   <a:srgbClr val="1A1A1A"/>
                 </a:solidFill>
-                <a:latin typeface="Century Schoolbook"/>
+                <a:latin typeface="Lexend"/>
               </a:rPr>
               <a:t>2.   Between which two whole numbers is </a:t>
             </a:r>
@@ -11659,7 +11582,7 @@
       </p:sp>
       <p:pic>
         <p:nvPicPr>
-          <p:cNvPr id="12" name="Picture 11" descr="bab7398c9b21b51a.png"/>
+          <p:cNvPr id="12" name="Picture 11" descr="77d9db560e6d39e9.png"/>
           <p:cNvPicPr>
             <a:picLocks noChangeAspect="1"/>
           </p:cNvPicPr>
@@ -11673,8 +11596,8 @@
         </p:blipFill>
         <p:spPr>
           <a:xfrm>
-            <a:off x="7901346" y="2077212"/>
-            <a:ext cx="688848" cy="408432"/>
+            <a:off x="7800442" y="2086356"/>
+            <a:ext cx="725424" cy="390144"/>
           </a:xfrm>
           <a:prstGeom prst="rect">
             <a:avLst/>
@@ -11689,8 +11612,8 @@
         </p:nvSpPr>
         <p:spPr>
           <a:xfrm>
-            <a:off x="8590194" y="2052828"/>
-            <a:ext cx="347771" cy="457200"/>
+            <a:off x="8525866" y="2052828"/>
+            <a:ext cx="360631" cy="457200"/>
           </a:xfrm>
           <a:prstGeom prst="rect">
             <a:avLst/>
@@ -11705,11 +11628,11 @@
           <a:p>
             <a:pPr algn="l"/>
             <a:r>
-              <a:rPr sz="2300" b="0" i="0">
+              <a:rPr sz="2180" b="0" i="0">
                 <a:solidFill>
                   <a:srgbClr val="1A1A1A"/>
                 </a:solidFill>
-                <a:latin typeface="Century Schoolbook"/>
+                <a:latin typeface="Lexend"/>
               </a:rPr>
               <a:t>?</a:t>
             </a:r>
@@ -11724,8 +11647,8 @@
         </p:nvSpPr>
         <p:spPr>
           <a:xfrm>
-            <a:off x="9349446" y="2052828"/>
-            <a:ext cx="1351321" cy="457200"/>
+            <a:off x="9297977" y="2052828"/>
+            <a:ext cx="1304512" cy="457200"/>
           </a:xfrm>
           <a:prstGeom prst="rect">
             <a:avLst/>
@@ -11740,11 +11663,11 @@
           <a:p>
             <a:pPr algn="l"/>
             <a:r>
-              <a:rPr sz="2300" b="1" i="0">
+              <a:rPr sz="2180" b="1" i="0">
                 <a:solidFill>
                   <a:srgbClr val="9E1B32"/>
                 </a:solidFill>
-                <a:latin typeface="Century Schoolbook"/>
+                <a:latin typeface="Lexend"/>
               </a:rPr>
               <a:t>6 and 7</a:t>
             </a:r>
@@ -11760,7 +11683,7 @@
         <p:spPr>
           <a:xfrm>
             <a:off x="1874519" y="2665476"/>
-            <a:ext cx="1652008" cy="457200"/>
+            <a:ext cx="1612295" cy="457200"/>
           </a:xfrm>
           <a:prstGeom prst="rect">
             <a:avLst/>
@@ -11775,11 +11698,11 @@
           <a:p>
             <a:pPr algn="l"/>
             <a:r>
-              <a:rPr sz="2300" b="0" i="0">
+              <a:rPr sz="2180" b="0" i="0">
                 <a:solidFill>
                   <a:srgbClr val="1A1A1A"/>
                 </a:solidFill>
-                <a:latin typeface="Century Schoolbook"/>
+                <a:latin typeface="Lexend"/>
               </a:rPr>
               <a:t>3.   Solve  </a:t>
             </a:r>
@@ -11788,7 +11711,7 @@
       </p:sp>
       <p:pic>
         <p:nvPicPr>
-          <p:cNvPr id="16" name="Picture 15" descr="d836f789d7988873.png"/>
+          <p:cNvPr id="16" name="Picture 15" descr="e6d9f3b3b9bc147e.png"/>
           <p:cNvPicPr>
             <a:picLocks noChangeAspect="1"/>
           </p:cNvPicPr>
@@ -11802,8 +11725,8 @@
         </p:blipFill>
         <p:spPr>
           <a:xfrm>
-            <a:off x="3389368" y="2778252"/>
-            <a:ext cx="1402080" cy="231648"/>
+            <a:off x="3349655" y="2781300"/>
+            <a:ext cx="1392936" cy="225552"/>
           </a:xfrm>
           <a:prstGeom prst="rect">
             <a:avLst/>
@@ -11818,8 +11741,8 @@
         </p:nvSpPr>
         <p:spPr>
           <a:xfrm>
-            <a:off x="5340088" y="2665476"/>
-            <a:ext cx="942623" cy="457200"/>
+            <a:off x="5291231" y="2665476"/>
+            <a:ext cx="930337" cy="457200"/>
           </a:xfrm>
           <a:prstGeom prst="rect">
             <a:avLst/>
@@ -11834,11 +11757,11 @@
           <a:p>
             <a:pPr algn="l"/>
             <a:r>
-              <a:rPr sz="2300" b="1" i="0">
+              <a:rPr sz="2180" b="1" i="0">
                 <a:solidFill>
                   <a:srgbClr val="9E1B32"/>
                 </a:solidFill>
-                <a:latin typeface="Century Schoolbook"/>
+                <a:latin typeface="Lexend"/>
               </a:rPr>
               <a:t>x = 6</a:t>
             </a:r>
@@ -11853,8 +11776,8 @@
         </p:nvSpPr>
         <p:spPr>
           <a:xfrm>
-            <a:off x="1874519" y="3349752"/>
-            <a:ext cx="2190435" cy="457200"/>
+            <a:off x="1874519" y="3343656"/>
+            <a:ext cx="2118555" cy="457200"/>
           </a:xfrm>
           <a:prstGeom prst="rect">
             <a:avLst/>
@@ -11869,11 +11792,11 @@
           <a:p>
             <a:pPr algn="l"/>
             <a:r>
-              <a:rPr sz="2300" b="0" i="0">
+              <a:rPr sz="2180" b="0" i="0">
                 <a:solidFill>
                   <a:srgbClr val="1A1A1A"/>
                 </a:solidFill>
-                <a:latin typeface="Century Schoolbook"/>
+                <a:latin typeface="Lexend"/>
               </a:rPr>
               <a:t>4.   Evaluate  </a:t>
             </a:r>
@@ -11882,7 +11805,7 @@
       </p:sp>
       <p:pic>
         <p:nvPicPr>
-          <p:cNvPr id="19" name="Picture 18" descr="ec4478436d606ed4.png"/>
+          <p:cNvPr id="19" name="Picture 18" descr="dec811195678918b.png"/>
           <p:cNvPicPr>
             <a:picLocks noChangeAspect="1"/>
           </p:cNvPicPr>
@@ -11896,8 +11819,8 @@
         </p:blipFill>
         <p:spPr>
           <a:xfrm>
-            <a:off x="3927795" y="3300984"/>
-            <a:ext cx="637032" cy="554736"/>
+            <a:off x="3855915" y="3300984"/>
+            <a:ext cx="640080" cy="542544"/>
           </a:xfrm>
           <a:prstGeom prst="rect">
             <a:avLst/>
@@ -11906,7 +11829,7 @@
       </p:pic>
       <p:pic>
         <p:nvPicPr>
-          <p:cNvPr id="20" name="Picture 19" descr="3a92952d92bb77ab.png"/>
+          <p:cNvPr id="20" name="Picture 19" descr="2579f76da37693be.png"/>
           <p:cNvPicPr>
             <a:picLocks noChangeAspect="1"/>
           </p:cNvPicPr>
@@ -11920,8 +11843,8 @@
         </p:blipFill>
         <p:spPr>
           <a:xfrm>
-            <a:off x="5113467" y="3300984"/>
-            <a:ext cx="170688" cy="557784"/>
+            <a:off x="5044635" y="3300984"/>
+            <a:ext cx="198120" cy="539496"/>
           </a:xfrm>
           <a:prstGeom prst="rect">
             <a:avLst/>
@@ -11970,11 +11893,11 @@
           <a:p>
             <a:pPr algn="l"/>
             <a:r>
-              <a:rPr sz="3400" b="1" i="0">
+              <a:rPr sz="3229" b="1" i="0">
                 <a:solidFill>
                   <a:srgbClr val="1A1A1A"/>
                 </a:solidFill>
-                <a:latin typeface="Century Schoolbook"/>
+                <a:latin typeface="Lexend"/>
               </a:rPr>
               <a:t>Whiteboards   ·   Question 8 of 9</a:t>
             </a:r>
@@ -12110,11 +12033,11 @@
           <a:p>
             <a:pPr algn="l"/>
             <a:r>
-              <a:rPr sz="1100" b="0" i="1">
+              <a:rPr sz="1040" b="0" i="0">
                 <a:solidFill>
                   <a:srgbClr val="6B6B6B"/>
                 </a:solidFill>
-                <a:latin typeface="Century Schoolbook"/>
+                <a:latin typeface="Lexend"/>
               </a:rPr>
               <a:t>Grade 7 Accelerated · Unit 3 · Lesson 1 — Product Laws of Exponents</a:t>
             </a:r>
@@ -12145,11 +12068,11 @@
           <a:p>
             <a:pPr algn="r"/>
             <a:r>
-              <a:rPr sz="1100" b="0" i="0">
+              <a:rPr sz="1040" b="0" i="0">
                 <a:solidFill>
                   <a:srgbClr val="6B6B6B"/>
                 </a:solidFill>
-                <a:latin typeface="Century Schoolbook"/>
+                <a:latin typeface="Lexend"/>
               </a:rPr>
               <a:t>30</a:t>
             </a:r>
@@ -12158,7 +12081,7 @@
       </p:sp>
       <p:pic>
         <p:nvPicPr>
-          <p:cNvPr id="8" name="Picture 7" descr="f58654af4b9460c1.png"/>
+          <p:cNvPr id="8" name="Picture 7" descr="3d20fb6b472c53e3.png"/>
           <p:cNvPicPr>
             <a:picLocks noChangeAspect="1"/>
           </p:cNvPicPr>
@@ -12172,8 +12095,8 @@
         </p:blipFill>
         <p:spPr>
           <a:xfrm>
-            <a:off x="4913376" y="2194560"/>
-            <a:ext cx="2334768" cy="853440"/>
+            <a:off x="4908803" y="2194560"/>
+            <a:ext cx="2343912" cy="841248"/>
           </a:xfrm>
           <a:prstGeom prst="rect">
             <a:avLst/>
@@ -12204,11 +12127,11 @@
           <a:p>
             <a:pPr algn="ctr"/>
             <a:r>
-              <a:rPr sz="2600" b="1" i="0">
+              <a:rPr sz="2470" b="1" i="0">
                 <a:solidFill>
                   <a:srgbClr val="1A1A1A"/>
                 </a:solidFill>
-                <a:latin typeface="Century Schoolbook"/>
+                <a:latin typeface="Lexend"/>
               </a:rPr>
               <a:t>Answer it.</a:t>
             </a:r>
@@ -12257,11 +12180,11 @@
           <a:p>
             <a:pPr algn="l"/>
             <a:r>
-              <a:rPr sz="3400" b="1" i="0">
+              <a:rPr sz="3229" b="1" i="0">
                 <a:solidFill>
                   <a:srgbClr val="1A1A1A"/>
                 </a:solidFill>
-                <a:latin typeface="Century Schoolbook"/>
+                <a:latin typeface="Lexend"/>
               </a:rPr>
               <a:t>Whiteboards   ·   Question 8 of 9</a:t>
             </a:r>
@@ -12397,11 +12320,11 @@
           <a:p>
             <a:pPr algn="l"/>
             <a:r>
-              <a:rPr sz="1100" b="0" i="1">
+              <a:rPr sz="1040" b="0" i="0">
                 <a:solidFill>
                   <a:srgbClr val="6B6B6B"/>
                 </a:solidFill>
-                <a:latin typeface="Century Schoolbook"/>
+                <a:latin typeface="Lexend"/>
               </a:rPr>
               <a:t>Grade 7 Accelerated · Unit 3 · Lesson 1 — Product Laws of Exponents</a:t>
             </a:r>
@@ -12432,11 +12355,11 @@
           <a:p>
             <a:pPr algn="r"/>
             <a:r>
-              <a:rPr sz="1100" b="0" i="0">
+              <a:rPr sz="1040" b="0" i="0">
                 <a:solidFill>
                   <a:srgbClr val="6B6B6B"/>
                 </a:solidFill>
-                <a:latin typeface="Century Schoolbook"/>
+                <a:latin typeface="Lexend"/>
               </a:rPr>
               <a:t>31</a:t>
             </a:r>
@@ -12445,7 +12368,7 @@
       </p:sp>
       <p:pic>
         <p:nvPicPr>
-          <p:cNvPr id="8" name="Picture 7" descr="a9bbd2622d9f1514.png"/>
+          <p:cNvPr id="8" name="Picture 7" descr="9bac66b5c58a7c0d.png"/>
           <p:cNvPicPr>
             <a:picLocks noChangeAspect="1"/>
           </p:cNvPicPr>
@@ -12459,52 +12382,17 @@
         </p:blipFill>
         <p:spPr>
           <a:xfrm>
-            <a:off x="4914900" y="2103120"/>
-            <a:ext cx="2331720" cy="850392"/>
+            <a:off x="4910327" y="2103120"/>
+            <a:ext cx="2340864" cy="841248"/>
           </a:xfrm>
           <a:prstGeom prst="rect">
             <a:avLst/>
           </a:prstGeom>
         </p:spPr>
       </p:pic>
-      <p:sp>
-        <p:nvSpPr>
-          <p:cNvPr id="9" name="TextBox 8"/>
-          <p:cNvSpPr txBox="1"/>
-          <p:nvPr/>
-        </p:nvSpPr>
-        <p:spPr>
-          <a:xfrm>
-            <a:off x="4864607" y="4817363"/>
-            <a:ext cx="1920240" cy="548640"/>
-          </a:xfrm>
-          <a:prstGeom prst="rect">
-            <a:avLst/>
-          </a:prstGeom>
-          <a:noFill/>
-        </p:spPr>
-        <p:txBody>
-          <a:bodyPr wrap="square" lIns="45720" rIns="45720" tIns="18288" bIns="18288" anchor="ctr">
-            <a:spAutoFit/>
-          </a:bodyPr>
-          <a:lstStyle/>
-          <a:p>
-            <a:pPr algn="l"/>
-            <a:r>
-              <a:rPr sz="3200" b="1" i="0">
-                <a:solidFill>
-                  <a:srgbClr val="9E1B32"/>
-                </a:solidFill>
-                <a:latin typeface="Century Schoolbook"/>
-              </a:rPr>
-              <a:t>Answer:</a:t>
-            </a:r>
-          </a:p>
-        </p:txBody>
-      </p:sp>
       <p:pic>
         <p:nvPicPr>
-          <p:cNvPr id="10" name="Picture 9" descr="08b8d08dca6c5152.png"/>
+          <p:cNvPr id="9" name="Picture 8" descr="efcb7ed02df521ec.png"/>
           <p:cNvPicPr>
             <a:picLocks noChangeAspect="1"/>
           </p:cNvPicPr>
@@ -12518,8 +12406,91 @@
         </p:blipFill>
         <p:spPr>
           <a:xfrm>
-            <a:off x="6784848" y="4663440"/>
-            <a:ext cx="512064" cy="856488"/>
+            <a:off x="4006595" y="3246120"/>
+            <a:ext cx="4264152" cy="612648"/>
+          </a:xfrm>
+          <a:prstGeom prst="rect">
+            <a:avLst/>
+          </a:prstGeom>
+        </p:spPr>
+      </p:pic>
+      <p:pic>
+        <p:nvPicPr>
+          <p:cNvPr id="10" name="Picture 9" descr="2365def5832106f2.png"/>
+          <p:cNvPicPr>
+            <a:picLocks noChangeAspect="1"/>
+          </p:cNvPicPr>
+          <p:nvPr/>
+        </p:nvPicPr>
+        <p:blipFill>
+          <a:blip r:embed="rId4"/>
+          <a:stretch>
+            <a:fillRect/>
+          </a:stretch>
+        </p:blipFill>
+        <p:spPr>
+          <a:xfrm>
+            <a:off x="4006595" y="3986783"/>
+            <a:ext cx="1438656" cy="612648"/>
+          </a:xfrm>
+          <a:prstGeom prst="rect">
+            <a:avLst/>
+          </a:prstGeom>
+        </p:spPr>
+      </p:pic>
+      <p:sp>
+        <p:nvSpPr>
+          <p:cNvPr id="11" name="TextBox 10"/>
+          <p:cNvSpPr txBox="1"/>
+          <p:nvPr/>
+        </p:nvSpPr>
+        <p:spPr>
+          <a:xfrm>
+            <a:off x="4858511" y="4884420"/>
+            <a:ext cx="1920240" cy="548640"/>
+          </a:xfrm>
+          <a:prstGeom prst="rect">
+            <a:avLst/>
+          </a:prstGeom>
+          <a:noFill/>
+        </p:spPr>
+        <p:txBody>
+          <a:bodyPr wrap="square" lIns="45720" rIns="45720" tIns="18288" bIns="18288" anchor="ctr">
+            <a:spAutoFit/>
+          </a:bodyPr>
+          <a:lstStyle/>
+          <a:p>
+            <a:pPr algn="l"/>
+            <a:r>
+              <a:rPr sz="3040" b="1" i="0">
+                <a:solidFill>
+                  <a:srgbClr val="9E1B32"/>
+                </a:solidFill>
+                <a:latin typeface="Lexend"/>
+              </a:rPr>
+              <a:t>Answer:</a:t>
+            </a:r>
+          </a:p>
+        </p:txBody>
+      </p:sp>
+      <p:pic>
+        <p:nvPicPr>
+          <p:cNvPr id="12" name="Picture 11" descr="74507af7579a5001.png"/>
+          <p:cNvPicPr>
+            <a:picLocks noChangeAspect="1"/>
+          </p:cNvPicPr>
+          <p:nvPr/>
+        </p:nvPicPr>
+        <p:blipFill>
+          <a:blip r:embed="rId5"/>
+          <a:stretch>
+            <a:fillRect/>
+          </a:stretch>
+        </p:blipFill>
+        <p:spPr>
+          <a:xfrm>
+            <a:off x="6778751" y="4736592"/>
+            <a:ext cx="524256" cy="844296"/>
           </a:xfrm>
           <a:prstGeom prst="rect">
             <a:avLst/>
@@ -12568,11 +12539,11 @@
           <a:p>
             <a:pPr algn="l"/>
             <a:r>
-              <a:rPr sz="3400" b="1" i="0">
+              <a:rPr sz="3229" b="1" i="0">
                 <a:solidFill>
                   <a:srgbClr val="1A1A1A"/>
                 </a:solidFill>
-                <a:latin typeface="Century Schoolbook"/>
+                <a:latin typeface="Lexend"/>
               </a:rPr>
               <a:t>Whiteboards   ·   Question 9 of 9</a:t>
             </a:r>
@@ -12708,11 +12679,11 @@
           <a:p>
             <a:pPr algn="l"/>
             <a:r>
-              <a:rPr sz="1100" b="0" i="1">
+              <a:rPr sz="1040" b="0" i="0">
                 <a:solidFill>
                   <a:srgbClr val="6B6B6B"/>
                 </a:solidFill>
-                <a:latin typeface="Century Schoolbook"/>
+                <a:latin typeface="Lexend"/>
               </a:rPr>
               <a:t>Grade 7 Accelerated · Unit 3 · Lesson 1 — Product Laws of Exponents</a:t>
             </a:r>
@@ -12743,11 +12714,11 @@
           <a:p>
             <a:pPr algn="r"/>
             <a:r>
-              <a:rPr sz="1100" b="0" i="0">
+              <a:rPr sz="1040" b="0" i="0">
                 <a:solidFill>
                   <a:srgbClr val="6B6B6B"/>
                 </a:solidFill>
-                <a:latin typeface="Century Schoolbook"/>
+                <a:latin typeface="Lexend"/>
               </a:rPr>
               <a:t>32</a:t>
             </a:r>
@@ -12778,11 +12749,11 @@
           <a:p>
             <a:pPr algn="ctr"/>
             <a:r>
-              <a:rPr sz="2600" b="0" i="0">
+              <a:rPr sz="2470" b="0" i="0">
                 <a:solidFill>
                   <a:srgbClr val="1A1A1A"/>
                 </a:solidFill>
-                <a:latin typeface="Century Schoolbook"/>
+                <a:latin typeface="Lexend"/>
               </a:rPr>
               <a:t>Aiyanna says she can use the power of a product law</a:t>
             </a:r>
@@ -12797,8 +12768,8 @@
         </p:nvSpPr>
         <p:spPr>
           <a:xfrm>
-            <a:off x="2897912" y="2746579"/>
-            <a:ext cx="2190277" cy="457200"/>
+            <a:off x="2913590" y="2746579"/>
+            <a:ext cx="2222015" cy="457200"/>
           </a:xfrm>
           <a:prstGeom prst="rect">
             <a:avLst/>
@@ -12813,11 +12784,11 @@
           <a:p>
             <a:pPr algn="l"/>
             <a:r>
-              <a:rPr sz="2600" b="0" i="0">
+              <a:rPr sz="2470" b="0" i="0">
                 <a:solidFill>
                   <a:srgbClr val="1A1A1A"/>
                 </a:solidFill>
-                <a:latin typeface="Century Schoolbook"/>
+                <a:latin typeface="Lexend"/>
               </a:rPr>
               <a:t>to evaluate  </a:t>
             </a:r>
@@ -12826,7 +12797,7 @@
       </p:sp>
       <p:pic>
         <p:nvPicPr>
-          <p:cNvPr id="10" name="Picture 9" descr="c4163b4848547f9b.png"/>
+          <p:cNvPr id="10" name="Picture 9" descr="3c467de68f6a9099.png"/>
           <p:cNvPicPr>
             <a:picLocks noChangeAspect="1"/>
           </p:cNvPicPr>
@@ -12840,8 +12811,8 @@
         </p:blipFill>
         <p:spPr>
           <a:xfrm>
-            <a:off x="4951030" y="2769439"/>
-            <a:ext cx="1938528" cy="411480"/>
+            <a:off x="4998446" y="2770963"/>
+            <a:ext cx="1920240" cy="408432"/>
           </a:xfrm>
           <a:prstGeom prst="rect">
             <a:avLst/>
@@ -12856,8 +12827,8 @@
         </p:nvSpPr>
         <p:spPr>
           <a:xfrm>
-            <a:off x="6889558" y="2746579"/>
-            <a:ext cx="2511209" cy="457200"/>
+            <a:off x="6918686" y="2746579"/>
+            <a:ext cx="2466403" cy="457200"/>
           </a:xfrm>
           <a:prstGeom prst="rect">
             <a:avLst/>
@@ -12872,11 +12843,11 @@
           <a:p>
             <a:pPr algn="l"/>
             <a:r>
-              <a:rPr sz="2600" b="0" i="0">
+              <a:rPr sz="2470" b="0" i="0">
                 <a:solidFill>
                   <a:srgbClr val="1A1A1A"/>
                 </a:solidFill>
-                <a:latin typeface="Century Schoolbook"/>
+                <a:latin typeface="Lexend"/>
               </a:rPr>
               <a:t>.  Is she right?</a:t>
             </a:r>
@@ -12907,11 +12878,11 @@
           <a:p>
             <a:pPr algn="ctr"/>
             <a:r>
-              <a:rPr sz="2600" b="1" i="0">
+              <a:rPr sz="2470" b="1" i="0">
                 <a:solidFill>
                   <a:srgbClr val="1A1A1A"/>
                 </a:solidFill>
-                <a:latin typeface="Century Schoolbook"/>
+                <a:latin typeface="Lexend"/>
               </a:rPr>
               <a:t>Write your answer in sentences.</a:t>
             </a:r>
@@ -12960,11 +12931,11 @@
           <a:p>
             <a:pPr algn="l"/>
             <a:r>
-              <a:rPr sz="3400" b="1" i="0">
+              <a:rPr sz="3229" b="1" i="0">
                 <a:solidFill>
                   <a:srgbClr val="1A1A1A"/>
                 </a:solidFill>
-                <a:latin typeface="Century Schoolbook"/>
+                <a:latin typeface="Lexend"/>
               </a:rPr>
               <a:t>Whiteboards   ·   Question 9 of 9</a:t>
             </a:r>
@@ -13100,11 +13071,11 @@
           <a:p>
             <a:pPr algn="l"/>
             <a:r>
-              <a:rPr sz="1100" b="0" i="1">
+              <a:rPr sz="1040" b="0" i="0">
                 <a:solidFill>
                   <a:srgbClr val="6B6B6B"/>
                 </a:solidFill>
-                <a:latin typeface="Century Schoolbook"/>
+                <a:latin typeface="Lexend"/>
               </a:rPr>
               <a:t>Grade 7 Accelerated · Unit 3 · Lesson 1 — Product Laws of Exponents</a:t>
             </a:r>
@@ -13135,11 +13106,11 @@
           <a:p>
             <a:pPr algn="r"/>
             <a:r>
-              <a:rPr sz="1100" b="0" i="0">
+              <a:rPr sz="1040" b="0" i="0">
                 <a:solidFill>
                   <a:srgbClr val="6B6B6B"/>
                 </a:solidFill>
-                <a:latin typeface="Century Schoolbook"/>
+                <a:latin typeface="Lexend"/>
               </a:rPr>
               <a:t>33</a:t>
             </a:r>
@@ -13170,11 +13141,11 @@
           <a:p>
             <a:pPr algn="ctr"/>
             <a:r>
-              <a:rPr sz="2600" b="0" i="0">
+              <a:rPr sz="2470" b="0" i="0">
                 <a:solidFill>
                   <a:srgbClr val="1A1A1A"/>
                 </a:solidFill>
-                <a:latin typeface="Century Schoolbook"/>
+                <a:latin typeface="Lexend"/>
               </a:rPr>
               <a:t>Aiyanna says she can use the power of a product law</a:t>
             </a:r>
@@ -13189,8 +13160,8 @@
         </p:nvSpPr>
         <p:spPr>
           <a:xfrm>
-            <a:off x="2896388" y="2655139"/>
-            <a:ext cx="2190277" cy="457200"/>
+            <a:off x="2912066" y="2655139"/>
+            <a:ext cx="2222015" cy="457200"/>
           </a:xfrm>
           <a:prstGeom prst="rect">
             <a:avLst/>
@@ -13205,11 +13176,11 @@
           <a:p>
             <a:pPr algn="l"/>
             <a:r>
-              <a:rPr sz="2600" b="0" i="0">
+              <a:rPr sz="2470" b="0" i="0">
                 <a:solidFill>
                   <a:srgbClr val="1A1A1A"/>
                 </a:solidFill>
-                <a:latin typeface="Century Schoolbook"/>
+                <a:latin typeface="Lexend"/>
               </a:rPr>
               <a:t>to evaluate  </a:t>
             </a:r>
@@ -13218,7 +13189,7 @@
       </p:sp>
       <p:pic>
         <p:nvPicPr>
-          <p:cNvPr id="10" name="Picture 9" descr="45831de1d391fe0a.png"/>
+          <p:cNvPr id="10" name="Picture 9" descr="8bb89340cbe98788.png"/>
           <p:cNvPicPr>
             <a:picLocks noChangeAspect="1"/>
           </p:cNvPicPr>
@@ -13232,8 +13203,8 @@
         </p:blipFill>
         <p:spPr>
           <a:xfrm>
-            <a:off x="4949506" y="2679523"/>
-            <a:ext cx="1941576" cy="408432"/>
+            <a:off x="4996922" y="2679523"/>
+            <a:ext cx="1923288" cy="408432"/>
           </a:xfrm>
           <a:prstGeom prst="rect">
             <a:avLst/>
@@ -13248,8 +13219,8 @@
         </p:nvSpPr>
         <p:spPr>
           <a:xfrm>
-            <a:off x="6891082" y="2655139"/>
-            <a:ext cx="2511209" cy="457200"/>
+            <a:off x="6920210" y="2655139"/>
+            <a:ext cx="2466403" cy="457200"/>
           </a:xfrm>
           <a:prstGeom prst="rect">
             <a:avLst/>
@@ -13264,11 +13235,11 @@
           <a:p>
             <a:pPr algn="l"/>
             <a:r>
-              <a:rPr sz="2600" b="0" i="0">
+              <a:rPr sz="2470" b="0" i="0">
                 <a:solidFill>
                   <a:srgbClr val="1A1A1A"/>
                 </a:solidFill>
-                <a:latin typeface="Century Schoolbook"/>
+                <a:latin typeface="Lexend"/>
               </a:rPr>
               <a:t>.  Is she right?</a:t>
             </a:r>
@@ -13283,7 +13254,90 @@
         </p:nvSpPr>
         <p:spPr>
           <a:xfrm>
-            <a:off x="777240" y="4663440"/>
+            <a:off x="2486746" y="3414091"/>
+            <a:ext cx="7325186" cy="457200"/>
+          </a:xfrm>
+          <a:prstGeom prst="rect">
+            <a:avLst/>
+          </a:prstGeom>
+          <a:noFill/>
+        </p:spPr>
+        <p:txBody>
+          <a:bodyPr wrap="none" lIns="45720" rIns="45720" tIns="18288" bIns="18288" anchor="ctr">
+            <a:noAutofit/>
+          </a:bodyPr>
+          <a:lstStyle/>
+          <a:p>
+            <a:pPr algn="l"/>
+            <a:r>
+              <a:rPr sz="2330" b="0" i="0">
+                <a:solidFill>
+                  <a:srgbClr val="1A1A1A"/>
+                </a:solidFill>
+                <a:latin typeface="Lexend"/>
+              </a:rPr>
+              <a:t>Inside the parentheses is a sum, not a product.</a:t>
+            </a:r>
+          </a:p>
+        </p:txBody>
+      </p:sp>
+      <p:pic>
+        <p:nvPicPr>
+          <p:cNvPr id="13" name="Picture 12" descr="df452ab7ad4dafcb.png"/>
+          <p:cNvPicPr>
+            <a:picLocks noChangeAspect="1"/>
+          </p:cNvPicPr>
+          <p:nvPr/>
+        </p:nvPicPr>
+        <p:blipFill>
+          <a:blip r:embed="rId3"/>
+          <a:stretch>
+            <a:fillRect/>
+          </a:stretch>
+        </p:blipFill>
+        <p:spPr>
+          <a:xfrm>
+            <a:off x="2541610" y="4013023"/>
+            <a:ext cx="1569720" cy="265176"/>
+          </a:xfrm>
+          <a:prstGeom prst="rect">
+            <a:avLst/>
+          </a:prstGeom>
+        </p:spPr>
+      </p:pic>
+      <p:pic>
+        <p:nvPicPr>
+          <p:cNvPr id="14" name="Picture 13" descr="5b67aed5b26673ef.png"/>
+          <p:cNvPicPr>
+            <a:picLocks noChangeAspect="1"/>
+          </p:cNvPicPr>
+          <p:nvPr/>
+        </p:nvPicPr>
+        <p:blipFill>
+          <a:blip r:embed="rId4"/>
+          <a:stretch>
+            <a:fillRect/>
+          </a:stretch>
+        </p:blipFill>
+        <p:spPr>
+          <a:xfrm>
+            <a:off x="2541610" y="4520515"/>
+            <a:ext cx="1024128" cy="256032"/>
+          </a:xfrm>
+          <a:prstGeom prst="rect">
+            <a:avLst/>
+          </a:prstGeom>
+        </p:spPr>
+      </p:pic>
+      <p:sp>
+        <p:nvSpPr>
+          <p:cNvPr id="15" name="TextBox 14"/>
+          <p:cNvSpPr txBox="1"/>
+          <p:nvPr/>
+        </p:nvSpPr>
+        <p:spPr>
+          <a:xfrm>
+            <a:off x="777240" y="4991431"/>
             <a:ext cx="10607040" cy="548640"/>
           </a:xfrm>
           <a:prstGeom prst="rect">
@@ -13299,47 +13353,47 @@
           <a:p>
             <a:pPr algn="ctr"/>
             <a:r>
-              <a:rPr sz="3200" b="1" i="0">
+              <a:rPr sz="3040" b="1" i="0">
                 <a:solidFill>
                   <a:srgbClr val="9E1B32"/>
                 </a:solidFill>
-                <a:latin typeface="Century Schoolbook"/>
+                <a:latin typeface="Lexend"/>
               </a:rPr>
               <a:t>Answer:   No — (10 + (−2))</a:t>
             </a:r>
             <a:r>
-              <a:rPr sz="3200" b="1" i="0" baseline="30000">
+              <a:rPr sz="3040" b="1" i="0" baseline="30000">
                 <a:solidFill>
                   <a:srgbClr val="9E1B32"/>
                 </a:solidFill>
-                <a:latin typeface="Century Schoolbook"/>
+                <a:latin typeface="Lexend"/>
               </a:rPr>
               <a:t>3</a:t>
             </a:r>
             <a:r>
-              <a:rPr sz="3200" b="1" i="0">
+              <a:rPr sz="3040" b="1" i="0">
                 <a:solidFill>
                   <a:srgbClr val="9E1B32"/>
                 </a:solidFill>
-                <a:latin typeface="Century Schoolbook"/>
+                <a:latin typeface="Lexend"/>
               </a:rPr>
               <a:t> = 8</a:t>
             </a:r>
             <a:r>
-              <a:rPr sz="3200" b="1" i="0" baseline="30000">
+              <a:rPr sz="3040" b="1" i="0" baseline="30000">
                 <a:solidFill>
                   <a:srgbClr val="9E1B32"/>
                 </a:solidFill>
-                <a:latin typeface="Century Schoolbook"/>
+                <a:latin typeface="Lexend"/>
               </a:rPr>
               <a:t>3</a:t>
             </a:r>
             <a:r>
-              <a:rPr sz="3200" b="1" i="0">
+              <a:rPr sz="3040" b="1" i="0">
                 <a:solidFill>
                   <a:srgbClr val="9E1B32"/>
                 </a:solidFill>
-                <a:latin typeface="Century Schoolbook"/>
+                <a:latin typeface="Lexend"/>
               </a:rPr>
               <a:t> = 512</a:t>
             </a:r>
@@ -13388,11 +13442,11 @@
           <a:p>
             <a:pPr algn="l"/>
             <a:r>
-              <a:rPr sz="3600" b="1" i="0">
+              <a:rPr sz="3420" b="1" i="0">
                 <a:solidFill>
                   <a:srgbClr val="1A1A1A"/>
                 </a:solidFill>
-                <a:latin typeface="Century Schoolbook"/>
+                <a:latin typeface="Lexend"/>
               </a:rPr>
               <a:t>Independent Set</a:t>
             </a:r>
@@ -13528,11 +13582,11 @@
           <a:p>
             <a:pPr algn="l"/>
             <a:r>
-              <a:rPr sz="1100" b="0" i="1">
+              <a:rPr sz="1040" b="0" i="0">
                 <a:solidFill>
                   <a:srgbClr val="6B6B6B"/>
                 </a:solidFill>
-                <a:latin typeface="Century Schoolbook"/>
+                <a:latin typeface="Lexend"/>
               </a:rPr>
               <a:t>Grade 7 Accelerated · Unit 3 · Lesson 1 — Product Laws of Exponents</a:t>
             </a:r>
@@ -13563,11 +13617,11 @@
           <a:p>
             <a:pPr algn="r"/>
             <a:r>
-              <a:rPr sz="1100" b="0" i="0">
+              <a:rPr sz="1040" b="0" i="0">
                 <a:solidFill>
                   <a:srgbClr val="6B6B6B"/>
                 </a:solidFill>
-                <a:latin typeface="Century Schoolbook"/>
+                <a:latin typeface="Lexend"/>
               </a:rPr>
               <a:t>34</a:t>
             </a:r>
@@ -13598,11 +13652,11 @@
           <a:p>
             <a:pPr algn="l"/>
             <a:r>
-              <a:rPr sz="2300" b="1" i="0">
+              <a:rPr sz="2180" b="1" i="0">
                 <a:solidFill>
                   <a:srgbClr val="0B5394"/>
                 </a:solidFill>
-                <a:latin typeface="Century Schoolbook"/>
+                <a:latin typeface="Lexend"/>
               </a:rPr>
               <a:t>1.</a:t>
             </a:r>
@@ -13618,7 +13672,7 @@
         <p:spPr>
           <a:xfrm>
             <a:off x="1554480" y="1495044"/>
-            <a:ext cx="3168165" cy="457200"/>
+            <a:ext cx="3169643" cy="457200"/>
           </a:xfrm>
           <a:prstGeom prst="rect">
             <a:avLst/>
@@ -13633,11 +13687,11 @@
           <a:p>
             <a:pPr algn="l"/>
             <a:r>
-              <a:rPr sz="2300" b="0" i="0">
+              <a:rPr sz="2180" b="0" i="0">
                 <a:solidFill>
                   <a:srgbClr val="1A1A1A"/>
                 </a:solidFill>
-                <a:latin typeface="Century Schoolbook"/>
+                <a:latin typeface="Lexend"/>
               </a:rPr>
               <a:t>Write as one power.  </a:t>
             </a:r>
@@ -13646,7 +13700,7 @@
       </p:sp>
       <p:pic>
         <p:nvPicPr>
-          <p:cNvPr id="10" name="Picture 9" descr="6d3773d9800b92db.png"/>
+          <p:cNvPr id="10" name="Picture 9" descr="e58cd8710f0bf385.png"/>
           <p:cNvPicPr>
             <a:picLocks noChangeAspect="1"/>
           </p:cNvPicPr>
@@ -13660,8 +13714,8 @@
         </p:blipFill>
         <p:spPr>
           <a:xfrm>
-            <a:off x="4585485" y="1583436"/>
-            <a:ext cx="749808" cy="280416"/>
+            <a:off x="4586963" y="1588008"/>
+            <a:ext cx="780288" cy="271272"/>
           </a:xfrm>
           <a:prstGeom prst="rect">
             <a:avLst/>
@@ -13692,11 +13746,11 @@
           <a:p>
             <a:pPr algn="l"/>
             <a:r>
-              <a:rPr sz="2300" b="1" i="0">
+              <a:rPr sz="2180" b="1" i="0">
                 <a:solidFill>
                   <a:srgbClr val="0B5394"/>
                 </a:solidFill>
-                <a:latin typeface="Century Schoolbook"/>
+                <a:latin typeface="Lexend"/>
               </a:rPr>
               <a:t>2.</a:t>
             </a:r>
@@ -13712,7 +13766,7 @@
         <p:spPr>
           <a:xfrm>
             <a:off x="1554480" y="2089403"/>
-            <a:ext cx="2548440" cy="457200"/>
+            <a:ext cx="2460558" cy="457200"/>
           </a:xfrm>
           <a:prstGeom prst="rect">
             <a:avLst/>
@@ -13727,11 +13781,11 @@
           <a:p>
             <a:pPr algn="l"/>
             <a:r>
-              <a:rPr sz="2300" b="0" i="0">
+              <a:rPr sz="2180" b="0" i="0">
                 <a:solidFill>
                   <a:srgbClr val="1A1A1A"/>
                 </a:solidFill>
-                <a:latin typeface="Century Schoolbook"/>
+                <a:latin typeface="Lexend"/>
               </a:rPr>
               <a:t>Find the value.  </a:t>
             </a:r>
@@ -13740,7 +13794,7 @@
       </p:sp>
       <p:pic>
         <p:nvPicPr>
-          <p:cNvPr id="13" name="Picture 12" descr="8b7a2cb55dcba947.png"/>
+          <p:cNvPr id="13" name="Picture 12" descr="4b095ad4a4725d99.png"/>
           <p:cNvPicPr>
             <a:picLocks noChangeAspect="1"/>
           </p:cNvPicPr>
@@ -13754,8 +13808,8 @@
         </p:blipFill>
         <p:spPr>
           <a:xfrm>
-            <a:off x="3965760" y="2180844"/>
-            <a:ext cx="758952" cy="274320"/>
+            <a:off x="3877878" y="2180844"/>
+            <a:ext cx="765048" cy="274320"/>
           </a:xfrm>
           <a:prstGeom prst="rect">
             <a:avLst/>
@@ -13786,11 +13840,11 @@
           <a:p>
             <a:pPr algn="l"/>
             <a:r>
-              <a:rPr sz="2300" b="1" i="0">
+              <a:rPr sz="2180" b="1" i="0">
                 <a:solidFill>
                   <a:srgbClr val="0B5394"/>
                 </a:solidFill>
-                <a:latin typeface="Century Schoolbook"/>
+                <a:latin typeface="Lexend"/>
               </a:rPr>
               <a:t>3.</a:t>
             </a:r>
@@ -13806,7 +13860,7 @@
         <p:spPr>
           <a:xfrm>
             <a:off x="1554480" y="2683763"/>
-            <a:ext cx="3168165" cy="457200"/>
+            <a:ext cx="3169643" cy="457200"/>
           </a:xfrm>
           <a:prstGeom prst="rect">
             <a:avLst/>
@@ -13821,11 +13875,11 @@
           <a:p>
             <a:pPr algn="l"/>
             <a:r>
-              <a:rPr sz="2300" b="0" i="0">
+              <a:rPr sz="2180" b="0" i="0">
                 <a:solidFill>
                   <a:srgbClr val="1A1A1A"/>
                 </a:solidFill>
-                <a:latin typeface="Century Schoolbook"/>
+                <a:latin typeface="Lexend"/>
               </a:rPr>
               <a:t>Write as one power.  </a:t>
             </a:r>
@@ -13834,7 +13888,7 @@
       </p:sp>
       <p:pic>
         <p:nvPicPr>
-          <p:cNvPr id="16" name="Picture 15" descr="8e2e3ba64c00d8d6.png"/>
+          <p:cNvPr id="16" name="Picture 15" descr="99f4e10d55b01f9e.png"/>
           <p:cNvPicPr>
             <a:picLocks noChangeAspect="1"/>
           </p:cNvPicPr>
@@ -13848,8 +13902,8 @@
         </p:blipFill>
         <p:spPr>
           <a:xfrm>
-            <a:off x="4585485" y="2744723"/>
-            <a:ext cx="618744" cy="335280"/>
+            <a:off x="4586963" y="2746247"/>
+            <a:ext cx="609600" cy="332232"/>
           </a:xfrm>
           <a:prstGeom prst="rect">
             <a:avLst/>
@@ -13880,11 +13934,11 @@
           <a:p>
             <a:pPr algn="l"/>
             <a:r>
-              <a:rPr sz="2300" b="1" i="0">
+              <a:rPr sz="2180" b="1" i="0">
                 <a:solidFill>
                   <a:srgbClr val="0B5394"/>
                 </a:solidFill>
-                <a:latin typeface="Century Schoolbook"/>
+                <a:latin typeface="Lexend"/>
               </a:rPr>
               <a:t>4.</a:t>
             </a:r>
@@ -13900,7 +13954,7 @@
         <p:spPr>
           <a:xfrm>
             <a:off x="1554480" y="3278123"/>
-            <a:ext cx="2548440" cy="457200"/>
+            <a:ext cx="2460558" cy="457200"/>
           </a:xfrm>
           <a:prstGeom prst="rect">
             <a:avLst/>
@@ -13915,11 +13969,11 @@
           <a:p>
             <a:pPr algn="l"/>
             <a:r>
-              <a:rPr sz="2300" b="0" i="0">
+              <a:rPr sz="2180" b="0" i="0">
                 <a:solidFill>
                   <a:srgbClr val="1A1A1A"/>
                 </a:solidFill>
-                <a:latin typeface="Century Schoolbook"/>
+                <a:latin typeface="Lexend"/>
               </a:rPr>
               <a:t>Find the value.  </a:t>
             </a:r>
@@ -13928,7 +13982,7 @@
       </p:sp>
       <p:pic>
         <p:nvPicPr>
-          <p:cNvPr id="19" name="Picture 18" descr="46f85d9f4b191651.png"/>
+          <p:cNvPr id="19" name="Picture 18" descr="3825344689b6a43c.png"/>
           <p:cNvPicPr>
             <a:picLocks noChangeAspect="1"/>
           </p:cNvPicPr>
@@ -13942,8 +13996,8 @@
         </p:blipFill>
         <p:spPr>
           <a:xfrm>
-            <a:off x="3965760" y="3339083"/>
-            <a:ext cx="838200" cy="335280"/>
+            <a:off x="3877878" y="3339083"/>
+            <a:ext cx="886968" cy="335280"/>
           </a:xfrm>
           <a:prstGeom prst="rect">
             <a:avLst/>
@@ -13974,11 +14028,11 @@
           <a:p>
             <a:pPr algn="l"/>
             <a:r>
-              <a:rPr sz="2300" b="1" i="0">
+              <a:rPr sz="2180" b="1" i="0">
                 <a:solidFill>
                   <a:srgbClr val="0B5394"/>
                 </a:solidFill>
-                <a:latin typeface="Century Schoolbook"/>
+                <a:latin typeface="Lexend"/>
               </a:rPr>
               <a:t>5.</a:t>
             </a:r>
@@ -13994,7 +14048,7 @@
         <p:spPr>
           <a:xfrm>
             <a:off x="1554480" y="3872483"/>
-            <a:ext cx="2548440" cy="457200"/>
+            <a:ext cx="2460558" cy="457200"/>
           </a:xfrm>
           <a:prstGeom prst="rect">
             <a:avLst/>
@@ -14009,11 +14063,11 @@
           <a:p>
             <a:pPr algn="l"/>
             <a:r>
-              <a:rPr sz="2300" b="0" i="0">
+              <a:rPr sz="2180" b="0" i="0">
                 <a:solidFill>
                   <a:srgbClr val="1A1A1A"/>
                 </a:solidFill>
-                <a:latin typeface="Century Schoolbook"/>
+                <a:latin typeface="Lexend"/>
               </a:rPr>
               <a:t>Find the value.  </a:t>
             </a:r>
@@ -14022,7 +14076,7 @@
       </p:sp>
       <p:pic>
         <p:nvPicPr>
-          <p:cNvPr id="22" name="Picture 21" descr="df0ae84d8a3187e4.png"/>
+          <p:cNvPr id="22" name="Picture 21" descr="bb914d77e9f3c460.png"/>
           <p:cNvPicPr>
             <a:picLocks noChangeAspect="1"/>
           </p:cNvPicPr>
@@ -14036,8 +14090,8 @@
         </p:blipFill>
         <p:spPr>
           <a:xfrm>
-            <a:off x="3965760" y="3933444"/>
-            <a:ext cx="1645920" cy="335280"/>
+            <a:off x="3877878" y="3933444"/>
+            <a:ext cx="1591056" cy="335280"/>
           </a:xfrm>
           <a:prstGeom prst="rect">
             <a:avLst/>
@@ -14068,11 +14122,11 @@
           <a:p>
             <a:pPr algn="l"/>
             <a:r>
-              <a:rPr sz="2300" b="1" i="0">
+              <a:rPr sz="2180" b="1" i="0">
                 <a:solidFill>
                   <a:srgbClr val="0B5394"/>
                 </a:solidFill>
-                <a:latin typeface="Century Schoolbook"/>
+                <a:latin typeface="Lexend"/>
               </a:rPr>
               <a:t>6.</a:t>
             </a:r>
@@ -14088,7 +14142,7 @@
         <p:spPr>
           <a:xfrm>
             <a:off x="1554480" y="4466844"/>
-            <a:ext cx="2720291" cy="457200"/>
+            <a:ext cx="2684114" cy="457200"/>
           </a:xfrm>
           <a:prstGeom prst="rect">
             <a:avLst/>
@@ -14103,11 +14157,11 @@
           <a:p>
             <a:pPr algn="l"/>
             <a:r>
-              <a:rPr sz="2300" b="0" i="0">
+              <a:rPr sz="2180" b="0" i="0">
                 <a:solidFill>
                   <a:srgbClr val="1A1A1A"/>
                 </a:solidFill>
-                <a:latin typeface="Century Schoolbook"/>
+                <a:latin typeface="Lexend"/>
               </a:rPr>
               <a:t>Find the value of </a:t>
             </a:r>
@@ -14116,7 +14170,7 @@
       </p:sp>
       <p:pic>
         <p:nvPicPr>
-          <p:cNvPr id="25" name="Picture 24" descr="0afe177f69dd5e06.png"/>
+          <p:cNvPr id="25" name="Picture 24" descr="6d78c2be12150bf5.png"/>
           <p:cNvPicPr>
             <a:picLocks noChangeAspect="1"/>
           </p:cNvPicPr>
@@ -14130,8 +14184,8 @@
         </p:blipFill>
         <p:spPr>
           <a:xfrm>
-            <a:off x="4137611" y="4620768"/>
-            <a:ext cx="155448" cy="149352"/>
+            <a:off x="4101434" y="4611624"/>
+            <a:ext cx="146304" cy="167640"/>
           </a:xfrm>
           <a:prstGeom prst="rect">
             <a:avLst/>
@@ -14146,8 +14200,8 @@
         </p:nvSpPr>
         <p:spPr>
           <a:xfrm>
-            <a:off x="4293059" y="4466844"/>
-            <a:ext cx="468561" cy="457200"/>
+            <a:off x="4247738" y="4466844"/>
+            <a:ext cx="442110" cy="457200"/>
           </a:xfrm>
           <a:prstGeom prst="rect">
             <a:avLst/>
@@ -14162,11 +14216,11 @@
           <a:p>
             <a:pPr algn="l"/>
             <a:r>
-              <a:rPr sz="2300" b="0" i="0">
+              <a:rPr sz="2180" b="0" i="0">
                 <a:solidFill>
                   <a:srgbClr val="1A1A1A"/>
                 </a:solidFill>
-                <a:latin typeface="Century Schoolbook"/>
+                <a:latin typeface="Lexend"/>
               </a:rPr>
               <a:t>.  </a:t>
             </a:r>
@@ -14175,7 +14229,7 @@
       </p:sp>
       <p:pic>
         <p:nvPicPr>
-          <p:cNvPr id="27" name="Picture 26" descr="46cee507e28ffbc7.png"/>
+          <p:cNvPr id="27" name="Picture 26" descr="dc32ec21fb3f8914.png"/>
           <p:cNvPicPr>
             <a:picLocks noChangeAspect="1"/>
           </p:cNvPicPr>
@@ -14189,8 +14243,8 @@
         </p:blipFill>
         <p:spPr>
           <a:xfrm>
-            <a:off x="4624460" y="4555236"/>
-            <a:ext cx="1374648" cy="280416"/>
+            <a:off x="4552689" y="4556760"/>
+            <a:ext cx="1392936" cy="277368"/>
           </a:xfrm>
           <a:prstGeom prst="rect">
             <a:avLst/>
@@ -14239,11 +14293,11 @@
           <a:p>
             <a:pPr algn="l"/>
             <a:r>
-              <a:rPr sz="3600" b="1" i="0">
+              <a:rPr sz="3420" b="1" i="0">
                 <a:solidFill>
                   <a:srgbClr val="1A1A1A"/>
                 </a:solidFill>
-                <a:latin typeface="Century Schoolbook"/>
+                <a:latin typeface="Lexend"/>
               </a:rPr>
               <a:t>IXL</a:t>
             </a:r>
@@ -14379,11 +14433,11 @@
           <a:p>
             <a:pPr algn="l"/>
             <a:r>
-              <a:rPr sz="1100" b="0" i="1">
+              <a:rPr sz="1040" b="0" i="0">
                 <a:solidFill>
                   <a:srgbClr val="6B6B6B"/>
                 </a:solidFill>
-                <a:latin typeface="Century Schoolbook"/>
+                <a:latin typeface="Lexend"/>
               </a:rPr>
               <a:t>Grade 7 Accelerated · Unit 3 · Lesson 1 — Product Laws of Exponents</a:t>
             </a:r>
@@ -14414,11 +14468,11 @@
           <a:p>
             <a:pPr algn="r"/>
             <a:r>
-              <a:rPr sz="1100" b="0" i="0">
+              <a:rPr sz="1040" b="0" i="0">
                 <a:solidFill>
                   <a:srgbClr val="6B6B6B"/>
                 </a:solidFill>
-                <a:latin typeface="Century Schoolbook"/>
+                <a:latin typeface="Lexend"/>
               </a:rPr>
               <a:t>35</a:t>
             </a:r>
@@ -14449,11 +14503,11 @@
           <a:p>
             <a:pPr algn="l"/>
             <a:r>
-              <a:rPr sz="2100" b="1" i="0">
+              <a:rPr sz="1989" b="1" i="0">
                 <a:solidFill>
                   <a:srgbClr val="0B5394"/>
                 </a:solidFill>
-                <a:latin typeface="Century Schoolbook"/>
+                <a:latin typeface="Lexend"/>
               </a:rPr>
               <a:t>1.</a:t>
             </a:r>
@@ -14484,11 +14538,11 @@
           <a:p>
             <a:pPr algn="l"/>
             <a:r>
-              <a:rPr sz="2100" b="0" i="0">
+              <a:rPr sz="1989" b="0" i="0">
                 <a:solidFill>
                   <a:srgbClr val="1A1A1A"/>
                 </a:solidFill>
-                <a:latin typeface="Century Schoolbook"/>
+                <a:latin typeface="Lexend"/>
               </a:rPr>
               <a:t>Open IXL and start today's skills.</a:t>
             </a:r>
@@ -14519,11 +14573,11 @@
           <a:p>
             <a:pPr algn="l"/>
             <a:r>
-              <a:rPr sz="2100" b="1" i="0">
+              <a:rPr sz="1989" b="1" i="0">
                 <a:solidFill>
                   <a:srgbClr val="0B5394"/>
                 </a:solidFill>
-                <a:latin typeface="Century Schoolbook"/>
+                <a:latin typeface="Lexend"/>
               </a:rPr>
               <a:t>2.</a:t>
             </a:r>
@@ -14554,11 +14608,11 @@
           <a:p>
             <a:pPr algn="l"/>
             <a:r>
-              <a:rPr sz="2100" b="0" i="0">
+              <a:rPr sz="1989" b="0" i="0">
                 <a:solidFill>
                   <a:srgbClr val="1A1A1A"/>
                 </a:solidFill>
-                <a:latin typeface="Century Schoolbook"/>
+                <a:latin typeface="Lexend"/>
               </a:rPr>
               <a:t>Work on paper where the question needs work. The answer box does not show it.</a:t>
             </a:r>
@@ -14589,11 +14643,11 @@
           <a:p>
             <a:pPr algn="l"/>
             <a:r>
-              <a:rPr sz="2100" b="1" i="0">
+              <a:rPr sz="1989" b="1" i="0">
                 <a:solidFill>
                   <a:srgbClr val="0B5394"/>
                 </a:solidFill>
-                <a:latin typeface="Century Schoolbook"/>
+                <a:latin typeface="Lexend"/>
               </a:rPr>
               <a:t>3.</a:t>
             </a:r>
@@ -14624,11 +14678,11 @@
           <a:p>
             <a:pPr algn="l"/>
             <a:r>
-              <a:rPr sz="2100" b="0" i="0">
+              <a:rPr sz="1989" b="0" i="0">
                 <a:solidFill>
                   <a:srgbClr val="1A1A1A"/>
                 </a:solidFill>
-                <a:latin typeface="Century Schoolbook"/>
+                <a:latin typeface="Lexend"/>
               </a:rPr>
               <a:t>Every skill listed is required, to a SmartScore of 67. Due at the start of the next class.</a:t>
             </a:r>
@@ -14659,11 +14713,11 @@
           <a:p>
             <a:pPr algn="l"/>
             <a:r>
-              <a:rPr sz="2100" b="1" i="0">
+              <a:rPr sz="1989" b="1" i="0">
                 <a:solidFill>
                   <a:srgbClr val="1A1A1A"/>
                 </a:solidFill>
-                <a:latin typeface="Century Schoolbook"/>
+                <a:latin typeface="Lexend"/>
               </a:rPr>
               <a:t>Today's skills — all required</a:t>
             </a:r>
@@ -14694,11 +14748,11 @@
           <a:p>
             <a:pPr algn="l"/>
             <a:r>
-              <a:rPr sz="1900" b="0" i="0">
+              <a:rPr sz="1810" b="0" i="0">
                 <a:solidFill>
                   <a:srgbClr val="1A1A1A"/>
                 </a:solidFill>
-                <a:latin typeface="Century Schoolbook"/>
+                <a:latin typeface="Lexend"/>
               </a:rPr>
               <a:t>Evaluate powers — SZQ</a:t>
             </a:r>
@@ -14729,11 +14783,11 @@
           <a:p>
             <a:pPr algn="l"/>
             <a:r>
-              <a:rPr sz="1900" b="0" i="0">
+              <a:rPr sz="1810" b="0" i="0">
                 <a:solidFill>
                   <a:srgbClr val="1A1A1A"/>
                 </a:solidFill>
-                <a:latin typeface="Century Schoolbook"/>
+                <a:latin typeface="Lexend"/>
               </a:rPr>
               <a:t>Multiplication with exponents — 5SK</a:t>
             </a:r>
@@ -14764,11 +14818,11 @@
           <a:p>
             <a:pPr algn="l"/>
             <a:r>
-              <a:rPr sz="1900" b="0" i="0">
+              <a:rPr sz="1810" b="0" i="0">
                 <a:solidFill>
                   <a:srgbClr val="1A1A1A"/>
                 </a:solidFill>
-                <a:latin typeface="Century Schoolbook"/>
+                <a:latin typeface="Lexend"/>
               </a:rPr>
               <a:t>Power rule — 8DA</a:t>
             </a:r>
@@ -14799,11 +14853,11 @@
           <a:p>
             <a:pPr algn="l"/>
             <a:r>
-              <a:rPr sz="1900" b="0" i="0">
+              <a:rPr sz="1810" b="0" i="0">
                 <a:solidFill>
                   <a:srgbClr val="1A1A1A"/>
                 </a:solidFill>
-                <a:latin typeface="Century Schoolbook"/>
+                <a:latin typeface="Lexend"/>
               </a:rPr>
               <a:t>Understanding exponents — BFA</a:t>
             </a:r>
@@ -14852,11 +14906,11 @@
           <a:p>
             <a:pPr algn="l"/>
             <a:r>
-              <a:rPr sz="3600" b="1" i="0">
+              <a:rPr sz="3420" b="1" i="0">
                 <a:solidFill>
                   <a:srgbClr val="1A1A1A"/>
                 </a:solidFill>
-                <a:latin typeface="Century Schoolbook"/>
+                <a:latin typeface="Lexend"/>
               </a:rPr>
               <a:t>Notes</a:t>
             </a:r>
@@ -14992,11 +15046,11 @@
           <a:p>
             <a:pPr algn="l"/>
             <a:r>
-              <a:rPr sz="1100" b="0" i="1">
+              <a:rPr sz="1040" b="0" i="0">
                 <a:solidFill>
                   <a:srgbClr val="6B6B6B"/>
                 </a:solidFill>
-                <a:latin typeface="Century Schoolbook"/>
+                <a:latin typeface="Lexend"/>
               </a:rPr>
               <a:t>Grade 7 Accelerated · Unit 3 · Lesson 1 — Product Laws of Exponents</a:t>
             </a:r>
@@ -15027,11 +15081,11 @@
           <a:p>
             <a:pPr algn="r"/>
             <a:r>
-              <a:rPr sz="1100" b="0" i="0">
+              <a:rPr sz="1040" b="0" i="0">
                 <a:solidFill>
                   <a:srgbClr val="6B6B6B"/>
                 </a:solidFill>
-                <a:latin typeface="Century Schoolbook"/>
+                <a:latin typeface="Lexend"/>
               </a:rPr>
               <a:t>4</a:t>
             </a:r>
@@ -15062,11 +15116,11 @@
           <a:p>
             <a:pPr algn="l"/>
             <a:r>
-              <a:rPr sz="2500" b="1" i="0">
+              <a:rPr sz="2380" b="1" i="0">
                 <a:solidFill>
                   <a:srgbClr val="1A1A1A"/>
                 </a:solidFill>
-                <a:latin typeface="Century Schoolbook"/>
+                <a:latin typeface="Lexend"/>
               </a:rPr>
               <a:t>I.  A power is a shorthand for repeated multiplication</a:t>
             </a:r>
@@ -15176,11 +15230,11 @@
           <a:p>
             <a:pPr algn="l"/>
             <a:r>
-              <a:rPr sz="2300" b="0" i="0">
+              <a:rPr sz="2180" b="0" i="0">
                 <a:solidFill>
                   <a:srgbClr val="1A1A1A"/>
                 </a:solidFill>
-                <a:latin typeface="Century Schoolbook"/>
+                <a:latin typeface="Lexend"/>
               </a:rPr>
               <a:t>A.</a:t>
             </a:r>
@@ -15211,20 +15265,20 @@
           <a:p>
             <a:pPr algn="l"/>
             <a:r>
-              <a:rPr sz="2500" b="1" i="0">
+              <a:rPr sz="2380" b="1" i="0">
                 <a:solidFill>
                   <a:srgbClr val="0B5394"/>
                 </a:solidFill>
-                <a:latin typeface="Century Schoolbook"/>
+                <a:latin typeface="Lexend"/>
               </a:rPr>
               <a:t>base</a:t>
             </a:r>
             <a:r>
-              <a:rPr sz="2300" b="0" i="0">
+              <a:rPr sz="2180" b="0" i="0">
                 <a:solidFill>
                   <a:srgbClr val="1A1A1A"/>
                 </a:solidFill>
-                <a:latin typeface="Century Schoolbook"/>
+                <a:latin typeface="Lexend"/>
               </a:rPr>
               <a:t>   —   the number used as a factor</a:t>
             </a:r>
@@ -15299,11 +15353,11 @@
           <a:p>
             <a:pPr algn="l"/>
             <a:r>
-              <a:rPr sz="2300" b="0" i="0">
+              <a:rPr sz="2180" b="0" i="0">
                 <a:solidFill>
                   <a:srgbClr val="1A1A1A"/>
                 </a:solidFill>
-                <a:latin typeface="Century Schoolbook"/>
+                <a:latin typeface="Lexend"/>
               </a:rPr>
               <a:t>B.</a:t>
             </a:r>
@@ -15334,20 +15388,20 @@
           <a:p>
             <a:pPr algn="l"/>
             <a:r>
-              <a:rPr sz="2500" b="1" i="0">
+              <a:rPr sz="2380" b="1" i="0">
                 <a:solidFill>
                   <a:srgbClr val="0B5394"/>
                 </a:solidFill>
-                <a:latin typeface="Century Schoolbook"/>
+                <a:latin typeface="Lexend"/>
               </a:rPr>
               <a:t>exponent</a:t>
             </a:r>
             <a:r>
-              <a:rPr sz="2300" b="0" i="0">
+              <a:rPr sz="2180" b="0" i="0">
                 <a:solidFill>
                   <a:srgbClr val="1A1A1A"/>
                 </a:solidFill>
-                <a:latin typeface="Century Schoolbook"/>
+                <a:latin typeface="Lexend"/>
               </a:rPr>
               <a:t>   —   how many times the base is a factor</a:t>
             </a:r>
@@ -15422,11 +15476,11 @@
           <a:p>
             <a:pPr algn="l"/>
             <a:r>
-              <a:rPr sz="2300" b="0" i="0">
+              <a:rPr sz="2180" b="0" i="0">
                 <a:solidFill>
                   <a:srgbClr val="1A1A1A"/>
                 </a:solidFill>
-                <a:latin typeface="Century Schoolbook"/>
+                <a:latin typeface="Lexend"/>
               </a:rPr>
               <a:t>C.</a:t>
             </a:r>
@@ -15457,20 +15511,20 @@
           <a:p>
             <a:pPr algn="l"/>
             <a:r>
-              <a:rPr sz="2500" b="1" i="0">
+              <a:rPr sz="2380" b="1" i="0">
                 <a:solidFill>
                   <a:srgbClr val="0B5394"/>
                 </a:solidFill>
-                <a:latin typeface="Century Schoolbook"/>
+                <a:latin typeface="Lexend"/>
               </a:rPr>
               <a:t>power</a:t>
             </a:r>
             <a:r>
-              <a:rPr sz="2300" b="0" i="0">
+              <a:rPr sz="2180" b="0" i="0">
                 <a:solidFill>
                   <a:srgbClr val="1A1A1A"/>
                 </a:solidFill>
-                <a:latin typeface="Century Schoolbook"/>
+                <a:latin typeface="Lexend"/>
               </a:rPr>
               <a:t>   —   the whole thing, base and exponent together</a:t>
             </a:r>
@@ -15479,7 +15533,7 @@
       </p:sp>
       <p:pic>
         <p:nvPicPr>
-          <p:cNvPr id="19" name="Picture 18" descr="0ab145e8ca7379f4.png"/>
+          <p:cNvPr id="19" name="Picture 18" descr="4d4b8fabf5344118.png"/>
           <p:cNvPicPr>
             <a:picLocks noChangeAspect="1"/>
           </p:cNvPicPr>
@@ -15493,8 +15547,8 @@
         </p:blipFill>
         <p:spPr>
           <a:xfrm>
-            <a:off x="3175500" y="4361688"/>
-            <a:ext cx="2410968" cy="344424"/>
+            <a:off x="3218067" y="4357116"/>
+            <a:ext cx="2383536" cy="335280"/>
           </a:xfrm>
           <a:prstGeom prst="rect">
             <a:avLst/>
@@ -15509,8 +15563,8 @@
         </p:nvSpPr>
         <p:spPr>
           <a:xfrm>
-            <a:off x="5586468" y="4305300"/>
-            <a:ext cx="988583" cy="457200"/>
+            <a:off x="5601603" y="4296156"/>
+            <a:ext cx="955265" cy="457200"/>
           </a:xfrm>
           <a:prstGeom prst="rect">
             <a:avLst/>
@@ -15525,11 +15579,11 @@
           <a:p>
             <a:pPr algn="l"/>
             <a:r>
-              <a:rPr sz="2600" b="0" i="0">
+              <a:rPr sz="2470" b="0" i="0">
                 <a:solidFill>
                   <a:srgbClr val="1A1A1A"/>
                 </a:solidFill>
-                <a:latin typeface="Century Schoolbook"/>
+                <a:latin typeface="Lexend"/>
               </a:rPr>
               <a:t>        </a:t>
             </a:r>
@@ -15538,7 +15592,7 @@
       </p:sp>
       <p:pic>
         <p:nvPicPr>
-          <p:cNvPr id="21" name="Picture 20" descr="3b6b0e0ba8659f8d.png"/>
+          <p:cNvPr id="21" name="Picture 20" descr="3fda2a6399064293.png"/>
           <p:cNvPicPr>
             <a:picLocks noChangeAspect="1"/>
           </p:cNvPicPr>
@@ -15552,8 +15606,8 @@
         </p:blipFill>
         <p:spPr>
           <a:xfrm>
-            <a:off x="6437891" y="4187952"/>
-            <a:ext cx="2548128" cy="691896"/>
+            <a:off x="6419708" y="4187952"/>
+            <a:ext cx="2523744" cy="673608"/>
           </a:xfrm>
           <a:prstGeom prst="rect">
             <a:avLst/>
@@ -15602,11 +15656,11 @@
           <a:p>
             <a:pPr algn="l"/>
             <a:r>
-              <a:rPr sz="3600" b="1" i="0">
+              <a:rPr sz="3420" b="1" i="0">
                 <a:solidFill>
                   <a:srgbClr val="1A1A1A"/>
                 </a:solidFill>
-                <a:latin typeface="Century Schoolbook"/>
+                <a:latin typeface="Lexend"/>
               </a:rPr>
               <a:t>Notes</a:t>
             </a:r>
@@ -15742,11 +15796,11 @@
           <a:p>
             <a:pPr algn="l"/>
             <a:r>
-              <a:rPr sz="1100" b="0" i="1">
+              <a:rPr sz="1040" b="0" i="0">
                 <a:solidFill>
                   <a:srgbClr val="6B6B6B"/>
                 </a:solidFill>
-                <a:latin typeface="Century Schoolbook"/>
+                <a:latin typeface="Lexend"/>
               </a:rPr>
               <a:t>Grade 7 Accelerated · Unit 3 · Lesson 1 — Product Laws of Exponents</a:t>
             </a:r>
@@ -15777,11 +15831,11 @@
           <a:p>
             <a:pPr algn="r"/>
             <a:r>
-              <a:rPr sz="1100" b="0" i="0">
+              <a:rPr sz="1040" b="0" i="0">
                 <a:solidFill>
                   <a:srgbClr val="6B6B6B"/>
                 </a:solidFill>
-                <a:latin typeface="Century Schoolbook"/>
+                <a:latin typeface="Lexend"/>
               </a:rPr>
               <a:t>5</a:t>
             </a:r>
@@ -15812,11 +15866,11 @@
           <a:p>
             <a:pPr algn="l"/>
             <a:r>
-              <a:rPr sz="2500" b="1" i="0">
+              <a:rPr sz="2380" b="1" i="0">
                 <a:solidFill>
                   <a:srgbClr val="1A1A1A"/>
                 </a:solidFill>
-                <a:latin typeface="Century Schoolbook"/>
+                <a:latin typeface="Lexend"/>
               </a:rPr>
               <a:t>II.  Product of powers — same base, add the exponents</a:t>
             </a:r>
@@ -15860,7 +15914,7 @@
       </p:cxnSp>
       <p:pic>
         <p:nvPicPr>
-          <p:cNvPr id="10" name="Picture 9" descr="979221dae3c66bd9.png"/>
+          <p:cNvPr id="10" name="Picture 9" descr="542b4bcba7fe8428.png"/>
           <p:cNvPicPr>
             <a:picLocks noChangeAspect="1"/>
           </p:cNvPicPr>
@@ -15874,8 +15928,8 @@
         </p:blipFill>
         <p:spPr>
           <a:xfrm>
-            <a:off x="3907536" y="1993392"/>
-            <a:ext cx="4346448" cy="411480"/>
+            <a:off x="3922776" y="1993392"/>
+            <a:ext cx="4315968" cy="411480"/>
           </a:xfrm>
           <a:prstGeom prst="rect">
             <a:avLst/>
@@ -15884,7 +15938,7 @@
       </p:pic>
       <p:pic>
         <p:nvPicPr>
-          <p:cNvPr id="11" name="Picture 10" descr="3ebe349f0ffa36d4.png"/>
+          <p:cNvPr id="11" name="Picture 10" descr="3565be77b64ee517.png"/>
           <p:cNvPicPr>
             <a:picLocks noChangeAspect="1"/>
           </p:cNvPicPr>
@@ -15898,8 +15952,8 @@
         </p:blipFill>
         <p:spPr>
           <a:xfrm>
-            <a:off x="1672781" y="2680716"/>
-            <a:ext cx="3596640" cy="408432"/>
+            <a:off x="1680812" y="2679192"/>
+            <a:ext cx="3627120" cy="411480"/>
           </a:xfrm>
           <a:prstGeom prst="rect">
             <a:avLst/>
@@ -15914,8 +15968,8 @@
         </p:nvSpPr>
         <p:spPr>
           <a:xfrm>
-            <a:off x="5269421" y="2656332"/>
-            <a:ext cx="5356477" cy="457200"/>
+            <a:off x="5307932" y="2656332"/>
+            <a:ext cx="5309935" cy="457200"/>
           </a:xfrm>
           <a:prstGeom prst="rect">
             <a:avLst/>
@@ -15930,11 +15984,11 @@
           <a:p>
             <a:pPr algn="l"/>
             <a:r>
-              <a:rPr sz="2600" b="0" i="0">
+              <a:rPr sz="2470" b="0" i="0">
                 <a:solidFill>
                   <a:srgbClr val="1A1A1A"/>
                 </a:solidFill>
-                <a:latin typeface="Century Schoolbook"/>
+                <a:latin typeface="Lexend"/>
               </a:rPr>
               <a:t>   — different bases, no shortcut</a:t>
             </a:r>
@@ -15950,7 +16004,7 @@
         <p:spPr>
           <a:xfrm>
             <a:off x="987552" y="3387852"/>
-            <a:ext cx="3419263" cy="457200"/>
+            <a:ext cx="3203713" cy="457200"/>
           </a:xfrm>
           <a:prstGeom prst="rect">
             <a:avLst/>
@@ -15965,11 +16019,11 @@
           <a:p>
             <a:pPr algn="l"/>
             <a:r>
-              <a:rPr sz="2300" b="1" i="0">
+              <a:rPr sz="2180" b="1" i="0">
                 <a:solidFill>
                   <a:srgbClr val="1A1A1A"/>
                 </a:solidFill>
-                <a:latin typeface="Century Schoolbook"/>
+                <a:latin typeface="Lexend"/>
               </a:rPr>
               <a:t>Product of powers:  </a:t>
             </a:r>
@@ -15978,7 +16032,7 @@
       </p:sp>
       <p:pic>
         <p:nvPicPr>
-          <p:cNvPr id="14" name="Picture 13" descr="90652a6387118d5a.png"/>
+          <p:cNvPr id="14" name="Picture 13" descr="968ec809d435da5f.png"/>
           <p:cNvPicPr>
             <a:picLocks noChangeAspect="1"/>
           </p:cNvPicPr>
@@ -15992,8 +16046,8 @@
         </p:blipFill>
         <p:spPr>
           <a:xfrm>
-            <a:off x="4269655" y="3462528"/>
-            <a:ext cx="2313432" cy="307848"/>
+            <a:off x="4054105" y="3471672"/>
+            <a:ext cx="2447544" cy="289560"/>
           </a:xfrm>
           <a:prstGeom prst="rect">
             <a:avLst/>
@@ -16009,7 +16063,7 @@
         <p:spPr>
           <a:xfrm>
             <a:off x="987552" y="4055363"/>
-            <a:ext cx="3088445" cy="457200"/>
+            <a:ext cx="2997293" cy="457200"/>
           </a:xfrm>
           <a:prstGeom prst="rect">
             <a:avLst/>
@@ -16024,11 +16078,11 @@
           <a:p>
             <a:pPr algn="l"/>
             <a:r>
-              <a:rPr sz="2300" b="0" i="0">
+              <a:rPr sz="2180" b="0" i="0">
                 <a:solidFill>
                   <a:srgbClr val="1A1A1A"/>
                 </a:solidFill>
-                <a:latin typeface="Century Schoolbook"/>
+                <a:latin typeface="Lexend"/>
               </a:rPr>
               <a:t>Check with values:  </a:t>
             </a:r>
@@ -16037,7 +16091,7 @@
       </p:sp>
       <p:pic>
         <p:nvPicPr>
-          <p:cNvPr id="16" name="Picture 15" descr="381f7ba218ba42db.png"/>
+          <p:cNvPr id="16" name="Picture 15" descr="d5d6c6f74431375e.png"/>
           <p:cNvPicPr>
             <a:picLocks noChangeAspect="1"/>
           </p:cNvPicPr>
@@ -16051,8 +16105,8 @@
         </p:blipFill>
         <p:spPr>
           <a:xfrm>
-            <a:off x="3938837" y="4107179"/>
-            <a:ext cx="3934968" cy="353568"/>
+            <a:off x="3847685" y="4113275"/>
+            <a:ext cx="3910583" cy="341376"/>
           </a:xfrm>
           <a:prstGeom prst="rect">
             <a:avLst/>
@@ -16101,11 +16155,11 @@
           <a:p>
             <a:pPr algn="l"/>
             <a:r>
-              <a:rPr sz="3600" b="1" i="0">
+              <a:rPr sz="3420" b="1" i="0">
                 <a:solidFill>
                   <a:srgbClr val="1A1A1A"/>
                 </a:solidFill>
-                <a:latin typeface="Century Schoolbook"/>
+                <a:latin typeface="Lexend"/>
               </a:rPr>
               <a:t>Notes</a:t>
             </a:r>
@@ -16241,11 +16295,11 @@
           <a:p>
             <a:pPr algn="l"/>
             <a:r>
-              <a:rPr sz="1100" b="0" i="1">
+              <a:rPr sz="1040" b="0" i="0">
                 <a:solidFill>
                   <a:srgbClr val="6B6B6B"/>
                 </a:solidFill>
-                <a:latin typeface="Century Schoolbook"/>
+                <a:latin typeface="Lexend"/>
               </a:rPr>
               <a:t>Grade 7 Accelerated · Unit 3 · Lesson 1 — Product Laws of Exponents</a:t>
             </a:r>
@@ -16276,11 +16330,11 @@
           <a:p>
             <a:pPr algn="r"/>
             <a:r>
-              <a:rPr sz="1100" b="0" i="0">
+              <a:rPr sz="1040" b="0" i="0">
                 <a:solidFill>
                   <a:srgbClr val="6B6B6B"/>
                 </a:solidFill>
-                <a:latin typeface="Century Schoolbook"/>
+                <a:latin typeface="Lexend"/>
               </a:rPr>
               <a:t>6</a:t>
             </a:r>
@@ -16311,11 +16365,11 @@
           <a:p>
             <a:pPr algn="l"/>
             <a:r>
-              <a:rPr sz="2500" b="1" i="0">
+              <a:rPr sz="2380" b="1" i="0">
                 <a:solidFill>
                   <a:srgbClr val="1A1A1A"/>
                 </a:solidFill>
-                <a:latin typeface="Century Schoolbook"/>
+                <a:latin typeface="Lexend"/>
               </a:rPr>
               <a:t>III.  Power of a product — the exponent goes to every factor</a:t>
             </a:r>
@@ -16359,7 +16413,7 @@
       </p:cxnSp>
       <p:pic>
         <p:nvPicPr>
-          <p:cNvPr id="10" name="Picture 9" descr="ba972b1c36f6d10a.png"/>
+          <p:cNvPr id="10" name="Picture 9" descr="c44ef493e450a976.png"/>
           <p:cNvPicPr>
             <a:picLocks noChangeAspect="1"/>
           </p:cNvPicPr>
@@ -16373,8 +16427,8 @@
         </p:blipFill>
         <p:spPr>
           <a:xfrm>
-            <a:off x="1772411" y="1994916"/>
-            <a:ext cx="8616696" cy="408432"/>
+            <a:off x="1687068" y="1994916"/>
+            <a:ext cx="8787384" cy="408432"/>
           </a:xfrm>
           <a:prstGeom prst="rect">
             <a:avLst/>
@@ -16390,7 +16444,7 @@
         <p:spPr>
           <a:xfrm>
             <a:off x="987552" y="2702052"/>
-            <a:ext cx="3530167" cy="457200"/>
+            <a:ext cx="3343092" cy="457200"/>
           </a:xfrm>
           <a:prstGeom prst="rect">
             <a:avLst/>
@@ -16405,11 +16459,11 @@
           <a:p>
             <a:pPr algn="l"/>
             <a:r>
-              <a:rPr sz="2300" b="1" i="0">
+              <a:rPr sz="2180" b="1" i="0">
                 <a:solidFill>
                   <a:srgbClr val="1A1A1A"/>
                 </a:solidFill>
-                <a:latin typeface="Century Schoolbook"/>
+                <a:latin typeface="Lexend"/>
               </a:rPr>
               <a:t>Power of a product:  </a:t>
             </a:r>
@@ -16418,7 +16472,7 @@
       </p:sp>
       <p:pic>
         <p:nvPicPr>
-          <p:cNvPr id="12" name="Picture 11" descr="7d1b404025905c6c.png"/>
+          <p:cNvPr id="12" name="Picture 11" descr="b9ea13f96cb17daf.png"/>
           <p:cNvPicPr>
             <a:picLocks noChangeAspect="1"/>
           </p:cNvPicPr>
@@ -16432,8 +16486,8 @@
         </p:blipFill>
         <p:spPr>
           <a:xfrm>
-            <a:off x="4380559" y="2756916"/>
-            <a:ext cx="2420112" cy="347472"/>
+            <a:off x="4193484" y="2747772"/>
+            <a:ext cx="2639568" cy="365760"/>
           </a:xfrm>
           <a:prstGeom prst="rect">
             <a:avLst/>
@@ -16464,11 +16518,11 @@
           <a:p>
             <a:pPr algn="l"/>
             <a:r>
-              <a:rPr sz="2300" b="0" i="0">
+              <a:rPr sz="2180" b="0" i="0">
                 <a:solidFill>
                   <a:srgbClr val="1A1A1A"/>
                 </a:solidFill>
-                <a:latin typeface="Century Schoolbook"/>
+                <a:latin typeface="Lexend"/>
               </a:rPr>
               <a:t>Works for a product only, never for a sum:</a:t>
             </a:r>
@@ -16477,7 +16531,7 @@
       </p:sp>
       <p:pic>
         <p:nvPicPr>
-          <p:cNvPr id="14" name="Picture 13" descr="6a79f5fbe0b8b3a0.png"/>
+          <p:cNvPr id="14" name="Picture 13" descr="39ca05d2d51d1335.png"/>
           <p:cNvPicPr>
             <a:picLocks noChangeAspect="1"/>
           </p:cNvPicPr>
@@ -16492,7 +16546,7 @@
         <p:spPr>
           <a:xfrm>
             <a:off x="987552" y="4125468"/>
-            <a:ext cx="3739896" cy="408432"/>
+            <a:ext cx="3654552" cy="408432"/>
           </a:xfrm>
           <a:prstGeom prst="rect">
             <a:avLst/>
@@ -16507,8 +16561,8 @@
         </p:nvSpPr>
         <p:spPr>
           <a:xfrm>
-            <a:off x="4727448" y="4101083"/>
-            <a:ext cx="1208603" cy="457200"/>
+            <a:off x="4642104" y="4101083"/>
+            <a:ext cx="1180769" cy="457200"/>
           </a:xfrm>
           <a:prstGeom prst="rect">
             <a:avLst/>
@@ -16523,11 +16577,11 @@
           <a:p>
             <a:pPr algn="l"/>
             <a:r>
-              <a:rPr sz="2300" b="0" i="0">
+              <a:rPr sz="2180" b="0" i="0">
                 <a:solidFill>
                   <a:srgbClr val="1A1A1A"/>
                 </a:solidFill>
-                <a:latin typeface="Century Schoolbook"/>
+                <a:latin typeface="Lexend"/>
               </a:rPr>
               <a:t>   but   </a:t>
             </a:r>
@@ -16536,7 +16590,7 @@
       </p:sp>
       <p:pic>
         <p:nvPicPr>
-          <p:cNvPr id="16" name="Picture 15" descr="25abd5cd359cd538.png"/>
+          <p:cNvPr id="16" name="Picture 15" descr="d063d47dd555d857.png"/>
           <p:cNvPicPr>
             <a:picLocks noChangeAspect="1"/>
           </p:cNvPicPr>
@@ -16550,8 +16604,8 @@
         </p:blipFill>
         <p:spPr>
           <a:xfrm>
-            <a:off x="5798891" y="4125468"/>
-            <a:ext cx="2840736" cy="408432"/>
+            <a:off x="5685713" y="4125468"/>
+            <a:ext cx="2779776" cy="408432"/>
           </a:xfrm>
           <a:prstGeom prst="rect">
             <a:avLst/>
@@ -16600,11 +16654,11 @@
           <a:p>
             <a:pPr algn="l"/>
             <a:r>
-              <a:rPr sz="3600" b="1" i="0">
+              <a:rPr sz="3420" b="1" i="0">
                 <a:solidFill>
                   <a:srgbClr val="1A1A1A"/>
                 </a:solidFill>
-                <a:latin typeface="Century Schoolbook"/>
+                <a:latin typeface="Lexend"/>
               </a:rPr>
               <a:t>Notes</a:t>
             </a:r>
@@ -16740,11 +16794,11 @@
           <a:p>
             <a:pPr algn="l"/>
             <a:r>
-              <a:rPr sz="1100" b="0" i="1">
+              <a:rPr sz="1040" b="0" i="0">
                 <a:solidFill>
                   <a:srgbClr val="6B6B6B"/>
                 </a:solidFill>
-                <a:latin typeface="Century Schoolbook"/>
+                <a:latin typeface="Lexend"/>
               </a:rPr>
               <a:t>Grade 7 Accelerated · Unit 3 · Lesson 1 — Product Laws of Exponents</a:t>
             </a:r>
@@ -16775,11 +16829,11 @@
           <a:p>
             <a:pPr algn="r"/>
             <a:r>
-              <a:rPr sz="1100" b="0" i="0">
+              <a:rPr sz="1040" b="0" i="0">
                 <a:solidFill>
                   <a:srgbClr val="6B6B6B"/>
                 </a:solidFill>
-                <a:latin typeface="Century Schoolbook"/>
+                <a:latin typeface="Lexend"/>
               </a:rPr>
               <a:t>7</a:t>
             </a:r>
@@ -16810,11 +16864,11 @@
           <a:p>
             <a:pPr algn="l"/>
             <a:r>
-              <a:rPr sz="2500" b="1" i="0">
+              <a:rPr sz="2380" b="1" i="0">
                 <a:solidFill>
                   <a:srgbClr val="1A1A1A"/>
                 </a:solidFill>
-                <a:latin typeface="Century Schoolbook"/>
+                <a:latin typeface="Lexend"/>
               </a:rPr>
               <a:t>IV.  Power of a power, and the exponent 1</a:t>
             </a:r>
@@ -16887,11 +16941,11 @@
                     <a:p>
                       <a:pPr algn="ctr"/>
                       <a:r>
-                        <a:rPr sz="1700" b="1">
+                        <a:rPr sz="1610" b="1">
                           <a:solidFill>
                             <a:srgbClr val="1A1A1A"/>
                           </a:solidFill>
-                          <a:latin typeface="Century Schoolbook"/>
+                          <a:latin typeface="Lexend"/>
                         </a:rPr>
                         <a:t>Power of a power</a:t>
                       </a:r>
@@ -16934,11 +16988,11 @@
                     <a:p>
                       <a:pPr algn="ctr"/>
                       <a:r>
-                        <a:rPr sz="1700" b="1">
+                        <a:rPr sz="1610" b="1">
                           <a:solidFill>
                             <a:srgbClr val="1A1A1A"/>
                           </a:solidFill>
-                          <a:latin typeface="Century Schoolbook"/>
+                          <a:latin typeface="Lexend"/>
                         </a:rPr>
                         <a:t>Repeated multiplication</a:t>
                       </a:r>
@@ -16981,11 +17035,11 @@
                     <a:p>
                       <a:pPr algn="ctr"/>
                       <a:r>
-                        <a:rPr sz="1700" b="1">
+                        <a:rPr sz="1610" b="1">
                           <a:solidFill>
                             <a:srgbClr val="1A1A1A"/>
                           </a:solidFill>
-                          <a:latin typeface="Century Schoolbook"/>
+                          <a:latin typeface="Lexend"/>
                         </a:rPr>
                         <a:t>Single power</a:t>
                       </a:r>
@@ -17030,38 +17084,38 @@
                     <a:p>
                       <a:pPr algn="ctr"/>
                       <a:r>
-                        <a:rPr sz="1700" b="0">
+                        <a:rPr sz="1610" b="0">
                           <a:solidFill>
                             <a:srgbClr val="1A1A1A"/>
                           </a:solidFill>
-                          <a:latin typeface="Century Schoolbook"/>
+                          <a:latin typeface="Lexend"/>
                         </a:rPr>
                         <a:t>(4</a:t>
                       </a:r>
                       <a:r>
-                        <a:rPr sz="1700" b="0" baseline="30000">
+                        <a:rPr sz="1610" b="0" baseline="30000">
                           <a:solidFill>
                             <a:srgbClr val="1A1A1A"/>
                           </a:solidFill>
-                          <a:latin typeface="Century Schoolbook"/>
+                          <a:latin typeface="Lexend"/>
                         </a:rPr>
                         <a:t>2</a:t>
                       </a:r>
                       <a:r>
-                        <a:rPr sz="1700" b="0">
+                        <a:rPr sz="1610" b="0">
                           <a:solidFill>
                             <a:srgbClr val="1A1A1A"/>
                           </a:solidFill>
-                          <a:latin typeface="Century Schoolbook"/>
+                          <a:latin typeface="Lexend"/>
                         </a:rPr>
                         <a:t>)</a:t>
                       </a:r>
                       <a:r>
-                        <a:rPr sz="1700" b="0" baseline="30000">
+                        <a:rPr sz="1610" b="0" baseline="30000">
                           <a:solidFill>
                             <a:srgbClr val="1A1A1A"/>
                           </a:solidFill>
-                          <a:latin typeface="Century Schoolbook"/>
+                          <a:latin typeface="Lexend"/>
                         </a:rPr>
                         <a:t>3</a:t>
                       </a:r>
@@ -17104,56 +17158,56 @@
                     <a:p>
                       <a:pPr algn="ctr"/>
                       <a:r>
-                        <a:rPr sz="1700" b="0">
+                        <a:rPr sz="1610" b="0">
                           <a:solidFill>
                             <a:srgbClr val="1A1A1A"/>
                           </a:solidFill>
-                          <a:latin typeface="Century Schoolbook"/>
+                          <a:latin typeface="Lexend"/>
                         </a:rPr>
                         <a:t>4</a:t>
                       </a:r>
                       <a:r>
-                        <a:rPr sz="1700" b="0" baseline="30000">
+                        <a:rPr sz="1610" b="0" baseline="30000">
                           <a:solidFill>
                             <a:srgbClr val="1A1A1A"/>
                           </a:solidFill>
-                          <a:latin typeface="Century Schoolbook"/>
+                          <a:latin typeface="Lexend"/>
                         </a:rPr>
                         <a:t>2</a:t>
                       </a:r>
                       <a:r>
-                        <a:rPr sz="1700" b="0">
+                        <a:rPr sz="1610" b="0">
                           <a:solidFill>
                             <a:srgbClr val="1A1A1A"/>
                           </a:solidFill>
-                          <a:latin typeface="Century Schoolbook"/>
+                          <a:latin typeface="Lexend"/>
                         </a:rPr>
                         <a:t> · 4</a:t>
                       </a:r>
                       <a:r>
-                        <a:rPr sz="1700" b="0" baseline="30000">
+                        <a:rPr sz="1610" b="0" baseline="30000">
                           <a:solidFill>
                             <a:srgbClr val="1A1A1A"/>
                           </a:solidFill>
-                          <a:latin typeface="Century Schoolbook"/>
+                          <a:latin typeface="Lexend"/>
                         </a:rPr>
                         <a:t>2</a:t>
                       </a:r>
                       <a:r>
-                        <a:rPr sz="1700" b="0">
+                        <a:rPr sz="1610" b="0">
                           <a:solidFill>
                             <a:srgbClr val="1A1A1A"/>
                           </a:solidFill>
-                          <a:latin typeface="Century Schoolbook"/>
+                          <a:latin typeface="Lexend"/>
                         </a:rPr>
                         <a:t> · 4</a:t>
                       </a:r>
                       <a:r>
-                        <a:rPr sz="1700" b="0" baseline="30000">
+                        <a:rPr sz="1610" b="0" baseline="30000">
                           <a:solidFill>
                             <a:srgbClr val="1A1A1A"/>
                           </a:solidFill>
-                          <a:latin typeface="Century Schoolbook"/>
+                          <a:latin typeface="Lexend"/>
                         </a:rPr>
                         <a:t>2</a:t>
                       </a:r>
@@ -17196,20 +17250,20 @@
                     <a:p>
                       <a:pPr algn="ctr"/>
                       <a:r>
-                        <a:rPr sz="1700" b="0">
+                        <a:rPr sz="1610" b="0">
                           <a:solidFill>
                             <a:srgbClr val="1A1A1A"/>
                           </a:solidFill>
-                          <a:latin typeface="Century Schoolbook"/>
+                          <a:latin typeface="Lexend"/>
                         </a:rPr>
                         <a:t>4</a:t>
                       </a:r>
                       <a:r>
-                        <a:rPr sz="1700" b="0" baseline="30000">
+                        <a:rPr sz="1610" b="0" baseline="30000">
                           <a:solidFill>
                             <a:srgbClr val="1A1A1A"/>
                           </a:solidFill>
-                          <a:latin typeface="Century Schoolbook"/>
+                          <a:latin typeface="Lexend"/>
                         </a:rPr>
                         <a:t>6</a:t>
                       </a:r>
@@ -17254,38 +17308,38 @@
                     <a:p>
                       <a:pPr algn="ctr"/>
                       <a:r>
-                        <a:rPr sz="1700" b="0">
+                        <a:rPr sz="1610" b="0">
                           <a:solidFill>
                             <a:srgbClr val="1A1A1A"/>
                           </a:solidFill>
-                          <a:latin typeface="Century Schoolbook"/>
+                          <a:latin typeface="Lexend"/>
                         </a:rPr>
                         <a:t>(10</a:t>
                       </a:r>
                       <a:r>
-                        <a:rPr sz="1700" b="0" baseline="30000">
+                        <a:rPr sz="1610" b="0" baseline="30000">
                           <a:solidFill>
                             <a:srgbClr val="1A1A1A"/>
                           </a:solidFill>
-                          <a:latin typeface="Century Schoolbook"/>
+                          <a:latin typeface="Lexend"/>
                         </a:rPr>
                         <a:t>4</a:t>
                       </a:r>
                       <a:r>
-                        <a:rPr sz="1700" b="0">
+                        <a:rPr sz="1610" b="0">
                           <a:solidFill>
                             <a:srgbClr val="1A1A1A"/>
                           </a:solidFill>
-                          <a:latin typeface="Century Schoolbook"/>
+                          <a:latin typeface="Lexend"/>
                         </a:rPr>
                         <a:t>)</a:t>
                       </a:r>
                       <a:r>
-                        <a:rPr sz="1700" b="0" baseline="30000">
+                        <a:rPr sz="1610" b="0" baseline="30000">
                           <a:solidFill>
                             <a:srgbClr val="1A1A1A"/>
                           </a:solidFill>
-                          <a:latin typeface="Century Schoolbook"/>
+                          <a:latin typeface="Lexend"/>
                         </a:rPr>
                         <a:t>4</a:t>
                       </a:r>
@@ -17328,74 +17382,74 @@
                     <a:p>
                       <a:pPr algn="ctr"/>
                       <a:r>
-                        <a:rPr sz="1700" b="0">
+                        <a:rPr sz="1610" b="0">
                           <a:solidFill>
                             <a:srgbClr val="1A1A1A"/>
                           </a:solidFill>
-                          <a:latin typeface="Century Schoolbook"/>
+                          <a:latin typeface="Lexend"/>
                         </a:rPr>
                         <a:t>10</a:t>
                       </a:r>
                       <a:r>
-                        <a:rPr sz="1700" b="0" baseline="30000">
+                        <a:rPr sz="1610" b="0" baseline="30000">
                           <a:solidFill>
                             <a:srgbClr val="1A1A1A"/>
                           </a:solidFill>
-                          <a:latin typeface="Century Schoolbook"/>
+                          <a:latin typeface="Lexend"/>
                         </a:rPr>
                         <a:t>4</a:t>
                       </a:r>
                       <a:r>
-                        <a:rPr sz="1700" b="0">
+                        <a:rPr sz="1610" b="0">
                           <a:solidFill>
                             <a:srgbClr val="1A1A1A"/>
                           </a:solidFill>
-                          <a:latin typeface="Century Schoolbook"/>
+                          <a:latin typeface="Lexend"/>
                         </a:rPr>
                         <a:t> · 10</a:t>
                       </a:r>
                       <a:r>
-                        <a:rPr sz="1700" b="0" baseline="30000">
+                        <a:rPr sz="1610" b="0" baseline="30000">
                           <a:solidFill>
                             <a:srgbClr val="1A1A1A"/>
                           </a:solidFill>
-                          <a:latin typeface="Century Schoolbook"/>
+                          <a:latin typeface="Lexend"/>
                         </a:rPr>
                         <a:t>4</a:t>
                       </a:r>
                       <a:r>
-                        <a:rPr sz="1700" b="0">
+                        <a:rPr sz="1610" b="0">
                           <a:solidFill>
                             <a:srgbClr val="1A1A1A"/>
                           </a:solidFill>
-                          <a:latin typeface="Century Schoolbook"/>
+                          <a:latin typeface="Lexend"/>
                         </a:rPr>
                         <a:t> · 10</a:t>
                       </a:r>
                       <a:r>
-                        <a:rPr sz="1700" b="0" baseline="30000">
+                        <a:rPr sz="1610" b="0" baseline="30000">
                           <a:solidFill>
                             <a:srgbClr val="1A1A1A"/>
                           </a:solidFill>
-                          <a:latin typeface="Century Schoolbook"/>
+                          <a:latin typeface="Lexend"/>
                         </a:rPr>
                         <a:t>4</a:t>
                       </a:r>
                       <a:r>
-                        <a:rPr sz="1700" b="0">
+                        <a:rPr sz="1610" b="0">
                           <a:solidFill>
                             <a:srgbClr val="1A1A1A"/>
                           </a:solidFill>
-                          <a:latin typeface="Century Schoolbook"/>
+                          <a:latin typeface="Lexend"/>
                         </a:rPr>
                         <a:t> · 10</a:t>
                       </a:r>
                       <a:r>
-                        <a:rPr sz="1700" b="0" baseline="30000">
+                        <a:rPr sz="1610" b="0" baseline="30000">
                           <a:solidFill>
                             <a:srgbClr val="1A1A1A"/>
                           </a:solidFill>
-                          <a:latin typeface="Century Schoolbook"/>
+                          <a:latin typeface="Lexend"/>
                         </a:rPr>
                         <a:t>4</a:t>
                       </a:r>
@@ -17438,20 +17492,20 @@
                     <a:p>
                       <a:pPr algn="ctr"/>
                       <a:r>
-                        <a:rPr sz="1700" b="0">
+                        <a:rPr sz="1610" b="0">
                           <a:solidFill>
                             <a:srgbClr val="1A1A1A"/>
                           </a:solidFill>
-                          <a:latin typeface="Century Schoolbook"/>
+                          <a:latin typeface="Lexend"/>
                         </a:rPr>
                         <a:t>10</a:t>
                       </a:r>
                       <a:r>
-                        <a:rPr sz="1700" b="0" baseline="30000">
+                        <a:rPr sz="1610" b="0" baseline="30000">
                           <a:solidFill>
                             <a:srgbClr val="1A1A1A"/>
                           </a:solidFill>
-                          <a:latin typeface="Century Schoolbook"/>
+                          <a:latin typeface="Lexend"/>
                         </a:rPr>
                         <a:t>16</a:t>
                       </a:r>
@@ -17496,38 +17550,38 @@
                     <a:p>
                       <a:pPr algn="ctr"/>
                       <a:r>
-                        <a:rPr sz="1700" b="0">
+                        <a:rPr sz="1610" b="0">
                           <a:solidFill>
                             <a:srgbClr val="1A1A1A"/>
                           </a:solidFill>
-                          <a:latin typeface="Century Schoolbook"/>
+                          <a:latin typeface="Lexend"/>
                         </a:rPr>
                         <a:t>(3</a:t>
                       </a:r>
                       <a:r>
-                        <a:rPr sz="1700" b="0" baseline="30000">
+                        <a:rPr sz="1610" b="0" baseline="30000">
                           <a:solidFill>
                             <a:srgbClr val="1A1A1A"/>
                           </a:solidFill>
-                          <a:latin typeface="Century Schoolbook"/>
+                          <a:latin typeface="Lexend"/>
                         </a:rPr>
                         <a:t>1</a:t>
                       </a:r>
                       <a:r>
-                        <a:rPr sz="1700" b="0">
+                        <a:rPr sz="1610" b="0">
                           <a:solidFill>
                             <a:srgbClr val="1A1A1A"/>
                           </a:solidFill>
-                          <a:latin typeface="Century Schoolbook"/>
+                          <a:latin typeface="Lexend"/>
                         </a:rPr>
                         <a:t>)</a:t>
                       </a:r>
                       <a:r>
-                        <a:rPr sz="1700" b="0" baseline="30000">
+                        <a:rPr sz="1610" b="0" baseline="30000">
                           <a:solidFill>
                             <a:srgbClr val="1A1A1A"/>
                           </a:solidFill>
-                          <a:latin typeface="Century Schoolbook"/>
+                          <a:latin typeface="Lexend"/>
                         </a:rPr>
                         <a:t>5</a:t>
                       </a:r>
@@ -17570,11 +17624,11 @@
                     <a:p>
                       <a:pPr algn="ctr"/>
                       <a:r>
-                        <a:rPr sz="1700" b="0">
+                        <a:rPr sz="1610" b="0">
                           <a:solidFill>
                             <a:srgbClr val="1A1A1A"/>
                           </a:solidFill>
-                          <a:latin typeface="Century Schoolbook"/>
+                          <a:latin typeface="Lexend"/>
                         </a:rPr>
                         <a:t>3 · 3 · 3 · 3 · 3</a:t>
                       </a:r>
@@ -17617,20 +17671,20 @@
                     <a:p>
                       <a:pPr algn="ctr"/>
                       <a:r>
-                        <a:rPr sz="1700" b="0">
+                        <a:rPr sz="1610" b="0">
                           <a:solidFill>
                             <a:srgbClr val="1A1A1A"/>
                           </a:solidFill>
-                          <a:latin typeface="Century Schoolbook"/>
+                          <a:latin typeface="Lexend"/>
                         </a:rPr>
                         <a:t>3</a:t>
                       </a:r>
                       <a:r>
-                        <a:rPr sz="1700" b="0" baseline="30000">
+                        <a:rPr sz="1610" b="0" baseline="30000">
                           <a:solidFill>
                             <a:srgbClr val="1A1A1A"/>
                           </a:solidFill>
-                          <a:latin typeface="Century Schoolbook"/>
+                          <a:latin typeface="Lexend"/>
                         </a:rPr>
                         <a:t>5</a:t>
                       </a:r>
@@ -17680,7 +17734,7 @@
         <p:spPr>
           <a:xfrm>
             <a:off x="987552" y="3781044"/>
-            <a:ext cx="3248043" cy="457200"/>
+            <a:ext cx="3093709" cy="457200"/>
           </a:xfrm>
           <a:prstGeom prst="rect">
             <a:avLst/>
@@ -17695,11 +17749,11 @@
           <a:p>
             <a:pPr algn="l"/>
             <a:r>
-              <a:rPr sz="2300" b="1" i="0">
+              <a:rPr sz="2180" b="1" i="0">
                 <a:solidFill>
                   <a:srgbClr val="1A1A1A"/>
                 </a:solidFill>
-                <a:latin typeface="Century Schoolbook"/>
+                <a:latin typeface="Lexend"/>
               </a:rPr>
               <a:t>Power of a power:  </a:t>
             </a:r>
@@ -17708,7 +17762,7 @@
       </p:sp>
       <p:pic>
         <p:nvPicPr>
-          <p:cNvPr id="12" name="Picture 11" descr="3ba570017fc9cc68.png"/>
+          <p:cNvPr id="12" name="Picture 11" descr="d8dde935facf944c.png"/>
           <p:cNvPicPr>
             <a:picLocks noChangeAspect="1"/>
           </p:cNvPicPr>
@@ -17722,8 +17776,8 @@
         </p:blipFill>
         <p:spPr>
           <a:xfrm>
-            <a:off x="4098435" y="3835908"/>
-            <a:ext cx="1837943" cy="347472"/>
+            <a:off x="3944101" y="3828288"/>
+            <a:ext cx="1978152" cy="362712"/>
           </a:xfrm>
           <a:prstGeom prst="rect">
             <a:avLst/>
@@ -17738,8 +17792,8 @@
         </p:nvSpPr>
         <p:spPr>
           <a:xfrm>
-            <a:off x="5936379" y="3781044"/>
-            <a:ext cx="2486441" cy="457200"/>
+            <a:off x="5922253" y="3781044"/>
+            <a:ext cx="2452166" cy="457200"/>
           </a:xfrm>
           <a:prstGeom prst="rect">
             <a:avLst/>
@@ -17754,11 +17808,11 @@
           <a:p>
             <a:pPr algn="l"/>
             <a:r>
-              <a:rPr sz="2300" b="1" i="0">
+              <a:rPr sz="2180" b="1" i="0">
                 <a:solidFill>
                   <a:srgbClr val="1A1A1A"/>
                 </a:solidFill>
-                <a:latin typeface="Century Schoolbook"/>
+                <a:latin typeface="Lexend"/>
               </a:rPr>
               <a:t>        Identity:  </a:t>
             </a:r>
@@ -17767,7 +17821,7 @@
       </p:sp>
       <p:pic>
         <p:nvPicPr>
-          <p:cNvPr id="14" name="Picture 13" descr="61e89ca5117b4f4c.png"/>
+          <p:cNvPr id="14" name="Picture 13" descr="c0cd50cdc3f1313f.png"/>
           <p:cNvPicPr>
             <a:picLocks noChangeAspect="1"/>
           </p:cNvPicPr>
@@ -17781,8 +17835,8 @@
         </p:blipFill>
         <p:spPr>
           <a:xfrm>
-            <a:off x="8285661" y="3838956"/>
-            <a:ext cx="975360" cy="341376"/>
+            <a:off x="8237259" y="3838956"/>
+            <a:ext cx="972311" cy="341376"/>
           </a:xfrm>
           <a:prstGeom prst="rect">
             <a:avLst/>
@@ -17831,11 +17885,11 @@
           <a:p>
             <a:pPr algn="l"/>
             <a:r>
-              <a:rPr sz="3600" b="1" i="0">
+              <a:rPr sz="3420" b="1" i="0">
                 <a:solidFill>
                   <a:srgbClr val="1A1A1A"/>
                 </a:solidFill>
-                <a:latin typeface="Century Schoolbook"/>
+                <a:latin typeface="Lexend"/>
               </a:rPr>
               <a:t>Example 1</a:t>
             </a:r>
@@ -17971,11 +18025,11 @@
           <a:p>
             <a:pPr algn="l"/>
             <a:r>
-              <a:rPr sz="1100" b="0" i="1">
+              <a:rPr sz="1040" b="0" i="0">
                 <a:solidFill>
                   <a:srgbClr val="6B6B6B"/>
                 </a:solidFill>
-                <a:latin typeface="Century Schoolbook"/>
+                <a:latin typeface="Lexend"/>
               </a:rPr>
               <a:t>Grade 7 Accelerated · Unit 3 · Lesson 1 — Product Laws of Exponents</a:t>
             </a:r>
@@ -18006,11 +18060,11 @@
           <a:p>
             <a:pPr algn="r"/>
             <a:r>
-              <a:rPr sz="1100" b="0" i="0">
+              <a:rPr sz="1040" b="0" i="0">
                 <a:solidFill>
                   <a:srgbClr val="6B6B6B"/>
                 </a:solidFill>
-                <a:latin typeface="Century Schoolbook"/>
+                <a:latin typeface="Lexend"/>
               </a:rPr>
               <a:t>8</a:t>
             </a:r>
@@ -18019,7 +18073,7 @@
       </p:sp>
       <p:pic>
         <p:nvPicPr>
-          <p:cNvPr id="8" name="Picture 7" descr="662f7ef757f30ae7.png"/>
+          <p:cNvPr id="8" name="Picture 7" descr="329b8ca23c9d7568.png"/>
           <p:cNvPicPr>
             <a:picLocks noChangeAspect="1"/>
           </p:cNvPicPr>
@@ -18033,8 +18087,8 @@
         </p:blipFill>
         <p:spPr>
           <a:xfrm>
-            <a:off x="5620512" y="2136648"/>
-            <a:ext cx="920495" cy="344424"/>
+            <a:off x="5612891" y="2138171"/>
+            <a:ext cx="935736" cy="341376"/>
           </a:xfrm>
           <a:prstGeom prst="rect">
             <a:avLst/>
@@ -18065,11 +18119,11 @@
           <a:p>
             <a:pPr algn="ctr"/>
             <a:r>
-              <a:rPr sz="2400" b="1" i="0">
+              <a:rPr sz="2280" b="1" i="0">
                 <a:solidFill>
                   <a:srgbClr val="1A1A1A"/>
                 </a:solidFill>
-                <a:latin typeface="Century Schoolbook"/>
+                <a:latin typeface="Lexend"/>
               </a:rPr>
               <a:t>Which law? Then find the value.</a:t>
             </a:r>
@@ -18118,11 +18172,11 @@
           <a:p>
             <a:pPr algn="l"/>
             <a:r>
-              <a:rPr sz="3600" b="1" i="0">
+              <a:rPr sz="3420" b="1" i="0">
                 <a:solidFill>
                   <a:srgbClr val="1A1A1A"/>
                 </a:solidFill>
-                <a:latin typeface="Century Schoolbook"/>
+                <a:latin typeface="Lexend"/>
               </a:rPr>
               <a:t>Example 1</a:t>
             </a:r>
@@ -18258,11 +18312,11 @@
           <a:p>
             <a:pPr algn="l"/>
             <a:r>
-              <a:rPr sz="1100" b="0" i="1">
+              <a:rPr sz="1040" b="0" i="0">
                 <a:solidFill>
                   <a:srgbClr val="6B6B6B"/>
                 </a:solidFill>
-                <a:latin typeface="Century Schoolbook"/>
+                <a:latin typeface="Lexend"/>
               </a:rPr>
               <a:t>Grade 7 Accelerated · Unit 3 · Lesson 1 — Product Laws of Exponents</a:t>
             </a:r>
@@ -18293,11 +18347,11 @@
           <a:p>
             <a:pPr algn="r"/>
             <a:r>
-              <a:rPr sz="1100" b="0" i="0">
+              <a:rPr sz="1040" b="0" i="0">
                 <a:solidFill>
                   <a:srgbClr val="6B6B6B"/>
                 </a:solidFill>
-                <a:latin typeface="Century Schoolbook"/>
+                <a:latin typeface="Lexend"/>
               </a:rPr>
               <a:t>9</a:t>
             </a:r>
@@ -18306,7 +18360,7 @@
       </p:sp>
       <p:pic>
         <p:nvPicPr>
-          <p:cNvPr id="8" name="Picture 7" descr="1638dccdf2248bcf.png"/>
+          <p:cNvPr id="8" name="Picture 7" descr="1c20bafbdc63ca87.png"/>
           <p:cNvPicPr>
             <a:picLocks noChangeAspect="1"/>
           </p:cNvPicPr>
@@ -18321,7 +18375,7 @@
         <p:spPr>
           <a:xfrm>
             <a:off x="1828800" y="1920240"/>
-            <a:ext cx="2877312" cy="347472"/>
+            <a:ext cx="2791968" cy="341376"/>
           </a:xfrm>
           <a:prstGeom prst="rect">
             <a:avLst/>
@@ -18330,7 +18384,7 @@
       </p:pic>
       <p:pic>
         <p:nvPicPr>
-          <p:cNvPr id="9" name="Picture 8" descr="4bce5fcbc09ba5a5.png"/>
+          <p:cNvPr id="9" name="Picture 8" descr="7bb738bd6adb720e.png"/>
           <p:cNvPicPr>
             <a:picLocks noChangeAspect="1"/>
           </p:cNvPicPr>
@@ -18344,8 +18398,8 @@
         </p:blipFill>
         <p:spPr>
           <a:xfrm>
-            <a:off x="1828800" y="2542032"/>
-            <a:ext cx="1335024" cy="347472"/>
+            <a:off x="1828800" y="2535936"/>
+            <a:ext cx="1371600" cy="335280"/>
           </a:xfrm>
           <a:prstGeom prst="rect">
             <a:avLst/>
@@ -18354,7 +18408,7 @@
       </p:pic>
       <p:pic>
         <p:nvPicPr>
-          <p:cNvPr id="10" name="Picture 9" descr="939d17ddf54fca0c.png"/>
+          <p:cNvPr id="10" name="Picture 9" descr="a913e805eb431395.png"/>
           <p:cNvPicPr>
             <a:picLocks noChangeAspect="1"/>
           </p:cNvPicPr>
@@ -18368,8 +18422,8 @@
         </p:blipFill>
         <p:spPr>
           <a:xfrm>
-            <a:off x="1828800" y="3163823"/>
-            <a:ext cx="1810512" cy="286512"/>
+            <a:off x="1828800" y="3145536"/>
+            <a:ext cx="1862328" cy="280416"/>
           </a:xfrm>
           <a:prstGeom prst="rect">
             <a:avLst/>
@@ -18400,11 +18454,11 @@
           <a:p>
             <a:pPr algn="ctr"/>
             <a:r>
-              <a:rPr sz="3200" b="1" i="0">
+              <a:rPr sz="3040" b="1" i="0">
                 <a:solidFill>
                   <a:srgbClr val="9E1B32"/>
                 </a:solidFill>
-                <a:latin typeface="Century Schoolbook"/>
+                <a:latin typeface="Lexend"/>
               </a:rPr>
               <a:t>Answer:   243</a:t>
             </a:r>

--- a/a7/packages/A7 Unit 3 - Exponents and Scientific Notation/Lessons/3.01/A7 3.01 Product Laws of Exponents - Slides.pptx
+++ b/a7/packages/A7 Unit 3 - Exponents and Scientific Notation/Lessons/3.01/A7 3.01 Product Laws of Exponents - Slides.pptx
@@ -7833,7 +7833,7 @@
       </p:sp>
       <p:pic>
         <p:nvPicPr>
-          <p:cNvPr id="8" name="Picture 7" descr="5affe015bded252a.png"/>
+          <p:cNvPr id="8" name="Picture 7" descr="613e669cfd3b6d49.png"/>
           <p:cNvPicPr>
             <a:picLocks noChangeAspect="1"/>
           </p:cNvPicPr>
@@ -7847,8 +7847,8 @@
         </p:blipFill>
         <p:spPr>
           <a:xfrm>
-            <a:off x="5410199" y="2194560"/>
-            <a:ext cx="1341120" cy="505968"/>
+            <a:off x="5285231" y="2194560"/>
+            <a:ext cx="1591056" cy="505968"/>
           </a:xfrm>
           <a:prstGeom prst="rect">
             <a:avLst/>
@@ -8120,7 +8120,7 @@
       </p:sp>
       <p:pic>
         <p:nvPicPr>
-          <p:cNvPr id="8" name="Picture 7" descr="b79ccee972120db7.png"/>
+          <p:cNvPr id="8" name="Picture 7" descr="7c404630188da250.png"/>
           <p:cNvPicPr>
             <a:picLocks noChangeAspect="1"/>
           </p:cNvPicPr>
@@ -8134,8 +8134,8 @@
         </p:blipFill>
         <p:spPr>
           <a:xfrm>
-            <a:off x="5410199" y="2103120"/>
-            <a:ext cx="1341120" cy="509016"/>
+            <a:off x="5283707" y="2103120"/>
+            <a:ext cx="1594104" cy="509016"/>
           </a:xfrm>
           <a:prstGeom prst="rect">
             <a:avLst/>
@@ -8144,7 +8144,7 @@
       </p:pic>
       <p:pic>
         <p:nvPicPr>
-          <p:cNvPr id="9" name="Picture 8" descr="40c6ca452737ffb3.png"/>
+          <p:cNvPr id="9" name="Picture 8" descr="c7daae656677eced.png"/>
           <p:cNvPicPr>
             <a:picLocks noChangeAspect="1"/>
           </p:cNvPicPr>
@@ -8158,8 +8158,8 @@
         </p:blipFill>
         <p:spPr>
           <a:xfrm>
-            <a:off x="3770375" y="2935224"/>
-            <a:ext cx="4730496" cy="368808"/>
+            <a:off x="3226308" y="2935224"/>
+            <a:ext cx="5818632" cy="368808"/>
           </a:xfrm>
           <a:prstGeom prst="rect">
             <a:avLst/>
@@ -8196,7 +8196,7 @@
                 </a:solidFill>
                 <a:latin typeface="Lexend"/>
               </a:rPr>
-              <a:t>Answer:   1000</a:t>
+              <a:t>Answer:   27,000</a:t>
             </a:r>
           </a:p>
         </p:txBody>
@@ -12768,7 +12768,7 @@
         </p:nvSpPr>
         <p:spPr>
           <a:xfrm>
-            <a:off x="2913590" y="2746579"/>
+            <a:off x="3024842" y="2746579"/>
             <a:ext cx="2222015" cy="457200"/>
           </a:xfrm>
           <a:prstGeom prst="rect">
@@ -12797,7 +12797,7 @@
       </p:sp>
       <p:pic>
         <p:nvPicPr>
-          <p:cNvPr id="10" name="Picture 9" descr="3c467de68f6a9099.png"/>
+          <p:cNvPr id="10" name="Picture 9" descr="2ac5303067d16b6b.png"/>
           <p:cNvPicPr>
             <a:picLocks noChangeAspect="1"/>
           </p:cNvPicPr>
@@ -12811,8 +12811,8 @@
         </p:blipFill>
         <p:spPr>
           <a:xfrm>
-            <a:off x="4998446" y="2770963"/>
-            <a:ext cx="1920240" cy="408432"/>
+            <a:off x="5109698" y="2770963"/>
+            <a:ext cx="1697736" cy="408432"/>
           </a:xfrm>
           <a:prstGeom prst="rect">
             <a:avLst/>
@@ -12827,7 +12827,7 @@
         </p:nvSpPr>
         <p:spPr>
           <a:xfrm>
-            <a:off x="6918686" y="2746579"/>
+            <a:off x="6807434" y="2746579"/>
             <a:ext cx="2466403" cy="457200"/>
           </a:xfrm>
           <a:prstGeom prst="rect">
@@ -13160,7 +13160,7 @@
         </p:nvSpPr>
         <p:spPr>
           <a:xfrm>
-            <a:off x="2912066" y="2655139"/>
+            <a:off x="3023318" y="2655139"/>
             <a:ext cx="2222015" cy="457200"/>
           </a:xfrm>
           <a:prstGeom prst="rect">
@@ -13189,7 +13189,7 @@
       </p:sp>
       <p:pic>
         <p:nvPicPr>
-          <p:cNvPr id="10" name="Picture 9" descr="8bb89340cbe98788.png"/>
+          <p:cNvPr id="10" name="Picture 9" descr="d92052160a3b4a7a.png"/>
           <p:cNvPicPr>
             <a:picLocks noChangeAspect="1"/>
           </p:cNvPicPr>
@@ -13203,8 +13203,8 @@
         </p:blipFill>
         <p:spPr>
           <a:xfrm>
-            <a:off x="4996922" y="2679523"/>
-            <a:ext cx="1923288" cy="408432"/>
+            <a:off x="5108174" y="2679523"/>
+            <a:ext cx="1700784" cy="408432"/>
           </a:xfrm>
           <a:prstGeom prst="rect">
             <a:avLst/>
@@ -13219,7 +13219,7 @@
         </p:nvSpPr>
         <p:spPr>
           <a:xfrm>
-            <a:off x="6920210" y="2655139"/>
+            <a:off x="6808958" y="2655139"/>
             <a:ext cx="2466403" cy="457200"/>
           </a:xfrm>
           <a:prstGeom prst="rect">
@@ -13283,7 +13283,7 @@
       </p:sp>
       <p:pic>
         <p:nvPicPr>
-          <p:cNvPr id="13" name="Picture 12" descr="df452ab7ad4dafcb.png"/>
+          <p:cNvPr id="13" name="Picture 12" descr="5256d7b7f99b417b.png"/>
           <p:cNvPicPr>
             <a:picLocks noChangeAspect="1"/>
           </p:cNvPicPr>
@@ -13298,7 +13298,7 @@
         <p:spPr>
           <a:xfrm>
             <a:off x="2541610" y="4013023"/>
-            <a:ext cx="1569720" cy="265176"/>
+            <a:ext cx="1417320" cy="265176"/>
           </a:xfrm>
           <a:prstGeom prst="rect">
             <a:avLst/>
@@ -13307,7 +13307,7 @@
       </p:pic>
       <p:pic>
         <p:nvPicPr>
-          <p:cNvPr id="14" name="Picture 13" descr="5b67aed5b26673ef.png"/>
+          <p:cNvPr id="14" name="Picture 13" descr="5fe753b3272aace9.png"/>
           <p:cNvPicPr>
             <a:picLocks noChangeAspect="1"/>
           </p:cNvPicPr>
@@ -13321,8 +13321,8 @@
         </p:blipFill>
         <p:spPr>
           <a:xfrm>
-            <a:off x="2541610" y="4520515"/>
-            <a:ext cx="1024128" cy="256032"/>
+            <a:off x="2541610" y="4522039"/>
+            <a:ext cx="1018032" cy="252984"/>
           </a:xfrm>
           <a:prstGeom prst="rect">
             <a:avLst/>
@@ -13359,7 +13359,7 @@
                 </a:solidFill>
                 <a:latin typeface="Lexend"/>
               </a:rPr>
-              <a:t>Answer:   No — (10 + (−2))</a:t>
+              <a:t>Answer:   No — (9 + (−3))</a:t>
             </a:r>
             <a:r>
               <a:rPr sz="3040" b="1" i="0" baseline="30000">
@@ -13377,7 +13377,7 @@
                 </a:solidFill>
                 <a:latin typeface="Lexend"/>
               </a:rPr>
-              <a:t> = 8</a:t>
+              <a:t> = 6</a:t>
             </a:r>
             <a:r>
               <a:rPr sz="3040" b="1" i="0" baseline="30000">
@@ -13395,7 +13395,7 @@
                 </a:solidFill>
                 <a:latin typeface="Lexend"/>
               </a:rPr>
-              <a:t> = 512</a:t>
+              <a:t> = 216</a:t>
             </a:r>
           </a:p>
         </p:txBody>

--- a/a7/packages/A7 Unit 3 - Exponents and Scientific Notation/Lessons/3.01/A7 3.01 Product Laws of Exponents - Slides.pptx
+++ b/a7/packages/A7 Unit 3 - Exponents and Scientific Notation/Lessons/3.01/A7 3.01 Product Laws of Exponents - Slides.pptx
@@ -9942,7 +9942,7 @@
       </p:sp>
       <p:pic>
         <p:nvPicPr>
-          <p:cNvPr id="8" name="Picture 7" descr="086b323a5a1e494d.png"/>
+          <p:cNvPr id="8" name="Picture 7" descr="f79d3fb964505a9d.png"/>
           <p:cNvPicPr>
             <a:picLocks noChangeAspect="1"/>
           </p:cNvPicPr>
@@ -9956,8 +9956,8 @@
         </p:blipFill>
         <p:spPr>
           <a:xfrm>
-            <a:off x="5611367" y="2194560"/>
-            <a:ext cx="938784" cy="505968"/>
+            <a:off x="5599176" y="2194560"/>
+            <a:ext cx="963167" cy="502920"/>
           </a:xfrm>
           <a:prstGeom prst="rect">
             <a:avLst/>
@@ -9972,7 +9972,7 @@
         </p:nvSpPr>
         <p:spPr>
           <a:xfrm>
-            <a:off x="777240" y="2929128"/>
+            <a:off x="777240" y="2926080"/>
             <a:ext cx="10607040" cy="465151"/>
           </a:xfrm>
           <a:prstGeom prst="rect">
@@ -10007,7 +10007,7 @@
         </p:nvSpPr>
         <p:spPr>
           <a:xfrm>
-            <a:off x="1874519" y="3595447"/>
+            <a:off x="1874519" y="3592399"/>
             <a:ext cx="4572000" cy="548640"/>
           </a:xfrm>
           <a:prstGeom prst="rect">
@@ -10047,7 +10047,7 @@
                 </a:solidFill>
                 <a:latin typeface="Lexend"/>
               </a:rPr>
-              <a:t>5</a:t>
+              <a:t>7</a:t>
             </a:r>
           </a:p>
         </p:txBody>
@@ -10060,7 +10060,7 @@
         </p:nvSpPr>
         <p:spPr>
           <a:xfrm>
-            <a:off x="6629400" y="3595447"/>
+            <a:off x="6629400" y="3592399"/>
             <a:ext cx="4572000" cy="548640"/>
           </a:xfrm>
           <a:prstGeom prst="rect">
@@ -10091,7 +10091,7 @@
                 </a:solidFill>
                 <a:latin typeface="Lexend"/>
               </a:rPr>
-              <a:t>4</a:t>
+              <a:t>8</a:t>
             </a:r>
             <a:r>
               <a:rPr sz="2280" b="0" i="0" baseline="30000">
@@ -10100,7 +10100,7 @@
                 </a:solidFill>
                 <a:latin typeface="Lexend"/>
               </a:rPr>
-              <a:t>6</a:t>
+              <a:t>12</a:t>
             </a:r>
           </a:p>
         </p:txBody>
@@ -10113,7 +10113,7 @@
         </p:nvSpPr>
         <p:spPr>
           <a:xfrm>
-            <a:off x="1874519" y="4281247"/>
+            <a:off x="1874519" y="4278199"/>
             <a:ext cx="4572000" cy="548640"/>
           </a:xfrm>
           <a:prstGeom prst="rect">
@@ -10153,7 +10153,7 @@
                 </a:solidFill>
                 <a:latin typeface="Lexend"/>
               </a:rPr>
-              <a:t>6</a:t>
+              <a:t>12</a:t>
             </a:r>
           </a:p>
         </p:txBody>
@@ -10166,7 +10166,7 @@
         </p:nvSpPr>
         <p:spPr>
           <a:xfrm>
-            <a:off x="6629400" y="4281247"/>
+            <a:off x="6629400" y="4278199"/>
             <a:ext cx="4572000" cy="548640"/>
           </a:xfrm>
           <a:prstGeom prst="rect">
@@ -10206,7 +10206,7 @@
                 </a:solidFill>
                 <a:latin typeface="Lexend"/>
               </a:rPr>
-              <a:t>9</a:t>
+              <a:t>64</a:t>
             </a:r>
           </a:p>
         </p:txBody>
@@ -10219,7 +10219,7 @@
         </p:nvSpPr>
         <p:spPr>
           <a:xfrm>
-            <a:off x="777240" y="5287087"/>
+            <a:off x="777240" y="5284039"/>
             <a:ext cx="10607040" cy="457200"/>
           </a:xfrm>
           <a:prstGeom prst="rect">
@@ -10476,7 +10476,7 @@
       </p:sp>
       <p:pic>
         <p:nvPicPr>
-          <p:cNvPr id="8" name="Picture 7" descr="9a96c530649f2cb7.png"/>
+          <p:cNvPr id="8" name="Picture 7" descr="9039f0d29f00b5c3.png"/>
           <p:cNvPicPr>
             <a:picLocks noChangeAspect="1"/>
           </p:cNvPicPr>
@@ -10490,8 +10490,8 @@
         </p:blipFill>
         <p:spPr>
           <a:xfrm>
-            <a:off x="5609844" y="2103120"/>
-            <a:ext cx="941832" cy="505968"/>
+            <a:off x="5600699" y="2103120"/>
+            <a:ext cx="960120" cy="505968"/>
           </a:xfrm>
           <a:prstGeom prst="rect">
             <a:avLst/>
@@ -10535,7 +10535,7 @@
       </p:sp>
       <p:pic>
         <p:nvPicPr>
-          <p:cNvPr id="10" name="Picture 9" descr="5669e1447e03fc57.png"/>
+          <p:cNvPr id="10" name="Picture 9" descr="fbd677bc81794072.png"/>
           <p:cNvPicPr>
             <a:picLocks noChangeAspect="1"/>
           </p:cNvPicPr>
@@ -10549,8 +10549,8 @@
         </p:blipFill>
         <p:spPr>
           <a:xfrm>
-            <a:off x="4977383" y="3505531"/>
-            <a:ext cx="2316480" cy="371856"/>
+            <a:off x="4898135" y="3505531"/>
+            <a:ext cx="2471928" cy="371856"/>
           </a:xfrm>
           <a:prstGeom prst="rect">
             <a:avLst/>
@@ -10596,7 +10596,7 @@
                 </a:solidFill>
                 <a:latin typeface="Lexend"/>
               </a:rPr>
-              <a:t>6</a:t>
+              <a:t>12</a:t>
             </a:r>
           </a:p>
         </p:txBody>
